--- a/docs/fmva/packs/day5-slides.pptx
+++ b/docs/fmva/packs/day5-slides.pptx
@@ -18,9 +18,13 @@
     <p:sldId id="266" r:id="rId12"/>
     <p:sldId id="267" r:id="rId13"/>
     <p:sldId id="268" r:id="rId14"/>
+    <p:sldId id="269" r:id="rId15"/>
+    <p:sldId id="270" r:id="rId16"/>
+    <p:sldId id="271" r:id="rId17"/>
+    <p:sldId id="272" r:id="rId18"/>
   </p:sldIdLst>
   <p:notesMasterIdLst>
-    <p:notesMasterId r:id="rId15"/>
+    <p:notesMasterId r:id="rId19"/>
   </p:notesMasterIdLst>
   <p:sldSz cx="9144000" cy="5148072"/>
   <p:notesSz cx="5148072" cy="9144000"/>
@@ -890,6 +894,358 @@
             <a:fld id="{F7021451-1387-4CA6-816F-3879F97B5CBC}" type="slidenum">
               <a:rPr lang="en-US"/>
               <a:t>13</a:t>
+            </a:fld>
+            <a:endParaRPr lang="en-US"/>
+          </a:p>
+        </p:txBody>
+      </p:sp>
+    </p:spTree>
+    <p:extLst>
+      <p:ext uri="{BB962C8B-B14F-4D97-AF65-F5344CB8AC3E}">
+        <p14:creationId xmlns:p14="http://schemas.microsoft.com/office/powerpoint/2010/main" val="1024086991"/>
+      </p:ext>
+    </p:extLst>
+  </p:cSld>
+  <p:clrMapOvr>
+    <a:masterClrMapping/>
+  </p:clrMapOvr>
+</p:notes>
+</file>
+
+<file path=ppt/notesSlides/notesSlide14.xml><?xml version="1.0" encoding="utf-8"?>
+<p:notes xmlns:a="http://schemas.openxmlformats.org/drawingml/2006/main" xmlns:r="http://schemas.openxmlformats.org/officeDocument/2006/relationships" xmlns:p="http://schemas.openxmlformats.org/presentationml/2006/main">
+  <p:cSld>
+    <p:spTree>
+      <p:nvGrpSpPr>
+        <p:cNvPr id="1" name=""/>
+        <p:cNvGrpSpPr/>
+        <p:nvPr/>
+      </p:nvGrpSpPr>
+      <p:grpSpPr>
+        <a:xfrm>
+          <a:off x="0" y="0"/>
+          <a:ext cx="0" cy="0"/>
+          <a:chOff x="0" y="0"/>
+          <a:chExt cx="0" cy="0"/>
+        </a:xfrm>
+      </p:grpSpPr>
+      <p:sp>
+        <p:nvSpPr>
+          <p:cNvPr id="2" name="Slide Image Placeholder 1"/>
+          <p:cNvSpPr>
+            <a:spLocks noGrp="1" noRot="1" noChangeAspect="1"/>
+          </p:cNvSpPr>
+          <p:nvPr>
+            <p:ph type="sldImg"/>
+          </p:nvPr>
+        </p:nvSpPr>
+        <p:spPr/>
+      </p:sp>
+      <p:sp>
+        <p:nvSpPr>
+          <p:cNvPr id="3" name="Notes Placeholder 2"/>
+          <p:cNvSpPr>
+            <a:spLocks noGrp="1"/>
+          </p:cNvSpPr>
+          <p:nvPr>
+            <p:ph type="body" idx="1"/>
+          </p:nvPr>
+        </p:nvSpPr>
+        <p:spPr/>
+        <p:txBody>
+          <a:bodyPr/>
+          <a:lstStyle/>
+          <a:p>
+            <a:r>
+              <a:rPr lang="en-US" dirty="0"/>
+              <a:t/>
+            </a:r>
+            <a:endParaRPr lang="en-US" dirty="0"/>
+          </a:p>
+        </p:txBody>
+      </p:sp>
+      <p:sp>
+        <p:nvSpPr>
+          <p:cNvPr id="4" name="Slide Number Placeholder 3"/>
+          <p:cNvSpPr>
+            <a:spLocks noGrp="1"/>
+          </p:cNvSpPr>
+          <p:nvPr>
+            <p:ph type="sldNum" sz="quarter" idx="10"/>
+          </p:nvPr>
+        </p:nvSpPr>
+        <p:spPr/>
+        <p:txBody>
+          <a:bodyPr/>
+          <a:lstStyle/>
+          <a:p>
+            <a:fld id="{F7021451-1387-4CA6-816F-3879F97B5CBC}" type="slidenum">
+              <a:rPr lang="en-US"/>
+              <a:t>14</a:t>
+            </a:fld>
+            <a:endParaRPr lang="en-US"/>
+          </a:p>
+        </p:txBody>
+      </p:sp>
+    </p:spTree>
+    <p:extLst>
+      <p:ext uri="{BB962C8B-B14F-4D97-AF65-F5344CB8AC3E}">
+        <p14:creationId xmlns:p14="http://schemas.microsoft.com/office/powerpoint/2010/main" val="1024086991"/>
+      </p:ext>
+    </p:extLst>
+  </p:cSld>
+  <p:clrMapOvr>
+    <a:masterClrMapping/>
+  </p:clrMapOvr>
+</p:notes>
+</file>
+
+<file path=ppt/notesSlides/notesSlide15.xml><?xml version="1.0" encoding="utf-8"?>
+<p:notes xmlns:a="http://schemas.openxmlformats.org/drawingml/2006/main" xmlns:r="http://schemas.openxmlformats.org/officeDocument/2006/relationships" xmlns:p="http://schemas.openxmlformats.org/presentationml/2006/main">
+  <p:cSld>
+    <p:spTree>
+      <p:nvGrpSpPr>
+        <p:cNvPr id="1" name=""/>
+        <p:cNvGrpSpPr/>
+        <p:nvPr/>
+      </p:nvGrpSpPr>
+      <p:grpSpPr>
+        <a:xfrm>
+          <a:off x="0" y="0"/>
+          <a:ext cx="0" cy="0"/>
+          <a:chOff x="0" y="0"/>
+          <a:chExt cx="0" cy="0"/>
+        </a:xfrm>
+      </p:grpSpPr>
+      <p:sp>
+        <p:nvSpPr>
+          <p:cNvPr id="2" name="Slide Image Placeholder 1"/>
+          <p:cNvSpPr>
+            <a:spLocks noGrp="1" noRot="1" noChangeAspect="1"/>
+          </p:cNvSpPr>
+          <p:nvPr>
+            <p:ph type="sldImg"/>
+          </p:nvPr>
+        </p:nvSpPr>
+        <p:spPr/>
+      </p:sp>
+      <p:sp>
+        <p:nvSpPr>
+          <p:cNvPr id="3" name="Notes Placeholder 2"/>
+          <p:cNvSpPr>
+            <a:spLocks noGrp="1"/>
+          </p:cNvSpPr>
+          <p:nvPr>
+            <p:ph type="body" idx="1"/>
+          </p:nvPr>
+        </p:nvSpPr>
+        <p:spPr/>
+        <p:txBody>
+          <a:bodyPr/>
+          <a:lstStyle/>
+          <a:p>
+            <a:r>
+              <a:rPr lang="en-US" dirty="0"/>
+              <a:t/>
+            </a:r>
+            <a:endParaRPr lang="en-US" dirty="0"/>
+          </a:p>
+        </p:txBody>
+      </p:sp>
+      <p:sp>
+        <p:nvSpPr>
+          <p:cNvPr id="4" name="Slide Number Placeholder 3"/>
+          <p:cNvSpPr>
+            <a:spLocks noGrp="1"/>
+          </p:cNvSpPr>
+          <p:nvPr>
+            <p:ph type="sldNum" sz="quarter" idx="10"/>
+          </p:nvPr>
+        </p:nvSpPr>
+        <p:spPr/>
+        <p:txBody>
+          <a:bodyPr/>
+          <a:lstStyle/>
+          <a:p>
+            <a:fld id="{F7021451-1387-4CA6-816F-3879F97B5CBC}" type="slidenum">
+              <a:rPr lang="en-US"/>
+              <a:t>15</a:t>
+            </a:fld>
+            <a:endParaRPr lang="en-US"/>
+          </a:p>
+        </p:txBody>
+      </p:sp>
+    </p:spTree>
+    <p:extLst>
+      <p:ext uri="{BB962C8B-B14F-4D97-AF65-F5344CB8AC3E}">
+        <p14:creationId xmlns:p14="http://schemas.microsoft.com/office/powerpoint/2010/main" val="1024086991"/>
+      </p:ext>
+    </p:extLst>
+  </p:cSld>
+  <p:clrMapOvr>
+    <a:masterClrMapping/>
+  </p:clrMapOvr>
+</p:notes>
+</file>
+
+<file path=ppt/notesSlides/notesSlide16.xml><?xml version="1.0" encoding="utf-8"?>
+<p:notes xmlns:a="http://schemas.openxmlformats.org/drawingml/2006/main" xmlns:r="http://schemas.openxmlformats.org/officeDocument/2006/relationships" xmlns:p="http://schemas.openxmlformats.org/presentationml/2006/main">
+  <p:cSld>
+    <p:spTree>
+      <p:nvGrpSpPr>
+        <p:cNvPr id="1" name=""/>
+        <p:cNvGrpSpPr/>
+        <p:nvPr/>
+      </p:nvGrpSpPr>
+      <p:grpSpPr>
+        <a:xfrm>
+          <a:off x="0" y="0"/>
+          <a:ext cx="0" cy="0"/>
+          <a:chOff x="0" y="0"/>
+          <a:chExt cx="0" cy="0"/>
+        </a:xfrm>
+      </p:grpSpPr>
+      <p:sp>
+        <p:nvSpPr>
+          <p:cNvPr id="2" name="Slide Image Placeholder 1"/>
+          <p:cNvSpPr>
+            <a:spLocks noGrp="1" noRot="1" noChangeAspect="1"/>
+          </p:cNvSpPr>
+          <p:nvPr>
+            <p:ph type="sldImg"/>
+          </p:nvPr>
+        </p:nvSpPr>
+        <p:spPr/>
+      </p:sp>
+      <p:sp>
+        <p:nvSpPr>
+          <p:cNvPr id="3" name="Notes Placeholder 2"/>
+          <p:cNvSpPr>
+            <a:spLocks noGrp="1"/>
+          </p:cNvSpPr>
+          <p:nvPr>
+            <p:ph type="body" idx="1"/>
+          </p:nvPr>
+        </p:nvSpPr>
+        <p:spPr/>
+        <p:txBody>
+          <a:bodyPr/>
+          <a:lstStyle/>
+          <a:p>
+            <a:r>
+              <a:rPr lang="en-US" dirty="0"/>
+              <a:t/>
+            </a:r>
+            <a:endParaRPr lang="en-US" dirty="0"/>
+          </a:p>
+        </p:txBody>
+      </p:sp>
+      <p:sp>
+        <p:nvSpPr>
+          <p:cNvPr id="4" name="Slide Number Placeholder 3"/>
+          <p:cNvSpPr>
+            <a:spLocks noGrp="1"/>
+          </p:cNvSpPr>
+          <p:nvPr>
+            <p:ph type="sldNum" sz="quarter" idx="10"/>
+          </p:nvPr>
+        </p:nvSpPr>
+        <p:spPr/>
+        <p:txBody>
+          <a:bodyPr/>
+          <a:lstStyle/>
+          <a:p>
+            <a:fld id="{F7021451-1387-4CA6-816F-3879F97B5CBC}" type="slidenum">
+              <a:rPr lang="en-US"/>
+              <a:t>16</a:t>
+            </a:fld>
+            <a:endParaRPr lang="en-US"/>
+          </a:p>
+        </p:txBody>
+      </p:sp>
+    </p:spTree>
+    <p:extLst>
+      <p:ext uri="{BB962C8B-B14F-4D97-AF65-F5344CB8AC3E}">
+        <p14:creationId xmlns:p14="http://schemas.microsoft.com/office/powerpoint/2010/main" val="1024086991"/>
+      </p:ext>
+    </p:extLst>
+  </p:cSld>
+  <p:clrMapOvr>
+    <a:masterClrMapping/>
+  </p:clrMapOvr>
+</p:notes>
+</file>
+
+<file path=ppt/notesSlides/notesSlide17.xml><?xml version="1.0" encoding="utf-8"?>
+<p:notes xmlns:a="http://schemas.openxmlformats.org/drawingml/2006/main" xmlns:r="http://schemas.openxmlformats.org/officeDocument/2006/relationships" xmlns:p="http://schemas.openxmlformats.org/presentationml/2006/main">
+  <p:cSld>
+    <p:spTree>
+      <p:nvGrpSpPr>
+        <p:cNvPr id="1" name=""/>
+        <p:cNvGrpSpPr/>
+        <p:nvPr/>
+      </p:nvGrpSpPr>
+      <p:grpSpPr>
+        <a:xfrm>
+          <a:off x="0" y="0"/>
+          <a:ext cx="0" cy="0"/>
+          <a:chOff x="0" y="0"/>
+          <a:chExt cx="0" cy="0"/>
+        </a:xfrm>
+      </p:grpSpPr>
+      <p:sp>
+        <p:nvSpPr>
+          <p:cNvPr id="2" name="Slide Image Placeholder 1"/>
+          <p:cNvSpPr>
+            <a:spLocks noGrp="1" noRot="1" noChangeAspect="1"/>
+          </p:cNvSpPr>
+          <p:nvPr>
+            <p:ph type="sldImg"/>
+          </p:nvPr>
+        </p:nvSpPr>
+        <p:spPr/>
+      </p:sp>
+      <p:sp>
+        <p:nvSpPr>
+          <p:cNvPr id="3" name="Notes Placeholder 2"/>
+          <p:cNvSpPr>
+            <a:spLocks noGrp="1"/>
+          </p:cNvSpPr>
+          <p:nvPr>
+            <p:ph type="body" idx="1"/>
+          </p:nvPr>
+        </p:nvSpPr>
+        <p:spPr/>
+        <p:txBody>
+          <a:bodyPr/>
+          <a:lstStyle/>
+          <a:p>
+            <a:r>
+              <a:rPr lang="en-US" dirty="0"/>
+              <a:t/>
+            </a:r>
+            <a:endParaRPr lang="en-US" dirty="0"/>
+          </a:p>
+        </p:txBody>
+      </p:sp>
+      <p:sp>
+        <p:nvSpPr>
+          <p:cNvPr id="4" name="Slide Number Placeholder 3"/>
+          <p:cNvSpPr>
+            <a:spLocks noGrp="1"/>
+          </p:cNvSpPr>
+          <p:nvPr>
+            <p:ph type="sldNum" sz="quarter" idx="10"/>
+          </p:nvPr>
+        </p:nvSpPr>
+        <p:spPr/>
+        <p:txBody>
+          <a:bodyPr/>
+          <a:lstStyle/>
+          <a:p>
+            <a:fld id="{F7021451-1387-4CA6-816F-3879F97B5CBC}" type="slidenum">
+              <a:rPr lang="en-US"/>
+              <a:t>17</a:t>
             </a:fld>
             <a:endParaRPr lang="en-US"/>
           </a:p>
@@ -1922,6 +2278,13 @@
 <file path=ppt/slides/slide1.xml><?xml version="1.0" encoding="utf-8"?>
 <p:sld xmlns:a="http://schemas.openxmlformats.org/drawingml/2006/main" xmlns:r="http://schemas.openxmlformats.org/officeDocument/2006/relationships" xmlns:p="http://schemas.openxmlformats.org/presentationml/2006/main">
   <p:cSld name="Slide 1">
+    <p:bg>
+      <p:bgPr>
+        <a:solidFill>
+          <a:srgbClr val="FFFFFF"/>
+        </a:solidFill>
+      </p:bgPr>
+    </p:bg>
     <p:spTree>
       <p:nvGrpSpPr>
         <p:cNvPr id="1" name=""/>
@@ -1938,14 +2301,56 @@
       </p:grpSpPr>
       <p:sp>
         <p:nvSpPr>
-          <p:cNvPr id="2" name="Text 0"/>
-          <p:cNvSpPr/>
-          <p:nvPr/>
-        </p:nvSpPr>
-        <p:spPr>
-          <a:xfrm>
-            <a:off x="548640" y="1828800"/>
-            <a:ext cx="8046720" cy="1097280"/>
+          <p:cNvPr id="2" name="Shape 0"/>
+          <p:cNvSpPr/>
+          <p:nvPr/>
+        </p:nvSpPr>
+        <p:spPr>
+          <a:xfrm>
+            <a:off x="0" y="0"/>
+            <a:ext cx="256032" cy="5148072"/>
+          </a:xfrm>
+          <a:prstGeom prst="rect">
+            <a:avLst/>
+          </a:prstGeom>
+          <a:solidFill>
+            <a:srgbClr val="B45309"/>
+          </a:solidFill>
+          <a:ln/>
+        </p:spPr>
+      </p:sp>
+      <p:sp>
+        <p:nvSpPr>
+          <p:cNvPr id="3" name="Shape 1"/>
+          <p:cNvSpPr/>
+          <p:nvPr/>
+        </p:nvSpPr>
+        <p:spPr>
+          <a:xfrm>
+            <a:off x="256032" y="0"/>
+            <a:ext cx="8887968" cy="109728"/>
+          </a:xfrm>
+          <a:prstGeom prst="rect">
+            <a:avLst/>
+          </a:prstGeom>
+          <a:solidFill>
+            <a:srgbClr val="B45309">
+              <a:alpha val="40000"/>
+            </a:srgbClr>
+          </a:solidFill>
+          <a:ln/>
+        </p:spPr>
+      </p:sp>
+      <p:sp>
+        <p:nvSpPr>
+          <p:cNvPr id="4" name="Text 2"/>
+          <p:cNvSpPr/>
+          <p:nvPr/>
+        </p:nvSpPr>
+        <p:spPr>
+          <a:xfrm>
+            <a:off x="685800" y="1051560"/>
+            <a:ext cx="7863840" cy="365760"/>
           </a:xfrm>
           <a:prstGeom prst="rect">
             <a:avLst/>
@@ -1961,27 +2366,30 @@
               <a:buNone/>
             </a:pPr>
             <a:r>
-              <a:rPr lang="en-US" sz="3200" b="1" dirty="0">
+              <a:rPr lang="en-US" sz="1300" b="1" spc="300" kern="0" dirty="0">
                 <a:solidFill>
                   <a:srgbClr val="B45309"/>
                 </a:solidFill>
-              </a:rPr>
-              <a:t>Financial Modeling for Mergers and Acquisitions (M&amp;A) and Investment Decisions</a:t>
-            </a:r>
-            <a:endParaRPr lang="en-US" sz="3200" dirty="0"/>
-          </a:p>
-        </p:txBody>
-      </p:sp>
-      <p:sp>
-        <p:nvSpPr>
-          <p:cNvPr id="3" name="Text 1"/>
-          <p:cNvSpPr/>
-          <p:nvPr/>
-        </p:nvSpPr>
-        <p:spPr>
-          <a:xfrm>
-            <a:off x="548640" y="3017520"/>
-            <a:ext cx="8046720" cy="457200"/>
+                <a:latin typeface="Arial" pitchFamily="34" charset="0"/>
+                <a:ea typeface="Arial" pitchFamily="34" charset="-122"/>
+                <a:cs typeface="Arial" pitchFamily="34" charset="-120"/>
+              </a:rPr>
+              <a:t>DAY 5</a:t>
+            </a:r>
+            <a:endParaRPr lang="en-US" sz="1300" dirty="0"/>
+          </a:p>
+        </p:txBody>
+      </p:sp>
+      <p:sp>
+        <p:nvSpPr>
+          <p:cNvPr id="5" name="Text 3"/>
+          <p:cNvSpPr/>
+          <p:nvPr/>
+        </p:nvSpPr>
+        <p:spPr>
+          <a:xfrm>
+            <a:off x="685800" y="1417320"/>
+            <a:ext cx="7863840" cy="1463040"/>
           </a:xfrm>
           <a:prstGeom prst="rect">
             <a:avLst/>
@@ -1997,27 +2405,30 @@
               <a:buNone/>
             </a:pPr>
             <a:r>
-              <a:rPr lang="en-US" sz="1400" dirty="0">
-                <a:solidFill>
-                  <a:srgbClr val="666666"/>
-                </a:solidFill>
-              </a:rPr>
-              <a:t>Lesson Forge Pro (owner)</a:t>
-            </a:r>
-            <a:endParaRPr lang="en-US" sz="1400" dirty="0"/>
-          </a:p>
-        </p:txBody>
-      </p:sp>
-      <p:sp>
-        <p:nvSpPr>
-          <p:cNvPr id="4" name="Text 2"/>
-          <p:cNvSpPr/>
-          <p:nvPr/>
-        </p:nvSpPr>
-        <p:spPr>
-          <a:xfrm>
-            <a:off x="548640" y="4389120"/>
-            <a:ext cx="8046720" cy="548640"/>
+              <a:rPr lang="en-US" sz="3300" b="1" dirty="0">
+                <a:solidFill>
+                  <a:srgbClr val="1C1917"/>
+                </a:solidFill>
+                <a:latin typeface="Arial" pitchFamily="34" charset="0"/>
+                <a:ea typeface="Arial" pitchFamily="34" charset="-122"/>
+                <a:cs typeface="Arial" pitchFamily="34" charset="-120"/>
+              </a:rPr>
+              <a:t>Financial Modeling for Mergers and Acquisitions (M&amp;A) and Investment Decisions</a:t>
+            </a:r>
+            <a:endParaRPr lang="en-US" sz="3300" dirty="0"/>
+          </a:p>
+        </p:txBody>
+      </p:sp>
+      <p:sp>
+        <p:nvSpPr>
+          <p:cNvPr id="6" name="Text 4"/>
+          <p:cNvSpPr/>
+          <p:nvPr/>
+        </p:nvSpPr>
+        <p:spPr>
+          <a:xfrm>
+            <a:off x="685800" y="2971800"/>
+            <a:ext cx="7863840" cy="411480"/>
           </a:xfrm>
           <a:prstGeom prst="rect">
             <a:avLst/>
@@ -2033,14 +2444,95 @@
               <a:buNone/>
             </a:pPr>
             <a:r>
-              <a:rPr lang="en-US" sz="1000" dirty="0">
-                <a:solidFill>
-                  <a:srgbClr val="888888"/>
-                </a:solidFill>
+              <a:rPr lang="en-US" sz="1400" dirty="0">
+                <a:solidFill>
+                  <a:srgbClr val="78716C"/>
+                </a:solidFill>
+                <a:latin typeface="Arial" pitchFamily="34" charset="0"/>
+                <a:ea typeface="Arial" pitchFamily="34" charset="-122"/>
+                <a:cs typeface="Arial" pitchFamily="34" charset="-120"/>
+              </a:rPr>
+              <a:t>FMVA Certification Prep: Financial Modeling and Valuation Bootcamp</a:t>
+            </a:r>
+            <a:endParaRPr lang="en-US" sz="1400" dirty="0"/>
+          </a:p>
+        </p:txBody>
+      </p:sp>
+      <p:sp>
+        <p:nvSpPr>
+          <p:cNvPr id="7" name="Text 5"/>
+          <p:cNvSpPr/>
+          <p:nvPr/>
+        </p:nvSpPr>
+        <p:spPr>
+          <a:xfrm>
+            <a:off x="685800" y="4343400"/>
+            <a:ext cx="7863840" cy="365760"/>
+          </a:xfrm>
+          <a:prstGeom prst="rect">
+            <a:avLst/>
+          </a:prstGeom>
+          <a:noFill/>
+          <a:ln/>
+        </p:spPr>
+        <p:txBody>
+          <a:bodyPr wrap="square" rtlCol="0" anchor="ctr"/>
+          <a:lstStyle/>
+          <a:p>
+            <a:pPr indent="0" marL="0">
+              <a:buNone/>
+            </a:pPr>
+            <a:r>
+              <a:rPr lang="en-US" sz="1200" b="1" dirty="0">
+                <a:solidFill>
+                  <a:srgbClr val="B45309"/>
+                </a:solidFill>
+                <a:latin typeface="Arial" pitchFamily="34" charset="0"/>
+                <a:ea typeface="Arial" pitchFamily="34" charset="-122"/>
+                <a:cs typeface="Arial" pitchFamily="34" charset="-120"/>
+              </a:rPr>
+              <a:t>Lesson Forge Pro (owner)</a:t>
+            </a:r>
+            <a:endParaRPr lang="en-US" sz="1200" dirty="0"/>
+          </a:p>
+        </p:txBody>
+      </p:sp>
+      <p:sp>
+        <p:nvSpPr>
+          <p:cNvPr id="8" name="Text 6"/>
+          <p:cNvSpPr/>
+          <p:nvPr/>
+        </p:nvSpPr>
+        <p:spPr>
+          <a:xfrm>
+            <a:off x="685800" y="4709160"/>
+            <a:ext cx="7863840" cy="320040"/>
+          </a:xfrm>
+          <a:prstGeom prst="rect">
+            <a:avLst/>
+          </a:prstGeom>
+          <a:noFill/>
+          <a:ln/>
+        </p:spPr>
+        <p:txBody>
+          <a:bodyPr wrap="square" rtlCol="0" anchor="ctr"/>
+          <a:lstStyle/>
+          <a:p>
+            <a:pPr indent="0" marL="0">
+              <a:buNone/>
+            </a:pPr>
+            <a:r>
+              <a:rPr lang="en-US" sz="850" dirty="0">
+                <a:solidFill>
+                  <a:srgbClr val="AAAAAA"/>
+                </a:solidFill>
+                <a:latin typeface="Arial" pitchFamily="34" charset="0"/>
+                <a:ea typeface="Arial" pitchFamily="34" charset="-122"/>
+                <a:cs typeface="Arial" pitchFamily="34" charset="-120"/>
               </a:rPr>
               <a:t>This content is educational material only and does not constitute financial, investment, or trading advice.</a:t>
             </a:r>
-            <a:endParaRPr lang="en-US" sz="1000" dirty="0"/>
+            <a:endParaRPr lang="en-US" sz="850" dirty="0"/>
           </a:p>
         </p:txBody>
       </p:sp>
@@ -2055,6 +2547,13 @@
 <file path=ppt/slides/slide10.xml><?xml version="1.0" encoding="utf-8"?>
 <p:sld xmlns:a="http://schemas.openxmlformats.org/drawingml/2006/main" xmlns:r="http://schemas.openxmlformats.org/officeDocument/2006/relationships" xmlns:p="http://schemas.openxmlformats.org/presentationml/2006/main">
   <p:cSld name="Slide 10">
+    <p:bg>
+      <p:bgPr>
+        <a:solidFill>
+          <a:srgbClr val="FFFFFF"/>
+        </a:solidFill>
+      </p:bgPr>
+    </p:bg>
     <p:spTree>
       <p:nvGrpSpPr>
         <p:cNvPr id="1" name=""/>
@@ -2071,14 +2570,34 @@
       </p:grpSpPr>
       <p:sp>
         <p:nvSpPr>
-          <p:cNvPr id="2" name="Text 0"/>
-          <p:cNvSpPr/>
-          <p:nvPr/>
-        </p:nvSpPr>
-        <p:spPr>
-          <a:xfrm>
-            <a:off x="457200" y="320040"/>
-            <a:ext cx="8229600" cy="731520"/>
+          <p:cNvPr id="2" name="Shape 0"/>
+          <p:cNvSpPr/>
+          <p:nvPr/>
+        </p:nvSpPr>
+        <p:spPr>
+          <a:xfrm>
+            <a:off x="411480" y="384048"/>
+            <a:ext cx="82296" cy="310896"/>
+          </a:xfrm>
+          <a:prstGeom prst="rect">
+            <a:avLst/>
+          </a:prstGeom>
+          <a:solidFill>
+            <a:srgbClr val="B45309"/>
+          </a:solidFill>
+          <a:ln/>
+        </p:spPr>
+      </p:sp>
+      <p:sp>
+        <p:nvSpPr>
+          <p:cNvPr id="3" name="Text 1"/>
+          <p:cNvSpPr/>
+          <p:nvPr/>
+        </p:nvSpPr>
+        <p:spPr>
+          <a:xfrm>
+            <a:off x="566928" y="292608"/>
+            <a:ext cx="8138160" cy="502920"/>
           </a:xfrm>
           <a:prstGeom prst="rect">
             <a:avLst/>
@@ -2094,111 +2613,17 @@
               <a:buNone/>
             </a:pPr>
             <a:r>
-              <a:rPr lang="en-US" sz="2400" b="1" dirty="0">
-                <a:solidFill>
-                  <a:srgbClr val="B45309"/>
-                </a:solidFill>
-              </a:rPr>
-              <a:t>Case Study and Group Discussion (70:00 - 90:00)</a:t>
-            </a:r>
-            <a:endParaRPr lang="en-US" sz="2400" dirty="0"/>
-          </a:p>
-        </p:txBody>
-      </p:sp>
-      <p:sp>
-        <p:nvSpPr>
-          <p:cNvPr id="3" name="Text 1"/>
-          <p:cNvSpPr/>
-          <p:nvPr/>
-        </p:nvSpPr>
-        <p:spPr>
-          <a:xfrm>
-            <a:off x="640080" y="1188720"/>
-            <a:ext cx="7863840" cy="3291840"/>
-          </a:xfrm>
-          <a:prstGeom prst="rect">
-            <a:avLst/>
-          </a:prstGeom>
-          <a:noFill/>
-          <a:ln/>
-        </p:spPr>
-        <p:txBody>
-          <a:bodyPr wrap="square" rtlCol="0" anchor="t"/>
-          <a:lstStyle/>
-          <a:p>
-            <a:pPr marL="342900" indent="-342900">
-              <a:buSzPct val="100000"/>
-              <a:buChar char="•"/>
-            </a:pPr>
-            <a:r>
-              <a:rPr lang="en-US" sz="1600" dirty="0">
-                <a:solidFill>
-                  <a:srgbClr val="333333"/>
-                </a:solidFill>
-              </a:rPr>
-              <a:t>Let's work on a case study together. We will be given a scenario where a company is considering an M&amp;A opportunity, and we need to apply financial modeling tech</a:t>
-            </a:r>
-            <a:endParaRPr lang="en-US" sz="1600" dirty="0"/>
-          </a:p>
-          <a:p>
-            <a:pPr marL="342900" indent="-342900">
-              <a:buSzPct val="100000"/>
-              <a:buChar char="•"/>
-            </a:pPr>
-            <a:r>
-              <a:rPr lang="en-US" sz="1600" dirty="0">
-                <a:solidFill>
-                  <a:srgbClr val="333333"/>
-                </a:solidFill>
-              </a:rPr>
-              <a:t>Please break into small groups and discuss the following questions:</a:t>
-            </a:r>
-            <a:endParaRPr lang="en-US" sz="1600" dirty="0"/>
-          </a:p>
-          <a:p>
-            <a:pPr marL="342900" indent="-342900">
-              <a:buSzPct val="100000"/>
-              <a:buChar char="•"/>
-            </a:pPr>
-            <a:r>
-              <a:rPr lang="en-US" sz="1600" dirty="0">
-                <a:solidFill>
-                  <a:srgbClr val="333333"/>
-                </a:solidFill>
-              </a:rPr>
-              <a:t>What are the potential synergies and cost savings of the merger?</a:t>
-            </a:r>
-            <a:endParaRPr lang="en-US" sz="1600" dirty="0"/>
-          </a:p>
-          <a:p>
-            <a:pPr marL="342900" indent="-342900">
-              <a:buSzPct val="100000"/>
-              <a:buChar char="•"/>
-            </a:pPr>
-            <a:r>
-              <a:rPr lang="en-US" sz="1600" dirty="0">
-                <a:solidFill>
-                  <a:srgbClr val="333333"/>
-                </a:solidFill>
-              </a:rPr>
-              <a:t>How would you estimate the potential revenue growth and cost savings of the acquisition?</a:t>
-            </a:r>
-            <a:endParaRPr lang="en-US" sz="1600" dirty="0"/>
-          </a:p>
-          <a:p>
-            <a:pPr marL="342900" indent="-342900">
-              <a:buSzPct val="100000"/>
-              <a:buChar char="•"/>
-            </a:pPr>
-            <a:r>
-              <a:rPr lang="en-US" sz="1600" dirty="0">
-                <a:solidFill>
-                  <a:srgbClr val="333333"/>
-                </a:solidFill>
-              </a:rPr>
-              <a:t>What are the potential risks and challenges of the merger?</a:t>
-            </a:r>
-            <a:endParaRPr lang="en-US" sz="1600" dirty="0"/>
+              <a:rPr lang="en-US" sz="2000" b="1" dirty="0">
+                <a:solidFill>
+                  <a:srgbClr val="1C1917"/>
+                </a:solidFill>
+                <a:latin typeface="Arial" pitchFamily="34" charset="0"/>
+                <a:ea typeface="Arial" pitchFamily="34" charset="-122"/>
+                <a:cs typeface="Arial" pitchFamily="34" charset="-120"/>
+              </a:rPr>
+              <a:t>M&amp;A Modeling Procedure</a:t>
+            </a:r>
+            <a:endParaRPr lang="en-US" sz="2000" dirty="0"/>
           </a:p>
         </p:txBody>
       </p:sp>
@@ -2210,8 +2635,8 @@
         </p:nvSpPr>
         <p:spPr>
           <a:xfrm>
-            <a:off x="457200" y="4709160"/>
-            <a:ext cx="8229600" cy="320040"/>
+            <a:off x="566928" y="4681728"/>
+            <a:ext cx="8138160" cy="320040"/>
           </a:xfrm>
           <a:prstGeom prst="rect">
             <a:avLst/>
@@ -2227,14 +2652,1032 @@
               <a:buNone/>
             </a:pPr>
             <a:r>
-              <a:rPr lang="en-US" sz="800" dirty="0">
+              <a:rPr lang="en-US" sz="1000" i="1" dirty="0">
+                <a:solidFill>
+                  <a:srgbClr val="78716C"/>
+                </a:solidFill>
+                <a:latin typeface="Arial" pitchFamily="34" charset="0"/>
+                <a:ea typeface="Arial" pitchFamily="34" charset="-122"/>
+                <a:cs typeface="Arial" pitchFamily="34" charset="-120"/>
+              </a:rPr>
+              <a:t>Follow all six stages in sequence; skipping steps creates unauditable models</a:t>
+            </a:r>
+            <a:endParaRPr lang="en-US" sz="1000" dirty="0"/>
+          </a:p>
+        </p:txBody>
+      </p:sp>
+      <p:sp>
+        <p:nvSpPr>
+          <p:cNvPr id="5" name="Text 3"/>
+          <p:cNvSpPr/>
+          <p:nvPr/>
+        </p:nvSpPr>
+        <p:spPr>
+          <a:xfrm>
+            <a:off x="411480" y="4919472"/>
+            <a:ext cx="8321040" cy="219456"/>
+          </a:xfrm>
+          <a:prstGeom prst="rect">
+            <a:avLst/>
+          </a:prstGeom>
+          <a:noFill/>
+          <a:ln/>
+        </p:spPr>
+        <p:txBody>
+          <a:bodyPr wrap="square" rtlCol="0" anchor="ctr"/>
+          <a:lstStyle/>
+          <a:p>
+            <a:pPr indent="0" marL="0">
+              <a:buNone/>
+            </a:pPr>
+            <a:r>
+              <a:rPr lang="en-US" sz="750" dirty="0">
                 <a:solidFill>
                   <a:srgbClr val="AAAAAA"/>
                 </a:solidFill>
+                <a:latin typeface="Arial" pitchFamily="34" charset="0"/>
+                <a:ea typeface="Arial" pitchFamily="34" charset="-122"/>
+                <a:cs typeface="Arial" pitchFamily="34" charset="-120"/>
               </a:rPr>
               <a:t>Lesson Forge Pro (owner) — This content is educational material only and does not constitute financial, investment, or trading advice.</a:t>
             </a:r>
-            <a:endParaRPr lang="en-US" sz="800" dirty="0"/>
+            <a:endParaRPr lang="en-US" sz="750" dirty="0"/>
+          </a:p>
+        </p:txBody>
+      </p:sp>
+      <p:sp>
+        <p:nvSpPr>
+          <p:cNvPr id="6" name="Shape 4"/>
+          <p:cNvSpPr/>
+          <p:nvPr/>
+        </p:nvSpPr>
+        <p:spPr>
+          <a:xfrm>
+            <a:off x="411480" y="1463040"/>
+            <a:ext cx="2011680" cy="960120"/>
+          </a:xfrm>
+          <a:prstGeom prst="roundRect">
+            <a:avLst>
+              <a:gd name="adj" fmla="val 7619"/>
+            </a:avLst>
+          </a:prstGeom>
+          <a:solidFill>
+            <a:srgbClr val="F5F5F4"/>
+          </a:solidFill>
+          <a:ln w="15240">
+            <a:solidFill>
+              <a:srgbClr val="B45309"/>
+            </a:solidFill>
+            <a:prstDash val="solid"/>
+          </a:ln>
+        </p:spPr>
+      </p:sp>
+      <p:sp>
+        <p:nvSpPr>
+          <p:cNvPr id="7" name="Text 5"/>
+          <p:cNvSpPr/>
+          <p:nvPr/>
+        </p:nvSpPr>
+        <p:spPr>
+          <a:xfrm>
+            <a:off x="484632" y="1536192"/>
+            <a:ext cx="310896" cy="274320"/>
+          </a:xfrm>
+          <a:prstGeom prst="rect">
+            <a:avLst/>
+          </a:prstGeom>
+          <a:solidFill>
+            <a:srgbClr val="B45309"/>
+          </a:solidFill>
+          <a:ln/>
+        </p:spPr>
+        <p:txBody>
+          <a:bodyPr wrap="square" rtlCol="0" anchor="ctr"/>
+          <a:lstStyle/>
+          <a:p>
+            <a:pPr algn="ctr" indent="0" marL="0">
+              <a:buNone/>
+            </a:pPr>
+            <a:r>
+              <a:rPr lang="en-US" sz="1000" b="1" dirty="0">
+                <a:solidFill>
+                  <a:srgbClr val="FFFFFF"/>
+                </a:solidFill>
+                <a:latin typeface="Arial" pitchFamily="34" charset="0"/>
+                <a:ea typeface="Arial" pitchFamily="34" charset="-122"/>
+                <a:cs typeface="Arial" pitchFamily="34" charset="-120"/>
+              </a:rPr>
+              <a:t>1</a:t>
+            </a:r>
+            <a:endParaRPr lang="en-US" sz="1000" dirty="0"/>
+          </a:p>
+        </p:txBody>
+      </p:sp>
+      <p:sp>
+        <p:nvSpPr>
+          <p:cNvPr id="8" name="Text 6"/>
+          <p:cNvSpPr/>
+          <p:nvPr/>
+        </p:nvSpPr>
+        <p:spPr>
+          <a:xfrm>
+            <a:off x="411480" y="1737360"/>
+            <a:ext cx="2011680" cy="384048"/>
+          </a:xfrm>
+          <a:prstGeom prst="rect">
+            <a:avLst/>
+          </a:prstGeom>
+          <a:noFill/>
+          <a:ln/>
+        </p:spPr>
+        <p:txBody>
+          <a:bodyPr wrap="square" rtlCol="0" anchor="ctr"/>
+          <a:lstStyle/>
+          <a:p>
+            <a:pPr algn="ctr" indent="0" marL="0">
+              <a:buNone/>
+            </a:pPr>
+            <a:r>
+              <a:rPr lang="en-US" sz="1200" b="1" dirty="0">
+                <a:solidFill>
+                  <a:srgbClr val="1C1917"/>
+                </a:solidFill>
+                <a:latin typeface="Arial" pitchFamily="34" charset="0"/>
+                <a:ea typeface="Arial" pitchFamily="34" charset="-122"/>
+                <a:cs typeface="Arial" pitchFamily="34" charset="-120"/>
+              </a:rPr>
+              <a:t>Gather Inputs</a:t>
+            </a:r>
+            <a:endParaRPr lang="en-US" sz="1200" dirty="0"/>
+          </a:p>
+        </p:txBody>
+      </p:sp>
+      <p:sp>
+        <p:nvSpPr>
+          <p:cNvPr id="9" name="Text 7"/>
+          <p:cNvSpPr/>
+          <p:nvPr/>
+        </p:nvSpPr>
+        <p:spPr>
+          <a:xfrm>
+            <a:off x="411480" y="2084832"/>
+            <a:ext cx="2011680" cy="310896"/>
+          </a:xfrm>
+          <a:prstGeom prst="rect">
+            <a:avLst/>
+          </a:prstGeom>
+          <a:noFill/>
+          <a:ln/>
+        </p:spPr>
+        <p:txBody>
+          <a:bodyPr wrap="square" rtlCol="0" anchor="ctr"/>
+          <a:lstStyle/>
+          <a:p>
+            <a:pPr algn="ctr" indent="0" marL="0">
+              <a:buNone/>
+            </a:pPr>
+            <a:r>
+              <a:rPr lang="en-US" sz="900" dirty="0">
+                <a:solidFill>
+                  <a:srgbClr val="78716C"/>
+                </a:solidFill>
+                <a:latin typeface="Arial" pitchFamily="34" charset="0"/>
+                <a:ea typeface="Arial" pitchFamily="34" charset="-122"/>
+                <a:cs typeface="Arial" pitchFamily="34" charset="-120"/>
+              </a:rPr>
+              <a:t>3–5 yrs financials, market data, deal terms</a:t>
+            </a:r>
+            <a:endParaRPr lang="en-US" sz="900" dirty="0"/>
+          </a:p>
+        </p:txBody>
+      </p:sp>
+      <p:sp>
+        <p:nvSpPr>
+          <p:cNvPr id="10" name="Shape 8"/>
+          <p:cNvSpPr/>
+          <p:nvPr/>
+        </p:nvSpPr>
+        <p:spPr>
+          <a:xfrm>
+            <a:off x="2478024" y="1842516"/>
+            <a:ext cx="301752" cy="201168"/>
+          </a:xfrm>
+          <a:prstGeom prst="rightArrow">
+            <a:avLst/>
+          </a:prstGeom>
+          <a:solidFill>
+            <a:srgbClr val="B45309"/>
+          </a:solidFill>
+          <a:ln/>
+        </p:spPr>
+      </p:sp>
+      <p:sp>
+        <p:nvSpPr>
+          <p:cNvPr id="11" name="Shape 9"/>
+          <p:cNvSpPr/>
+          <p:nvPr/>
+        </p:nvSpPr>
+        <p:spPr>
+          <a:xfrm>
+            <a:off x="2834640" y="1463040"/>
+            <a:ext cx="2011680" cy="960120"/>
+          </a:xfrm>
+          <a:prstGeom prst="roundRect">
+            <a:avLst>
+              <a:gd name="adj" fmla="val 7619"/>
+            </a:avLst>
+          </a:prstGeom>
+          <a:solidFill>
+            <a:srgbClr val="F5F5F4"/>
+          </a:solidFill>
+          <a:ln w="15240">
+            <a:solidFill>
+              <a:srgbClr val="B45309"/>
+            </a:solidFill>
+            <a:prstDash val="solid"/>
+          </a:ln>
+        </p:spPr>
+      </p:sp>
+      <p:sp>
+        <p:nvSpPr>
+          <p:cNvPr id="12" name="Text 10"/>
+          <p:cNvSpPr/>
+          <p:nvPr/>
+        </p:nvSpPr>
+        <p:spPr>
+          <a:xfrm>
+            <a:off x="2907792" y="1536192"/>
+            <a:ext cx="310896" cy="274320"/>
+          </a:xfrm>
+          <a:prstGeom prst="rect">
+            <a:avLst/>
+          </a:prstGeom>
+          <a:solidFill>
+            <a:srgbClr val="B45309"/>
+          </a:solidFill>
+          <a:ln/>
+        </p:spPr>
+        <p:txBody>
+          <a:bodyPr wrap="square" rtlCol="0" anchor="ctr"/>
+          <a:lstStyle/>
+          <a:p>
+            <a:pPr algn="ctr" indent="0" marL="0">
+              <a:buNone/>
+            </a:pPr>
+            <a:r>
+              <a:rPr lang="en-US" sz="1000" b="1" dirty="0">
+                <a:solidFill>
+                  <a:srgbClr val="FFFFFF"/>
+                </a:solidFill>
+                <a:latin typeface="Arial" pitchFamily="34" charset="0"/>
+                <a:ea typeface="Arial" pitchFamily="34" charset="-122"/>
+                <a:cs typeface="Arial" pitchFamily="34" charset="-120"/>
+              </a:rPr>
+              <a:t>2</a:t>
+            </a:r>
+            <a:endParaRPr lang="en-US" sz="1000" dirty="0"/>
+          </a:p>
+        </p:txBody>
+      </p:sp>
+      <p:sp>
+        <p:nvSpPr>
+          <p:cNvPr id="13" name="Text 11"/>
+          <p:cNvSpPr/>
+          <p:nvPr/>
+        </p:nvSpPr>
+        <p:spPr>
+          <a:xfrm>
+            <a:off x="2834640" y="1737360"/>
+            <a:ext cx="2011680" cy="384048"/>
+          </a:xfrm>
+          <a:prstGeom prst="rect">
+            <a:avLst/>
+          </a:prstGeom>
+          <a:noFill/>
+          <a:ln/>
+        </p:spPr>
+        <p:txBody>
+          <a:bodyPr wrap="square" rtlCol="0" anchor="ctr"/>
+          <a:lstStyle/>
+          <a:p>
+            <a:pPr algn="ctr" indent="0" marL="0">
+              <a:buNone/>
+            </a:pPr>
+            <a:r>
+              <a:rPr lang="en-US" sz="1200" b="1" dirty="0">
+                <a:solidFill>
+                  <a:srgbClr val="1C1917"/>
+                </a:solidFill>
+                <a:latin typeface="Arial" pitchFamily="34" charset="0"/>
+                <a:ea typeface="Arial" pitchFamily="34" charset="-122"/>
+                <a:cs typeface="Arial" pitchFamily="34" charset="-120"/>
+              </a:rPr>
+              <a:t>Normalize Financials</a:t>
+            </a:r>
+            <a:endParaRPr lang="en-US" sz="1200" dirty="0"/>
+          </a:p>
+        </p:txBody>
+      </p:sp>
+      <p:sp>
+        <p:nvSpPr>
+          <p:cNvPr id="14" name="Text 12"/>
+          <p:cNvSpPr/>
+          <p:nvPr/>
+        </p:nvSpPr>
+        <p:spPr>
+          <a:xfrm>
+            <a:off x="2834640" y="2084832"/>
+            <a:ext cx="2011680" cy="310896"/>
+          </a:xfrm>
+          <a:prstGeom prst="rect">
+            <a:avLst/>
+          </a:prstGeom>
+          <a:noFill/>
+          <a:ln/>
+        </p:spPr>
+        <p:txBody>
+          <a:bodyPr wrap="square" rtlCol="0" anchor="ctr"/>
+          <a:lstStyle/>
+          <a:p>
+            <a:pPr algn="ctr" indent="0" marL="0">
+              <a:buNone/>
+            </a:pPr>
+            <a:r>
+              <a:rPr lang="en-US" sz="900" dirty="0">
+                <a:solidFill>
+                  <a:srgbClr val="78716C"/>
+                </a:solidFill>
+                <a:latin typeface="Arial" pitchFamily="34" charset="0"/>
+                <a:ea typeface="Arial" pitchFamily="34" charset="-122"/>
+                <a:cs typeface="Arial" pitchFamily="34" charset="-120"/>
+              </a:rPr>
+              <a:t>Remove one-time items for clean baseline</a:t>
+            </a:r>
+            <a:endParaRPr lang="en-US" sz="900" dirty="0"/>
+          </a:p>
+        </p:txBody>
+      </p:sp>
+      <p:sp>
+        <p:nvSpPr>
+          <p:cNvPr id="15" name="Shape 13"/>
+          <p:cNvSpPr/>
+          <p:nvPr/>
+        </p:nvSpPr>
+        <p:spPr>
+          <a:xfrm>
+            <a:off x="4901184" y="1842516"/>
+            <a:ext cx="301752" cy="201168"/>
+          </a:xfrm>
+          <a:prstGeom prst="rightArrow">
+            <a:avLst/>
+          </a:prstGeom>
+          <a:solidFill>
+            <a:srgbClr val="B45309"/>
+          </a:solidFill>
+          <a:ln/>
+        </p:spPr>
+      </p:sp>
+      <p:sp>
+        <p:nvSpPr>
+          <p:cNvPr id="16" name="Shape 14"/>
+          <p:cNvSpPr/>
+          <p:nvPr/>
+        </p:nvSpPr>
+        <p:spPr>
+          <a:xfrm>
+            <a:off x="5257800" y="1463040"/>
+            <a:ext cx="2011680" cy="960120"/>
+          </a:xfrm>
+          <a:prstGeom prst="roundRect">
+            <a:avLst>
+              <a:gd name="adj" fmla="val 7619"/>
+            </a:avLst>
+          </a:prstGeom>
+          <a:solidFill>
+            <a:srgbClr val="F5F5F4"/>
+          </a:solidFill>
+          <a:ln w="15240">
+            <a:solidFill>
+              <a:srgbClr val="B45309"/>
+            </a:solidFill>
+            <a:prstDash val="solid"/>
+          </a:ln>
+        </p:spPr>
+      </p:sp>
+      <p:sp>
+        <p:nvSpPr>
+          <p:cNvPr id="17" name="Text 15"/>
+          <p:cNvSpPr/>
+          <p:nvPr/>
+        </p:nvSpPr>
+        <p:spPr>
+          <a:xfrm>
+            <a:off x="5330952" y="1536192"/>
+            <a:ext cx="310896" cy="274320"/>
+          </a:xfrm>
+          <a:prstGeom prst="rect">
+            <a:avLst/>
+          </a:prstGeom>
+          <a:solidFill>
+            <a:srgbClr val="B45309"/>
+          </a:solidFill>
+          <a:ln/>
+        </p:spPr>
+        <p:txBody>
+          <a:bodyPr wrap="square" rtlCol="0" anchor="ctr"/>
+          <a:lstStyle/>
+          <a:p>
+            <a:pPr algn="ctr" indent="0" marL="0">
+              <a:buNone/>
+            </a:pPr>
+            <a:r>
+              <a:rPr lang="en-US" sz="1000" b="1" dirty="0">
+                <a:solidFill>
+                  <a:srgbClr val="FFFFFF"/>
+                </a:solidFill>
+                <a:latin typeface="Arial" pitchFamily="34" charset="0"/>
+                <a:ea typeface="Arial" pitchFamily="34" charset="-122"/>
+                <a:cs typeface="Arial" pitchFamily="34" charset="-120"/>
+              </a:rPr>
+              <a:t>3</a:t>
+            </a:r>
+            <a:endParaRPr lang="en-US" sz="1000" dirty="0"/>
+          </a:p>
+        </p:txBody>
+      </p:sp>
+      <p:sp>
+        <p:nvSpPr>
+          <p:cNvPr id="18" name="Text 16"/>
+          <p:cNvSpPr/>
+          <p:nvPr/>
+        </p:nvSpPr>
+        <p:spPr>
+          <a:xfrm>
+            <a:off x="5257800" y="1737360"/>
+            <a:ext cx="2011680" cy="384048"/>
+          </a:xfrm>
+          <a:prstGeom prst="rect">
+            <a:avLst/>
+          </a:prstGeom>
+          <a:noFill/>
+          <a:ln/>
+        </p:spPr>
+        <p:txBody>
+          <a:bodyPr wrap="square" rtlCol="0" anchor="ctr"/>
+          <a:lstStyle/>
+          <a:p>
+            <a:pPr algn="ctr" indent="0" marL="0">
+              <a:buNone/>
+            </a:pPr>
+            <a:r>
+              <a:rPr lang="en-US" sz="1200" b="1" dirty="0">
+                <a:solidFill>
+                  <a:srgbClr val="1C1917"/>
+                </a:solidFill>
+                <a:latin typeface="Arial" pitchFamily="34" charset="0"/>
+                <a:ea typeface="Arial" pitchFamily="34" charset="-122"/>
+                <a:cs typeface="Arial" pitchFamily="34" charset="-120"/>
+              </a:rPr>
+              <a:t>Project Income Statement</a:t>
+            </a:r>
+            <a:endParaRPr lang="en-US" sz="1200" dirty="0"/>
+          </a:p>
+        </p:txBody>
+      </p:sp>
+      <p:sp>
+        <p:nvSpPr>
+          <p:cNvPr id="19" name="Text 17"/>
+          <p:cNvSpPr/>
+          <p:nvPr/>
+        </p:nvSpPr>
+        <p:spPr>
+          <a:xfrm>
+            <a:off x="5257800" y="2084832"/>
+            <a:ext cx="2011680" cy="310896"/>
+          </a:xfrm>
+          <a:prstGeom prst="rect">
+            <a:avLst/>
+          </a:prstGeom>
+          <a:noFill/>
+          <a:ln/>
+        </p:spPr>
+        <p:txBody>
+          <a:bodyPr wrap="square" rtlCol="0" anchor="ctr"/>
+          <a:lstStyle/>
+          <a:p>
+            <a:pPr algn="ctr" indent="0" marL="0">
+              <a:buNone/>
+            </a:pPr>
+            <a:r>
+              <a:rPr lang="en-US" sz="900" dirty="0">
+                <a:solidFill>
+                  <a:srgbClr val="78716C"/>
+                </a:solidFill>
+                <a:latin typeface="Arial" pitchFamily="34" charset="0"/>
+                <a:ea typeface="Arial" pitchFamily="34" charset="-122"/>
+                <a:cs typeface="Arial" pitchFamily="34" charset="-120"/>
+              </a:rPr>
+              <a:t>Forecast revenue, COGS, operating expenses</a:t>
+            </a:r>
+            <a:endParaRPr lang="en-US" sz="900" dirty="0"/>
+          </a:p>
+        </p:txBody>
+      </p:sp>
+      <p:sp>
+        <p:nvSpPr>
+          <p:cNvPr id="20" name="Shape 18"/>
+          <p:cNvSpPr/>
+          <p:nvPr/>
+        </p:nvSpPr>
+        <p:spPr>
+          <a:xfrm>
+            <a:off x="6163056" y="2496312"/>
+            <a:ext cx="201168" cy="548640"/>
+          </a:xfrm>
+          <a:prstGeom prst="downArrow">
+            <a:avLst/>
+          </a:prstGeom>
+          <a:solidFill>
+            <a:srgbClr val="B45309"/>
+          </a:solidFill>
+          <a:ln/>
+        </p:spPr>
+      </p:sp>
+      <p:sp>
+        <p:nvSpPr>
+          <p:cNvPr id="21" name="Shape 19"/>
+          <p:cNvSpPr/>
+          <p:nvPr/>
+        </p:nvSpPr>
+        <p:spPr>
+          <a:xfrm>
+            <a:off x="5257800" y="3108960"/>
+            <a:ext cx="2011680" cy="960120"/>
+          </a:xfrm>
+          <a:prstGeom prst="roundRect">
+            <a:avLst>
+              <a:gd name="adj" fmla="val 7619"/>
+            </a:avLst>
+          </a:prstGeom>
+          <a:solidFill>
+            <a:srgbClr val="F5F5F4"/>
+          </a:solidFill>
+          <a:ln w="15240">
+            <a:solidFill>
+              <a:srgbClr val="B45309"/>
+            </a:solidFill>
+            <a:prstDash val="solid"/>
+          </a:ln>
+        </p:spPr>
+      </p:sp>
+      <p:sp>
+        <p:nvSpPr>
+          <p:cNvPr id="22" name="Text 20"/>
+          <p:cNvSpPr/>
+          <p:nvPr/>
+        </p:nvSpPr>
+        <p:spPr>
+          <a:xfrm>
+            <a:off x="5330952" y="3182112"/>
+            <a:ext cx="310896" cy="274320"/>
+          </a:xfrm>
+          <a:prstGeom prst="rect">
+            <a:avLst/>
+          </a:prstGeom>
+          <a:solidFill>
+            <a:srgbClr val="B45309"/>
+          </a:solidFill>
+          <a:ln/>
+        </p:spPr>
+        <p:txBody>
+          <a:bodyPr wrap="square" rtlCol="0" anchor="ctr"/>
+          <a:lstStyle/>
+          <a:p>
+            <a:pPr algn="ctr" indent="0" marL="0">
+              <a:buNone/>
+            </a:pPr>
+            <a:r>
+              <a:rPr lang="en-US" sz="1000" b="1" dirty="0">
+                <a:solidFill>
+                  <a:srgbClr val="FFFFFF"/>
+                </a:solidFill>
+                <a:latin typeface="Arial" pitchFamily="34" charset="0"/>
+                <a:ea typeface="Arial" pitchFamily="34" charset="-122"/>
+                <a:cs typeface="Arial" pitchFamily="34" charset="-120"/>
+              </a:rPr>
+              <a:t>4</a:t>
+            </a:r>
+            <a:endParaRPr lang="en-US" sz="1000" dirty="0"/>
+          </a:p>
+        </p:txBody>
+      </p:sp>
+      <p:sp>
+        <p:nvSpPr>
+          <p:cNvPr id="23" name="Text 21"/>
+          <p:cNvSpPr/>
+          <p:nvPr/>
+        </p:nvSpPr>
+        <p:spPr>
+          <a:xfrm>
+            <a:off x="5257800" y="3383280"/>
+            <a:ext cx="2011680" cy="384048"/>
+          </a:xfrm>
+          <a:prstGeom prst="rect">
+            <a:avLst/>
+          </a:prstGeom>
+          <a:noFill/>
+          <a:ln/>
+        </p:spPr>
+        <p:txBody>
+          <a:bodyPr wrap="square" rtlCol="0" anchor="ctr"/>
+          <a:lstStyle/>
+          <a:p>
+            <a:pPr algn="ctr" indent="0" marL="0">
+              <a:buNone/>
+            </a:pPr>
+            <a:r>
+              <a:rPr lang="en-US" sz="1200" b="1" dirty="0">
+                <a:solidFill>
+                  <a:srgbClr val="1C1917"/>
+                </a:solidFill>
+                <a:latin typeface="Arial" pitchFamily="34" charset="0"/>
+                <a:ea typeface="Arial" pitchFamily="34" charset="-122"/>
+                <a:cs typeface="Arial" pitchFamily="34" charset="-120"/>
+              </a:rPr>
+              <a:t>Build Balance Sheet</a:t>
+            </a:r>
+            <a:endParaRPr lang="en-US" sz="1200" dirty="0"/>
+          </a:p>
+        </p:txBody>
+      </p:sp>
+      <p:sp>
+        <p:nvSpPr>
+          <p:cNvPr id="24" name="Text 22"/>
+          <p:cNvSpPr/>
+          <p:nvPr/>
+        </p:nvSpPr>
+        <p:spPr>
+          <a:xfrm>
+            <a:off x="5257800" y="3730752"/>
+            <a:ext cx="2011680" cy="310896"/>
+          </a:xfrm>
+          <a:prstGeom prst="rect">
+            <a:avLst/>
+          </a:prstGeom>
+          <a:noFill/>
+          <a:ln/>
+        </p:spPr>
+        <p:txBody>
+          <a:bodyPr wrap="square" rtlCol="0" anchor="ctr"/>
+          <a:lstStyle/>
+          <a:p>
+            <a:pPr algn="ctr" indent="0" marL="0">
+              <a:buNone/>
+            </a:pPr>
+            <a:r>
+              <a:rPr lang="en-US" sz="900" dirty="0">
+                <a:solidFill>
+                  <a:srgbClr val="78716C"/>
+                </a:solidFill>
+                <a:latin typeface="Arial" pitchFamily="34" charset="0"/>
+                <a:ea typeface="Arial" pitchFamily="34" charset="-122"/>
+                <a:cs typeface="Arial" pitchFamily="34" charset="-120"/>
+              </a:rPr>
+              <a:t>Model working capital using days-outstanding</a:t>
+            </a:r>
+            <a:endParaRPr lang="en-US" sz="900" dirty="0"/>
+          </a:p>
+        </p:txBody>
+      </p:sp>
+      <p:sp>
+        <p:nvSpPr>
+          <p:cNvPr id="25" name="Shape 23"/>
+          <p:cNvSpPr/>
+          <p:nvPr/>
+        </p:nvSpPr>
+        <p:spPr>
+          <a:xfrm>
+            <a:off x="4901184" y="3488436"/>
+            <a:ext cx="301752" cy="201168"/>
+          </a:xfrm>
+          <a:prstGeom prst="leftArrow">
+            <a:avLst/>
+          </a:prstGeom>
+          <a:solidFill>
+            <a:srgbClr val="B45309"/>
+          </a:solidFill>
+          <a:ln/>
+        </p:spPr>
+      </p:sp>
+      <p:sp>
+        <p:nvSpPr>
+          <p:cNvPr id="26" name="Shape 24"/>
+          <p:cNvSpPr/>
+          <p:nvPr/>
+        </p:nvSpPr>
+        <p:spPr>
+          <a:xfrm>
+            <a:off x="2834640" y="3108960"/>
+            <a:ext cx="2011680" cy="960120"/>
+          </a:xfrm>
+          <a:prstGeom prst="roundRect">
+            <a:avLst>
+              <a:gd name="adj" fmla="val 7619"/>
+            </a:avLst>
+          </a:prstGeom>
+          <a:solidFill>
+            <a:srgbClr val="F5F5F4"/>
+          </a:solidFill>
+          <a:ln w="15240">
+            <a:solidFill>
+              <a:srgbClr val="B45309"/>
+            </a:solidFill>
+            <a:prstDash val="solid"/>
+          </a:ln>
+        </p:spPr>
+      </p:sp>
+      <p:sp>
+        <p:nvSpPr>
+          <p:cNvPr id="27" name="Text 25"/>
+          <p:cNvSpPr/>
+          <p:nvPr/>
+        </p:nvSpPr>
+        <p:spPr>
+          <a:xfrm>
+            <a:off x="2907792" y="3182112"/>
+            <a:ext cx="310896" cy="274320"/>
+          </a:xfrm>
+          <a:prstGeom prst="rect">
+            <a:avLst/>
+          </a:prstGeom>
+          <a:solidFill>
+            <a:srgbClr val="B45309"/>
+          </a:solidFill>
+          <a:ln/>
+        </p:spPr>
+        <p:txBody>
+          <a:bodyPr wrap="square" rtlCol="0" anchor="ctr"/>
+          <a:lstStyle/>
+          <a:p>
+            <a:pPr algn="ctr" indent="0" marL="0">
+              <a:buNone/>
+            </a:pPr>
+            <a:r>
+              <a:rPr lang="en-US" sz="1000" b="1" dirty="0">
+                <a:solidFill>
+                  <a:srgbClr val="FFFFFF"/>
+                </a:solidFill>
+                <a:latin typeface="Arial" pitchFamily="34" charset="0"/>
+                <a:ea typeface="Arial" pitchFamily="34" charset="-122"/>
+                <a:cs typeface="Arial" pitchFamily="34" charset="-120"/>
+              </a:rPr>
+              <a:t>5</a:t>
+            </a:r>
+            <a:endParaRPr lang="en-US" sz="1000" dirty="0"/>
+          </a:p>
+        </p:txBody>
+      </p:sp>
+      <p:sp>
+        <p:nvSpPr>
+          <p:cNvPr id="28" name="Text 26"/>
+          <p:cNvSpPr/>
+          <p:nvPr/>
+        </p:nvSpPr>
+        <p:spPr>
+          <a:xfrm>
+            <a:off x="2834640" y="3383280"/>
+            <a:ext cx="2011680" cy="384048"/>
+          </a:xfrm>
+          <a:prstGeom prst="rect">
+            <a:avLst/>
+          </a:prstGeom>
+          <a:noFill/>
+          <a:ln/>
+        </p:spPr>
+        <p:txBody>
+          <a:bodyPr wrap="square" rtlCol="0" anchor="ctr"/>
+          <a:lstStyle/>
+          <a:p>
+            <a:pPr algn="ctr" indent="0" marL="0">
+              <a:buNone/>
+            </a:pPr>
+            <a:r>
+              <a:rPr lang="en-US" sz="1200" b="1" dirty="0">
+                <a:solidFill>
+                  <a:srgbClr val="1C1917"/>
+                </a:solidFill>
+                <a:latin typeface="Arial" pitchFamily="34" charset="0"/>
+                <a:ea typeface="Arial" pitchFamily="34" charset="-122"/>
+                <a:cs typeface="Arial" pitchFamily="34" charset="-120"/>
+              </a:rPr>
+              <a:t>Construct Cash Flows</a:t>
+            </a:r>
+            <a:endParaRPr lang="en-US" sz="1200" dirty="0"/>
+          </a:p>
+        </p:txBody>
+      </p:sp>
+      <p:sp>
+        <p:nvSpPr>
+          <p:cNvPr id="29" name="Text 27"/>
+          <p:cNvSpPr/>
+          <p:nvPr/>
+        </p:nvSpPr>
+        <p:spPr>
+          <a:xfrm>
+            <a:off x="2834640" y="3730752"/>
+            <a:ext cx="2011680" cy="310896"/>
+          </a:xfrm>
+          <a:prstGeom prst="rect">
+            <a:avLst/>
+          </a:prstGeom>
+          <a:noFill/>
+          <a:ln/>
+        </p:spPr>
+        <p:txBody>
+          <a:bodyPr wrap="square" rtlCol="0" anchor="ctr"/>
+          <a:lstStyle/>
+          <a:p>
+            <a:pPr algn="ctr" indent="0" marL="0">
+              <a:buNone/>
+            </a:pPr>
+            <a:r>
+              <a:rPr lang="en-US" sz="900" dirty="0">
+                <a:solidFill>
+                  <a:srgbClr val="78716C"/>
+                </a:solidFill>
+                <a:latin typeface="Arial" pitchFamily="34" charset="0"/>
+                <a:ea typeface="Arial" pitchFamily="34" charset="-122"/>
+                <a:cs typeface="Arial" pitchFamily="34" charset="-120"/>
+              </a:rPr>
+              <a:t>Derive FCF from EBIT and working capital</a:t>
+            </a:r>
+            <a:endParaRPr lang="en-US" sz="900" dirty="0"/>
+          </a:p>
+        </p:txBody>
+      </p:sp>
+      <p:sp>
+        <p:nvSpPr>
+          <p:cNvPr id="30" name="Shape 28"/>
+          <p:cNvSpPr/>
+          <p:nvPr/>
+        </p:nvSpPr>
+        <p:spPr>
+          <a:xfrm>
+            <a:off x="2478024" y="3488436"/>
+            <a:ext cx="301752" cy="201168"/>
+          </a:xfrm>
+          <a:prstGeom prst="leftArrow">
+            <a:avLst/>
+          </a:prstGeom>
+          <a:solidFill>
+            <a:srgbClr val="B45309"/>
+          </a:solidFill>
+          <a:ln/>
+        </p:spPr>
+      </p:sp>
+      <p:sp>
+        <p:nvSpPr>
+          <p:cNvPr id="31" name="Shape 29"/>
+          <p:cNvSpPr/>
+          <p:nvPr/>
+        </p:nvSpPr>
+        <p:spPr>
+          <a:xfrm>
+            <a:off x="411480" y="3108960"/>
+            <a:ext cx="2011680" cy="960120"/>
+          </a:xfrm>
+          <a:prstGeom prst="roundRect">
+            <a:avLst>
+              <a:gd name="adj" fmla="val 7619"/>
+            </a:avLst>
+          </a:prstGeom>
+          <a:solidFill>
+            <a:srgbClr val="F5F5F4"/>
+          </a:solidFill>
+          <a:ln w="15240">
+            <a:solidFill>
+              <a:srgbClr val="B45309"/>
+            </a:solidFill>
+            <a:prstDash val="solid"/>
+          </a:ln>
+        </p:spPr>
+      </p:sp>
+      <p:sp>
+        <p:nvSpPr>
+          <p:cNvPr id="32" name="Text 30"/>
+          <p:cNvSpPr/>
+          <p:nvPr/>
+        </p:nvSpPr>
+        <p:spPr>
+          <a:xfrm>
+            <a:off x="484632" y="3182112"/>
+            <a:ext cx="310896" cy="274320"/>
+          </a:xfrm>
+          <a:prstGeom prst="rect">
+            <a:avLst/>
+          </a:prstGeom>
+          <a:solidFill>
+            <a:srgbClr val="B45309"/>
+          </a:solidFill>
+          <a:ln/>
+        </p:spPr>
+        <p:txBody>
+          <a:bodyPr wrap="square" rtlCol="0" anchor="ctr"/>
+          <a:lstStyle/>
+          <a:p>
+            <a:pPr algn="ctr" indent="0" marL="0">
+              <a:buNone/>
+            </a:pPr>
+            <a:r>
+              <a:rPr lang="en-US" sz="1000" b="1" dirty="0">
+                <a:solidFill>
+                  <a:srgbClr val="FFFFFF"/>
+                </a:solidFill>
+                <a:latin typeface="Arial" pitchFamily="34" charset="0"/>
+                <a:ea typeface="Arial" pitchFamily="34" charset="-122"/>
+                <a:cs typeface="Arial" pitchFamily="34" charset="-120"/>
+              </a:rPr>
+              <a:t>6</a:t>
+            </a:r>
+            <a:endParaRPr lang="en-US" sz="1000" dirty="0"/>
+          </a:p>
+        </p:txBody>
+      </p:sp>
+      <p:sp>
+        <p:nvSpPr>
+          <p:cNvPr id="33" name="Text 31"/>
+          <p:cNvSpPr/>
+          <p:nvPr/>
+        </p:nvSpPr>
+        <p:spPr>
+          <a:xfrm>
+            <a:off x="411480" y="3383280"/>
+            <a:ext cx="2011680" cy="384048"/>
+          </a:xfrm>
+          <a:prstGeom prst="rect">
+            <a:avLst/>
+          </a:prstGeom>
+          <a:noFill/>
+          <a:ln/>
+        </p:spPr>
+        <p:txBody>
+          <a:bodyPr wrap="square" rtlCol="0" anchor="ctr"/>
+          <a:lstStyle/>
+          <a:p>
+            <a:pPr algn="ctr" indent="0" marL="0">
+              <a:buNone/>
+            </a:pPr>
+            <a:r>
+              <a:rPr lang="en-US" sz="1200" b="1" dirty="0">
+                <a:solidFill>
+                  <a:srgbClr val="1C1917"/>
+                </a:solidFill>
+                <a:latin typeface="Arial" pitchFamily="34" charset="0"/>
+                <a:ea typeface="Arial" pitchFamily="34" charset="-122"/>
+                <a:cs typeface="Arial" pitchFamily="34" charset="-120"/>
+              </a:rPr>
+              <a:t>Value &amp; Stress-Test</a:t>
+            </a:r>
+            <a:endParaRPr lang="en-US" sz="1200" dirty="0"/>
+          </a:p>
+        </p:txBody>
+      </p:sp>
+      <p:sp>
+        <p:nvSpPr>
+          <p:cNvPr id="34" name="Text 32"/>
+          <p:cNvSpPr/>
+          <p:nvPr/>
+        </p:nvSpPr>
+        <p:spPr>
+          <a:xfrm>
+            <a:off x="411480" y="3730752"/>
+            <a:ext cx="2011680" cy="310896"/>
+          </a:xfrm>
+          <a:prstGeom prst="rect">
+            <a:avLst/>
+          </a:prstGeom>
+          <a:noFill/>
+          <a:ln/>
+        </p:spPr>
+        <p:txBody>
+          <a:bodyPr wrap="square" rtlCol="0" anchor="ctr"/>
+          <a:lstStyle/>
+          <a:p>
+            <a:pPr algn="ctr" indent="0" marL="0">
+              <a:buNone/>
+            </a:pPr>
+            <a:r>
+              <a:rPr lang="en-US" sz="900" dirty="0">
+                <a:solidFill>
+                  <a:srgbClr val="78716C"/>
+                </a:solidFill>
+                <a:latin typeface="Arial" pitchFamily="34" charset="0"/>
+                <a:ea typeface="Arial" pitchFamily="34" charset="-122"/>
+                <a:cs typeface="Arial" pitchFamily="34" charset="-120"/>
+              </a:rPr>
+              <a:t>Apply WACC, run bear/base/bull scenarios</a:t>
+            </a:r>
+            <a:endParaRPr lang="en-US" sz="900" dirty="0"/>
           </a:p>
         </p:txBody>
       </p:sp>
@@ -2249,6 +3692,13 @@
 <file path=ppt/slides/slide11.xml><?xml version="1.0" encoding="utf-8"?>
 <p:sld xmlns:a="http://schemas.openxmlformats.org/drawingml/2006/main" xmlns:r="http://schemas.openxmlformats.org/officeDocument/2006/relationships" xmlns:p="http://schemas.openxmlformats.org/presentationml/2006/main">
   <p:cSld name="Slide 11">
+    <p:bg>
+      <p:bgPr>
+        <a:solidFill>
+          <a:srgbClr val="FFFFFF"/>
+        </a:solidFill>
+      </p:bgPr>
+    </p:bg>
     <p:spTree>
       <p:nvGrpSpPr>
         <p:cNvPr id="1" name=""/>
@@ -2265,14 +3715,34 @@
       </p:grpSpPr>
       <p:sp>
         <p:nvSpPr>
-          <p:cNvPr id="2" name="Text 0"/>
-          <p:cNvSpPr/>
-          <p:nvPr/>
-        </p:nvSpPr>
-        <p:spPr>
-          <a:xfrm>
-            <a:off x="457200" y="320040"/>
-            <a:ext cx="8229600" cy="731520"/>
+          <p:cNvPr id="2" name="Shape 0"/>
+          <p:cNvSpPr/>
+          <p:nvPr/>
+        </p:nvSpPr>
+        <p:spPr>
+          <a:xfrm>
+            <a:off x="411480" y="402336"/>
+            <a:ext cx="82296" cy="329184"/>
+          </a:xfrm>
+          <a:prstGeom prst="rect">
+            <a:avLst/>
+          </a:prstGeom>
+          <a:solidFill>
+            <a:srgbClr val="B45309"/>
+          </a:solidFill>
+          <a:ln/>
+        </p:spPr>
+      </p:sp>
+      <p:sp>
+        <p:nvSpPr>
+          <p:cNvPr id="3" name="Text 1"/>
+          <p:cNvSpPr/>
+          <p:nvPr/>
+        </p:nvSpPr>
+        <p:spPr>
+          <a:xfrm>
+            <a:off x="566928" y="292608"/>
+            <a:ext cx="8138160" cy="548640"/>
           </a:xfrm>
           <a:prstGeom prst="rect">
             <a:avLst/>
@@ -2288,27 +3758,92 @@
               <a:buNone/>
             </a:pPr>
             <a:r>
-              <a:rPr lang="en-US" sz="2400" b="1" dirty="0">
-                <a:solidFill>
-                  <a:srgbClr val="B45309"/>
-                </a:solidFill>
-              </a:rPr>
-              <a:t>Model Risk and Criticisms of Financial Modeling (90:00 - 110:00)</a:t>
-            </a:r>
-            <a:endParaRPr lang="en-US" sz="2400" dirty="0"/>
-          </a:p>
-        </p:txBody>
-      </p:sp>
-      <p:sp>
-        <p:nvSpPr>
-          <p:cNvPr id="3" name="Text 1"/>
-          <p:cNvSpPr/>
-          <p:nvPr/>
-        </p:nvSpPr>
-        <p:spPr>
-          <a:xfrm>
-            <a:off x="640080" y="1188720"/>
-            <a:ext cx="7863840" cy="3291840"/>
+              <a:rPr lang="en-US" sz="2100" b="1" dirty="0">
+                <a:solidFill>
+                  <a:srgbClr val="1C1917"/>
+                </a:solidFill>
+                <a:latin typeface="Arial" pitchFamily="34" charset="0"/>
+                <a:ea typeface="Arial" pitchFamily="34" charset="-122"/>
+                <a:cs typeface="Arial" pitchFamily="34" charset="-120"/>
+              </a:rPr>
+              <a:t>Inputs: Building the Foundation</a:t>
+            </a:r>
+            <a:endParaRPr lang="en-US" sz="2100" dirty="0"/>
+          </a:p>
+        </p:txBody>
+      </p:sp>
+      <p:sp>
+        <p:nvSpPr>
+          <p:cNvPr id="4" name="Shape 2"/>
+          <p:cNvSpPr/>
+          <p:nvPr/>
+        </p:nvSpPr>
+        <p:spPr>
+          <a:xfrm>
+            <a:off x="411480" y="960120"/>
+            <a:ext cx="8321040" cy="0"/>
+          </a:xfrm>
+          <a:prstGeom prst="line">
+            <a:avLst/>
+          </a:prstGeom>
+          <a:noFill/>
+          <a:ln w="12700">
+            <a:solidFill>
+              <a:srgbClr val="E7E5E4"/>
+            </a:solidFill>
+            <a:prstDash val="solid"/>
+          </a:ln>
+        </p:spPr>
+      </p:sp>
+      <p:sp>
+        <p:nvSpPr>
+          <p:cNvPr id="5" name="Text 3"/>
+          <p:cNvSpPr/>
+          <p:nvPr/>
+        </p:nvSpPr>
+        <p:spPr>
+          <a:xfrm>
+            <a:off x="411480" y="4864608"/>
+            <a:ext cx="8321040" cy="237744"/>
+          </a:xfrm>
+          <a:prstGeom prst="rect">
+            <a:avLst/>
+          </a:prstGeom>
+          <a:noFill/>
+          <a:ln/>
+        </p:spPr>
+        <p:txBody>
+          <a:bodyPr wrap="square" rtlCol="0" anchor="ctr"/>
+          <a:lstStyle/>
+          <a:p>
+            <a:pPr indent="0" marL="0">
+              <a:buNone/>
+            </a:pPr>
+            <a:r>
+              <a:rPr lang="en-US" sz="750" dirty="0">
+                <a:solidFill>
+                  <a:srgbClr val="AAAAAA"/>
+                </a:solidFill>
+                <a:latin typeface="Arial" pitchFamily="34" charset="0"/>
+                <a:ea typeface="Arial" pitchFamily="34" charset="-122"/>
+                <a:cs typeface="Arial" pitchFamily="34" charset="-120"/>
+              </a:rPr>
+              <a:t>Lesson Forge Pro (owner) — This content is educational material only and does not constitute financial, investment, or trading advice.</a:t>
+            </a:r>
+            <a:endParaRPr lang="en-US" sz="750" dirty="0"/>
+          </a:p>
+        </p:txBody>
+      </p:sp>
+      <p:sp>
+        <p:nvSpPr>
+          <p:cNvPr id="6" name="Text 4"/>
+          <p:cNvSpPr/>
+          <p:nvPr/>
+        </p:nvSpPr>
+        <p:spPr>
+          <a:xfrm>
+            <a:off x="731520" y="1188720"/>
+            <a:ext cx="7680960" cy="2743200"/>
           </a:xfrm>
           <a:prstGeom prst="rect">
             <a:avLst/>
@@ -2320,47 +3855,151 @@
           <a:bodyPr wrap="square" rtlCol="0" anchor="t"/>
           <a:lstStyle/>
           <a:p>
-            <a:pPr marL="342900" indent="-342900">
+            <a:pPr marL="152400" indent="-152400">
+              <a:spcAft>
+                <a:spcPts val="800"/>
+              </a:spcAft>
               <a:buSzPct val="100000"/>
               <a:buChar char="•"/>
             </a:pPr>
             <a:r>
-              <a:rPr lang="en-US" sz="1600" dirty="0">
-                <a:solidFill>
-                  <a:srgbClr val="333333"/>
-                </a:solidFill>
-              </a:rPr>
-              <a:t>Financial models are not without risks and criticisms. Model risk refers to the potential errors or inaccuracies in financial models, which can result in incorr</a:t>
-            </a:r>
-            <a:endParaRPr lang="en-US" sz="1600" dirty="0"/>
-          </a:p>
-          <a:p>
-            <a:pPr marL="342900" indent="-342900">
+              <a:rPr lang="en-US" sz="1500" dirty="0">
+                <a:solidFill>
+                  <a:srgbClr val="1C1917"/>
+                </a:solidFill>
+                <a:latin typeface="Arial" pitchFamily="34" charset="0"/>
+                <a:ea typeface="Arial" pitchFamily="34" charset="-122"/>
+                <a:cs typeface="Arial" pitchFamily="34" charset="-120"/>
+              </a:rPr>
+              <a:t>Use three to five years of historical income statements, balance sheets, and cash flows.</a:t>
+            </a:r>
+            <a:endParaRPr lang="en-US" sz="1500" dirty="0"/>
+          </a:p>
+          <a:p>
+            <a:pPr marL="152400" indent="-152400">
+              <a:spcAft>
+                <a:spcPts val="800"/>
+              </a:spcAft>
               <a:buSzPct val="100000"/>
               <a:buChar char="•"/>
             </a:pPr>
             <a:r>
-              <a:rPr lang="en-US" sz="1600" dirty="0">
-                <a:solidFill>
-                  <a:srgbClr val="333333"/>
-                </a:solidFill>
-              </a:rPr>
-              <a:t>To illustrate this concept, let's consider an analogy. Imagine you are a sailor who relies on a map to navigate the ocean. If the map is inaccurate, you may get</a:t>
-            </a:r>
-            <a:endParaRPr lang="en-US" sz="1600" dirty="0"/>
-          </a:p>
-        </p:txBody>
-      </p:sp>
-      <p:sp>
-        <p:nvSpPr>
-          <p:cNvPr id="4" name="Text 2"/>
-          <p:cNvSpPr/>
-          <p:nvPr/>
-        </p:nvSpPr>
-        <p:spPr>
-          <a:xfrm>
-            <a:off x="457200" y="4709160"/>
-            <a:ext cx="8229600" cy="320040"/>
+              <a:rPr lang="en-US" sz="1500" dirty="0">
+                <a:solidFill>
+                  <a:srgbClr val="1C1917"/>
+                </a:solidFill>
+                <a:latin typeface="Arial" pitchFamily="34" charset="0"/>
+                <a:ea typeface="Arial" pitchFamily="34" charset="-122"/>
+                <a:cs typeface="Arial" pitchFamily="34" charset="-120"/>
+              </a:rPr>
+              <a:t>Gather market data: growth rates, comparable multiples, and discount rates.</a:t>
+            </a:r>
+            <a:endParaRPr lang="en-US" sz="1500" dirty="0"/>
+          </a:p>
+          <a:p>
+            <a:pPr marL="152400" indent="-152400">
+              <a:spcAft>
+                <a:spcPts val="800"/>
+              </a:spcAft>
+              <a:buSzPct val="100000"/>
+              <a:buChar char="•"/>
+            </a:pPr>
+            <a:r>
+              <a:rPr lang="en-US" sz="1500" dirty="0">
+                <a:solidFill>
+                  <a:srgbClr val="1C1917"/>
+                </a:solidFill>
+                <a:latin typeface="Arial" pitchFamily="34" charset="0"/>
+                <a:ea typeface="Arial" pitchFamily="34" charset="-122"/>
+                <a:cs typeface="Arial" pitchFamily="34" charset="-120"/>
+              </a:rPr>
+              <a:t>Capture deal-specific assumptions: price, financing, synergies, integration costs.</a:t>
+            </a:r>
+            <a:endParaRPr lang="en-US" sz="1500" dirty="0"/>
+          </a:p>
+          <a:p>
+            <a:pPr marL="152400" indent="-152400">
+              <a:spcAft>
+                <a:spcPts val="800"/>
+              </a:spcAft>
+              <a:buSzPct val="100000"/>
+              <a:buChar char="•"/>
+            </a:pPr>
+            <a:r>
+              <a:rPr lang="en-US" sz="1500" dirty="0">
+                <a:solidFill>
+                  <a:srgbClr val="1C1917"/>
+                </a:solidFill>
+                <a:latin typeface="Arial" pitchFamily="34" charset="0"/>
+                <a:ea typeface="Arial" pitchFamily="34" charset="-122"/>
+                <a:cs typeface="Arial" pitchFamily="34" charset="-120"/>
+              </a:rPr>
+              <a:t>Store all assumptions on a dedicated inputs tab—never bury hard-coded numbers.</a:t>
+            </a:r>
+            <a:endParaRPr lang="en-US" sz="1500" dirty="0"/>
+          </a:p>
+          <a:p>
+            <a:pPr marL="152400" indent="-152400">
+              <a:spcAft>
+                <a:spcPts val="800"/>
+              </a:spcAft>
+              <a:buSzPct val="100000"/>
+              <a:buChar char="•"/>
+            </a:pPr>
+            <a:r>
+              <a:rPr lang="en-US" sz="1500" dirty="0">
+                <a:solidFill>
+                  <a:srgbClr val="1C1917"/>
+                </a:solidFill>
+                <a:latin typeface="Arial" pitchFamily="34" charset="0"/>
+                <a:ea typeface="Arial" pitchFamily="34" charset="-122"/>
+                <a:cs typeface="Arial" pitchFamily="34" charset="-120"/>
+              </a:rPr>
+              <a:t>Explicit labeling of every assumption is the single best error-prevention habit.</a:t>
+            </a:r>
+            <a:endParaRPr lang="en-US" sz="1500" dirty="0"/>
+          </a:p>
+        </p:txBody>
+      </p:sp>
+      <p:sp>
+        <p:nvSpPr>
+          <p:cNvPr id="7" name="Shape 5"/>
+          <p:cNvSpPr/>
+          <p:nvPr/>
+        </p:nvSpPr>
+        <p:spPr>
+          <a:xfrm>
+            <a:off x="731520" y="4041648"/>
+            <a:ext cx="7680960" cy="566928"/>
+          </a:xfrm>
+          <a:prstGeom prst="roundRect">
+            <a:avLst>
+              <a:gd name="adj" fmla="val 12903"/>
+            </a:avLst>
+          </a:prstGeom>
+          <a:solidFill>
+            <a:srgbClr val="B45309">
+              <a:alpha val="12000"/>
+            </a:srgbClr>
+          </a:solidFill>
+          <a:ln w="12700">
+            <a:solidFill>
+              <a:srgbClr val="B45309"/>
+            </a:solidFill>
+            <a:prstDash val="solid"/>
+          </a:ln>
+        </p:spPr>
+      </p:sp>
+      <p:sp>
+        <p:nvSpPr>
+          <p:cNvPr id="8" name="Text 6"/>
+          <p:cNvSpPr/>
+          <p:nvPr/>
+        </p:nvSpPr>
+        <p:spPr>
+          <a:xfrm>
+            <a:off x="868680" y="4087368"/>
+            <a:ext cx="7406640" cy="475488"/>
           </a:xfrm>
           <a:prstGeom prst="rect">
             <a:avLst/>
@@ -2376,14 +4015,31 @@
               <a:buNone/>
             </a:pPr>
             <a:r>
-              <a:rPr lang="en-US" sz="800" dirty="0">
-                <a:solidFill>
-                  <a:srgbClr val="AAAAAA"/>
-                </a:solidFill>
-              </a:rPr>
-              <a:t>Lesson Forge Pro (owner) — This content is educational material only and does not constitute financial, investment, or trading advice.</a:t>
-            </a:r>
-            <a:endParaRPr lang="en-US" sz="800" dirty="0"/>
+              <a:rPr lang="en-US" sz="1100" b="1" dirty="0">
+                <a:solidFill>
+                  <a:srgbClr val="B45309"/>
+                </a:solidFill>
+                <a:latin typeface="Arial" pitchFamily="34" charset="0"/>
+                <a:ea typeface="Arial" pitchFamily="34" charset="-122"/>
+                <a:cs typeface="Arial" pitchFamily="34" charset="-120"/>
+              </a:rPr>
+              <a:t>Takeaway  </a:t>
+            </a:r>
+            <a:pPr indent="0" marL="0">
+              <a:buNone/>
+            </a:pPr>
+            <a:r>
+              <a:rPr lang="en-US" sz="1150" dirty="0">
+                <a:solidFill>
+                  <a:srgbClr val="1C1917"/>
+                </a:solidFill>
+                <a:latin typeface="Arial" pitchFamily="34" charset="0"/>
+                <a:ea typeface="Arial" pitchFamily="34" charset="-122"/>
+                <a:cs typeface="Arial" pitchFamily="34" charset="-120"/>
+              </a:rPr>
+              <a:t>A clean, centralized inputs tab is the most important structural decision in any M&amp;A model.</a:t>
+            </a:r>
+            <a:endParaRPr lang="en-US" sz="1100" dirty="0"/>
           </a:p>
         </p:txBody>
       </p:sp>
@@ -2398,6 +4054,13 @@
 <file path=ppt/slides/slide12.xml><?xml version="1.0" encoding="utf-8"?>
 <p:sld xmlns:a="http://schemas.openxmlformats.org/drawingml/2006/main" xmlns:r="http://schemas.openxmlformats.org/officeDocument/2006/relationships" xmlns:p="http://schemas.openxmlformats.org/presentationml/2006/main">
   <p:cSld name="Slide 12">
+    <p:bg>
+      <p:bgPr>
+        <a:solidFill>
+          <a:srgbClr val="FFFFFF"/>
+        </a:solidFill>
+      </p:bgPr>
+    </p:bg>
     <p:spTree>
       <p:nvGrpSpPr>
         <p:cNvPr id="1" name=""/>
@@ -2414,14 +4077,34 @@
       </p:grpSpPr>
       <p:sp>
         <p:nvSpPr>
-          <p:cNvPr id="2" name="Text 0"/>
-          <p:cNvSpPr/>
-          <p:nvPr/>
-        </p:nvSpPr>
-        <p:spPr>
-          <a:xfrm>
-            <a:off x="457200" y="320040"/>
-            <a:ext cx="8229600" cy="731520"/>
+          <p:cNvPr id="2" name="Shape 0"/>
+          <p:cNvSpPr/>
+          <p:nvPr/>
+        </p:nvSpPr>
+        <p:spPr>
+          <a:xfrm>
+            <a:off x="411480" y="402336"/>
+            <a:ext cx="82296" cy="329184"/>
+          </a:xfrm>
+          <a:prstGeom prst="rect">
+            <a:avLst/>
+          </a:prstGeom>
+          <a:solidFill>
+            <a:srgbClr val="B45309"/>
+          </a:solidFill>
+          <a:ln/>
+        </p:spPr>
+      </p:sp>
+      <p:sp>
+        <p:nvSpPr>
+          <p:cNvPr id="3" name="Text 1"/>
+          <p:cNvSpPr/>
+          <p:nvPr/>
+        </p:nvSpPr>
+        <p:spPr>
+          <a:xfrm>
+            <a:off x="566928" y="292608"/>
+            <a:ext cx="8138160" cy="548640"/>
           </a:xfrm>
           <a:prstGeom prst="rect">
             <a:avLst/>
@@ -2437,27 +4120,92 @@
               <a:buNone/>
             </a:pPr>
             <a:r>
-              <a:rPr lang="en-US" sz="2400" b="1" dirty="0">
-                <a:solidFill>
-                  <a:srgbClr val="B45309"/>
-                </a:solidFill>
-              </a:rPr>
-              <a:t>Conclusion and Next Steps (110:00 - 120:00)</a:t>
-            </a:r>
-            <a:endParaRPr lang="en-US" sz="2400" dirty="0"/>
-          </a:p>
-        </p:txBody>
-      </p:sp>
-      <p:sp>
-        <p:nvSpPr>
-          <p:cNvPr id="3" name="Text 1"/>
-          <p:cNvSpPr/>
-          <p:nvPr/>
-        </p:nvSpPr>
-        <p:spPr>
-          <a:xfrm>
-            <a:off x="640080" y="1188720"/>
-            <a:ext cx="7863840" cy="3291840"/>
+              <a:rPr lang="en-US" sz="2100" b="1" dirty="0">
+                <a:solidFill>
+                  <a:srgbClr val="1C1917"/>
+                </a:solidFill>
+                <a:latin typeface="Arial" pitchFamily="34" charset="0"/>
+                <a:ea typeface="Arial" pitchFamily="34" charset="-122"/>
+                <a:cs typeface="Arial" pitchFamily="34" charset="-120"/>
+              </a:rPr>
+              <a:t>Steps: Building the Model</a:t>
+            </a:r>
+            <a:endParaRPr lang="en-US" sz="2100" dirty="0"/>
+          </a:p>
+        </p:txBody>
+      </p:sp>
+      <p:sp>
+        <p:nvSpPr>
+          <p:cNvPr id="4" name="Shape 2"/>
+          <p:cNvSpPr/>
+          <p:nvPr/>
+        </p:nvSpPr>
+        <p:spPr>
+          <a:xfrm>
+            <a:off x="411480" y="960120"/>
+            <a:ext cx="8321040" cy="0"/>
+          </a:xfrm>
+          <a:prstGeom prst="line">
+            <a:avLst/>
+          </a:prstGeom>
+          <a:noFill/>
+          <a:ln w="12700">
+            <a:solidFill>
+              <a:srgbClr val="E7E5E4"/>
+            </a:solidFill>
+            <a:prstDash val="solid"/>
+          </a:ln>
+        </p:spPr>
+      </p:sp>
+      <p:sp>
+        <p:nvSpPr>
+          <p:cNvPr id="5" name="Text 3"/>
+          <p:cNvSpPr/>
+          <p:nvPr/>
+        </p:nvSpPr>
+        <p:spPr>
+          <a:xfrm>
+            <a:off x="411480" y="4864608"/>
+            <a:ext cx="8321040" cy="237744"/>
+          </a:xfrm>
+          <a:prstGeom prst="rect">
+            <a:avLst/>
+          </a:prstGeom>
+          <a:noFill/>
+          <a:ln/>
+        </p:spPr>
+        <p:txBody>
+          <a:bodyPr wrap="square" rtlCol="0" anchor="ctr"/>
+          <a:lstStyle/>
+          <a:p>
+            <a:pPr indent="0" marL="0">
+              <a:buNone/>
+            </a:pPr>
+            <a:r>
+              <a:rPr lang="en-US" sz="750" dirty="0">
+                <a:solidFill>
+                  <a:srgbClr val="AAAAAA"/>
+                </a:solidFill>
+                <a:latin typeface="Arial" pitchFamily="34" charset="0"/>
+                <a:ea typeface="Arial" pitchFamily="34" charset="-122"/>
+                <a:cs typeface="Arial" pitchFamily="34" charset="-120"/>
+              </a:rPr>
+              <a:t>Lesson Forge Pro (owner) — This content is educational material only and does not constitute financial, investment, or trading advice.</a:t>
+            </a:r>
+            <a:endParaRPr lang="en-US" sz="750" dirty="0"/>
+          </a:p>
+        </p:txBody>
+      </p:sp>
+      <p:sp>
+        <p:nvSpPr>
+          <p:cNvPr id="6" name="Text 4"/>
+          <p:cNvSpPr/>
+          <p:nvPr/>
+        </p:nvSpPr>
+        <p:spPr>
+          <a:xfrm>
+            <a:off x="731520" y="1188720"/>
+            <a:ext cx="7680960" cy="2743200"/>
           </a:xfrm>
           <a:prstGeom prst="rect">
             <a:avLst/>
@@ -2469,47 +4217,151 @@
           <a:bodyPr wrap="square" rtlCol="0" anchor="t"/>
           <a:lstStyle/>
           <a:p>
-            <a:pPr marL="342900" indent="-342900">
+            <a:pPr marL="152400" indent="-152400">
+              <a:spcAft>
+                <a:spcPts val="800"/>
+              </a:spcAft>
               <a:buSzPct val="100000"/>
               <a:buChar char="•"/>
             </a:pPr>
             <a:r>
-              <a:rPr lang="en-US" sz="1600" dirty="0">
-                <a:solidFill>
-                  <a:srgbClr val="333333"/>
-                </a:solidFill>
-              </a:rPr>
-              <a:t>In conclusion, financial modeling is a powerful tool for evaluating M&amp;A opportunities and investment decisions. By applying financial modeling techniques, we ca</a:t>
-            </a:r>
-            <a:endParaRPr lang="en-US" sz="1600" dirty="0"/>
-          </a:p>
-          <a:p>
-            <a:pPr marL="342900" indent="-342900">
+              <a:rPr lang="en-US" sz="1500" dirty="0">
+                <a:solidFill>
+                  <a:srgbClr val="1C1917"/>
+                </a:solidFill>
+                <a:latin typeface="Arial" pitchFamily="34" charset="0"/>
+                <a:ea typeface="Arial" pitchFamily="34" charset="-122"/>
+                <a:cs typeface="Arial" pitchFamily="34" charset="-120"/>
+              </a:rPr>
+              <a:t>Normalize historicals first—remove litigation, write-downs, and restructuring charges.</a:t>
+            </a:r>
+            <a:endParaRPr lang="en-US" sz="1500" dirty="0"/>
+          </a:p>
+          <a:p>
+            <a:pPr marL="152400" indent="-152400">
+              <a:spcAft>
+                <a:spcPts val="800"/>
+              </a:spcAft>
               <a:buSzPct val="100000"/>
               <a:buChar char="•"/>
             </a:pPr>
             <a:r>
-              <a:rPr lang="en-US" sz="1600" dirty="0">
-                <a:solidFill>
-                  <a:srgbClr val="333333"/>
-                </a:solidFill>
-              </a:rPr>
-              <a:t>For next steps, please review the case study and group discussion notes, and consider how you can apply financial modeling techniques to your own work or person</a:t>
-            </a:r>
-            <a:endParaRPr lang="en-US" sz="1600" dirty="0"/>
-          </a:p>
-        </p:txBody>
-      </p:sp>
-      <p:sp>
-        <p:nvSpPr>
-          <p:cNvPr id="4" name="Text 2"/>
-          <p:cNvSpPr/>
-          <p:nvPr/>
-        </p:nvSpPr>
-        <p:spPr>
-          <a:xfrm>
-            <a:off x="457200" y="4709160"/>
-            <a:ext cx="8229600" cy="320040"/>
+              <a:rPr lang="en-US" sz="1500" dirty="0">
+                <a:solidFill>
+                  <a:srgbClr val="1C1917"/>
+                </a:solidFill>
+                <a:latin typeface="Arial" pitchFamily="34" charset="0"/>
+                <a:ea typeface="Arial" pitchFamily="34" charset="-122"/>
+                <a:cs typeface="Arial" pitchFamily="34" charset="-120"/>
+              </a:rPr>
+              <a:t>Project revenue via bottom-up or top-down growth; forecast costs as revenue percentages.</a:t>
+            </a:r>
+            <a:endParaRPr lang="en-US" sz="1500" dirty="0"/>
+          </a:p>
+          <a:p>
+            <a:pPr marL="152400" indent="-152400">
+              <a:spcAft>
+                <a:spcPts val="800"/>
+              </a:spcAft>
+              <a:buSzPct val="100000"/>
+              <a:buChar char="•"/>
+            </a:pPr>
+            <a:r>
+              <a:rPr lang="en-US" sz="1500" dirty="0">
+                <a:solidFill>
+                  <a:srgbClr val="1C1917"/>
+                </a:solidFill>
+                <a:latin typeface="Arial" pitchFamily="34" charset="0"/>
+                <a:ea typeface="Arial" pitchFamily="34" charset="-122"/>
+                <a:cs typeface="Arial" pitchFamily="34" charset="-120"/>
+              </a:rPr>
+              <a:t>Build working capital schedules using days-outstanding metrics from history.</a:t>
+            </a:r>
+            <a:endParaRPr lang="en-US" sz="1500" dirty="0"/>
+          </a:p>
+          <a:p>
+            <a:pPr marL="152400" indent="-152400">
+              <a:spcAft>
+                <a:spcPts val="800"/>
+              </a:spcAft>
+              <a:buSzPct val="100000"/>
+              <a:buChar char="•"/>
+            </a:pPr>
+            <a:r>
+              <a:rPr lang="en-US" sz="1500" dirty="0">
+                <a:solidFill>
+                  <a:srgbClr val="1C1917"/>
+                </a:solidFill>
+                <a:latin typeface="Arial" pitchFamily="34" charset="0"/>
+                <a:ea typeface="Arial" pitchFamily="34" charset="-122"/>
+                <a:cs typeface="Arial" pitchFamily="34" charset="-120"/>
+              </a:rPr>
+              <a:t>Derive FCF from EBIT: apply taxes, add D&amp;A, subtract capex and working capital changes.</a:t>
+            </a:r>
+            <a:endParaRPr lang="en-US" sz="1500" dirty="0"/>
+          </a:p>
+          <a:p>
+            <a:pPr marL="152400" indent="-152400">
+              <a:spcAft>
+                <a:spcPts val="800"/>
+              </a:spcAft>
+              <a:buSzPct val="100000"/>
+              <a:buChar char="•"/>
+            </a:pPr>
+            <a:r>
+              <a:rPr lang="en-US" sz="1500" dirty="0">
+                <a:solidFill>
+                  <a:srgbClr val="1C1917"/>
+                </a:solidFill>
+                <a:latin typeface="Arial" pitchFamily="34" charset="0"/>
+                <a:ea typeface="Arial" pitchFamily="34" charset="-122"/>
+                <a:cs typeface="Arial" pitchFamily="34" charset="-120"/>
+              </a:rPr>
+              <a:t>Layer in acquisition price, goodwill, new debt, and equity to form the pro-forma balance sheet.</a:t>
+            </a:r>
+            <a:endParaRPr lang="en-US" sz="1500" dirty="0"/>
+          </a:p>
+        </p:txBody>
+      </p:sp>
+      <p:sp>
+        <p:nvSpPr>
+          <p:cNvPr id="7" name="Shape 5"/>
+          <p:cNvSpPr/>
+          <p:nvPr/>
+        </p:nvSpPr>
+        <p:spPr>
+          <a:xfrm>
+            <a:off x="731520" y="4041648"/>
+            <a:ext cx="7680960" cy="566928"/>
+          </a:xfrm>
+          <a:prstGeom prst="roundRect">
+            <a:avLst>
+              <a:gd name="adj" fmla="val 12903"/>
+            </a:avLst>
+          </a:prstGeom>
+          <a:solidFill>
+            <a:srgbClr val="B45309">
+              <a:alpha val="12000"/>
+            </a:srgbClr>
+          </a:solidFill>
+          <a:ln w="12700">
+            <a:solidFill>
+              <a:srgbClr val="B45309"/>
+            </a:solidFill>
+            <a:prstDash val="solid"/>
+          </a:ln>
+        </p:spPr>
+      </p:sp>
+      <p:sp>
+        <p:nvSpPr>
+          <p:cNvPr id="8" name="Text 6"/>
+          <p:cNvSpPr/>
+          <p:nvPr/>
+        </p:nvSpPr>
+        <p:spPr>
+          <a:xfrm>
+            <a:off x="868680" y="4087368"/>
+            <a:ext cx="7406640" cy="475488"/>
           </a:xfrm>
           <a:prstGeom prst="rect">
             <a:avLst/>
@@ -2525,14 +4377,31 @@
               <a:buNone/>
             </a:pPr>
             <a:r>
-              <a:rPr lang="en-US" sz="800" dirty="0">
-                <a:solidFill>
-                  <a:srgbClr val="AAAAAA"/>
-                </a:solidFill>
-              </a:rPr>
-              <a:t>Lesson Forge Pro (owner) — This content is educational material only and does not constitute financial, investment, or trading advice.</a:t>
-            </a:r>
-            <a:endParaRPr lang="en-US" sz="800" dirty="0"/>
+              <a:rPr lang="en-US" sz="1100" b="1" dirty="0">
+                <a:solidFill>
+                  <a:srgbClr val="B45309"/>
+                </a:solidFill>
+                <a:latin typeface="Arial" pitchFamily="34" charset="0"/>
+                <a:ea typeface="Arial" pitchFamily="34" charset="-122"/>
+                <a:cs typeface="Arial" pitchFamily="34" charset="-120"/>
+              </a:rPr>
+              <a:t>Takeaway  </a:t>
+            </a:r>
+            <a:pPr indent="0" marL="0">
+              <a:buNone/>
+            </a:pPr>
+            <a:r>
+              <a:rPr lang="en-US" sz="1150" dirty="0">
+                <a:solidFill>
+                  <a:srgbClr val="1C1917"/>
+                </a:solidFill>
+                <a:latin typeface="Arial" pitchFamily="34" charset="0"/>
+                <a:ea typeface="Arial" pitchFamily="34" charset="-122"/>
+                <a:cs typeface="Arial" pitchFamily="34" charset="-120"/>
+              </a:rPr>
+              <a:t>Following each modeling step in sequence ensures every output traces back to a defensible assumption.</a:t>
+            </a:r>
+            <a:endParaRPr lang="en-US" sz="1100" dirty="0"/>
           </a:p>
         </p:txBody>
       </p:sp>
@@ -2547,6 +4416,13 @@
 <file path=ppt/slides/slide13.xml><?xml version="1.0" encoding="utf-8"?>
 <p:sld xmlns:a="http://schemas.openxmlformats.org/drawingml/2006/main" xmlns:r="http://schemas.openxmlformats.org/officeDocument/2006/relationships" xmlns:p="http://schemas.openxmlformats.org/presentationml/2006/main">
   <p:cSld name="Slide 13">
+    <p:bg>
+      <p:bgPr>
+        <a:solidFill>
+          <a:srgbClr val="FFFFFF"/>
+        </a:solidFill>
+      </p:bgPr>
+    </p:bg>
     <p:spTree>
       <p:nvGrpSpPr>
         <p:cNvPr id="1" name=""/>
@@ -2563,14 +4439,34 @@
       </p:grpSpPr>
       <p:sp>
         <p:nvSpPr>
-          <p:cNvPr id="2" name="Text 0"/>
-          <p:cNvSpPr/>
-          <p:nvPr/>
-        </p:nvSpPr>
-        <p:spPr>
-          <a:xfrm>
-            <a:off x="457200" y="320040"/>
-            <a:ext cx="8229600" cy="731520"/>
+          <p:cNvPr id="2" name="Shape 0"/>
+          <p:cNvSpPr/>
+          <p:nvPr/>
+        </p:nvSpPr>
+        <p:spPr>
+          <a:xfrm>
+            <a:off x="411480" y="402336"/>
+            <a:ext cx="82296" cy="329184"/>
+          </a:xfrm>
+          <a:prstGeom prst="rect">
+            <a:avLst/>
+          </a:prstGeom>
+          <a:solidFill>
+            <a:srgbClr val="B45309"/>
+          </a:solidFill>
+          <a:ln/>
+        </p:spPr>
+      </p:sp>
+      <p:sp>
+        <p:nvSpPr>
+          <p:cNvPr id="3" name="Text 1"/>
+          <p:cNvSpPr/>
+          <p:nvPr/>
+        </p:nvSpPr>
+        <p:spPr>
+          <a:xfrm>
+            <a:off x="566928" y="292608"/>
+            <a:ext cx="8138160" cy="548640"/>
           </a:xfrm>
           <a:prstGeom prst="rect">
             <a:avLst/>
@@ -2586,27 +4482,92 @@
               <a:buNone/>
             </a:pPr>
             <a:r>
-              <a:rPr lang="en-US" sz="2400" b="1" dirty="0">
-                <a:solidFill>
-                  <a:srgbClr val="B45309"/>
-                </a:solidFill>
-              </a:rPr>
-              <a:t>Anticipated Learner Questions and Answers</a:t>
-            </a:r>
-            <a:endParaRPr lang="en-US" sz="2400" dirty="0"/>
-          </a:p>
-        </p:txBody>
-      </p:sp>
-      <p:sp>
-        <p:nvSpPr>
-          <p:cNvPr id="3" name="Text 1"/>
-          <p:cNvSpPr/>
-          <p:nvPr/>
-        </p:nvSpPr>
-        <p:spPr>
-          <a:xfrm>
-            <a:off x="640080" y="1188720"/>
-            <a:ext cx="7863840" cy="3291840"/>
+              <a:rPr lang="en-US" sz="2100" b="1" dirty="0">
+                <a:solidFill>
+                  <a:srgbClr val="1C1917"/>
+                </a:solidFill>
+                <a:latin typeface="Arial" pitchFamily="34" charset="0"/>
+                <a:ea typeface="Arial" pitchFamily="34" charset="-122"/>
+                <a:cs typeface="Arial" pitchFamily="34" charset="-120"/>
+              </a:rPr>
+              <a:t>Worked Example: DCF Valuation</a:t>
+            </a:r>
+            <a:endParaRPr lang="en-US" sz="2100" dirty="0"/>
+          </a:p>
+        </p:txBody>
+      </p:sp>
+      <p:sp>
+        <p:nvSpPr>
+          <p:cNvPr id="4" name="Shape 2"/>
+          <p:cNvSpPr/>
+          <p:nvPr/>
+        </p:nvSpPr>
+        <p:spPr>
+          <a:xfrm>
+            <a:off x="411480" y="960120"/>
+            <a:ext cx="8321040" cy="0"/>
+          </a:xfrm>
+          <a:prstGeom prst="line">
+            <a:avLst/>
+          </a:prstGeom>
+          <a:noFill/>
+          <a:ln w="12700">
+            <a:solidFill>
+              <a:srgbClr val="E7E5E4"/>
+            </a:solidFill>
+            <a:prstDash val="solid"/>
+          </a:ln>
+        </p:spPr>
+      </p:sp>
+      <p:sp>
+        <p:nvSpPr>
+          <p:cNvPr id="5" name="Text 3"/>
+          <p:cNvSpPr/>
+          <p:nvPr/>
+        </p:nvSpPr>
+        <p:spPr>
+          <a:xfrm>
+            <a:off x="411480" y="4864608"/>
+            <a:ext cx="8321040" cy="237744"/>
+          </a:xfrm>
+          <a:prstGeom prst="rect">
+            <a:avLst/>
+          </a:prstGeom>
+          <a:noFill/>
+          <a:ln/>
+        </p:spPr>
+        <p:txBody>
+          <a:bodyPr wrap="square" rtlCol="0" anchor="ctr"/>
+          <a:lstStyle/>
+          <a:p>
+            <a:pPr indent="0" marL="0">
+              <a:buNone/>
+            </a:pPr>
+            <a:r>
+              <a:rPr lang="en-US" sz="750" dirty="0">
+                <a:solidFill>
+                  <a:srgbClr val="AAAAAA"/>
+                </a:solidFill>
+                <a:latin typeface="Arial" pitchFamily="34" charset="0"/>
+                <a:ea typeface="Arial" pitchFamily="34" charset="-122"/>
+                <a:cs typeface="Arial" pitchFamily="34" charset="-120"/>
+              </a:rPr>
+              <a:t>Lesson Forge Pro (owner) — This content is educational material only and does not constitute financial, investment, or trading advice.</a:t>
+            </a:r>
+            <a:endParaRPr lang="en-US" sz="750" dirty="0"/>
+          </a:p>
+        </p:txBody>
+      </p:sp>
+      <p:sp>
+        <p:nvSpPr>
+          <p:cNvPr id="6" name="Text 4"/>
+          <p:cNvSpPr/>
+          <p:nvPr/>
+        </p:nvSpPr>
+        <p:spPr>
+          <a:xfrm>
+            <a:off x="731520" y="1188720"/>
+            <a:ext cx="7680960" cy="2743200"/>
           </a:xfrm>
           <a:prstGeom prst="rect">
             <a:avLst/>
@@ -2618,107 +4579,151 @@
           <a:bodyPr wrap="square" rtlCol="0" anchor="t"/>
           <a:lstStyle/>
           <a:p>
-            <a:pPr marL="342900" indent="-342900">
+            <a:pPr marL="152400" indent="-152400">
+              <a:spcAft>
+                <a:spcPts val="800"/>
+              </a:spcAft>
               <a:buSzPct val="100000"/>
               <a:buChar char="•"/>
             </a:pPr>
             <a:r>
-              <a:rPr lang="en-US" sz="1600" dirty="0">
-                <a:solidFill>
-                  <a:srgbClr val="333333"/>
-                </a:solidFill>
-              </a:rPr>
-              <a:t>Q: What is the difference between a financial model and a financial statement?</a:t>
-            </a:r>
-            <a:endParaRPr lang="en-US" sz="1600" dirty="0"/>
-          </a:p>
-          <a:p>
-            <a:pPr marL="342900" indent="-342900">
+              <a:rPr lang="en-US" sz="1500" dirty="0">
+                <a:solidFill>
+                  <a:srgbClr val="1C1917"/>
+                </a:solidFill>
+                <a:latin typeface="Arial" pitchFamily="34" charset="0"/>
+                <a:ea typeface="Arial" pitchFamily="34" charset="-122"/>
+                <a:cs typeface="Arial" pitchFamily="34" charset="-120"/>
+              </a:rPr>
+              <a:t>Year 1 FCF: $60M × 0.75 + $10M − $8M − $4M = $43M.</a:t>
+            </a:r>
+            <a:endParaRPr lang="en-US" sz="1500" dirty="0"/>
+          </a:p>
+          <a:p>
+            <a:pPr marL="152400" indent="-152400">
+              <a:spcAft>
+                <a:spcPts val="800"/>
+              </a:spcAft>
               <a:buSzPct val="100000"/>
               <a:buChar char="•"/>
             </a:pPr>
             <a:r>
-              <a:rPr lang="en-US" sz="1600" dirty="0">
-                <a:solidFill>
-                  <a:srgbClr val="333333"/>
-                </a:solidFill>
-              </a:rPr>
-              <a:t>A: A financial statement is a historical document that shows a company's financial performance, while a financial model is a forward-looking tool that estimates</a:t>
-            </a:r>
-            <a:endParaRPr lang="en-US" sz="1600" dirty="0"/>
-          </a:p>
-          <a:p>
-            <a:pPr marL="342900" indent="-342900">
+              <a:rPr lang="en-US" sz="1500" dirty="0">
+                <a:solidFill>
+                  <a:srgbClr val="1C1917"/>
+                </a:solidFill>
+                <a:latin typeface="Arial" pitchFamily="34" charset="0"/>
+                <a:ea typeface="Arial" pitchFamily="34" charset="-122"/>
+                <a:cs typeface="Arial" pitchFamily="34" charset="-120"/>
+              </a:rPr>
+              <a:t>FCFs grow 5% annually through Year 5, reaching $52.3M.</a:t>
+            </a:r>
+            <a:endParaRPr lang="en-US" sz="1500" dirty="0"/>
+          </a:p>
+          <a:p>
+            <a:pPr marL="152400" indent="-152400">
+              <a:spcAft>
+                <a:spcPts val="800"/>
+              </a:spcAft>
               <a:buSzPct val="100000"/>
               <a:buChar char="•"/>
             </a:pPr>
             <a:r>
-              <a:rPr lang="en-US" sz="1600" dirty="0">
-                <a:solidFill>
-                  <a:srgbClr val="333333"/>
-                </a:solidFill>
-              </a:rPr>
-              <a:t>Q: How do I estimate the potential synergies and cost savings of a merger or acquisition?</a:t>
-            </a:r>
-            <a:endParaRPr lang="en-US" sz="1600" dirty="0"/>
-          </a:p>
-          <a:p>
-            <a:pPr marL="342900" indent="-342900">
+              <a:rPr lang="en-US" sz="1500" dirty="0">
+                <a:solidFill>
+                  <a:srgbClr val="1C1917"/>
+                </a:solidFill>
+                <a:latin typeface="Arial" pitchFamily="34" charset="0"/>
+                <a:ea typeface="Arial" pitchFamily="34" charset="-122"/>
+                <a:cs typeface="Arial" pitchFamily="34" charset="-120"/>
+              </a:rPr>
+              <a:t>Terminal Value (Gordon Growth): $52.3M × 1.03 ÷ 0.06 = $898M.</a:t>
+            </a:r>
+            <a:endParaRPr lang="en-US" sz="1500" dirty="0"/>
+          </a:p>
+          <a:p>
+            <a:pPr marL="152400" indent="-152400">
+              <a:spcAft>
+                <a:spcPts val="800"/>
+              </a:spcAft>
               <a:buSzPct val="100000"/>
               <a:buChar char="•"/>
             </a:pPr>
             <a:r>
-              <a:rPr lang="en-US" sz="1600" dirty="0">
-                <a:solidFill>
-                  <a:srgbClr val="333333"/>
-                </a:solidFill>
-              </a:rPr>
-              <a:t>A: You can estimate the potential synergies and cost savings by analyzing the companies' financial statements, identifying areas of overlap and potential cost s</a:t>
-            </a:r>
-            <a:endParaRPr lang="en-US" sz="1600" dirty="0"/>
-          </a:p>
-          <a:p>
-            <a:pPr marL="342900" indent="-342900">
+              <a:rPr lang="en-US" sz="1500" dirty="0">
+                <a:solidFill>
+                  <a:srgbClr val="1C1917"/>
+                </a:solidFill>
+                <a:latin typeface="Arial" pitchFamily="34" charset="0"/>
+                <a:ea typeface="Arial" pitchFamily="34" charset="-122"/>
+                <a:cs typeface="Arial" pitchFamily="34" charset="-120"/>
+              </a:rPr>
+              <a:t>PV of Years 1–5 ≈ $185M; discounting terminal value at 9% anchors total valuation.</a:t>
+            </a:r>
+            <a:endParaRPr lang="en-US" sz="1500" dirty="0"/>
+          </a:p>
+          <a:p>
+            <a:pPr marL="152400" indent="-152400">
+              <a:spcAft>
+                <a:spcPts val="800"/>
+              </a:spcAft>
               <a:buSzPct val="100000"/>
               <a:buChar char="•"/>
             </a:pPr>
             <a:r>
-              <a:rPr lang="en-US" sz="1600" dirty="0">
-                <a:solidFill>
-                  <a:srgbClr val="333333"/>
-                </a:solidFill>
-              </a:rPr>
-              <a:t>Q: What are the potential risks and challenges of financial modeling?</a:t>
-            </a:r>
-            <a:endParaRPr lang="en-US" sz="1600" dirty="0"/>
-          </a:p>
-          <a:p>
-            <a:pPr marL="342900" indent="-342900">
-              <a:buSzPct val="100000"/>
-              <a:buChar char="•"/>
-            </a:pPr>
-            <a:r>
-              <a:rPr lang="en-US" sz="1600" dirty="0">
-                <a:solidFill>
-                  <a:srgbClr val="333333"/>
-                </a:solidFill>
-              </a:rPr>
-              <a:t>A: The potential risks and challenges of financial modeling include model risk, data quality issues, and the potential for incorrect assumptions or estimates. I</a:t>
-            </a:r>
-            <a:endParaRPr lang="en-US" sz="1600" dirty="0"/>
-          </a:p>
-        </p:txBody>
-      </p:sp>
-      <p:sp>
-        <p:nvSpPr>
-          <p:cNvPr id="4" name="Text 2"/>
-          <p:cNvSpPr/>
-          <p:nvPr/>
-        </p:nvSpPr>
-        <p:spPr>
-          <a:xfrm>
-            <a:off x="457200" y="4709160"/>
-            <a:ext cx="8229600" cy="320040"/>
+              <a:rPr lang="en-US" sz="1500" dirty="0">
+                <a:solidFill>
+                  <a:srgbClr val="1C1917"/>
+                </a:solidFill>
+                <a:latin typeface="Arial" pitchFamily="34" charset="0"/>
+                <a:ea typeface="Arial" pitchFamily="34" charset="-122"/>
+                <a:cs typeface="Arial" pitchFamily="34" charset="-120"/>
+              </a:rPr>
+              <a:t>Compare implied EV to $500M purchase price to assess value creation.</a:t>
+            </a:r>
+            <a:endParaRPr lang="en-US" sz="1500" dirty="0"/>
+          </a:p>
+        </p:txBody>
+      </p:sp>
+      <p:sp>
+        <p:nvSpPr>
+          <p:cNvPr id="7" name="Shape 5"/>
+          <p:cNvSpPr/>
+          <p:nvPr/>
+        </p:nvSpPr>
+        <p:spPr>
+          <a:xfrm>
+            <a:off x="731520" y="4041648"/>
+            <a:ext cx="7680960" cy="566928"/>
+          </a:xfrm>
+          <a:prstGeom prst="roundRect">
+            <a:avLst>
+              <a:gd name="adj" fmla="val 12903"/>
+            </a:avLst>
+          </a:prstGeom>
+          <a:solidFill>
+            <a:srgbClr val="B45309">
+              <a:alpha val="12000"/>
+            </a:srgbClr>
+          </a:solidFill>
+          <a:ln w="12700">
+            <a:solidFill>
+              <a:srgbClr val="B45309"/>
+            </a:solidFill>
+            <a:prstDash val="solid"/>
+          </a:ln>
+        </p:spPr>
+      </p:sp>
+      <p:sp>
+        <p:nvSpPr>
+          <p:cNvPr id="8" name="Text 6"/>
+          <p:cNvSpPr/>
+          <p:nvPr/>
+        </p:nvSpPr>
+        <p:spPr>
+          <a:xfrm>
+            <a:off x="868680" y="4087368"/>
+            <a:ext cx="7406640" cy="475488"/>
           </a:xfrm>
           <a:prstGeom prst="rect">
             <a:avLst/>
@@ -2734,14 +4739,31 @@
               <a:buNone/>
             </a:pPr>
             <a:r>
-              <a:rPr lang="en-US" sz="800" dirty="0">
-                <a:solidFill>
-                  <a:srgbClr val="AAAAAA"/>
-                </a:solidFill>
-              </a:rPr>
-              <a:t>Lesson Forge Pro (owner) — This content is educational material only and does not constitute financial, investment, or trading advice.</a:t>
-            </a:r>
-            <a:endParaRPr lang="en-US" sz="800" dirty="0"/>
+              <a:rPr lang="en-US" sz="1100" b="1" dirty="0">
+                <a:solidFill>
+                  <a:srgbClr val="B45309"/>
+                </a:solidFill>
+                <a:latin typeface="Arial" pitchFamily="34" charset="0"/>
+                <a:ea typeface="Arial" pitchFamily="34" charset="-122"/>
+                <a:cs typeface="Arial" pitchFamily="34" charset="-120"/>
+              </a:rPr>
+              <a:t>Takeaway  </a:t>
+            </a:r>
+            <a:pPr indent="0" marL="0">
+              <a:buNone/>
+            </a:pPr>
+            <a:r>
+              <a:rPr lang="en-US" sz="1150" dirty="0">
+                <a:solidFill>
+                  <a:srgbClr val="1C1917"/>
+                </a:solidFill>
+                <a:latin typeface="Arial" pitchFamily="34" charset="0"/>
+                <a:ea typeface="Arial" pitchFamily="34" charset="-122"/>
+                <a:cs typeface="Arial" pitchFamily="34" charset="-120"/>
+              </a:rPr>
+              <a:t>A five-step DCF converts operating assumptions into a concrete, comparable valuation for any acquisition target.</a:t>
+            </a:r>
+            <a:endParaRPr lang="en-US" sz="1100" dirty="0"/>
           </a:p>
         </p:txBody>
       </p:sp>
@@ -2753,9 +4775,16 @@
 </p:sld>
 </file>
 
-<file path=ppt/slides/slide2.xml><?xml version="1.0" encoding="utf-8"?>
+<file path=ppt/slides/slide14.xml><?xml version="1.0" encoding="utf-8"?>
 <p:sld xmlns:a="http://schemas.openxmlformats.org/drawingml/2006/main" xmlns:r="http://schemas.openxmlformats.org/officeDocument/2006/relationships" xmlns:p="http://schemas.openxmlformats.org/presentationml/2006/main">
-  <p:cSld name="Slide 2">
+  <p:cSld name="Slide 14">
+    <p:bg>
+      <p:bgPr>
+        <a:solidFill>
+          <a:srgbClr val="FFFFFF"/>
+        </a:solidFill>
+      </p:bgPr>
+    </p:bg>
     <p:spTree>
       <p:nvGrpSpPr>
         <p:cNvPr id="1" name=""/>
@@ -2772,14 +4801,34 @@
       </p:grpSpPr>
       <p:sp>
         <p:nvSpPr>
-          <p:cNvPr id="2" name="Text 0"/>
-          <p:cNvSpPr/>
-          <p:nvPr/>
-        </p:nvSpPr>
-        <p:spPr>
-          <a:xfrm>
-            <a:off x="457200" y="320040"/>
-            <a:ext cx="8229600" cy="731520"/>
+          <p:cNvPr id="2" name="Shape 0"/>
+          <p:cNvSpPr/>
+          <p:nvPr/>
+        </p:nvSpPr>
+        <p:spPr>
+          <a:xfrm>
+            <a:off x="411480" y="384048"/>
+            <a:ext cx="82296" cy="310896"/>
+          </a:xfrm>
+          <a:prstGeom prst="rect">
+            <a:avLst/>
+          </a:prstGeom>
+          <a:solidFill>
+            <a:srgbClr val="B45309"/>
+          </a:solidFill>
+          <a:ln/>
+        </p:spPr>
+      </p:sp>
+      <p:sp>
+        <p:nvSpPr>
+          <p:cNvPr id="3" name="Text 1"/>
+          <p:cNvSpPr/>
+          <p:nvPr/>
+        </p:nvSpPr>
+        <p:spPr>
+          <a:xfrm>
+            <a:off x="566928" y="292608"/>
+            <a:ext cx="8138160" cy="502920"/>
           </a:xfrm>
           <a:prstGeom prst="rect">
             <a:avLst/>
@@ -2795,27 +4844,30 @@
               <a:buNone/>
             </a:pPr>
             <a:r>
-              <a:rPr lang="en-US" sz="2400" b="1" dirty="0">
-                <a:solidFill>
-                  <a:srgbClr val="B45309"/>
-                </a:solidFill>
-              </a:rPr>
-              <a:t>Financial Modeling for Mergers and Acquisitions (M&amp;A) and Investment Decisions</a:t>
-            </a:r>
-            <a:endParaRPr lang="en-US" sz="2400" dirty="0"/>
-          </a:p>
-        </p:txBody>
-      </p:sp>
-      <p:sp>
-        <p:nvSpPr>
-          <p:cNvPr id="3" name="Text 1"/>
-          <p:cNvSpPr/>
-          <p:nvPr/>
-        </p:nvSpPr>
-        <p:spPr>
-          <a:xfrm>
-            <a:off x="457200" y="4709160"/>
-            <a:ext cx="8229600" cy="320040"/>
+              <a:rPr lang="en-US" sz="2000" b="1" dirty="0">
+                <a:solidFill>
+                  <a:srgbClr val="1C1917"/>
+                </a:solidFill>
+                <a:latin typeface="Arial" pitchFamily="34" charset="0"/>
+                <a:ea typeface="Arial" pitchFamily="34" charset="-122"/>
+                <a:cs typeface="Arial" pitchFamily="34" charset="-120"/>
+              </a:rPr>
+              <a:t>M&amp;A Model Output Hierarchy</a:t>
+            </a:r>
+            <a:endParaRPr lang="en-US" sz="2000" dirty="0"/>
+          </a:p>
+        </p:txBody>
+      </p:sp>
+      <p:sp>
+        <p:nvSpPr>
+          <p:cNvPr id="4" name="Text 2"/>
+          <p:cNvSpPr/>
+          <p:nvPr/>
+        </p:nvSpPr>
+        <p:spPr>
+          <a:xfrm>
+            <a:off x="566928" y="4681728"/>
+            <a:ext cx="8138160" cy="320040"/>
           </a:xfrm>
           <a:prstGeom prst="rect">
             <a:avLst/>
@@ -2831,14 +4883,456 @@
               <a:buNone/>
             </a:pPr>
             <a:r>
-              <a:rPr lang="en-US" sz="800" dirty="0">
+              <a:rPr lang="en-US" sz="1000" i="1" dirty="0">
+                <a:solidFill>
+                  <a:srgbClr val="78716C"/>
+                </a:solidFill>
+                <a:latin typeface="Arial" pitchFamily="34" charset="0"/>
+                <a:ea typeface="Arial" pitchFamily="34" charset="-122"/>
+                <a:cs typeface="Arial" pitchFamily="34" charset="-120"/>
+              </a:rPr>
+              <a:t>Higher tiers depend on accuracy of lower-tier inputs; errors cascade upward</a:t>
+            </a:r>
+            <a:endParaRPr lang="en-US" sz="1000" dirty="0"/>
+          </a:p>
+        </p:txBody>
+      </p:sp>
+      <p:sp>
+        <p:nvSpPr>
+          <p:cNvPr id="5" name="Text 3"/>
+          <p:cNvSpPr/>
+          <p:nvPr/>
+        </p:nvSpPr>
+        <p:spPr>
+          <a:xfrm>
+            <a:off x="411480" y="4919472"/>
+            <a:ext cx="8321040" cy="219456"/>
+          </a:xfrm>
+          <a:prstGeom prst="rect">
+            <a:avLst/>
+          </a:prstGeom>
+          <a:noFill/>
+          <a:ln/>
+        </p:spPr>
+        <p:txBody>
+          <a:bodyPr wrap="square" rtlCol="0" anchor="ctr"/>
+          <a:lstStyle/>
+          <a:p>
+            <a:pPr indent="0" marL="0">
+              <a:buNone/>
+            </a:pPr>
+            <a:r>
+              <a:rPr lang="en-US" sz="750" dirty="0">
                 <a:solidFill>
                   <a:srgbClr val="AAAAAA"/>
                 </a:solidFill>
+                <a:latin typeface="Arial" pitchFamily="34" charset="0"/>
+                <a:ea typeface="Arial" pitchFamily="34" charset="-122"/>
+                <a:cs typeface="Arial" pitchFamily="34" charset="-120"/>
               </a:rPr>
               <a:t>Lesson Forge Pro (owner) — This content is educational material only and does not constitute financial, investment, or trading advice.</a:t>
             </a:r>
-            <a:endParaRPr lang="en-US" sz="800" dirty="0"/>
+            <a:endParaRPr lang="en-US" sz="750" dirty="0"/>
+          </a:p>
+        </p:txBody>
+      </p:sp>
+      <p:sp>
+        <p:nvSpPr>
+          <p:cNvPr id="6" name="Shape 4"/>
+          <p:cNvSpPr/>
+          <p:nvPr/>
+        </p:nvSpPr>
+        <p:spPr>
+          <a:xfrm flipV="1">
+            <a:off x="1988820" y="1234440"/>
+            <a:ext cx="2240280" cy="713232"/>
+          </a:xfrm>
+          <a:prstGeom prst="trapezoid">
+            <a:avLst/>
+          </a:prstGeom>
+          <a:solidFill>
+            <a:srgbClr val="B45309">
+              <a:alpha val="40000"/>
+            </a:srgbClr>
+          </a:solidFill>
+          <a:ln/>
+        </p:spPr>
+      </p:sp>
+      <p:sp>
+        <p:nvSpPr>
+          <p:cNvPr id="7" name="Text 5"/>
+          <p:cNvSpPr/>
+          <p:nvPr/>
+        </p:nvSpPr>
+        <p:spPr>
+          <a:xfrm>
+            <a:off x="1988820" y="1289304"/>
+            <a:ext cx="2240280" cy="621792"/>
+          </a:xfrm>
+          <a:prstGeom prst="rect">
+            <a:avLst/>
+          </a:prstGeom>
+          <a:noFill/>
+          <a:ln/>
+        </p:spPr>
+        <p:txBody>
+          <a:bodyPr wrap="square" rtlCol="0" anchor="ctr"/>
+          <a:lstStyle/>
+          <a:p>
+            <a:pPr algn="ctr" indent="0" marL="0">
+              <a:buNone/>
+            </a:pPr>
+            <a:r>
+              <a:rPr lang="en-US" sz="1200" b="1" dirty="0">
+                <a:solidFill>
+                  <a:srgbClr val="FFFFFF"/>
+                </a:solidFill>
+                <a:latin typeface="Arial" pitchFamily="34" charset="0"/>
+                <a:ea typeface="Arial" pitchFamily="34" charset="-122"/>
+                <a:cs typeface="Arial" pitchFamily="34" charset="-120"/>
+              </a:rPr>
+              <a:t>Accretion / Dilution</a:t>
+            </a:r>
+            <a:endParaRPr lang="en-US" sz="1200" dirty="0"/>
+          </a:p>
+        </p:txBody>
+      </p:sp>
+      <p:sp>
+        <p:nvSpPr>
+          <p:cNvPr id="8" name="Text 6"/>
+          <p:cNvSpPr/>
+          <p:nvPr/>
+        </p:nvSpPr>
+        <p:spPr>
+          <a:xfrm>
+            <a:off x="5760720" y="1444752"/>
+            <a:ext cx="2926080" cy="310896"/>
+          </a:xfrm>
+          <a:prstGeom prst="rect">
+            <a:avLst/>
+          </a:prstGeom>
+          <a:noFill/>
+          <a:ln/>
+        </p:spPr>
+        <p:txBody>
+          <a:bodyPr wrap="square" rtlCol="0" anchor="ctr"/>
+          <a:lstStyle/>
+          <a:p>
+            <a:pPr indent="0" marL="0">
+              <a:buNone/>
+            </a:pPr>
+            <a:r>
+              <a:rPr lang="en-US" sz="1000" dirty="0">
+                <a:solidFill>
+                  <a:srgbClr val="78716C"/>
+                </a:solidFill>
+                <a:latin typeface="Arial" pitchFamily="34" charset="0"/>
+                <a:ea typeface="Arial" pitchFamily="34" charset="-122"/>
+                <a:cs typeface="Arial" pitchFamily="34" charset="-120"/>
+              </a:rPr>
+              <a:t>Ultimate EPS impact test for any deal</a:t>
+            </a:r>
+            <a:endParaRPr lang="en-US" sz="1000" dirty="0"/>
+          </a:p>
+        </p:txBody>
+      </p:sp>
+      <p:sp>
+        <p:nvSpPr>
+          <p:cNvPr id="9" name="Shape 7"/>
+          <p:cNvSpPr/>
+          <p:nvPr/>
+        </p:nvSpPr>
+        <p:spPr>
+          <a:xfrm flipV="1">
+            <a:off x="1508760" y="2039112"/>
+            <a:ext cx="3200400" cy="713232"/>
+          </a:xfrm>
+          <a:prstGeom prst="trapezoid">
+            <a:avLst/>
+          </a:prstGeom>
+          <a:solidFill>
+            <a:srgbClr val="B45309">
+              <a:alpha val="58000"/>
+            </a:srgbClr>
+          </a:solidFill>
+          <a:ln/>
+        </p:spPr>
+      </p:sp>
+      <p:sp>
+        <p:nvSpPr>
+          <p:cNvPr id="10" name="Text 8"/>
+          <p:cNvSpPr/>
+          <p:nvPr/>
+        </p:nvSpPr>
+        <p:spPr>
+          <a:xfrm>
+            <a:off x="1508760" y="2093976"/>
+            <a:ext cx="3200400" cy="621792"/>
+          </a:xfrm>
+          <a:prstGeom prst="rect">
+            <a:avLst/>
+          </a:prstGeom>
+          <a:noFill/>
+          <a:ln/>
+        </p:spPr>
+        <p:txBody>
+          <a:bodyPr wrap="square" rtlCol="0" anchor="ctr"/>
+          <a:lstStyle/>
+          <a:p>
+            <a:pPr algn="ctr" indent="0" marL="0">
+              <a:buNone/>
+            </a:pPr>
+            <a:r>
+              <a:rPr lang="en-US" sz="1200" b="1" dirty="0">
+                <a:solidFill>
+                  <a:srgbClr val="FFFFFF"/>
+                </a:solidFill>
+                <a:latin typeface="Arial" pitchFamily="34" charset="0"/>
+                <a:ea typeface="Arial" pitchFamily="34" charset="-122"/>
+                <a:cs typeface="Arial" pitchFamily="34" charset="-120"/>
+              </a:rPr>
+              <a:t>Intrinsic Value (DCF)</a:t>
+            </a:r>
+            <a:endParaRPr lang="en-US" sz="1200" dirty="0"/>
+          </a:p>
+        </p:txBody>
+      </p:sp>
+      <p:sp>
+        <p:nvSpPr>
+          <p:cNvPr id="11" name="Text 9"/>
+          <p:cNvSpPr/>
+          <p:nvPr/>
+        </p:nvSpPr>
+        <p:spPr>
+          <a:xfrm>
+            <a:off x="5760720" y="2249424"/>
+            <a:ext cx="2926080" cy="310896"/>
+          </a:xfrm>
+          <a:prstGeom prst="rect">
+            <a:avLst/>
+          </a:prstGeom>
+          <a:noFill/>
+          <a:ln/>
+        </p:spPr>
+        <p:txBody>
+          <a:bodyPr wrap="square" rtlCol="0" anchor="ctr"/>
+          <a:lstStyle/>
+          <a:p>
+            <a:pPr indent="0" marL="0">
+              <a:buNone/>
+            </a:pPr>
+            <a:r>
+              <a:rPr lang="en-US" sz="1000" dirty="0">
+                <a:solidFill>
+                  <a:srgbClr val="78716C"/>
+                </a:solidFill>
+                <a:latin typeface="Arial" pitchFamily="34" charset="0"/>
+                <a:ea typeface="Arial" pitchFamily="34" charset="-122"/>
+                <a:cs typeface="Arial" pitchFamily="34" charset="-120"/>
+              </a:rPr>
+              <a:t>PV of FCF discounted at 9% WACC</a:t>
+            </a:r>
+            <a:endParaRPr lang="en-US" sz="1000" dirty="0"/>
+          </a:p>
+        </p:txBody>
+      </p:sp>
+      <p:sp>
+        <p:nvSpPr>
+          <p:cNvPr id="12" name="Shape 10"/>
+          <p:cNvSpPr/>
+          <p:nvPr/>
+        </p:nvSpPr>
+        <p:spPr>
+          <a:xfrm flipV="1">
+            <a:off x="1028700" y="2843784"/>
+            <a:ext cx="4160520" cy="713232"/>
+          </a:xfrm>
+          <a:prstGeom prst="trapezoid">
+            <a:avLst/>
+          </a:prstGeom>
+          <a:solidFill>
+            <a:srgbClr val="B45309">
+              <a:alpha val="77000"/>
+            </a:srgbClr>
+          </a:solidFill>
+          <a:ln/>
+        </p:spPr>
+      </p:sp>
+      <p:sp>
+        <p:nvSpPr>
+          <p:cNvPr id="13" name="Text 11"/>
+          <p:cNvSpPr/>
+          <p:nvPr/>
+        </p:nvSpPr>
+        <p:spPr>
+          <a:xfrm>
+            <a:off x="1028700" y="2898648"/>
+            <a:ext cx="4160520" cy="621792"/>
+          </a:xfrm>
+          <a:prstGeom prst="rect">
+            <a:avLst/>
+          </a:prstGeom>
+          <a:noFill/>
+          <a:ln/>
+        </p:spPr>
+        <p:txBody>
+          <a:bodyPr wrap="square" rtlCol="0" anchor="ctr"/>
+          <a:lstStyle/>
+          <a:p>
+            <a:pPr algn="ctr" indent="0" marL="0">
+              <a:buNone/>
+            </a:pPr>
+            <a:r>
+              <a:rPr lang="en-US" sz="1200" b="1" dirty="0">
+                <a:solidFill>
+                  <a:srgbClr val="FFFFFF"/>
+                </a:solidFill>
+                <a:latin typeface="Arial" pitchFamily="34" charset="0"/>
+                <a:ea typeface="Arial" pitchFamily="34" charset="-122"/>
+                <a:cs typeface="Arial" pitchFamily="34" charset="-120"/>
+              </a:rPr>
+              <a:t>Valuation Multiples</a:t>
+            </a:r>
+            <a:endParaRPr lang="en-US" sz="1200" dirty="0"/>
+          </a:p>
+        </p:txBody>
+      </p:sp>
+      <p:sp>
+        <p:nvSpPr>
+          <p:cNvPr id="14" name="Text 12"/>
+          <p:cNvSpPr/>
+          <p:nvPr/>
+        </p:nvSpPr>
+        <p:spPr>
+          <a:xfrm>
+            <a:off x="5760720" y="3054096"/>
+            <a:ext cx="2926080" cy="310896"/>
+          </a:xfrm>
+          <a:prstGeom prst="rect">
+            <a:avLst/>
+          </a:prstGeom>
+          <a:noFill/>
+          <a:ln/>
+        </p:spPr>
+        <p:txBody>
+          <a:bodyPr wrap="square" rtlCol="0" anchor="ctr"/>
+          <a:lstStyle/>
+          <a:p>
+            <a:pPr indent="0" marL="0">
+              <a:buNone/>
+            </a:pPr>
+            <a:r>
+              <a:rPr lang="en-US" sz="1000" dirty="0">
+                <a:solidFill>
+                  <a:srgbClr val="78716C"/>
+                </a:solidFill>
+                <a:latin typeface="Arial" pitchFamily="34" charset="0"/>
+                <a:ea typeface="Arial" pitchFamily="34" charset="-122"/>
+                <a:cs typeface="Arial" pitchFamily="34" charset="-120"/>
+              </a:rPr>
+              <a:t>EV/EBITDA benchmarked to peer comps</a:t>
+            </a:r>
+            <a:endParaRPr lang="en-US" sz="1000" dirty="0"/>
+          </a:p>
+        </p:txBody>
+      </p:sp>
+      <p:sp>
+        <p:nvSpPr>
+          <p:cNvPr id="15" name="Shape 13"/>
+          <p:cNvSpPr/>
+          <p:nvPr/>
+        </p:nvSpPr>
+        <p:spPr>
+          <a:xfrm flipV="1">
+            <a:off x="548640" y="3648456"/>
+            <a:ext cx="5120640" cy="713232"/>
+          </a:xfrm>
+          <a:prstGeom prst="trapezoid">
+            <a:avLst/>
+          </a:prstGeom>
+          <a:solidFill>
+            <a:srgbClr val="B45309">
+              <a:alpha val="95000"/>
+            </a:srgbClr>
+          </a:solidFill>
+          <a:ln/>
+        </p:spPr>
+      </p:sp>
+      <p:sp>
+        <p:nvSpPr>
+          <p:cNvPr id="16" name="Text 14"/>
+          <p:cNvSpPr/>
+          <p:nvPr/>
+        </p:nvSpPr>
+        <p:spPr>
+          <a:xfrm>
+            <a:off x="548640" y="3703320"/>
+            <a:ext cx="5120640" cy="621792"/>
+          </a:xfrm>
+          <a:prstGeom prst="rect">
+            <a:avLst/>
+          </a:prstGeom>
+          <a:noFill/>
+          <a:ln/>
+        </p:spPr>
+        <p:txBody>
+          <a:bodyPr wrap="square" rtlCol="0" anchor="ctr"/>
+          <a:lstStyle/>
+          <a:p>
+            <a:pPr algn="ctr" indent="0" marL="0">
+              <a:buNone/>
+            </a:pPr>
+            <a:r>
+              <a:rPr lang="en-US" sz="1200" b="1" dirty="0">
+                <a:solidFill>
+                  <a:srgbClr val="FFFFFF"/>
+                </a:solidFill>
+                <a:latin typeface="Arial" pitchFamily="34" charset="0"/>
+                <a:ea typeface="Arial" pitchFamily="34" charset="-122"/>
+                <a:cs typeface="Arial" pitchFamily="34" charset="-120"/>
+              </a:rPr>
+              <a:t>Synergy Estimates</a:t>
+            </a:r>
+            <a:endParaRPr lang="en-US" sz="1200" dirty="0"/>
+          </a:p>
+        </p:txBody>
+      </p:sp>
+      <p:sp>
+        <p:nvSpPr>
+          <p:cNvPr id="17" name="Text 15"/>
+          <p:cNvSpPr/>
+          <p:nvPr/>
+        </p:nvSpPr>
+        <p:spPr>
+          <a:xfrm>
+            <a:off x="5760720" y="3858768"/>
+            <a:ext cx="2926080" cy="310896"/>
+          </a:xfrm>
+          <a:prstGeom prst="rect">
+            <a:avLst/>
+          </a:prstGeom>
+          <a:noFill/>
+          <a:ln/>
+        </p:spPr>
+        <p:txBody>
+          <a:bodyPr wrap="square" rtlCol="0" anchor="ctr"/>
+          <a:lstStyle/>
+          <a:p>
+            <a:pPr indent="0" marL="0">
+              <a:buNone/>
+            </a:pPr>
+            <a:r>
+              <a:rPr lang="en-US" sz="1000" dirty="0">
+                <a:solidFill>
+                  <a:srgbClr val="78716C"/>
+                </a:solidFill>
+                <a:latin typeface="Arial" pitchFamily="34" charset="0"/>
+                <a:ea typeface="Arial" pitchFamily="34" charset="-122"/>
+                <a:cs typeface="Arial" pitchFamily="34" charset="-120"/>
+              </a:rPr>
+              <a:t>Revenue and cost synergies quantified</a:t>
+            </a:r>
+            <a:endParaRPr lang="en-US" sz="1000" dirty="0"/>
           </a:p>
         </p:txBody>
       </p:sp>
@@ -2850,9 +5344,16 @@
 </p:sld>
 </file>
 
-<file path=ppt/slides/slide3.xml><?xml version="1.0" encoding="utf-8"?>
+<file path=ppt/slides/slide15.xml><?xml version="1.0" encoding="utf-8"?>
 <p:sld xmlns:a="http://schemas.openxmlformats.org/drawingml/2006/main" xmlns:r="http://schemas.openxmlformats.org/officeDocument/2006/relationships" xmlns:p="http://schemas.openxmlformats.org/presentationml/2006/main">
-  <p:cSld name="Slide 3">
+  <p:cSld name="Slide 15">
+    <p:bg>
+      <p:bgPr>
+        <a:solidFill>
+          <a:srgbClr val="FFFFFF"/>
+        </a:solidFill>
+      </p:bgPr>
+    </p:bg>
     <p:spTree>
       <p:nvGrpSpPr>
         <p:cNvPr id="1" name=""/>
@@ -2869,14 +5370,34 @@
       </p:grpSpPr>
       <p:sp>
         <p:nvSpPr>
-          <p:cNvPr id="2" name="Text 0"/>
-          <p:cNvSpPr/>
-          <p:nvPr/>
-        </p:nvSpPr>
-        <p:spPr>
-          <a:xfrm>
-            <a:off x="457200" y="320040"/>
-            <a:ext cx="8229600" cy="731520"/>
+          <p:cNvPr id="2" name="Shape 0"/>
+          <p:cNvSpPr/>
+          <p:nvPr/>
+        </p:nvSpPr>
+        <p:spPr>
+          <a:xfrm>
+            <a:off x="411480" y="402336"/>
+            <a:ext cx="82296" cy="329184"/>
+          </a:xfrm>
+          <a:prstGeom prst="rect">
+            <a:avLst/>
+          </a:prstGeom>
+          <a:solidFill>
+            <a:srgbClr val="B45309"/>
+          </a:solidFill>
+          <a:ln/>
+        </p:spPr>
+      </p:sp>
+      <p:sp>
+        <p:nvSpPr>
+          <p:cNvPr id="3" name="Text 1"/>
+          <p:cNvSpPr/>
+          <p:nvPr/>
+        </p:nvSpPr>
+        <p:spPr>
+          <a:xfrm>
+            <a:off x="566928" y="292608"/>
+            <a:ext cx="8138160" cy="548640"/>
           </a:xfrm>
           <a:prstGeom prst="rect">
             <a:avLst/>
@@ -2892,27 +5413,92 @@
               <a:buNone/>
             </a:pPr>
             <a:r>
-              <a:rPr lang="en-US" sz="2400" b="1" dirty="0">
-                <a:solidFill>
-                  <a:srgbClr val="B45309"/>
-                </a:solidFill>
-              </a:rPr>
-              <a:t>Session Overview</a:t>
-            </a:r>
-            <a:endParaRPr lang="en-US" sz="2400" dirty="0"/>
-          </a:p>
-        </p:txBody>
-      </p:sp>
-      <p:sp>
-        <p:nvSpPr>
-          <p:cNvPr id="3" name="Text 1"/>
-          <p:cNvSpPr/>
-          <p:nvPr/>
-        </p:nvSpPr>
-        <p:spPr>
-          <a:xfrm>
-            <a:off x="640080" y="1188720"/>
-            <a:ext cx="7863840" cy="3291840"/>
+              <a:rPr lang="en-US" sz="2100" b="1" dirty="0">
+                <a:solidFill>
+                  <a:srgbClr val="1C1917"/>
+                </a:solidFill>
+                <a:latin typeface="Arial" pitchFamily="34" charset="0"/>
+                <a:ea typeface="Arial" pitchFamily="34" charset="-122"/>
+                <a:cs typeface="Arial" pitchFamily="34" charset="-120"/>
+              </a:rPr>
+              <a:t>Outputs and Checks</a:t>
+            </a:r>
+            <a:endParaRPr lang="en-US" sz="2100" dirty="0"/>
+          </a:p>
+        </p:txBody>
+      </p:sp>
+      <p:sp>
+        <p:nvSpPr>
+          <p:cNvPr id="4" name="Shape 2"/>
+          <p:cNvSpPr/>
+          <p:nvPr/>
+        </p:nvSpPr>
+        <p:spPr>
+          <a:xfrm>
+            <a:off x="411480" y="960120"/>
+            <a:ext cx="8321040" cy="0"/>
+          </a:xfrm>
+          <a:prstGeom prst="line">
+            <a:avLst/>
+          </a:prstGeom>
+          <a:noFill/>
+          <a:ln w="12700">
+            <a:solidFill>
+              <a:srgbClr val="E7E5E4"/>
+            </a:solidFill>
+            <a:prstDash val="solid"/>
+          </a:ln>
+        </p:spPr>
+      </p:sp>
+      <p:sp>
+        <p:nvSpPr>
+          <p:cNvPr id="5" name="Text 3"/>
+          <p:cNvSpPr/>
+          <p:nvPr/>
+        </p:nvSpPr>
+        <p:spPr>
+          <a:xfrm>
+            <a:off x="411480" y="4864608"/>
+            <a:ext cx="8321040" cy="237744"/>
+          </a:xfrm>
+          <a:prstGeom prst="rect">
+            <a:avLst/>
+          </a:prstGeom>
+          <a:noFill/>
+          <a:ln/>
+        </p:spPr>
+        <p:txBody>
+          <a:bodyPr wrap="square" rtlCol="0" anchor="ctr"/>
+          <a:lstStyle/>
+          <a:p>
+            <a:pPr indent="0" marL="0">
+              <a:buNone/>
+            </a:pPr>
+            <a:r>
+              <a:rPr lang="en-US" sz="750" dirty="0">
+                <a:solidFill>
+                  <a:srgbClr val="AAAAAA"/>
+                </a:solidFill>
+                <a:latin typeface="Arial" pitchFamily="34" charset="0"/>
+                <a:ea typeface="Arial" pitchFamily="34" charset="-122"/>
+                <a:cs typeface="Arial" pitchFamily="34" charset="-120"/>
+              </a:rPr>
+              <a:t>Lesson Forge Pro (owner) — This content is educational material only and does not constitute financial, investment, or trading advice.</a:t>
+            </a:r>
+            <a:endParaRPr lang="en-US" sz="750" dirty="0"/>
+          </a:p>
+        </p:txBody>
+      </p:sp>
+      <p:sp>
+        <p:nvSpPr>
+          <p:cNvPr id="6" name="Text 4"/>
+          <p:cNvSpPr/>
+          <p:nvPr/>
+        </p:nvSpPr>
+        <p:spPr>
+          <a:xfrm>
+            <a:off x="731520" y="1188720"/>
+            <a:ext cx="7680960" cy="2743200"/>
           </a:xfrm>
           <a:prstGeom prst="rect">
             <a:avLst/>
@@ -2924,32 +5510,151 @@
           <a:bodyPr wrap="square" rtlCol="0" anchor="t"/>
           <a:lstStyle/>
           <a:p>
-            <a:pPr marL="342900" indent="-342900">
+            <a:pPr marL="152400" indent="-152400">
+              <a:spcAft>
+                <a:spcPts val="800"/>
+              </a:spcAft>
               <a:buSzPct val="100000"/>
               <a:buChar char="•"/>
             </a:pPr>
             <a:r>
-              <a:rPr lang="en-US" sz="1600" dirty="0">
-                <a:solidFill>
-                  <a:srgbClr val="333333"/>
-                </a:solidFill>
-              </a:rPr>
-              <a:t>In this 120-minute session, we will explore the application of financial modeling techniques to evaluate Mergers and Acquisitions (M&amp;A) opportunities and analyz</a:t>
-            </a:r>
-            <a:endParaRPr lang="en-US" sz="1600" dirty="0"/>
-          </a:p>
-        </p:txBody>
-      </p:sp>
-      <p:sp>
-        <p:nvSpPr>
-          <p:cNvPr id="4" name="Text 2"/>
-          <p:cNvSpPr/>
-          <p:nvPr/>
-        </p:nvSpPr>
-        <p:spPr>
-          <a:xfrm>
-            <a:off x="457200" y="4709160"/>
-            <a:ext cx="8229600" cy="320040"/>
+              <a:rPr lang="en-US" sz="1500" dirty="0">
+                <a:solidFill>
+                  <a:srgbClr val="1C1917"/>
+                </a:solidFill>
+                <a:latin typeface="Arial" pitchFamily="34" charset="0"/>
+                <a:ea typeface="Arial" pitchFamily="34" charset="-122"/>
+                <a:cs typeface="Arial" pitchFamily="34" charset="-120"/>
+              </a:rPr>
+              <a:t>Deliver a pro-forma three-statement model, DCF summary, accretion/dilution table, and sensitivity matrix.</a:t>
+            </a:r>
+            <a:endParaRPr lang="en-US" sz="1500" dirty="0"/>
+          </a:p>
+          <a:p>
+            <a:pPr marL="152400" indent="-152400">
+              <a:spcAft>
+                <a:spcPts val="800"/>
+              </a:spcAft>
+              <a:buSzPct val="100000"/>
+              <a:buChar char="•"/>
+            </a:pPr>
+            <a:r>
+              <a:rPr lang="en-US" sz="1500" dirty="0">
+                <a:solidFill>
+                  <a:srgbClr val="1C1917"/>
+                </a:solidFill>
+                <a:latin typeface="Arial" pitchFamily="34" charset="0"/>
+                <a:ea typeface="Arial" pitchFamily="34" charset="-122"/>
+                <a:cs typeface="Arial" pitchFamily="34" charset="-120"/>
+              </a:rPr>
+              <a:t>Balance sheet must balance—assets equal liabilities plus equity every period.</a:t>
+            </a:r>
+            <a:endParaRPr lang="en-US" sz="1500" dirty="0"/>
+          </a:p>
+          <a:p>
+            <a:pPr marL="152400" indent="-152400">
+              <a:spcAft>
+                <a:spcPts val="800"/>
+              </a:spcAft>
+              <a:buSzPct val="100000"/>
+              <a:buChar char="•"/>
+            </a:pPr>
+            <a:r>
+              <a:rPr lang="en-US" sz="1500" dirty="0">
+                <a:solidFill>
+                  <a:srgbClr val="1C1917"/>
+                </a:solidFill>
+                <a:latin typeface="Arial" pitchFamily="34" charset="0"/>
+                <a:ea typeface="Arial" pitchFamily="34" charset="-122"/>
+                <a:cs typeface="Arial" pitchFamily="34" charset="-120"/>
+              </a:rPr>
+              <a:t>Implied EV/EBITDA must fall within comparable transaction ranges.</a:t>
+            </a:r>
+            <a:endParaRPr lang="en-US" sz="1500" dirty="0"/>
+          </a:p>
+          <a:p>
+            <a:pPr marL="152400" indent="-152400">
+              <a:spcAft>
+                <a:spcPts val="800"/>
+              </a:spcAft>
+              <a:buSzPct val="100000"/>
+              <a:buChar char="•"/>
+            </a:pPr>
+            <a:r>
+              <a:rPr lang="en-US" sz="1500" dirty="0">
+                <a:solidFill>
+                  <a:srgbClr val="1C1917"/>
+                </a:solidFill>
+                <a:latin typeface="Arial" pitchFamily="34" charset="0"/>
+                <a:ea typeface="Arial" pitchFamily="34" charset="-122"/>
+                <a:cs typeface="Arial" pitchFamily="34" charset="-120"/>
+              </a:rPr>
+              <a:t>A 1% WACC shift that destroys deal value must be flagged explicitly.</a:t>
+            </a:r>
+            <a:endParaRPr lang="en-US" sz="1500" dirty="0"/>
+          </a:p>
+          <a:p>
+            <a:pPr marL="152400" indent="-152400">
+              <a:spcAft>
+                <a:spcPts val="800"/>
+              </a:spcAft>
+              <a:buSzPct val="100000"/>
+              <a:buChar char="•"/>
+            </a:pPr>
+            <a:r>
+              <a:rPr lang="en-US" sz="1500" dirty="0">
+                <a:solidFill>
+                  <a:srgbClr val="1C1917"/>
+                </a:solidFill>
+                <a:latin typeface="Arial" pitchFamily="34" charset="0"/>
+                <a:ea typeface="Arial" pitchFamily="34" charset="-122"/>
+                <a:cs typeface="Arial" pitchFamily="34" charset="-120"/>
+              </a:rPr>
+              <a:t>Never apply synergies at full run-rate in Year 1—phase them over two to three years.</a:t>
+            </a:r>
+            <a:endParaRPr lang="en-US" sz="1500" dirty="0"/>
+          </a:p>
+        </p:txBody>
+      </p:sp>
+      <p:sp>
+        <p:nvSpPr>
+          <p:cNvPr id="7" name="Shape 5"/>
+          <p:cNvSpPr/>
+          <p:nvPr/>
+        </p:nvSpPr>
+        <p:spPr>
+          <a:xfrm>
+            <a:off x="731520" y="4041648"/>
+            <a:ext cx="7680960" cy="566928"/>
+          </a:xfrm>
+          <a:prstGeom prst="roundRect">
+            <a:avLst>
+              <a:gd name="adj" fmla="val 12903"/>
+            </a:avLst>
+          </a:prstGeom>
+          <a:solidFill>
+            <a:srgbClr val="B45309">
+              <a:alpha val="12000"/>
+            </a:srgbClr>
+          </a:solidFill>
+          <a:ln w="12700">
+            <a:solidFill>
+              <a:srgbClr val="B45309"/>
+            </a:solidFill>
+            <a:prstDash val="solid"/>
+          </a:ln>
+        </p:spPr>
+      </p:sp>
+      <p:sp>
+        <p:nvSpPr>
+          <p:cNvPr id="8" name="Text 6"/>
+          <p:cNvSpPr/>
+          <p:nvPr/>
+        </p:nvSpPr>
+        <p:spPr>
+          <a:xfrm>
+            <a:off x="868680" y="4087368"/>
+            <a:ext cx="7406640" cy="475488"/>
           </a:xfrm>
           <a:prstGeom prst="rect">
             <a:avLst/>
@@ -2965,14 +5670,31 @@
               <a:buNone/>
             </a:pPr>
             <a:r>
-              <a:rPr lang="en-US" sz="800" dirty="0">
-                <a:solidFill>
-                  <a:srgbClr val="AAAAAA"/>
-                </a:solidFill>
-              </a:rPr>
-              <a:t>Lesson Forge Pro (owner) — This content is educational material only and does not constitute financial, investment, or trading advice.</a:t>
-            </a:r>
-            <a:endParaRPr lang="en-US" sz="800" dirty="0"/>
+              <a:rPr lang="en-US" sz="1100" b="1" dirty="0">
+                <a:solidFill>
+                  <a:srgbClr val="B45309"/>
+                </a:solidFill>
+                <a:latin typeface="Arial" pitchFamily="34" charset="0"/>
+                <a:ea typeface="Arial" pitchFamily="34" charset="-122"/>
+                <a:cs typeface="Arial" pitchFamily="34" charset="-120"/>
+              </a:rPr>
+              <a:t>Takeaway  </a:t>
+            </a:r>
+            <a:pPr indent="0" marL="0">
+              <a:buNone/>
+            </a:pPr>
+            <a:r>
+              <a:rPr lang="en-US" sz="1150" dirty="0">
+                <a:solidFill>
+                  <a:srgbClr val="1C1917"/>
+                </a:solidFill>
+                <a:latin typeface="Arial" pitchFamily="34" charset="0"/>
+                <a:ea typeface="Arial" pitchFamily="34" charset="-122"/>
+                <a:cs typeface="Arial" pitchFamily="34" charset="-120"/>
+              </a:rPr>
+              <a:t>Rigorous output checks and honest synergy phasing are what keep a model from misleading decision-makers.</a:t>
+            </a:r>
+            <a:endParaRPr lang="en-US" sz="1100" dirty="0"/>
           </a:p>
         </p:txBody>
       </p:sp>
@@ -2984,9 +5706,16 @@
 </p:sld>
 </file>
 
-<file path=ppt/slides/slide4.xml><?xml version="1.0" encoding="utf-8"?>
+<file path=ppt/slides/slide16.xml><?xml version="1.0" encoding="utf-8"?>
 <p:sld xmlns:a="http://schemas.openxmlformats.org/drawingml/2006/main" xmlns:r="http://schemas.openxmlformats.org/officeDocument/2006/relationships" xmlns:p="http://schemas.openxmlformats.org/presentationml/2006/main">
-  <p:cSld name="Slide 4">
+  <p:cSld name="Slide 16">
+    <p:bg>
+      <p:bgPr>
+        <a:solidFill>
+          <a:srgbClr val="FFFFFF"/>
+        </a:solidFill>
+      </p:bgPr>
+    </p:bg>
     <p:spTree>
       <p:nvGrpSpPr>
         <p:cNvPr id="1" name=""/>
@@ -3003,14 +5732,34 @@
       </p:grpSpPr>
       <p:sp>
         <p:nvSpPr>
-          <p:cNvPr id="2" name="Text 0"/>
-          <p:cNvSpPr/>
-          <p:nvPr/>
-        </p:nvSpPr>
-        <p:spPr>
-          <a:xfrm>
-            <a:off x="457200" y="320040"/>
-            <a:ext cx="8229600" cy="731520"/>
+          <p:cNvPr id="2" name="Shape 0"/>
+          <p:cNvSpPr/>
+          <p:nvPr/>
+        </p:nvSpPr>
+        <p:spPr>
+          <a:xfrm>
+            <a:off x="411480" y="402336"/>
+            <a:ext cx="82296" cy="329184"/>
+          </a:xfrm>
+          <a:prstGeom prst="rect">
+            <a:avLst/>
+          </a:prstGeom>
+          <a:solidFill>
+            <a:srgbClr val="B45309"/>
+          </a:solidFill>
+          <a:ln/>
+        </p:spPr>
+      </p:sp>
+      <p:sp>
+        <p:nvSpPr>
+          <p:cNvPr id="3" name="Text 1"/>
+          <p:cNvSpPr/>
+          <p:nvPr/>
+        </p:nvSpPr>
+        <p:spPr>
+          <a:xfrm>
+            <a:off x="566928" y="292608"/>
+            <a:ext cx="8138160" cy="548640"/>
           </a:xfrm>
           <a:prstGeom prst="rect">
             <a:avLst/>
@@ -3026,27 +5775,92 @@
               <a:buNone/>
             </a:pPr>
             <a:r>
-              <a:rPr lang="en-US" sz="2400" b="1" dirty="0">
-                <a:solidFill>
-                  <a:srgbClr val="B45309"/>
-                </a:solidFill>
-              </a:rPr>
-              <a:t>Timed Agenda</a:t>
-            </a:r>
-            <a:endParaRPr lang="en-US" sz="2400" dirty="0"/>
-          </a:p>
-        </p:txBody>
-      </p:sp>
-      <p:sp>
-        <p:nvSpPr>
-          <p:cNvPr id="3" name="Text 1"/>
-          <p:cNvSpPr/>
-          <p:nvPr/>
-        </p:nvSpPr>
-        <p:spPr>
-          <a:xfrm>
-            <a:off x="640080" y="1188720"/>
-            <a:ext cx="7863840" cy="3291840"/>
+              <a:rPr lang="en-US" sz="2100" b="1" dirty="0">
+                <a:solidFill>
+                  <a:srgbClr val="1C1917"/>
+                </a:solidFill>
+                <a:latin typeface="Arial" pitchFamily="34" charset="0"/>
+                <a:ea typeface="Arial" pitchFamily="34" charset="-122"/>
+                <a:cs typeface="Arial" pitchFamily="34" charset="-120"/>
+              </a:rPr>
+              <a:t>Applications and Pitfalls</a:t>
+            </a:r>
+            <a:endParaRPr lang="en-US" sz="2100" dirty="0"/>
+          </a:p>
+        </p:txBody>
+      </p:sp>
+      <p:sp>
+        <p:nvSpPr>
+          <p:cNvPr id="4" name="Shape 2"/>
+          <p:cNvSpPr/>
+          <p:nvPr/>
+        </p:nvSpPr>
+        <p:spPr>
+          <a:xfrm>
+            <a:off x="411480" y="960120"/>
+            <a:ext cx="8321040" cy="0"/>
+          </a:xfrm>
+          <a:prstGeom prst="line">
+            <a:avLst/>
+          </a:prstGeom>
+          <a:noFill/>
+          <a:ln w="12700">
+            <a:solidFill>
+              <a:srgbClr val="E7E5E4"/>
+            </a:solidFill>
+            <a:prstDash val="solid"/>
+          </a:ln>
+        </p:spPr>
+      </p:sp>
+      <p:sp>
+        <p:nvSpPr>
+          <p:cNvPr id="5" name="Text 3"/>
+          <p:cNvSpPr/>
+          <p:nvPr/>
+        </p:nvSpPr>
+        <p:spPr>
+          <a:xfrm>
+            <a:off x="411480" y="4864608"/>
+            <a:ext cx="8321040" cy="237744"/>
+          </a:xfrm>
+          <a:prstGeom prst="rect">
+            <a:avLst/>
+          </a:prstGeom>
+          <a:noFill/>
+          <a:ln/>
+        </p:spPr>
+        <p:txBody>
+          <a:bodyPr wrap="square" rtlCol="0" anchor="ctr"/>
+          <a:lstStyle/>
+          <a:p>
+            <a:pPr indent="0" marL="0">
+              <a:buNone/>
+            </a:pPr>
+            <a:r>
+              <a:rPr lang="en-US" sz="750" dirty="0">
+                <a:solidFill>
+                  <a:srgbClr val="AAAAAA"/>
+                </a:solidFill>
+                <a:latin typeface="Arial" pitchFamily="34" charset="0"/>
+                <a:ea typeface="Arial" pitchFamily="34" charset="-122"/>
+                <a:cs typeface="Arial" pitchFamily="34" charset="-120"/>
+              </a:rPr>
+              <a:t>Lesson Forge Pro (owner) — This content is educational material only and does not constitute financial, investment, or trading advice.</a:t>
+            </a:r>
+            <a:endParaRPr lang="en-US" sz="750" dirty="0"/>
+          </a:p>
+        </p:txBody>
+      </p:sp>
+      <p:sp>
+        <p:nvSpPr>
+          <p:cNvPr id="6" name="Text 4"/>
+          <p:cNvSpPr/>
+          <p:nvPr/>
+        </p:nvSpPr>
+        <p:spPr>
+          <a:xfrm>
+            <a:off x="731520" y="1188720"/>
+            <a:ext cx="7680960" cy="2743200"/>
           </a:xfrm>
           <a:prstGeom prst="rect">
             <a:avLst/>
@@ -3058,137 +5872,151 @@
           <a:bodyPr wrap="square" rtlCol="0" anchor="t"/>
           <a:lstStyle/>
           <a:p>
-            <a:pPr marL="342900" indent="-342900">
+            <a:pPr marL="152400" indent="-152400">
+              <a:spcAft>
+                <a:spcPts val="800"/>
+              </a:spcAft>
               <a:buSzPct val="100000"/>
               <a:buChar char="•"/>
             </a:pPr>
             <a:r>
-              <a:rPr lang="en-US" sz="1600" dirty="0">
-                <a:solidFill>
-                  <a:srgbClr val="333333"/>
-                </a:solidFill>
-              </a:rPr>
-              <a:t>| Time | Topic |</a:t>
-            </a:r>
-            <a:endParaRPr lang="en-US" sz="1600" dirty="0"/>
-          </a:p>
-          <a:p>
-            <a:pPr marL="342900" indent="-342900">
+              <a:rPr lang="en-US" sz="1500" dirty="0">
+                <a:solidFill>
+                  <a:srgbClr val="1C1917"/>
+                </a:solidFill>
+                <a:latin typeface="Arial" pitchFamily="34" charset="0"/>
+                <a:ea typeface="Arial" pitchFamily="34" charset="-122"/>
+                <a:cs typeface="Arial" pitchFamily="34" charset="-120"/>
+              </a:rPr>
+              <a:t>DCF models establish intrinsic value; LBO models test private-equity return hurdles.</a:t>
+            </a:r>
+            <a:endParaRPr lang="en-US" sz="1500" dirty="0"/>
+          </a:p>
+          <a:p>
+            <a:pPr marL="152400" indent="-152400">
+              <a:spcAft>
+                <a:spcPts val="800"/>
+              </a:spcAft>
               <a:buSzPct val="100000"/>
               <a:buChar char="•"/>
             </a:pPr>
             <a:r>
-              <a:rPr lang="en-US" sz="1600" dirty="0">
-                <a:solidFill>
-                  <a:srgbClr val="333333"/>
-                </a:solidFill>
-              </a:rPr>
-              <a:t>| --- | --- |</a:t>
-            </a:r>
-            <a:endParaRPr lang="en-US" sz="1600" dirty="0"/>
-          </a:p>
-          <a:p>
-            <a:pPr marL="342900" indent="-342900">
+              <a:rPr lang="en-US" sz="1500" dirty="0">
+                <a:solidFill>
+                  <a:srgbClr val="1C1917"/>
+                </a:solidFill>
+                <a:latin typeface="Arial" pitchFamily="34" charset="0"/>
+                <a:ea typeface="Arial" pitchFamily="34" charset="-122"/>
+                <a:cs typeface="Arial" pitchFamily="34" charset="-120"/>
+              </a:rPr>
+              <a:t>Accretion/dilution models answer whether a deal immediately helps or hurts EPS.</a:t>
+            </a:r>
+            <a:endParaRPr lang="en-US" sz="1500" dirty="0"/>
+          </a:p>
+          <a:p>
+            <a:pPr marL="152400" indent="-152400">
+              <a:spcAft>
+                <a:spcPts val="800"/>
+              </a:spcAft>
               <a:buSzPct val="100000"/>
               <a:buChar char="•"/>
             </a:pPr>
             <a:r>
-              <a:rPr lang="en-US" sz="1600" dirty="0">
-                <a:solidFill>
-                  <a:srgbClr val="333333"/>
-                </a:solidFill>
-              </a:rPr>
-              <a:t>| 0:00 - 5:00 | Introduction and Objectives |</a:t>
-            </a:r>
-            <a:endParaRPr lang="en-US" sz="1600" dirty="0"/>
-          </a:p>
-          <a:p>
-            <a:pPr marL="342900" indent="-342900">
+              <a:rPr lang="en-US" sz="1500" dirty="0">
+                <a:solidFill>
+                  <a:srgbClr val="1C1917"/>
+                </a:solidFill>
+                <a:latin typeface="Arial" pitchFamily="34" charset="0"/>
+                <a:ea typeface="Arial" pitchFamily="34" charset="-122"/>
+                <a:cs typeface="Arial" pitchFamily="34" charset="-120"/>
+              </a:rPr>
+              <a:t>Front-loading synergies is the most common valuation inflation mistake.</a:t>
+            </a:r>
+            <a:endParaRPr lang="en-US" sz="1500" dirty="0"/>
+          </a:p>
+          <a:p>
+            <a:pPr marL="152400" indent="-152400">
+              <a:spcAft>
+                <a:spcPts val="800"/>
+              </a:spcAft>
               <a:buSzPct val="100000"/>
               <a:buChar char="•"/>
             </a:pPr>
             <a:r>
-              <a:rPr lang="en-US" sz="1600" dirty="0">
-                <a:solidFill>
-                  <a:srgbClr val="333333"/>
-                </a:solidFill>
-              </a:rPr>
-              <a:t>| 5:00 - 20:00 | Financial Modeling Basics |</a:t>
-            </a:r>
-            <a:endParaRPr lang="en-US" sz="1600" dirty="0"/>
-          </a:p>
-          <a:p>
-            <a:pPr marL="342900" indent="-342900">
+              <a:rPr lang="en-US" sz="1500" dirty="0">
+                <a:solidFill>
+                  <a:srgbClr val="1C1917"/>
+                </a:solidFill>
+                <a:latin typeface="Arial" pitchFamily="34" charset="0"/>
+                <a:ea typeface="Arial" pitchFamily="34" charset="-122"/>
+                <a:cs typeface="Arial" pitchFamily="34" charset="-120"/>
+              </a:rPr>
+              <a:t>Sensitivity matrices expose fragile deals before boards commit capital.</a:t>
+            </a:r>
+            <a:endParaRPr lang="en-US" sz="1500" dirty="0"/>
+          </a:p>
+          <a:p>
+            <a:pPr marL="152400" indent="-152400">
+              <a:spcAft>
+                <a:spcPts val="800"/>
+              </a:spcAft>
               <a:buSzPct val="100000"/>
               <a:buChar char="•"/>
             </a:pPr>
             <a:r>
-              <a:rPr lang="en-US" sz="1600" dirty="0">
-                <a:solidFill>
-                  <a:srgbClr val="333333"/>
-                </a:solidFill>
-              </a:rPr>
-              <a:t>| 20:00 - 30:00 | Energizer/Break |</a:t>
-            </a:r>
-            <a:endParaRPr lang="en-US" sz="1600" dirty="0"/>
-          </a:p>
-          <a:p>
-            <a:pPr marL="342900" indent="-342900">
-              <a:buSzPct val="100000"/>
-              <a:buChar char="•"/>
-            </a:pPr>
-            <a:r>
-              <a:rPr lang="en-US" sz="1600" dirty="0">
-                <a:solidFill>
-                  <a:srgbClr val="333333"/>
-                </a:solidFill>
-              </a:rPr>
-              <a:t>| 30:00 - 50:00 | Applying Financial Models to M&amp;A and Investment Decisions |</a:t>
-            </a:r>
-            <a:endParaRPr lang="en-US" sz="1600" dirty="0"/>
-          </a:p>
-          <a:p>
-            <a:pPr marL="342900" indent="-342900">
-              <a:buSzPct val="100000"/>
-              <a:buChar char="•"/>
-            </a:pPr>
-            <a:r>
-              <a:rPr lang="en-US" sz="1600" dirty="0">
-                <a:solidFill>
-                  <a:srgbClr val="333333"/>
-                </a:solidFill>
-              </a:rPr>
-              <a:t>| 50:00 - 70:00 | Evaluating Financing Options and Investment Returns |</a:t>
-            </a:r>
-            <a:endParaRPr lang="en-US" sz="1600" dirty="0"/>
-          </a:p>
-          <a:p>
-            <a:pPr marL="342900" indent="-342900">
-              <a:buSzPct val="100000"/>
-              <a:buChar char="•"/>
-            </a:pPr>
-            <a:r>
-              <a:rPr lang="en-US" sz="1600" dirty="0">
-                <a:solidFill>
-                  <a:srgbClr val="333333"/>
-                </a:solidFill>
-              </a:rPr>
-              <a:t>| 70:00 - 90:00 | Case Study and Group Discussion |</a:t>
-            </a:r>
-            <a:endParaRPr lang="en-US" sz="1600" dirty="0"/>
-          </a:p>
-        </p:txBody>
-      </p:sp>
-      <p:sp>
-        <p:nvSpPr>
-          <p:cNvPr id="4" name="Text 2"/>
-          <p:cNvSpPr/>
-          <p:nvPr/>
-        </p:nvSpPr>
-        <p:spPr>
-          <a:xfrm>
-            <a:off x="457200" y="4709160"/>
-            <a:ext cx="8229600" cy="320040"/>
+              <a:rPr lang="en-US" sz="1500" dirty="0">
+                <a:solidFill>
+                  <a:srgbClr val="1C1917"/>
+                </a:solidFill>
+                <a:latin typeface="Arial" pitchFamily="34" charset="0"/>
+                <a:ea typeface="Arial" pitchFamily="34" charset="-122"/>
+                <a:cs typeface="Arial" pitchFamily="34" charset="-120"/>
+              </a:rPr>
+              <a:t>Every assumption must be documented so any reviewer can challenge it.</a:t>
+            </a:r>
+            <a:endParaRPr lang="en-US" sz="1500" dirty="0"/>
+          </a:p>
+        </p:txBody>
+      </p:sp>
+      <p:sp>
+        <p:nvSpPr>
+          <p:cNvPr id="7" name="Shape 5"/>
+          <p:cNvSpPr/>
+          <p:nvPr/>
+        </p:nvSpPr>
+        <p:spPr>
+          <a:xfrm>
+            <a:off x="731520" y="4041648"/>
+            <a:ext cx="7680960" cy="566928"/>
+          </a:xfrm>
+          <a:prstGeom prst="roundRect">
+            <a:avLst>
+              <a:gd name="adj" fmla="val 12903"/>
+            </a:avLst>
+          </a:prstGeom>
+          <a:solidFill>
+            <a:srgbClr val="B45309">
+              <a:alpha val="12000"/>
+            </a:srgbClr>
+          </a:solidFill>
+          <a:ln w="12700">
+            <a:solidFill>
+              <a:srgbClr val="B45309"/>
+            </a:solidFill>
+            <a:prstDash val="solid"/>
+          </a:ln>
+        </p:spPr>
+      </p:sp>
+      <p:sp>
+        <p:nvSpPr>
+          <p:cNvPr id="8" name="Text 6"/>
+          <p:cNvSpPr/>
+          <p:nvPr/>
+        </p:nvSpPr>
+        <p:spPr>
+          <a:xfrm>
+            <a:off x="868680" y="4087368"/>
+            <a:ext cx="7406640" cy="475488"/>
           </a:xfrm>
           <a:prstGeom prst="rect">
             <a:avLst/>
@@ -3204,14 +6032,31 @@
               <a:buNone/>
             </a:pPr>
             <a:r>
-              <a:rPr lang="en-US" sz="800" dirty="0">
-                <a:solidFill>
-                  <a:srgbClr val="AAAAAA"/>
-                </a:solidFill>
-              </a:rPr>
-              <a:t>Lesson Forge Pro (owner) — This content is educational material only and does not constitute financial, investment, or trading advice.</a:t>
-            </a:r>
-            <a:endParaRPr lang="en-US" sz="800" dirty="0"/>
+              <a:rPr lang="en-US" sz="1100" b="1" dirty="0">
+                <a:solidFill>
+                  <a:srgbClr val="B45309"/>
+                </a:solidFill>
+                <a:latin typeface="Arial" pitchFamily="34" charset="0"/>
+                <a:ea typeface="Arial" pitchFamily="34" charset="-122"/>
+                <a:cs typeface="Arial" pitchFamily="34" charset="-120"/>
+              </a:rPr>
+              <a:t>Takeaway  </a:t>
+            </a:r>
+            <a:pPr indent="0" marL="0">
+              <a:buNone/>
+            </a:pPr>
+            <a:r>
+              <a:rPr lang="en-US" sz="1150" dirty="0">
+                <a:solidFill>
+                  <a:srgbClr val="1C1917"/>
+                </a:solidFill>
+                <a:latin typeface="Arial" pitchFamily="34" charset="0"/>
+                <a:ea typeface="Arial" pitchFamily="34" charset="-122"/>
+                <a:cs typeface="Arial" pitchFamily="34" charset="-120"/>
+              </a:rPr>
+              <a:t>Knowing where models are used—and where analysts routinely err—is as valuable as knowing how to build them.</a:t>
+            </a:r>
+            <a:endParaRPr lang="en-US" sz="1100" dirty="0"/>
           </a:p>
         </p:txBody>
       </p:sp>
@@ -3223,9 +6068,16 @@
 </p:sld>
 </file>
 
-<file path=ppt/slides/slide5.xml><?xml version="1.0" encoding="utf-8"?>
+<file path=ppt/slides/slide17.xml><?xml version="1.0" encoding="utf-8"?>
 <p:sld xmlns:a="http://schemas.openxmlformats.org/drawingml/2006/main" xmlns:r="http://schemas.openxmlformats.org/officeDocument/2006/relationships" xmlns:p="http://schemas.openxmlformats.org/presentationml/2006/main">
-  <p:cSld name="Slide 5">
+  <p:cSld name="Slide 17">
+    <p:bg>
+      <p:bgPr>
+        <a:solidFill>
+          <a:srgbClr val="FFFFFF"/>
+        </a:solidFill>
+      </p:bgPr>
+    </p:bg>
     <p:spTree>
       <p:nvGrpSpPr>
         <p:cNvPr id="1" name=""/>
@@ -3242,14 +6094,34 @@
       </p:grpSpPr>
       <p:sp>
         <p:nvSpPr>
-          <p:cNvPr id="2" name="Text 0"/>
-          <p:cNvSpPr/>
-          <p:nvPr/>
-        </p:nvSpPr>
-        <p:spPr>
-          <a:xfrm>
-            <a:off x="457200" y="320040"/>
-            <a:ext cx="8229600" cy="731520"/>
+          <p:cNvPr id="2" name="Shape 0"/>
+          <p:cNvSpPr/>
+          <p:nvPr/>
+        </p:nvSpPr>
+        <p:spPr>
+          <a:xfrm>
+            <a:off x="0" y="4480560"/>
+            <a:ext cx="9144000" cy="667512"/>
+          </a:xfrm>
+          <a:prstGeom prst="rect">
+            <a:avLst/>
+          </a:prstGeom>
+          <a:solidFill>
+            <a:srgbClr val="B45309"/>
+          </a:solidFill>
+          <a:ln/>
+        </p:spPr>
+      </p:sp>
+      <p:sp>
+        <p:nvSpPr>
+          <p:cNvPr id="3" name="Text 1"/>
+          <p:cNvSpPr/>
+          <p:nvPr/>
+        </p:nvSpPr>
+        <p:spPr>
+          <a:xfrm>
+            <a:off x="685800" y="2148840"/>
+            <a:ext cx="7863840" cy="548640"/>
           </a:xfrm>
           <a:prstGeom prst="rect">
             <a:avLst/>
@@ -3265,111 +6137,17 @@
               <a:buNone/>
             </a:pPr>
             <a:r>
-              <a:rPr lang="en-US" sz="2400" b="1" dirty="0">
-                <a:solidFill>
-                  <a:srgbClr val="B45309"/>
-                </a:solidFill>
-              </a:rPr>
-              <a:t>Introduction and Objectives (0:00 - 5:00)</a:t>
-            </a:r>
-            <a:endParaRPr lang="en-US" sz="2400" dirty="0"/>
-          </a:p>
-        </p:txBody>
-      </p:sp>
-      <p:sp>
-        <p:nvSpPr>
-          <p:cNvPr id="3" name="Text 1"/>
-          <p:cNvSpPr/>
-          <p:nvPr/>
-        </p:nvSpPr>
-        <p:spPr>
-          <a:xfrm>
-            <a:off x="640080" y="1188720"/>
-            <a:ext cx="7863840" cy="3291840"/>
-          </a:xfrm>
-          <a:prstGeom prst="rect">
-            <a:avLst/>
-          </a:prstGeom>
-          <a:noFill/>
-          <a:ln/>
-        </p:spPr>
-        <p:txBody>
-          <a:bodyPr wrap="square" rtlCol="0" anchor="t"/>
-          <a:lstStyle/>
-          <a:p>
-            <a:pPr marL="342900" indent="-342900">
-              <a:buSzPct val="100000"/>
-              <a:buChar char="•"/>
-            </a:pPr>
-            <a:r>
-              <a:rPr lang="en-US" sz="1600" dirty="0">
-                <a:solidFill>
-                  <a:srgbClr val="333333"/>
-                </a:solidFill>
-              </a:rPr>
-              <a:t>Welcome to the session on Financial Modeling for Mergers and Acquisitions (M&amp;A) and Investment Decisions. My name is [Your Name], and I will be your instructor </a:t>
-            </a:r>
-            <a:endParaRPr lang="en-US" sz="1600" dirty="0"/>
-          </a:p>
-          <a:p>
-            <a:pPr marL="342900" indent="-342900">
-              <a:buSzPct val="100000"/>
-              <a:buChar char="•"/>
-            </a:pPr>
-            <a:r>
-              <a:rPr lang="en-US" sz="1600" dirty="0">
-                <a:solidFill>
-                  <a:srgbClr val="333333"/>
-                </a:solidFill>
-              </a:rPr>
-              <a:t>Apply financial modeling techniques to evaluate M&amp;A opportunities</a:t>
-            </a:r>
-            <a:endParaRPr lang="en-US" sz="1600" dirty="0"/>
-          </a:p>
-          <a:p>
-            <a:pPr marL="342900" indent="-342900">
-              <a:buSzPct val="100000"/>
-              <a:buChar char="•"/>
-            </a:pPr>
-            <a:r>
-              <a:rPr lang="en-US" sz="1600" dirty="0">
-                <a:solidFill>
-                  <a:srgbClr val="333333"/>
-                </a:solidFill>
-              </a:rPr>
-              <a:t>Analyze investment decisions using financial models</a:t>
-            </a:r>
-            <a:endParaRPr lang="en-US" sz="1600" dirty="0"/>
-          </a:p>
-          <a:p>
-            <a:pPr marL="342900" indent="-342900">
-              <a:buSzPct val="100000"/>
-              <a:buChar char="•"/>
-            </a:pPr>
-            <a:r>
-              <a:rPr lang="en-US" sz="1600" dirty="0">
-                <a:solidFill>
-                  <a:srgbClr val="333333"/>
-                </a:solidFill>
-              </a:rPr>
-              <a:t>Evaluate the impact of different financing options on investment returns</a:t>
-            </a:r>
-            <a:endParaRPr lang="en-US" sz="1600" dirty="0"/>
-          </a:p>
-          <a:p>
-            <a:pPr marL="342900" indent="-342900">
-              <a:buSzPct val="100000"/>
-              <a:buChar char="•"/>
-            </a:pPr>
-            <a:r>
-              <a:rPr lang="en-US" sz="1600" dirty="0">
-                <a:solidFill>
-                  <a:srgbClr val="333333"/>
-                </a:solidFill>
-              </a:rPr>
-              <a:t>To illustrate the importance of financial modeling, consider a chef who needs to plan a menu for a large event. Just as a chef needs to plan the ingredients, co</a:t>
-            </a:r>
-            <a:endParaRPr lang="en-US" sz="1600" dirty="0"/>
+              <a:rPr lang="en-US" sz="2000" b="1" dirty="0">
+                <a:solidFill>
+                  <a:srgbClr val="1C1917"/>
+                </a:solidFill>
+                <a:latin typeface="Arial" pitchFamily="34" charset="0"/>
+                <a:ea typeface="Arial" pitchFamily="34" charset="-122"/>
+                <a:cs typeface="Arial" pitchFamily="34" charset="-120"/>
+              </a:rPr>
+              <a:t>Next: practice problems in your textbook chapter</a:t>
+            </a:r>
+            <a:endParaRPr lang="en-US" sz="2000" dirty="0"/>
           </a:p>
         </p:txBody>
       </p:sp>
@@ -3381,8 +6159,8 @@
         </p:nvSpPr>
         <p:spPr>
           <a:xfrm>
-            <a:off x="457200" y="4709160"/>
-            <a:ext cx="8229600" cy="320040"/>
+            <a:off x="685800" y="4599432"/>
+            <a:ext cx="7863840" cy="411480"/>
           </a:xfrm>
           <a:prstGeom prst="rect">
             <a:avLst/>
@@ -3398,14 +6176,17 @@
               <a:buNone/>
             </a:pPr>
             <a:r>
-              <a:rPr lang="en-US" sz="800" dirty="0">
-                <a:solidFill>
-                  <a:srgbClr val="AAAAAA"/>
-                </a:solidFill>
+              <a:rPr lang="en-US" sz="1100" dirty="0">
+                <a:solidFill>
+                  <a:srgbClr val="FFFFFF"/>
+                </a:solidFill>
+                <a:latin typeface="Arial" pitchFamily="34" charset="0"/>
+                <a:ea typeface="Arial" pitchFamily="34" charset="-122"/>
+                <a:cs typeface="Arial" pitchFamily="34" charset="-120"/>
               </a:rPr>
               <a:t>Lesson Forge Pro (owner) — This content is educational material only and does not constitute financial, investment, or trading advice.</a:t>
             </a:r>
-            <a:endParaRPr lang="en-US" sz="800" dirty="0"/>
+            <a:endParaRPr lang="en-US" sz="1100" dirty="0"/>
           </a:p>
         </p:txBody>
       </p:sp>
@@ -3417,9 +6198,16 @@
 </p:sld>
 </file>
 
-<file path=ppt/slides/slide6.xml><?xml version="1.0" encoding="utf-8"?>
+<file path=ppt/slides/slide2.xml><?xml version="1.0" encoding="utf-8"?>
 <p:sld xmlns:a="http://schemas.openxmlformats.org/drawingml/2006/main" xmlns:r="http://schemas.openxmlformats.org/officeDocument/2006/relationships" xmlns:p="http://schemas.openxmlformats.org/presentationml/2006/main">
-  <p:cSld name="Slide 6">
+  <p:cSld name="Slide 2">
+    <p:bg>
+      <p:bgPr>
+        <a:solidFill>
+          <a:srgbClr val="FFFFFF"/>
+        </a:solidFill>
+      </p:bgPr>
+    </p:bg>
     <p:spTree>
       <p:nvGrpSpPr>
         <p:cNvPr id="1" name=""/>
@@ -3436,14 +6224,34 @@
       </p:grpSpPr>
       <p:sp>
         <p:nvSpPr>
-          <p:cNvPr id="2" name="Text 0"/>
-          <p:cNvSpPr/>
-          <p:nvPr/>
-        </p:nvSpPr>
-        <p:spPr>
-          <a:xfrm>
-            <a:off x="457200" y="320040"/>
-            <a:ext cx="8229600" cy="731520"/>
+          <p:cNvPr id="2" name="Shape 0"/>
+          <p:cNvSpPr/>
+          <p:nvPr/>
+        </p:nvSpPr>
+        <p:spPr>
+          <a:xfrm>
+            <a:off x="411480" y="402336"/>
+            <a:ext cx="82296" cy="329184"/>
+          </a:xfrm>
+          <a:prstGeom prst="rect">
+            <a:avLst/>
+          </a:prstGeom>
+          <a:solidFill>
+            <a:srgbClr val="B45309"/>
+          </a:solidFill>
+          <a:ln/>
+        </p:spPr>
+      </p:sp>
+      <p:sp>
+        <p:nvSpPr>
+          <p:cNvPr id="3" name="Text 1"/>
+          <p:cNvSpPr/>
+          <p:nvPr/>
+        </p:nvSpPr>
+        <p:spPr>
+          <a:xfrm>
+            <a:off x="566928" y="292608"/>
+            <a:ext cx="8138160" cy="548640"/>
           </a:xfrm>
           <a:prstGeom prst="rect">
             <a:avLst/>
@@ -3459,79 +6267,53 @@
               <a:buNone/>
             </a:pPr>
             <a:r>
-              <a:rPr lang="en-US" sz="2400" b="1" dirty="0">
-                <a:solidFill>
-                  <a:srgbClr val="B45309"/>
-                </a:solidFill>
-              </a:rPr>
-              <a:t>Financial Modeling Basics (5:00 - 20:00)</a:t>
-            </a:r>
-            <a:endParaRPr lang="en-US" sz="2400" dirty="0"/>
-          </a:p>
-        </p:txBody>
-      </p:sp>
-      <p:sp>
-        <p:nvSpPr>
-          <p:cNvPr id="3" name="Text 1"/>
-          <p:cNvSpPr/>
-          <p:nvPr/>
-        </p:nvSpPr>
-        <p:spPr>
-          <a:xfrm>
-            <a:off x="640080" y="1188720"/>
-            <a:ext cx="7863840" cy="3291840"/>
-          </a:xfrm>
-          <a:prstGeom prst="rect">
-            <a:avLst/>
-          </a:prstGeom>
-          <a:noFill/>
-          <a:ln/>
-        </p:spPr>
-        <p:txBody>
-          <a:bodyPr wrap="square" rtlCol="0" anchor="t"/>
-          <a:lstStyle/>
-          <a:p>
-            <a:pPr marL="342900" indent="-342900">
-              <a:buSzPct val="100000"/>
-              <a:buChar char="•"/>
-            </a:pPr>
-            <a:r>
-              <a:rPr lang="en-US" sz="1600" dirty="0">
-                <a:solidFill>
-                  <a:srgbClr val="333333"/>
-                </a:solidFill>
-              </a:rPr>
-              <a:t>Financial modeling typically entails financial statement forecasting, usually the preparation of detailed company-specific models used for decision-making purpo</a:t>
-            </a:r>
-            <a:endParaRPr lang="en-US" sz="1600" dirty="0"/>
-          </a:p>
-          <a:p>
-            <a:pPr marL="342900" indent="-342900">
-              <a:buSzPct val="100000"/>
-              <a:buChar char="•"/>
-            </a:pPr>
-            <a:r>
-              <a:rPr lang="en-US" sz="1600" dirty="0">
-                <a:solidFill>
-                  <a:srgbClr val="333333"/>
-                </a:solidFill>
-              </a:rPr>
-              <a:t>A good financial model should be transparent, auditable, and well-documented, with clear labeling and documentation of assumptions. This is like creating a blue</a:t>
-            </a:r>
-            <a:endParaRPr lang="en-US" sz="1600" dirty="0"/>
-          </a:p>
-        </p:txBody>
-      </p:sp>
-      <p:sp>
-        <p:nvSpPr>
-          <p:cNvPr id="4" name="Text 2"/>
-          <p:cNvSpPr/>
-          <p:nvPr/>
-        </p:nvSpPr>
-        <p:spPr>
-          <a:xfrm>
-            <a:off x="457200" y="4709160"/>
-            <a:ext cx="8229600" cy="320040"/>
+              <a:rPr lang="en-US" sz="2100" b="1" dirty="0">
+                <a:solidFill>
+                  <a:srgbClr val="1C1917"/>
+                </a:solidFill>
+                <a:latin typeface="Arial" pitchFamily="34" charset="0"/>
+                <a:ea typeface="Arial" pitchFamily="34" charset="-122"/>
+                <a:cs typeface="Arial" pitchFamily="34" charset="-120"/>
+              </a:rPr>
+              <a:t>Today's agenda</a:t>
+            </a:r>
+            <a:endParaRPr lang="en-US" sz="2100" dirty="0"/>
+          </a:p>
+        </p:txBody>
+      </p:sp>
+      <p:sp>
+        <p:nvSpPr>
+          <p:cNvPr id="4" name="Shape 2"/>
+          <p:cNvSpPr/>
+          <p:nvPr/>
+        </p:nvSpPr>
+        <p:spPr>
+          <a:xfrm>
+            <a:off x="411480" y="960120"/>
+            <a:ext cx="8321040" cy="0"/>
+          </a:xfrm>
+          <a:prstGeom prst="line">
+            <a:avLst/>
+          </a:prstGeom>
+          <a:noFill/>
+          <a:ln w="12700">
+            <a:solidFill>
+              <a:srgbClr val="E7E5E4"/>
+            </a:solidFill>
+            <a:prstDash val="solid"/>
+          </a:ln>
+        </p:spPr>
+      </p:sp>
+      <p:sp>
+        <p:nvSpPr>
+          <p:cNvPr id="5" name="Text 3"/>
+          <p:cNvSpPr/>
+          <p:nvPr/>
+        </p:nvSpPr>
+        <p:spPr>
+          <a:xfrm>
+            <a:off x="411480" y="4864608"/>
+            <a:ext cx="8321040" cy="237744"/>
           </a:xfrm>
           <a:prstGeom prst="rect">
             <a:avLst/>
@@ -3547,14 +6329,270 @@
               <a:buNone/>
             </a:pPr>
             <a:r>
-              <a:rPr lang="en-US" sz="800" dirty="0">
+              <a:rPr lang="en-US" sz="750" dirty="0">
                 <a:solidFill>
                   <a:srgbClr val="AAAAAA"/>
                 </a:solidFill>
+                <a:latin typeface="Arial" pitchFamily="34" charset="0"/>
+                <a:ea typeface="Arial" pitchFamily="34" charset="-122"/>
+                <a:cs typeface="Arial" pitchFamily="34" charset="-120"/>
               </a:rPr>
               <a:t>Lesson Forge Pro (owner) — This content is educational material only and does not constitute financial, investment, or trading advice.</a:t>
             </a:r>
-            <a:endParaRPr lang="en-US" sz="800" dirty="0"/>
+            <a:endParaRPr lang="en-US" sz="750" dirty="0"/>
+          </a:p>
+        </p:txBody>
+      </p:sp>
+      <p:sp>
+        <p:nvSpPr>
+          <p:cNvPr id="6" name="Text 4"/>
+          <p:cNvSpPr/>
+          <p:nvPr/>
+        </p:nvSpPr>
+        <p:spPr>
+          <a:xfrm>
+            <a:off x="731520" y="1234440"/>
+            <a:ext cx="7680960" cy="3383280"/>
+          </a:xfrm>
+          <a:prstGeom prst="rect">
+            <a:avLst/>
+          </a:prstGeom>
+          <a:noFill/>
+          <a:ln/>
+        </p:spPr>
+        <p:txBody>
+          <a:bodyPr wrap="square" rtlCol="0" anchor="t"/>
+          <a:lstStyle/>
+          <a:p>
+            <a:pPr marL="177800" indent="-177800">
+              <a:spcAft>
+                <a:spcPts val="1000"/>
+              </a:spcAft>
+              <a:buSzPct val="100000"/>
+              <a:buChar char="▪"/>
+            </a:pPr>
+            <a:r>
+              <a:rPr lang="en-US" sz="1600" dirty="0">
+                <a:solidFill>
+                  <a:srgbClr val="1C1917"/>
+                </a:solidFill>
+                <a:latin typeface="Arial" pitchFamily="34" charset="0"/>
+                <a:ea typeface="Arial" pitchFamily="34" charset="-122"/>
+                <a:cs typeface="Arial" pitchFamily="34" charset="-120"/>
+              </a:rPr>
+              <a:t>Concepts and Vocabulary</a:t>
+            </a:r>
+            <a:endParaRPr lang="en-US" sz="1600" dirty="0"/>
+          </a:p>
+          <a:p>
+            <a:pPr marL="177800" indent="-177800">
+              <a:spcAft>
+                <a:spcPts val="1000"/>
+              </a:spcAft>
+              <a:buSzPct val="100000"/>
+              <a:buChar char="▪"/>
+            </a:pPr>
+            <a:r>
+              <a:rPr lang="en-US" sz="1600" dirty="0">
+                <a:solidFill>
+                  <a:srgbClr val="1C1917"/>
+                </a:solidFill>
+                <a:latin typeface="Arial" pitchFamily="34" charset="0"/>
+                <a:ea typeface="Arial" pitchFamily="34" charset="-122"/>
+                <a:cs typeface="Arial" pitchFamily="34" charset="-120"/>
+              </a:rPr>
+              <a:t>Core Definitions</a:t>
+            </a:r>
+            <a:endParaRPr lang="en-US" sz="1600" dirty="0"/>
+          </a:p>
+          <a:p>
+            <a:pPr marL="177800" indent="-177800">
+              <a:spcAft>
+                <a:spcPts val="1000"/>
+              </a:spcAft>
+              <a:buSzPct val="100000"/>
+              <a:buChar char="▪"/>
+            </a:pPr>
+            <a:r>
+              <a:rPr lang="en-US" sz="1600" dirty="0">
+                <a:solidFill>
+                  <a:srgbClr val="1C1917"/>
+                </a:solidFill>
+                <a:latin typeface="Arial" pitchFamily="34" charset="0"/>
+                <a:ea typeface="Arial" pitchFamily="34" charset="-122"/>
+                <a:cs typeface="Arial" pitchFamily="34" charset="-120"/>
+              </a:rPr>
+              <a:t>Where Financial Modeling Fits in Practice</a:t>
+            </a:r>
+            <a:endParaRPr lang="en-US" sz="1600" dirty="0"/>
+          </a:p>
+          <a:p>
+            <a:pPr marL="177800" indent="-177800">
+              <a:spcAft>
+                <a:spcPts val="1000"/>
+              </a:spcAft>
+              <a:buSzPct val="100000"/>
+              <a:buChar char="▪"/>
+            </a:pPr>
+            <a:r>
+              <a:rPr lang="en-US" sz="1600" dirty="0">
+                <a:solidFill>
+                  <a:srgbClr val="1C1917"/>
+                </a:solidFill>
+                <a:latin typeface="Arial" pitchFamily="34" charset="0"/>
+                <a:ea typeface="Arial" pitchFamily="34" charset="-122"/>
+                <a:cs typeface="Arial" pitchFamily="34" charset="-120"/>
+              </a:rPr>
+              <a:t>Standard Notation</a:t>
+            </a:r>
+            <a:endParaRPr lang="en-US" sz="1600" dirty="0"/>
+          </a:p>
+          <a:p>
+            <a:pPr marL="177800" indent="-177800">
+              <a:spcAft>
+                <a:spcPts val="1000"/>
+              </a:spcAft>
+              <a:buSzPct val="100000"/>
+              <a:buChar char="▪"/>
+            </a:pPr>
+            <a:r>
+              <a:rPr lang="en-US" sz="1600" dirty="0">
+                <a:solidFill>
+                  <a:srgbClr val="1C1917"/>
+                </a:solidFill>
+                <a:latin typeface="Arial" pitchFamily="34" charset="0"/>
+                <a:ea typeface="Arial" pitchFamily="34" charset="-122"/>
+                <a:cs typeface="Arial" pitchFamily="34" charset="-120"/>
+              </a:rPr>
+              <a:t>Worked Example: Terminology Applied</a:t>
+            </a:r>
+            <a:endParaRPr lang="en-US" sz="1600" dirty="0"/>
+          </a:p>
+          <a:p>
+            <a:pPr marL="177800" indent="-177800">
+              <a:spcAft>
+                <a:spcPts val="1000"/>
+              </a:spcAft>
+              <a:buSzPct val="100000"/>
+              <a:buChar char="▪"/>
+            </a:pPr>
+            <a:r>
+              <a:rPr lang="en-US" sz="1600" dirty="0">
+                <a:solidFill>
+                  <a:srgbClr val="1C1917"/>
+                </a:solidFill>
+                <a:latin typeface="Arial" pitchFamily="34" charset="0"/>
+                <a:ea typeface="Arial" pitchFamily="34" charset="-122"/>
+                <a:cs typeface="Arial" pitchFamily="34" charset="-120"/>
+              </a:rPr>
+              <a:t>The Standard M&amp;A Modeling Procedure</a:t>
+            </a:r>
+            <a:endParaRPr lang="en-US" sz="1600" dirty="0"/>
+          </a:p>
+          <a:p>
+            <a:pPr marL="177800" indent="-177800">
+              <a:spcAft>
+                <a:spcPts val="1000"/>
+              </a:spcAft>
+              <a:buSzPct val="100000"/>
+              <a:buChar char="▪"/>
+            </a:pPr>
+            <a:r>
+              <a:rPr lang="en-US" sz="1600" dirty="0">
+                <a:solidFill>
+                  <a:srgbClr val="1C1917"/>
+                </a:solidFill>
+                <a:latin typeface="Arial" pitchFamily="34" charset="0"/>
+                <a:ea typeface="Arial" pitchFamily="34" charset="-122"/>
+                <a:cs typeface="Arial" pitchFamily="34" charset="-120"/>
+              </a:rPr>
+              <a:t>Inputs: Building the Foundation</a:t>
+            </a:r>
+            <a:endParaRPr lang="en-US" sz="1600" dirty="0"/>
+          </a:p>
+          <a:p>
+            <a:pPr marL="177800" indent="-177800">
+              <a:spcAft>
+                <a:spcPts val="1000"/>
+              </a:spcAft>
+              <a:buSzPct val="100000"/>
+              <a:buChar char="▪"/>
+            </a:pPr>
+            <a:r>
+              <a:rPr lang="en-US" sz="1600" dirty="0">
+                <a:solidFill>
+                  <a:srgbClr val="1C1917"/>
+                </a:solidFill>
+                <a:latin typeface="Arial" pitchFamily="34" charset="0"/>
+                <a:ea typeface="Arial" pitchFamily="34" charset="-122"/>
+                <a:cs typeface="Arial" pitchFamily="34" charset="-120"/>
+              </a:rPr>
+              <a:t>Steps: Building the Model</a:t>
+            </a:r>
+            <a:endParaRPr lang="en-US" sz="1600" dirty="0"/>
+          </a:p>
+          <a:p>
+            <a:pPr marL="177800" indent="-177800">
+              <a:spcAft>
+                <a:spcPts val="1000"/>
+              </a:spcAft>
+              <a:buSzPct val="100000"/>
+              <a:buChar char="▪"/>
+            </a:pPr>
+            <a:r>
+              <a:rPr lang="en-US" sz="1600" dirty="0">
+                <a:solidFill>
+                  <a:srgbClr val="1C1917"/>
+                </a:solidFill>
+                <a:latin typeface="Arial" pitchFamily="34" charset="0"/>
+                <a:ea typeface="Arial" pitchFamily="34" charset="-122"/>
+                <a:cs typeface="Arial" pitchFamily="34" charset="-120"/>
+              </a:rPr>
+              <a:t>Worked Example: DCF Valuation</a:t>
+            </a:r>
+            <a:endParaRPr lang="en-US" sz="1600" dirty="0"/>
+          </a:p>
+          <a:p>
+            <a:pPr marL="177800" indent="-177800">
+              <a:spcAft>
+                <a:spcPts val="1000"/>
+              </a:spcAft>
+              <a:buSzPct val="100000"/>
+              <a:buChar char="▪"/>
+            </a:pPr>
+            <a:r>
+              <a:rPr lang="en-US" sz="1600" dirty="0">
+                <a:solidFill>
+                  <a:srgbClr val="1C1917"/>
+                </a:solidFill>
+                <a:latin typeface="Arial" pitchFamily="34" charset="0"/>
+                <a:ea typeface="Arial" pitchFamily="34" charset="-122"/>
+                <a:cs typeface="Arial" pitchFamily="34" charset="-120"/>
+              </a:rPr>
+              <a:t>Outputs and Checks</a:t>
+            </a:r>
+            <a:endParaRPr lang="en-US" sz="1600" dirty="0"/>
+          </a:p>
+          <a:p>
+            <a:pPr marL="177800" indent="-177800">
+              <a:spcAft>
+                <a:spcPts val="1000"/>
+              </a:spcAft>
+              <a:buSzPct val="100000"/>
+              <a:buChar char="▪"/>
+            </a:pPr>
+            <a:r>
+              <a:rPr lang="en-US" sz="1600" dirty="0">
+                <a:solidFill>
+                  <a:srgbClr val="1C1917"/>
+                </a:solidFill>
+                <a:latin typeface="Arial" pitchFamily="34" charset="0"/>
+                <a:ea typeface="Arial" pitchFamily="34" charset="-122"/>
+                <a:cs typeface="Arial" pitchFamily="34" charset="-120"/>
+              </a:rPr>
+              <a:t>Applications and Pitfalls</a:t>
+            </a:r>
+            <a:endParaRPr lang="en-US" sz="1600" dirty="0"/>
           </a:p>
         </p:txBody>
       </p:sp>
@@ -3566,9 +6604,16 @@
 </p:sld>
 </file>
 
-<file path=ppt/slides/slide7.xml><?xml version="1.0" encoding="utf-8"?>
+<file path=ppt/slides/slide3.xml><?xml version="1.0" encoding="utf-8"?>
 <p:sld xmlns:a="http://schemas.openxmlformats.org/drawingml/2006/main" xmlns:r="http://schemas.openxmlformats.org/officeDocument/2006/relationships" xmlns:p="http://schemas.openxmlformats.org/presentationml/2006/main">
-  <p:cSld name="Slide 7">
+  <p:cSld name="Slide 3">
+    <p:bg>
+      <p:bgPr>
+        <a:solidFill>
+          <a:srgbClr val="FFFFFF"/>
+        </a:solidFill>
+      </p:bgPr>
+    </p:bg>
     <p:spTree>
       <p:nvGrpSpPr>
         <p:cNvPr id="1" name=""/>
@@ -3585,14 +6630,34 @@
       </p:grpSpPr>
       <p:sp>
         <p:nvSpPr>
-          <p:cNvPr id="2" name="Text 0"/>
-          <p:cNvSpPr/>
-          <p:nvPr/>
-        </p:nvSpPr>
-        <p:spPr>
-          <a:xfrm>
-            <a:off x="457200" y="320040"/>
-            <a:ext cx="8229600" cy="731520"/>
+          <p:cNvPr id="2" name="Shape 0"/>
+          <p:cNvSpPr/>
+          <p:nvPr/>
+        </p:nvSpPr>
+        <p:spPr>
+          <a:xfrm>
+            <a:off x="411480" y="402336"/>
+            <a:ext cx="82296" cy="329184"/>
+          </a:xfrm>
+          <a:prstGeom prst="rect">
+            <a:avLst/>
+          </a:prstGeom>
+          <a:solidFill>
+            <a:srgbClr val="B45309"/>
+          </a:solidFill>
+          <a:ln/>
+        </p:spPr>
+      </p:sp>
+      <p:sp>
+        <p:nvSpPr>
+          <p:cNvPr id="3" name="Text 1"/>
+          <p:cNvSpPr/>
+          <p:nvPr/>
+        </p:nvSpPr>
+        <p:spPr>
+          <a:xfrm>
+            <a:off x="566928" y="292608"/>
+            <a:ext cx="8138160" cy="548640"/>
           </a:xfrm>
           <a:prstGeom prst="rect">
             <a:avLst/>
@@ -3608,27 +6673,92 @@
               <a:buNone/>
             </a:pPr>
             <a:r>
-              <a:rPr lang="en-US" sz="2400" b="1" dirty="0">
-                <a:solidFill>
-                  <a:srgbClr val="B45309"/>
-                </a:solidFill>
-              </a:rPr>
-              <a:t>Energizer/Break (20:00 - 30:00)</a:t>
-            </a:r>
-            <a:endParaRPr lang="en-US" sz="2400" dirty="0"/>
-          </a:p>
-        </p:txBody>
-      </p:sp>
-      <p:sp>
-        <p:nvSpPr>
-          <p:cNvPr id="3" name="Text 1"/>
-          <p:cNvSpPr/>
-          <p:nvPr/>
-        </p:nvSpPr>
-        <p:spPr>
-          <a:xfrm>
-            <a:off x="640080" y="1188720"/>
-            <a:ext cx="7863840" cy="3291840"/>
+              <a:rPr lang="en-US" sz="2100" b="1" dirty="0">
+                <a:solidFill>
+                  <a:srgbClr val="1C1917"/>
+                </a:solidFill>
+                <a:latin typeface="Arial" pitchFamily="34" charset="0"/>
+                <a:ea typeface="Arial" pitchFamily="34" charset="-122"/>
+                <a:cs typeface="Arial" pitchFamily="34" charset="-120"/>
+              </a:rPr>
+              <a:t>Concepts and Vocabulary</a:t>
+            </a:r>
+            <a:endParaRPr lang="en-US" sz="2100" dirty="0"/>
+          </a:p>
+        </p:txBody>
+      </p:sp>
+      <p:sp>
+        <p:nvSpPr>
+          <p:cNvPr id="4" name="Shape 2"/>
+          <p:cNvSpPr/>
+          <p:nvPr/>
+        </p:nvSpPr>
+        <p:spPr>
+          <a:xfrm>
+            <a:off x="411480" y="960120"/>
+            <a:ext cx="8321040" cy="0"/>
+          </a:xfrm>
+          <a:prstGeom prst="line">
+            <a:avLst/>
+          </a:prstGeom>
+          <a:noFill/>
+          <a:ln w="12700">
+            <a:solidFill>
+              <a:srgbClr val="E7E5E4"/>
+            </a:solidFill>
+            <a:prstDash val="solid"/>
+          </a:ln>
+        </p:spPr>
+      </p:sp>
+      <p:sp>
+        <p:nvSpPr>
+          <p:cNvPr id="5" name="Text 3"/>
+          <p:cNvSpPr/>
+          <p:nvPr/>
+        </p:nvSpPr>
+        <p:spPr>
+          <a:xfrm>
+            <a:off x="411480" y="4864608"/>
+            <a:ext cx="8321040" cy="237744"/>
+          </a:xfrm>
+          <a:prstGeom prst="rect">
+            <a:avLst/>
+          </a:prstGeom>
+          <a:noFill/>
+          <a:ln/>
+        </p:spPr>
+        <p:txBody>
+          <a:bodyPr wrap="square" rtlCol="0" anchor="ctr"/>
+          <a:lstStyle/>
+          <a:p>
+            <a:pPr indent="0" marL="0">
+              <a:buNone/>
+            </a:pPr>
+            <a:r>
+              <a:rPr lang="en-US" sz="750" dirty="0">
+                <a:solidFill>
+                  <a:srgbClr val="AAAAAA"/>
+                </a:solidFill>
+                <a:latin typeface="Arial" pitchFamily="34" charset="0"/>
+                <a:ea typeface="Arial" pitchFamily="34" charset="-122"/>
+                <a:cs typeface="Arial" pitchFamily="34" charset="-120"/>
+              </a:rPr>
+              <a:t>Lesson Forge Pro (owner) — This content is educational material only and does not constitute financial, investment, or trading advice.</a:t>
+            </a:r>
+            <a:endParaRPr lang="en-US" sz="750" dirty="0"/>
+          </a:p>
+        </p:txBody>
+      </p:sp>
+      <p:sp>
+        <p:nvSpPr>
+          <p:cNvPr id="6" name="Text 4"/>
+          <p:cNvSpPr/>
+          <p:nvPr/>
+        </p:nvSpPr>
+        <p:spPr>
+          <a:xfrm>
+            <a:off x="731520" y="1188720"/>
+            <a:ext cx="7680960" cy="2743200"/>
           </a:xfrm>
           <a:prstGeom prst="rect">
             <a:avLst/>
@@ -3640,32 +6770,130 @@
           <a:bodyPr wrap="square" rtlCol="0" anchor="t"/>
           <a:lstStyle/>
           <a:p>
-            <a:pPr marL="342900" indent="-342900">
+            <a:pPr marL="152400" indent="-152400">
+              <a:spcAft>
+                <a:spcPts val="800"/>
+              </a:spcAft>
               <a:buSzPct val="100000"/>
               <a:buChar char="•"/>
             </a:pPr>
             <a:r>
-              <a:rPr lang="en-US" sz="1600" dirty="0">
-                <a:solidFill>
-                  <a:srgbClr val="333333"/>
-                </a:solidFill>
-              </a:rPr>
-              <a:t>Let's take a short break to stretch our minds and bodies. Please stand up, stretch, and move around the room. We will also do a quick energizer activity to get </a:t>
-            </a:r>
-            <a:endParaRPr lang="en-US" sz="1600" dirty="0"/>
-          </a:p>
-        </p:txBody>
-      </p:sp>
-      <p:sp>
-        <p:nvSpPr>
-          <p:cNvPr id="4" name="Text 2"/>
-          <p:cNvSpPr/>
-          <p:nvPr/>
-        </p:nvSpPr>
-        <p:spPr>
-          <a:xfrm>
-            <a:off x="457200" y="4709160"/>
-            <a:ext cx="8229600" cy="320040"/>
+              <a:rPr lang="en-US" sz="1500" dirty="0">
+                <a:solidFill>
+                  <a:srgbClr val="1C1917"/>
+                </a:solidFill>
+                <a:latin typeface="Arial" pitchFamily="34" charset="0"/>
+                <a:ea typeface="Arial" pitchFamily="34" charset="-122"/>
+                <a:cs typeface="Arial" pitchFamily="34" charset="-120"/>
+              </a:rPr>
+              <a:t>Financial modeling quantifies a company's past, present, and projected reality.</a:t>
+            </a:r>
+            <a:endParaRPr lang="en-US" sz="1500" dirty="0"/>
+          </a:p>
+          <a:p>
+            <a:pPr marL="152400" indent="-152400">
+              <a:spcAft>
+                <a:spcPts val="800"/>
+              </a:spcAft>
+              <a:buSzPct val="100000"/>
+              <a:buChar char="•"/>
+            </a:pPr>
+            <a:r>
+              <a:rPr lang="en-US" sz="1500" dirty="0">
+                <a:solidFill>
+                  <a:srgbClr val="1C1917"/>
+                </a:solidFill>
+                <a:latin typeface="Arial" pitchFamily="34" charset="0"/>
+                <a:ea typeface="Arial" pitchFamily="34" charset="-122"/>
+                <a:cs typeface="Arial" pitchFamily="34" charset="-120"/>
+              </a:rPr>
+              <a:t>Precise vocabulary prevents costly errors in high-stakes M&amp;A decisions.</a:t>
+            </a:r>
+            <a:endParaRPr lang="en-US" sz="1500" dirty="0"/>
+          </a:p>
+          <a:p>
+            <a:pPr marL="152400" indent="-152400">
+              <a:spcAft>
+                <a:spcPts val="800"/>
+              </a:spcAft>
+              <a:buSzPct val="100000"/>
+              <a:buChar char="•"/>
+            </a:pPr>
+            <a:r>
+              <a:rPr lang="en-US" sz="1500" dirty="0">
+                <a:solidFill>
+                  <a:srgbClr val="1C1917"/>
+                </a:solidFill>
+                <a:latin typeface="Arial" pitchFamily="34" charset="0"/>
+                <a:ea typeface="Arial" pitchFamily="34" charset="-122"/>
+                <a:cs typeface="Arial" pitchFamily="34" charset="-120"/>
+              </a:rPr>
+              <a:t>Models support acquisitions, divestitures, capital raises, and strategic investments.</a:t>
+            </a:r>
+            <a:endParaRPr lang="en-US" sz="1500" dirty="0"/>
+          </a:p>
+          <a:p>
+            <a:pPr marL="152400" indent="-152400">
+              <a:spcAft>
+                <a:spcPts val="800"/>
+              </a:spcAft>
+              <a:buSzPct val="100000"/>
+              <a:buChar char="•"/>
+            </a:pPr>
+            <a:r>
+              <a:rPr lang="en-US" sz="1500" dirty="0">
+                <a:solidFill>
+                  <a:srgbClr val="1C1917"/>
+                </a:solidFill>
+                <a:latin typeface="Arial" pitchFamily="34" charset="0"/>
+                <a:ea typeface="Arial" pitchFamily="34" charset="-122"/>
+                <a:cs typeface="Arial" pitchFamily="34" charset="-120"/>
+              </a:rPr>
+              <a:t>Imprecise language directly produces imprecise, unreliable models.</a:t>
+            </a:r>
+            <a:endParaRPr lang="en-US" sz="1500" dirty="0"/>
+          </a:p>
+        </p:txBody>
+      </p:sp>
+      <p:sp>
+        <p:nvSpPr>
+          <p:cNvPr id="7" name="Shape 5"/>
+          <p:cNvSpPr/>
+          <p:nvPr/>
+        </p:nvSpPr>
+        <p:spPr>
+          <a:xfrm>
+            <a:off x="731520" y="4041648"/>
+            <a:ext cx="7680960" cy="566928"/>
+          </a:xfrm>
+          <a:prstGeom prst="roundRect">
+            <a:avLst>
+              <a:gd name="adj" fmla="val 12903"/>
+            </a:avLst>
+          </a:prstGeom>
+          <a:solidFill>
+            <a:srgbClr val="B45309">
+              <a:alpha val="12000"/>
+            </a:srgbClr>
+          </a:solidFill>
+          <a:ln w="12700">
+            <a:solidFill>
+              <a:srgbClr val="B45309"/>
+            </a:solidFill>
+            <a:prstDash val="solid"/>
+          </a:ln>
+        </p:spPr>
+      </p:sp>
+      <p:sp>
+        <p:nvSpPr>
+          <p:cNvPr id="8" name="Text 6"/>
+          <p:cNvSpPr/>
+          <p:nvPr/>
+        </p:nvSpPr>
+        <p:spPr>
+          <a:xfrm>
+            <a:off x="868680" y="4087368"/>
+            <a:ext cx="7406640" cy="475488"/>
           </a:xfrm>
           <a:prstGeom prst="rect">
             <a:avLst/>
@@ -3681,14 +6909,31 @@
               <a:buNone/>
             </a:pPr>
             <a:r>
-              <a:rPr lang="en-US" sz="800" dirty="0">
-                <a:solidFill>
-                  <a:srgbClr val="AAAAAA"/>
-                </a:solidFill>
-              </a:rPr>
-              <a:t>Lesson Forge Pro (owner) — This content is educational material only and does not constitute financial, investment, or trading advice.</a:t>
-            </a:r>
-            <a:endParaRPr lang="en-US" sz="800" dirty="0"/>
+              <a:rPr lang="en-US" sz="1100" b="1" dirty="0">
+                <a:solidFill>
+                  <a:srgbClr val="B45309"/>
+                </a:solidFill>
+                <a:latin typeface="Arial" pitchFamily="34" charset="0"/>
+                <a:ea typeface="Arial" pitchFamily="34" charset="-122"/>
+                <a:cs typeface="Arial" pitchFamily="34" charset="-120"/>
+              </a:rPr>
+              <a:t>Takeaway  </a:t>
+            </a:r>
+            <a:pPr indent="0" marL="0">
+              <a:buNone/>
+            </a:pPr>
+            <a:r>
+              <a:rPr lang="en-US" sz="1150" dirty="0">
+                <a:solidFill>
+                  <a:srgbClr val="1C1917"/>
+                </a:solidFill>
+                <a:latin typeface="Arial" pitchFamily="34" charset="0"/>
+                <a:ea typeface="Arial" pitchFamily="34" charset="-122"/>
+                <a:cs typeface="Arial" pitchFamily="34" charset="-120"/>
+              </a:rPr>
+              <a:t>In M&amp;A modeling, getting the language right is the first line of defense against expensive mistakes.</a:t>
+            </a:r>
+            <a:endParaRPr lang="en-US" sz="1100" dirty="0"/>
           </a:p>
         </p:txBody>
       </p:sp>
@@ -3700,9 +6945,16 @@
 </p:sld>
 </file>
 
-<file path=ppt/slides/slide8.xml><?xml version="1.0" encoding="utf-8"?>
+<file path=ppt/slides/slide4.xml><?xml version="1.0" encoding="utf-8"?>
 <p:sld xmlns:a="http://schemas.openxmlformats.org/drawingml/2006/main" xmlns:r="http://schemas.openxmlformats.org/officeDocument/2006/relationships" xmlns:p="http://schemas.openxmlformats.org/presentationml/2006/main">
-  <p:cSld name="Slide 8">
+  <p:cSld name="Slide 4">
+    <p:bg>
+      <p:bgPr>
+        <a:solidFill>
+          <a:srgbClr val="FFFFFF"/>
+        </a:solidFill>
+      </p:bgPr>
+    </p:bg>
     <p:spTree>
       <p:nvGrpSpPr>
         <p:cNvPr id="1" name=""/>
@@ -3719,14 +6971,34 @@
       </p:grpSpPr>
       <p:sp>
         <p:nvSpPr>
-          <p:cNvPr id="2" name="Text 0"/>
-          <p:cNvSpPr/>
-          <p:nvPr/>
-        </p:nvSpPr>
-        <p:spPr>
-          <a:xfrm>
-            <a:off x="457200" y="320040"/>
-            <a:ext cx="8229600" cy="731520"/>
+          <p:cNvPr id="2" name="Shape 0"/>
+          <p:cNvSpPr/>
+          <p:nvPr/>
+        </p:nvSpPr>
+        <p:spPr>
+          <a:xfrm>
+            <a:off x="411480" y="402336"/>
+            <a:ext cx="82296" cy="329184"/>
+          </a:xfrm>
+          <a:prstGeom prst="rect">
+            <a:avLst/>
+          </a:prstGeom>
+          <a:solidFill>
+            <a:srgbClr val="B45309"/>
+          </a:solidFill>
+          <a:ln/>
+        </p:spPr>
+      </p:sp>
+      <p:sp>
+        <p:nvSpPr>
+          <p:cNvPr id="3" name="Text 1"/>
+          <p:cNvSpPr/>
+          <p:nvPr/>
+        </p:nvSpPr>
+        <p:spPr>
+          <a:xfrm>
+            <a:off x="566928" y="292608"/>
+            <a:ext cx="8138160" cy="548640"/>
           </a:xfrm>
           <a:prstGeom prst="rect">
             <a:avLst/>
@@ -3742,27 +7014,92 @@
               <a:buNone/>
             </a:pPr>
             <a:r>
-              <a:rPr lang="en-US" sz="2400" b="1" dirty="0">
-                <a:solidFill>
-                  <a:srgbClr val="B45309"/>
-                </a:solidFill>
-              </a:rPr>
-              <a:t>Applying Financial Models to M&amp;A and Investment Decisions (30:00 - 50:00)</a:t>
-            </a:r>
-            <a:endParaRPr lang="en-US" sz="2400" dirty="0"/>
-          </a:p>
-        </p:txBody>
-      </p:sp>
-      <p:sp>
-        <p:nvSpPr>
-          <p:cNvPr id="3" name="Text 1"/>
-          <p:cNvSpPr/>
-          <p:nvPr/>
-        </p:nvSpPr>
-        <p:spPr>
-          <a:xfrm>
-            <a:off x="640080" y="1188720"/>
-            <a:ext cx="7863840" cy="3291840"/>
+              <a:rPr lang="en-US" sz="2100" b="1" dirty="0">
+                <a:solidFill>
+                  <a:srgbClr val="1C1917"/>
+                </a:solidFill>
+                <a:latin typeface="Arial" pitchFamily="34" charset="0"/>
+                <a:ea typeface="Arial" pitchFamily="34" charset="-122"/>
+                <a:cs typeface="Arial" pitchFamily="34" charset="-120"/>
+              </a:rPr>
+              <a:t>Core Definitions</a:t>
+            </a:r>
+            <a:endParaRPr lang="en-US" sz="2100" dirty="0"/>
+          </a:p>
+        </p:txBody>
+      </p:sp>
+      <p:sp>
+        <p:nvSpPr>
+          <p:cNvPr id="4" name="Shape 2"/>
+          <p:cNvSpPr/>
+          <p:nvPr/>
+        </p:nvSpPr>
+        <p:spPr>
+          <a:xfrm>
+            <a:off x="411480" y="960120"/>
+            <a:ext cx="8321040" cy="0"/>
+          </a:xfrm>
+          <a:prstGeom prst="line">
+            <a:avLst/>
+          </a:prstGeom>
+          <a:noFill/>
+          <a:ln w="12700">
+            <a:solidFill>
+              <a:srgbClr val="E7E5E4"/>
+            </a:solidFill>
+            <a:prstDash val="solid"/>
+          </a:ln>
+        </p:spPr>
+      </p:sp>
+      <p:sp>
+        <p:nvSpPr>
+          <p:cNvPr id="5" name="Text 3"/>
+          <p:cNvSpPr/>
+          <p:nvPr/>
+        </p:nvSpPr>
+        <p:spPr>
+          <a:xfrm>
+            <a:off x="411480" y="4864608"/>
+            <a:ext cx="8321040" cy="237744"/>
+          </a:xfrm>
+          <a:prstGeom prst="rect">
+            <a:avLst/>
+          </a:prstGeom>
+          <a:noFill/>
+          <a:ln/>
+        </p:spPr>
+        <p:txBody>
+          <a:bodyPr wrap="square" rtlCol="0" anchor="ctr"/>
+          <a:lstStyle/>
+          <a:p>
+            <a:pPr indent="0" marL="0">
+              <a:buNone/>
+            </a:pPr>
+            <a:r>
+              <a:rPr lang="en-US" sz="750" dirty="0">
+                <a:solidFill>
+                  <a:srgbClr val="AAAAAA"/>
+                </a:solidFill>
+                <a:latin typeface="Arial" pitchFamily="34" charset="0"/>
+                <a:ea typeface="Arial" pitchFamily="34" charset="-122"/>
+                <a:cs typeface="Arial" pitchFamily="34" charset="-120"/>
+              </a:rPr>
+              <a:t>Lesson Forge Pro (owner) — This content is educational material only and does not constitute financial, investment, or trading advice.</a:t>
+            </a:r>
+            <a:endParaRPr lang="en-US" sz="750" dirty="0"/>
+          </a:p>
+        </p:txBody>
+      </p:sp>
+      <p:sp>
+        <p:nvSpPr>
+          <p:cNvPr id="6" name="Text 4"/>
+          <p:cNvSpPr/>
+          <p:nvPr/>
+        </p:nvSpPr>
+        <p:spPr>
+          <a:xfrm>
+            <a:off x="731520" y="1188720"/>
+            <a:ext cx="7680960" cy="2743200"/>
           </a:xfrm>
           <a:prstGeom prst="rect">
             <a:avLst/>
@@ -3774,47 +7111,151 @@
           <a:bodyPr wrap="square" rtlCol="0" anchor="t"/>
           <a:lstStyle/>
           <a:p>
-            <a:pPr marL="342900" indent="-342900">
+            <a:pPr marL="152400" indent="-152400">
+              <a:spcAft>
+                <a:spcPts val="800"/>
+              </a:spcAft>
               <a:buSzPct val="100000"/>
               <a:buChar char="•"/>
             </a:pPr>
             <a:r>
-              <a:rPr lang="en-US" sz="1600" dirty="0">
-                <a:solidFill>
-                  <a:srgbClr val="333333"/>
-                </a:solidFill>
-              </a:rPr>
-              <a:t>Financial models can be used to evaluate M&amp;A opportunities by estimating the potential synergies and cost savings of a merger or acquisition. For example, consi</a:t>
-            </a:r>
-            <a:endParaRPr lang="en-US" sz="1600" dirty="0"/>
-          </a:p>
-          <a:p>
-            <a:pPr marL="342900" indent="-342900">
+              <a:rPr lang="en-US" sz="1500" dirty="0">
+                <a:solidFill>
+                  <a:srgbClr val="1C1917"/>
+                </a:solidFill>
+                <a:latin typeface="Arial" pitchFamily="34" charset="0"/>
+                <a:ea typeface="Arial" pitchFamily="34" charset="-122"/>
+                <a:cs typeface="Arial" pitchFamily="34" charset="-120"/>
+              </a:rPr>
+              <a:t>A financial model links assumptions to outputs through auditable formulas.</a:t>
+            </a:r>
+            <a:endParaRPr lang="en-US" sz="1500" dirty="0"/>
+          </a:p>
+          <a:p>
+            <a:pPr marL="152400" indent="-152400">
+              <a:spcAft>
+                <a:spcPts val="800"/>
+              </a:spcAft>
               <a:buSzPct val="100000"/>
               <a:buChar char="•"/>
             </a:pPr>
             <a:r>
-              <a:rPr lang="en-US" sz="1600" dirty="0">
-                <a:solidFill>
-                  <a:srgbClr val="333333"/>
-                </a:solidFill>
-              </a:rPr>
-              <a:t>To illustrate this concept, let's consider an analogy. Imagine you are a farmer who wants to acquire a neighboring farm to increase your crop yield. You would n</a:t>
-            </a:r>
-            <a:endParaRPr lang="en-US" sz="1600" dirty="0"/>
-          </a:p>
-        </p:txBody>
-      </p:sp>
-      <p:sp>
-        <p:nvSpPr>
-          <p:cNvPr id="4" name="Text 2"/>
-          <p:cNvSpPr/>
-          <p:nvPr/>
-        </p:nvSpPr>
-        <p:spPr>
-          <a:xfrm>
-            <a:off x="457200" y="4709160"/>
-            <a:ext cx="8229600" cy="320040"/>
+              <a:rPr lang="en-US" sz="1500" dirty="0">
+                <a:solidFill>
+                  <a:srgbClr val="1C1917"/>
+                </a:solidFill>
+                <a:latin typeface="Arial" pitchFamily="34" charset="0"/>
+                <a:ea typeface="Arial" pitchFamily="34" charset="-122"/>
+                <a:cs typeface="Arial" pitchFamily="34" charset="-120"/>
+              </a:rPr>
+              <a:t>Enterprise Value equals Equity Value plus Net Debt, ignoring capital structure.</a:t>
+            </a:r>
+            <a:endParaRPr lang="en-US" sz="1500" dirty="0"/>
+          </a:p>
+          <a:p>
+            <a:pPr marL="152400" indent="-152400">
+              <a:spcAft>
+                <a:spcPts val="800"/>
+              </a:spcAft>
+              <a:buSzPct val="100000"/>
+              <a:buChar char="•"/>
+            </a:pPr>
+            <a:r>
+              <a:rPr lang="en-US" sz="1500" dirty="0">
+                <a:solidFill>
+                  <a:srgbClr val="1C1917"/>
+                </a:solidFill>
+                <a:latin typeface="Arial" pitchFamily="34" charset="0"/>
+                <a:ea typeface="Arial" pitchFamily="34" charset="-122"/>
+                <a:cs typeface="Arial" pitchFamily="34" charset="-120"/>
+              </a:rPr>
+              <a:t>Synergies are incremental value neither company could create independently.</a:t>
+            </a:r>
+            <a:endParaRPr lang="en-US" sz="1500" dirty="0"/>
+          </a:p>
+          <a:p>
+            <a:pPr marL="152400" indent="-152400">
+              <a:spcAft>
+                <a:spcPts val="800"/>
+              </a:spcAft>
+              <a:buSzPct val="100000"/>
+              <a:buChar char="•"/>
+            </a:pPr>
+            <a:r>
+              <a:rPr lang="en-US" sz="1500" dirty="0">
+                <a:solidFill>
+                  <a:srgbClr val="1C1917"/>
+                </a:solidFill>
+                <a:latin typeface="Arial" pitchFamily="34" charset="0"/>
+                <a:ea typeface="Arial" pitchFamily="34" charset="-122"/>
+                <a:cs typeface="Arial" pitchFamily="34" charset="-120"/>
+              </a:rPr>
+              <a:t>Revenue synergies come from cross-selling; cost synergies from eliminating redundancy.</a:t>
+            </a:r>
+            <a:endParaRPr lang="en-US" sz="1500" dirty="0"/>
+          </a:p>
+          <a:p>
+            <a:pPr marL="152400" indent="-152400">
+              <a:spcAft>
+                <a:spcPts val="800"/>
+              </a:spcAft>
+              <a:buSzPct val="100000"/>
+              <a:buChar char="•"/>
+            </a:pPr>
+            <a:r>
+              <a:rPr lang="en-US" sz="1500" dirty="0">
+                <a:solidFill>
+                  <a:srgbClr val="1C1917"/>
+                </a:solidFill>
+                <a:latin typeface="Arial" pitchFamily="34" charset="0"/>
+                <a:ea typeface="Arial" pitchFamily="34" charset="-122"/>
+                <a:cs typeface="Arial" pitchFamily="34" charset="-120"/>
+              </a:rPr>
+              <a:t>Net Debt equals Total Debt minus Cash and Cash Equivalents.</a:t>
+            </a:r>
+            <a:endParaRPr lang="en-US" sz="1500" dirty="0"/>
+          </a:p>
+        </p:txBody>
+      </p:sp>
+      <p:sp>
+        <p:nvSpPr>
+          <p:cNvPr id="7" name="Shape 5"/>
+          <p:cNvSpPr/>
+          <p:nvPr/>
+        </p:nvSpPr>
+        <p:spPr>
+          <a:xfrm>
+            <a:off x="731520" y="4041648"/>
+            <a:ext cx="7680960" cy="566928"/>
+          </a:xfrm>
+          <a:prstGeom prst="roundRect">
+            <a:avLst>
+              <a:gd name="adj" fmla="val 12903"/>
+            </a:avLst>
+          </a:prstGeom>
+          <a:solidFill>
+            <a:srgbClr val="B45309">
+              <a:alpha val="12000"/>
+            </a:srgbClr>
+          </a:solidFill>
+          <a:ln w="12700">
+            <a:solidFill>
+              <a:srgbClr val="B45309"/>
+            </a:solidFill>
+            <a:prstDash val="solid"/>
+          </a:ln>
+        </p:spPr>
+      </p:sp>
+      <p:sp>
+        <p:nvSpPr>
+          <p:cNvPr id="8" name="Text 6"/>
+          <p:cNvSpPr/>
+          <p:nvPr/>
+        </p:nvSpPr>
+        <p:spPr>
+          <a:xfrm>
+            <a:off x="868680" y="4087368"/>
+            <a:ext cx="7406640" cy="475488"/>
           </a:xfrm>
           <a:prstGeom prst="rect">
             <a:avLst/>
@@ -3830,14 +7271,31 @@
               <a:buNone/>
             </a:pPr>
             <a:r>
-              <a:rPr lang="en-US" sz="800" dirty="0">
-                <a:solidFill>
-                  <a:srgbClr val="AAAAAA"/>
-                </a:solidFill>
-              </a:rPr>
-              <a:t>Lesson Forge Pro (owner) — This content is educational material only and does not constitute financial, investment, or trading advice.</a:t>
-            </a:r>
-            <a:endParaRPr lang="en-US" sz="800" dirty="0"/>
+              <a:rPr lang="en-US" sz="1100" b="1" dirty="0">
+                <a:solidFill>
+                  <a:srgbClr val="B45309"/>
+                </a:solidFill>
+                <a:latin typeface="Arial" pitchFamily="34" charset="0"/>
+                <a:ea typeface="Arial" pitchFamily="34" charset="-122"/>
+                <a:cs typeface="Arial" pitchFamily="34" charset="-120"/>
+              </a:rPr>
+              <a:t>Takeaway  </a:t>
+            </a:r>
+            <a:pPr indent="0" marL="0">
+              <a:buNone/>
+            </a:pPr>
+            <a:r>
+              <a:rPr lang="en-US" sz="1150" dirty="0">
+                <a:solidFill>
+                  <a:srgbClr val="1C1917"/>
+                </a:solidFill>
+                <a:latin typeface="Arial" pitchFamily="34" charset="0"/>
+                <a:ea typeface="Arial" pitchFamily="34" charset="-122"/>
+                <a:cs typeface="Arial" pitchFamily="34" charset="-120"/>
+              </a:rPr>
+              <a:t>Mastering EV, equity value, and synergy definitions is foundational before building any M&amp;A model.</a:t>
+            </a:r>
+            <a:endParaRPr lang="en-US" sz="1100" dirty="0"/>
           </a:p>
         </p:txBody>
       </p:sp>
@@ -3849,9 +7307,16 @@
 </p:sld>
 </file>
 
-<file path=ppt/slides/slide9.xml><?xml version="1.0" encoding="utf-8"?>
+<file path=ppt/slides/slide5.xml><?xml version="1.0" encoding="utf-8"?>
 <p:sld xmlns:a="http://schemas.openxmlformats.org/drawingml/2006/main" xmlns:r="http://schemas.openxmlformats.org/officeDocument/2006/relationships" xmlns:p="http://schemas.openxmlformats.org/presentationml/2006/main">
-  <p:cSld name="Slide 9">
+  <p:cSld name="Slide 5">
+    <p:bg>
+      <p:bgPr>
+        <a:solidFill>
+          <a:srgbClr val="FFFFFF"/>
+        </a:solidFill>
+      </p:bgPr>
+    </p:bg>
     <p:spTree>
       <p:nvGrpSpPr>
         <p:cNvPr id="1" name=""/>
@@ -3868,14 +7333,34 @@
       </p:grpSpPr>
       <p:sp>
         <p:nvSpPr>
-          <p:cNvPr id="2" name="Text 0"/>
-          <p:cNvSpPr/>
-          <p:nvPr/>
-        </p:nvSpPr>
-        <p:spPr>
-          <a:xfrm>
-            <a:off x="457200" y="320040"/>
-            <a:ext cx="8229600" cy="731520"/>
+          <p:cNvPr id="2" name="Shape 0"/>
+          <p:cNvSpPr/>
+          <p:nvPr/>
+        </p:nvSpPr>
+        <p:spPr>
+          <a:xfrm>
+            <a:off x="411480" y="402336"/>
+            <a:ext cx="82296" cy="329184"/>
+          </a:xfrm>
+          <a:prstGeom prst="rect">
+            <a:avLst/>
+          </a:prstGeom>
+          <a:solidFill>
+            <a:srgbClr val="B45309"/>
+          </a:solidFill>
+          <a:ln/>
+        </p:spPr>
+      </p:sp>
+      <p:sp>
+        <p:nvSpPr>
+          <p:cNvPr id="3" name="Text 1"/>
+          <p:cNvSpPr/>
+          <p:nvPr/>
+        </p:nvSpPr>
+        <p:spPr>
+          <a:xfrm>
+            <a:off x="566928" y="292608"/>
+            <a:ext cx="8138160" cy="548640"/>
           </a:xfrm>
           <a:prstGeom prst="rect">
             <a:avLst/>
@@ -3891,27 +7376,92 @@
               <a:buNone/>
             </a:pPr>
             <a:r>
-              <a:rPr lang="en-US" sz="2400" b="1" dirty="0">
-                <a:solidFill>
-                  <a:srgbClr val="B45309"/>
-                </a:solidFill>
-              </a:rPr>
-              <a:t>Evaluating Financing Options and Investment Returns (50:00 - 70:00)</a:t>
-            </a:r>
-            <a:endParaRPr lang="en-US" sz="2400" dirty="0"/>
-          </a:p>
-        </p:txBody>
-      </p:sp>
-      <p:sp>
-        <p:nvSpPr>
-          <p:cNvPr id="3" name="Text 1"/>
-          <p:cNvSpPr/>
-          <p:nvPr/>
-        </p:nvSpPr>
-        <p:spPr>
-          <a:xfrm>
-            <a:off x="640080" y="1188720"/>
-            <a:ext cx="7863840" cy="3291840"/>
+              <a:rPr lang="en-US" sz="2100" b="1" dirty="0">
+                <a:solidFill>
+                  <a:srgbClr val="1C1917"/>
+                </a:solidFill>
+                <a:latin typeface="Arial" pitchFamily="34" charset="0"/>
+                <a:ea typeface="Arial" pitchFamily="34" charset="-122"/>
+                <a:cs typeface="Arial" pitchFamily="34" charset="-120"/>
+              </a:rPr>
+              <a:t>Where Financial Modeling Fits in Practice</a:t>
+            </a:r>
+            <a:endParaRPr lang="en-US" sz="2100" dirty="0"/>
+          </a:p>
+        </p:txBody>
+      </p:sp>
+      <p:sp>
+        <p:nvSpPr>
+          <p:cNvPr id="4" name="Shape 2"/>
+          <p:cNvSpPr/>
+          <p:nvPr/>
+        </p:nvSpPr>
+        <p:spPr>
+          <a:xfrm>
+            <a:off x="411480" y="960120"/>
+            <a:ext cx="8321040" cy="0"/>
+          </a:xfrm>
+          <a:prstGeom prst="line">
+            <a:avLst/>
+          </a:prstGeom>
+          <a:noFill/>
+          <a:ln w="12700">
+            <a:solidFill>
+              <a:srgbClr val="E7E5E4"/>
+            </a:solidFill>
+            <a:prstDash val="solid"/>
+          </a:ln>
+        </p:spPr>
+      </p:sp>
+      <p:sp>
+        <p:nvSpPr>
+          <p:cNvPr id="5" name="Text 3"/>
+          <p:cNvSpPr/>
+          <p:nvPr/>
+        </p:nvSpPr>
+        <p:spPr>
+          <a:xfrm>
+            <a:off x="411480" y="4864608"/>
+            <a:ext cx="8321040" cy="237744"/>
+          </a:xfrm>
+          <a:prstGeom prst="rect">
+            <a:avLst/>
+          </a:prstGeom>
+          <a:noFill/>
+          <a:ln/>
+        </p:spPr>
+        <p:txBody>
+          <a:bodyPr wrap="square" rtlCol="0" anchor="ctr"/>
+          <a:lstStyle/>
+          <a:p>
+            <a:pPr indent="0" marL="0">
+              <a:buNone/>
+            </a:pPr>
+            <a:r>
+              <a:rPr lang="en-US" sz="750" dirty="0">
+                <a:solidFill>
+                  <a:srgbClr val="AAAAAA"/>
+                </a:solidFill>
+                <a:latin typeface="Arial" pitchFamily="34" charset="0"/>
+                <a:ea typeface="Arial" pitchFamily="34" charset="-122"/>
+                <a:cs typeface="Arial" pitchFamily="34" charset="-120"/>
+              </a:rPr>
+              <a:t>Lesson Forge Pro (owner) — This content is educational material only and does not constitute financial, investment, or trading advice.</a:t>
+            </a:r>
+            <a:endParaRPr lang="en-US" sz="750" dirty="0"/>
+          </a:p>
+        </p:txBody>
+      </p:sp>
+      <p:sp>
+        <p:nvSpPr>
+          <p:cNvPr id="6" name="Text 4"/>
+          <p:cNvSpPr/>
+          <p:nvPr/>
+        </p:nvSpPr>
+        <p:spPr>
+          <a:xfrm>
+            <a:off x="731520" y="1188720"/>
+            <a:ext cx="7680960" cy="2743200"/>
           </a:xfrm>
           <a:prstGeom prst="rect">
             <a:avLst/>
@@ -3923,47 +7473,151 @@
           <a:bodyPr wrap="square" rtlCol="0" anchor="t"/>
           <a:lstStyle/>
           <a:p>
-            <a:pPr marL="342900" indent="-342900">
+            <a:pPr marL="152400" indent="-152400">
+              <a:spcAft>
+                <a:spcPts val="800"/>
+              </a:spcAft>
               <a:buSzPct val="100000"/>
               <a:buChar char="•"/>
             </a:pPr>
             <a:r>
-              <a:rPr lang="en-US" sz="1600" dirty="0">
-                <a:solidFill>
-                  <a:srgbClr val="333333"/>
-                </a:solidFill>
-              </a:rPr>
-              <a:t>Financial models can also be used to evaluate different financing options and their impact on investment returns. For example, a company may consider issuing de</a:t>
-            </a:r>
-            <a:endParaRPr lang="en-US" sz="1600" dirty="0"/>
-          </a:p>
-          <a:p>
-            <a:pPr marL="342900" indent="-342900">
+              <a:rPr lang="en-US" sz="1500" dirty="0">
+                <a:solidFill>
+                  <a:srgbClr val="1C1917"/>
+                </a:solidFill>
+                <a:latin typeface="Arial" pitchFamily="34" charset="0"/>
+                <a:ea typeface="Arial" pitchFamily="34" charset="-122"/>
+                <a:cs typeface="Arial" pitchFamily="34" charset="-120"/>
+              </a:rPr>
+              <a:t>Models determine fair offer prices for acquisition targets.</a:t>
+            </a:r>
+            <a:endParaRPr lang="en-US" sz="1500" dirty="0"/>
+          </a:p>
+          <a:p>
+            <a:pPr marL="152400" indent="-152400">
+              <a:spcAft>
+                <a:spcPts val="800"/>
+              </a:spcAft>
               <a:buSzPct val="100000"/>
               <a:buChar char="•"/>
             </a:pPr>
             <a:r>
-              <a:rPr lang="en-US" sz="1600" dirty="0">
-                <a:solidFill>
-                  <a:srgbClr val="333333"/>
-                </a:solidFill>
-              </a:rPr>
-              <a:t>To illustrate this concept, let's consider another analogy. Imagine you are a homeowner who wants to finance a new kitchen renovation. You would need to evaluat</a:t>
-            </a:r>
-            <a:endParaRPr lang="en-US" sz="1600" dirty="0"/>
-          </a:p>
-        </p:txBody>
-      </p:sp>
-      <p:sp>
-        <p:nvSpPr>
-          <p:cNvPr id="4" name="Text 2"/>
-          <p:cNvSpPr/>
-          <p:nvPr/>
-        </p:nvSpPr>
-        <p:spPr>
-          <a:xfrm>
-            <a:off x="457200" y="4709160"/>
-            <a:ext cx="8229600" cy="320040"/>
+              <a:rPr lang="en-US" sz="1500" dirty="0">
+                <a:solidFill>
+                  <a:srgbClr val="1C1917"/>
+                </a:solidFill>
+                <a:latin typeface="Arial" pitchFamily="34" charset="0"/>
+                <a:ea typeface="Arial" pitchFamily="34" charset="-122"/>
+                <a:cs typeface="Arial" pitchFamily="34" charset="-120"/>
+              </a:rPr>
+              <a:t>Scenario analysis stress-tests assumptions across bear, base, and bull cases.</a:t>
+            </a:r>
+            <a:endParaRPr lang="en-US" sz="1500" dirty="0"/>
+          </a:p>
+          <a:p>
+            <a:pPr marL="152400" indent="-152400">
+              <a:spcAft>
+                <a:spcPts val="800"/>
+              </a:spcAft>
+              <a:buSzPct val="100000"/>
+              <a:buChar char="•"/>
+            </a:pPr>
+            <a:r>
+              <a:rPr lang="en-US" sz="1500" dirty="0">
+                <a:solidFill>
+                  <a:srgbClr val="1C1917"/>
+                </a:solidFill>
+                <a:latin typeface="Arial" pitchFamily="34" charset="0"/>
+                <a:ea typeface="Arial" pitchFamily="34" charset="-122"/>
+                <a:cs typeface="Arial" pitchFamily="34" charset="-120"/>
+              </a:rPr>
+              <a:t>Models satisfy due diligence requirements for boards, lenders, and regulators.</a:t>
+            </a:r>
+            <a:endParaRPr lang="en-US" sz="1500" dirty="0"/>
+          </a:p>
+          <a:p>
+            <a:pPr marL="152400" indent="-152400">
+              <a:spcAft>
+                <a:spcPts val="800"/>
+              </a:spcAft>
+              <a:buSzPct val="100000"/>
+              <a:buChar char="•"/>
+            </a:pPr>
+            <a:r>
+              <a:rPr lang="en-US" sz="1500" dirty="0">
+                <a:solidFill>
+                  <a:srgbClr val="1C1917"/>
+                </a:solidFill>
+                <a:latin typeface="Arial" pitchFamily="34" charset="0"/>
+                <a:ea typeface="Arial" pitchFamily="34" charset="-122"/>
+                <a:cs typeface="Arial" pitchFamily="34" charset="-120"/>
+              </a:rPr>
+              <a:t>Analysts in banking, corporate development, and private equity build and consume models.</a:t>
+            </a:r>
+            <a:endParaRPr lang="en-US" sz="1500" dirty="0"/>
+          </a:p>
+          <a:p>
+            <a:pPr marL="152400" indent="-152400">
+              <a:spcAft>
+                <a:spcPts val="800"/>
+              </a:spcAft>
+              <a:buSzPct val="100000"/>
+              <a:buChar char="•"/>
+            </a:pPr>
+            <a:r>
+              <a:rPr lang="en-US" sz="1500" dirty="0">
+                <a:solidFill>
+                  <a:srgbClr val="1C1917"/>
+                </a:solidFill>
+                <a:latin typeface="Arial" pitchFamily="34" charset="0"/>
+                <a:ea typeface="Arial" pitchFamily="34" charset="-122"/>
+                <a:cs typeface="Arial" pitchFamily="34" charset="-120"/>
+              </a:rPr>
+              <a:t>Every model simultaneously forecasts, tells a story, and assesses risk.</a:t>
+            </a:r>
+            <a:endParaRPr lang="en-US" sz="1500" dirty="0"/>
+          </a:p>
+        </p:txBody>
+      </p:sp>
+      <p:sp>
+        <p:nvSpPr>
+          <p:cNvPr id="7" name="Shape 5"/>
+          <p:cNvSpPr/>
+          <p:nvPr/>
+        </p:nvSpPr>
+        <p:spPr>
+          <a:xfrm>
+            <a:off x="731520" y="4041648"/>
+            <a:ext cx="7680960" cy="566928"/>
+          </a:xfrm>
+          <a:prstGeom prst="roundRect">
+            <a:avLst>
+              <a:gd name="adj" fmla="val 12903"/>
+            </a:avLst>
+          </a:prstGeom>
+          <a:solidFill>
+            <a:srgbClr val="B45309">
+              <a:alpha val="12000"/>
+            </a:srgbClr>
+          </a:solidFill>
+          <a:ln w="12700">
+            <a:solidFill>
+              <a:srgbClr val="B45309"/>
+            </a:solidFill>
+            <a:prstDash val="solid"/>
+          </a:ln>
+        </p:spPr>
+      </p:sp>
+      <p:sp>
+        <p:nvSpPr>
+          <p:cNvPr id="8" name="Text 6"/>
+          <p:cNvSpPr/>
+          <p:nvPr/>
+        </p:nvSpPr>
+        <p:spPr>
+          <a:xfrm>
+            <a:off x="868680" y="4087368"/>
+            <a:ext cx="7406640" cy="475488"/>
           </a:xfrm>
           <a:prstGeom prst="rect">
             <a:avLst/>
@@ -3979,14 +7633,1778 @@
               <a:buNone/>
             </a:pPr>
             <a:r>
-              <a:rPr lang="en-US" sz="800" dirty="0">
+              <a:rPr lang="en-US" sz="1100" b="1" dirty="0">
+                <a:solidFill>
+                  <a:srgbClr val="B45309"/>
+                </a:solidFill>
+                <a:latin typeface="Arial" pitchFamily="34" charset="0"/>
+                <a:ea typeface="Arial" pitchFamily="34" charset="-122"/>
+                <a:cs typeface="Arial" pitchFamily="34" charset="-120"/>
+              </a:rPr>
+              <a:t>Takeaway  </a:t>
+            </a:r>
+            <a:pPr indent="0" marL="0">
+              <a:buNone/>
+            </a:pPr>
+            <a:r>
+              <a:rPr lang="en-US" sz="1150" dirty="0">
+                <a:solidFill>
+                  <a:srgbClr val="1C1917"/>
+                </a:solidFill>
+                <a:latin typeface="Arial" pitchFamily="34" charset="0"/>
+                <a:ea typeface="Arial" pitchFamily="34" charset="-122"/>
+                <a:cs typeface="Arial" pitchFamily="34" charset="-120"/>
+              </a:rPr>
+              <a:t>Financial modeling is the analytical backbone connecting valuation, decision-making, and stakeholder communication.</a:t>
+            </a:r>
+            <a:endParaRPr lang="en-US" sz="1100" dirty="0"/>
+          </a:p>
+        </p:txBody>
+      </p:sp>
+    </p:spTree>
+  </p:cSld>
+  <p:clrMapOvr>
+    <a:masterClrMapping/>
+  </p:clrMapOvr>
+</p:sld>
+</file>
+
+<file path=ppt/slides/slide6.xml><?xml version="1.0" encoding="utf-8"?>
+<p:sld xmlns:a="http://schemas.openxmlformats.org/drawingml/2006/main" xmlns:r="http://schemas.openxmlformats.org/officeDocument/2006/relationships" xmlns:p="http://schemas.openxmlformats.org/presentationml/2006/main">
+  <p:cSld name="Slide 6">
+    <p:bg>
+      <p:bgPr>
+        <a:solidFill>
+          <a:srgbClr val="FFFFFF"/>
+        </a:solidFill>
+      </p:bgPr>
+    </p:bg>
+    <p:spTree>
+      <p:nvGrpSpPr>
+        <p:cNvPr id="1" name=""/>
+        <p:cNvGrpSpPr/>
+        <p:nvPr/>
+      </p:nvGrpSpPr>
+      <p:grpSpPr>
+        <a:xfrm>
+          <a:off x="0" y="0"/>
+          <a:ext cx="0" cy="0"/>
+          <a:chOff x="0" y="0"/>
+          <a:chExt cx="0" cy="0"/>
+        </a:xfrm>
+      </p:grpSpPr>
+      <p:sp>
+        <p:nvSpPr>
+          <p:cNvPr id="2" name="Shape 0"/>
+          <p:cNvSpPr/>
+          <p:nvPr/>
+        </p:nvSpPr>
+        <p:spPr>
+          <a:xfrm>
+            <a:off x="411480" y="384048"/>
+            <a:ext cx="82296" cy="310896"/>
+          </a:xfrm>
+          <a:prstGeom prst="rect">
+            <a:avLst/>
+          </a:prstGeom>
+          <a:solidFill>
+            <a:srgbClr val="B45309"/>
+          </a:solidFill>
+          <a:ln/>
+        </p:spPr>
+      </p:sp>
+      <p:sp>
+        <p:nvSpPr>
+          <p:cNvPr id="3" name="Text 1"/>
+          <p:cNvSpPr/>
+          <p:nvPr/>
+        </p:nvSpPr>
+        <p:spPr>
+          <a:xfrm>
+            <a:off x="566928" y="292608"/>
+            <a:ext cx="8138160" cy="502920"/>
+          </a:xfrm>
+          <a:prstGeom prst="rect">
+            <a:avLst/>
+          </a:prstGeom>
+          <a:noFill/>
+          <a:ln/>
+        </p:spPr>
+        <p:txBody>
+          <a:bodyPr wrap="square" rtlCol="0" anchor="ctr"/>
+          <a:lstStyle/>
+          <a:p>
+            <a:pPr indent="0" marL="0">
+              <a:buNone/>
+            </a:pPr>
+            <a:r>
+              <a:rPr lang="en-US" sz="2000" b="1" dirty="0">
+                <a:solidFill>
+                  <a:srgbClr val="1C1917"/>
+                </a:solidFill>
+                <a:latin typeface="Arial" pitchFamily="34" charset="0"/>
+                <a:ea typeface="Arial" pitchFamily="34" charset="-122"/>
+                <a:cs typeface="Arial" pitchFamily="34" charset="-120"/>
+              </a:rPr>
+              <a:t>Enterprise Value Build-Up</a:t>
+            </a:r>
+            <a:endParaRPr lang="en-US" sz="2000" dirty="0"/>
+          </a:p>
+        </p:txBody>
+      </p:sp>
+      <p:sp>
+        <p:nvSpPr>
+          <p:cNvPr id="4" name="Text 2"/>
+          <p:cNvSpPr/>
+          <p:nvPr/>
+        </p:nvSpPr>
+        <p:spPr>
+          <a:xfrm>
+            <a:off x="566928" y="4681728"/>
+            <a:ext cx="8138160" cy="320040"/>
+          </a:xfrm>
+          <a:prstGeom prst="rect">
+            <a:avLst/>
+          </a:prstGeom>
+          <a:noFill/>
+          <a:ln/>
+        </p:spPr>
+        <p:txBody>
+          <a:bodyPr wrap="square" rtlCol="0" anchor="ctr"/>
+          <a:lstStyle/>
+          <a:p>
+            <a:pPr indent="0" marL="0">
+              <a:buNone/>
+            </a:pPr>
+            <a:r>
+              <a:rPr lang="en-US" sz="1000" i="1" dirty="0">
+                <a:solidFill>
+                  <a:srgbClr val="78716C"/>
+                </a:solidFill>
+                <a:latin typeface="Arial" pitchFamily="34" charset="0"/>
+                <a:ea typeface="Arial" pitchFamily="34" charset="-122"/>
+                <a:cs typeface="Arial" pitchFamily="34" charset="-120"/>
+              </a:rPr>
+              <a:t>Target Inc. mini-scenario: $18 share price, $120M debt, $20M cash, $40M EBITDA</a:t>
+            </a:r>
+            <a:endParaRPr lang="en-US" sz="1000" dirty="0"/>
+          </a:p>
+        </p:txBody>
+      </p:sp>
+      <p:sp>
+        <p:nvSpPr>
+          <p:cNvPr id="5" name="Text 3"/>
+          <p:cNvSpPr/>
+          <p:nvPr/>
+        </p:nvSpPr>
+        <p:spPr>
+          <a:xfrm>
+            <a:off x="411480" y="4919472"/>
+            <a:ext cx="8321040" cy="219456"/>
+          </a:xfrm>
+          <a:prstGeom prst="rect">
+            <a:avLst/>
+          </a:prstGeom>
+          <a:noFill/>
+          <a:ln/>
+        </p:spPr>
+        <p:txBody>
+          <a:bodyPr wrap="square" rtlCol="0" anchor="ctr"/>
+          <a:lstStyle/>
+          <a:p>
+            <a:pPr indent="0" marL="0">
+              <a:buNone/>
+            </a:pPr>
+            <a:r>
+              <a:rPr lang="en-US" sz="750" dirty="0">
                 <a:solidFill>
                   <a:srgbClr val="AAAAAA"/>
                 </a:solidFill>
+                <a:latin typeface="Arial" pitchFamily="34" charset="0"/>
+                <a:ea typeface="Arial" pitchFamily="34" charset="-122"/>
+                <a:cs typeface="Arial" pitchFamily="34" charset="-120"/>
               </a:rPr>
               <a:t>Lesson Forge Pro (owner) — This content is educational material only and does not constitute financial, investment, or trading advice.</a:t>
             </a:r>
-            <a:endParaRPr lang="en-US" sz="800" dirty="0"/>
+            <a:endParaRPr lang="en-US" sz="750" dirty="0"/>
+          </a:p>
+        </p:txBody>
+      </p:sp>
+      <p:sp>
+        <p:nvSpPr>
+          <p:cNvPr id="6" name="Shape 4"/>
+          <p:cNvSpPr/>
+          <p:nvPr/>
+        </p:nvSpPr>
+        <p:spPr>
+          <a:xfrm>
+            <a:off x="685800" y="4206240"/>
+            <a:ext cx="7772400" cy="0"/>
+          </a:xfrm>
+          <a:prstGeom prst="line">
+            <a:avLst/>
+          </a:prstGeom>
+          <a:noFill/>
+          <a:ln w="12700">
+            <a:solidFill>
+              <a:srgbClr val="1C1917"/>
+            </a:solidFill>
+            <a:prstDash val="solid"/>
+          </a:ln>
+        </p:spPr>
+      </p:sp>
+      <p:sp>
+        <p:nvSpPr>
+          <p:cNvPr id="7" name="Shape 5"/>
+          <p:cNvSpPr/>
+          <p:nvPr/>
+        </p:nvSpPr>
+        <p:spPr>
+          <a:xfrm>
+            <a:off x="1184148" y="2915322"/>
+            <a:ext cx="777240" cy="1290918"/>
+          </a:xfrm>
+          <a:prstGeom prst="rect">
+            <a:avLst/>
+          </a:prstGeom>
+          <a:solidFill>
+            <a:srgbClr val="15803D"/>
+          </a:solidFill>
+          <a:ln/>
+        </p:spPr>
+      </p:sp>
+      <p:sp>
+        <p:nvSpPr>
+          <p:cNvPr id="8" name="Text 6"/>
+          <p:cNvSpPr/>
+          <p:nvPr/>
+        </p:nvSpPr>
+        <p:spPr>
+          <a:xfrm>
+            <a:off x="1001268" y="2641002"/>
+            <a:ext cx="1143000" cy="237744"/>
+          </a:xfrm>
+          <a:prstGeom prst="rect">
+            <a:avLst/>
+          </a:prstGeom>
+          <a:noFill/>
+          <a:ln/>
+        </p:spPr>
+        <p:txBody>
+          <a:bodyPr wrap="square" rtlCol="0" anchor="ctr"/>
+          <a:lstStyle/>
+          <a:p>
+            <a:pPr algn="ctr" indent="0" marL="0">
+              <a:buNone/>
+            </a:pPr>
+            <a:r>
+              <a:rPr lang="en-US" sz="950" b="1" dirty="0">
+                <a:solidFill>
+                  <a:srgbClr val="1C1917"/>
+                </a:solidFill>
+                <a:latin typeface="Arial" pitchFamily="34" charset="0"/>
+                <a:ea typeface="Arial" pitchFamily="34" charset="-122"/>
+                <a:cs typeface="Arial" pitchFamily="34" charset="-120"/>
+              </a:rPr>
+              <a:t>900</a:t>
+            </a:r>
+            <a:endParaRPr lang="en-US" sz="950" dirty="0"/>
+          </a:p>
+        </p:txBody>
+      </p:sp>
+      <p:sp>
+        <p:nvSpPr>
+          <p:cNvPr id="9" name="Text 7"/>
+          <p:cNvSpPr/>
+          <p:nvPr/>
+        </p:nvSpPr>
+        <p:spPr>
+          <a:xfrm>
+            <a:off x="955548" y="4315968"/>
+            <a:ext cx="1234440" cy="502920"/>
+          </a:xfrm>
+          <a:prstGeom prst="rect">
+            <a:avLst/>
+          </a:prstGeom>
+          <a:noFill/>
+          <a:ln/>
+        </p:spPr>
+        <p:txBody>
+          <a:bodyPr wrap="square" rtlCol="0" anchor="ctr"/>
+          <a:lstStyle/>
+          <a:p>
+            <a:pPr algn="ctr" indent="0" marL="0">
+              <a:buNone/>
+            </a:pPr>
+            <a:r>
+              <a:rPr lang="en-US" sz="850" dirty="0">
+                <a:solidFill>
+                  <a:srgbClr val="78716C"/>
+                </a:solidFill>
+                <a:latin typeface="Arial" pitchFamily="34" charset="0"/>
+                <a:ea typeface="Arial" pitchFamily="34" charset="-122"/>
+                <a:cs typeface="Arial" pitchFamily="34" charset="-120"/>
+              </a:rPr>
+              <a:t>Equity Value</a:t>
+            </a:r>
+            <a:endParaRPr lang="en-US" sz="850" dirty="0"/>
+          </a:p>
+        </p:txBody>
+      </p:sp>
+      <p:sp>
+        <p:nvSpPr>
+          <p:cNvPr id="10" name="Shape 8"/>
+          <p:cNvSpPr/>
+          <p:nvPr/>
+        </p:nvSpPr>
+        <p:spPr>
+          <a:xfrm>
+            <a:off x="2683764" y="2771887"/>
+            <a:ext cx="777240" cy="143435"/>
+          </a:xfrm>
+          <a:prstGeom prst="rect">
+            <a:avLst/>
+          </a:prstGeom>
+          <a:solidFill>
+            <a:srgbClr val="15803D"/>
+          </a:solidFill>
+          <a:ln/>
+        </p:spPr>
+      </p:sp>
+      <p:sp>
+        <p:nvSpPr>
+          <p:cNvPr id="11" name="Text 9"/>
+          <p:cNvSpPr/>
+          <p:nvPr/>
+        </p:nvSpPr>
+        <p:spPr>
+          <a:xfrm>
+            <a:off x="2500884" y="2497567"/>
+            <a:ext cx="1143000" cy="237744"/>
+          </a:xfrm>
+          <a:prstGeom prst="rect">
+            <a:avLst/>
+          </a:prstGeom>
+          <a:noFill/>
+          <a:ln/>
+        </p:spPr>
+        <p:txBody>
+          <a:bodyPr wrap="square" rtlCol="0" anchor="ctr"/>
+          <a:lstStyle/>
+          <a:p>
+            <a:pPr algn="ctr" indent="0" marL="0">
+              <a:buNone/>
+            </a:pPr>
+            <a:r>
+              <a:rPr lang="en-US" sz="950" b="1" dirty="0">
+                <a:solidFill>
+                  <a:srgbClr val="1C1917"/>
+                </a:solidFill>
+                <a:latin typeface="Arial" pitchFamily="34" charset="0"/>
+                <a:ea typeface="Arial" pitchFamily="34" charset="-122"/>
+                <a:cs typeface="Arial" pitchFamily="34" charset="-120"/>
+              </a:rPr>
+              <a:t>100</a:t>
+            </a:r>
+            <a:endParaRPr lang="en-US" sz="950" dirty="0"/>
+          </a:p>
+        </p:txBody>
+      </p:sp>
+      <p:sp>
+        <p:nvSpPr>
+          <p:cNvPr id="12" name="Text 10"/>
+          <p:cNvSpPr/>
+          <p:nvPr/>
+        </p:nvSpPr>
+        <p:spPr>
+          <a:xfrm>
+            <a:off x="2455164" y="4315968"/>
+            <a:ext cx="1234440" cy="502920"/>
+          </a:xfrm>
+          <a:prstGeom prst="rect">
+            <a:avLst/>
+          </a:prstGeom>
+          <a:noFill/>
+          <a:ln/>
+        </p:spPr>
+        <p:txBody>
+          <a:bodyPr wrap="square" rtlCol="0" anchor="ctr"/>
+          <a:lstStyle/>
+          <a:p>
+            <a:pPr algn="ctr" indent="0" marL="0">
+              <a:buNone/>
+            </a:pPr>
+            <a:r>
+              <a:rPr lang="en-US" sz="850" dirty="0">
+                <a:solidFill>
+                  <a:srgbClr val="78716C"/>
+                </a:solidFill>
+                <a:latin typeface="Arial" pitchFamily="34" charset="0"/>
+                <a:ea typeface="Arial" pitchFamily="34" charset="-122"/>
+                <a:cs typeface="Arial" pitchFamily="34" charset="-120"/>
+              </a:rPr>
+              <a:t>Add: Net Debt</a:t>
+            </a:r>
+            <a:endParaRPr lang="en-US" sz="850" dirty="0"/>
+          </a:p>
+        </p:txBody>
+      </p:sp>
+      <p:sp>
+        <p:nvSpPr>
+          <p:cNvPr id="13" name="Shape 11"/>
+          <p:cNvSpPr/>
+          <p:nvPr/>
+        </p:nvSpPr>
+        <p:spPr>
+          <a:xfrm>
+            <a:off x="4183380" y="1337534"/>
+            <a:ext cx="777240" cy="1434353"/>
+          </a:xfrm>
+          <a:prstGeom prst="rect">
+            <a:avLst/>
+          </a:prstGeom>
+          <a:solidFill>
+            <a:srgbClr val="15803D"/>
+          </a:solidFill>
+          <a:ln/>
+        </p:spPr>
+      </p:sp>
+      <p:sp>
+        <p:nvSpPr>
+          <p:cNvPr id="14" name="Text 12"/>
+          <p:cNvSpPr/>
+          <p:nvPr/>
+        </p:nvSpPr>
+        <p:spPr>
+          <a:xfrm>
+            <a:off x="4000500" y="1063214"/>
+            <a:ext cx="1143000" cy="237744"/>
+          </a:xfrm>
+          <a:prstGeom prst="rect">
+            <a:avLst/>
+          </a:prstGeom>
+          <a:noFill/>
+          <a:ln/>
+        </p:spPr>
+        <p:txBody>
+          <a:bodyPr wrap="square" rtlCol="0" anchor="ctr"/>
+          <a:lstStyle/>
+          <a:p>
+            <a:pPr algn="ctr" indent="0" marL="0">
+              <a:buNone/>
+            </a:pPr>
+            <a:r>
+              <a:rPr lang="en-US" sz="950" b="1" dirty="0">
+                <a:solidFill>
+                  <a:srgbClr val="1C1917"/>
+                </a:solidFill>
+                <a:latin typeface="Arial" pitchFamily="34" charset="0"/>
+                <a:ea typeface="Arial" pitchFamily="34" charset="-122"/>
+                <a:cs typeface="Arial" pitchFamily="34" charset="-120"/>
+              </a:rPr>
+              <a:t>1000</a:t>
+            </a:r>
+            <a:endParaRPr lang="en-US" sz="950" dirty="0"/>
+          </a:p>
+        </p:txBody>
+      </p:sp>
+      <p:sp>
+        <p:nvSpPr>
+          <p:cNvPr id="15" name="Text 13"/>
+          <p:cNvSpPr/>
+          <p:nvPr/>
+        </p:nvSpPr>
+        <p:spPr>
+          <a:xfrm>
+            <a:off x="3954780" y="4315968"/>
+            <a:ext cx="1234440" cy="502920"/>
+          </a:xfrm>
+          <a:prstGeom prst="rect">
+            <a:avLst/>
+          </a:prstGeom>
+          <a:noFill/>
+          <a:ln/>
+        </p:spPr>
+        <p:txBody>
+          <a:bodyPr wrap="square" rtlCol="0" anchor="ctr"/>
+          <a:lstStyle/>
+          <a:p>
+            <a:pPr algn="ctr" indent="0" marL="0">
+              <a:buNone/>
+            </a:pPr>
+            <a:r>
+              <a:rPr lang="en-US" sz="850" dirty="0">
+                <a:solidFill>
+                  <a:srgbClr val="78716C"/>
+                </a:solidFill>
+                <a:latin typeface="Arial" pitchFamily="34" charset="0"/>
+                <a:ea typeface="Arial" pitchFamily="34" charset="-122"/>
+                <a:cs typeface="Arial" pitchFamily="34" charset="-120"/>
+              </a:rPr>
+              <a:t>Enterprise Value</a:t>
+            </a:r>
+            <a:endParaRPr lang="en-US" sz="850" dirty="0"/>
+          </a:p>
+        </p:txBody>
+      </p:sp>
+      <p:sp>
+        <p:nvSpPr>
+          <p:cNvPr id="16" name="Shape 14"/>
+          <p:cNvSpPr/>
+          <p:nvPr/>
+        </p:nvSpPr>
+        <p:spPr>
+          <a:xfrm>
+            <a:off x="5682996" y="1280160"/>
+            <a:ext cx="777240" cy="57374"/>
+          </a:xfrm>
+          <a:prstGeom prst="rect">
+            <a:avLst/>
+          </a:prstGeom>
+          <a:solidFill>
+            <a:srgbClr val="15803D"/>
+          </a:solidFill>
+          <a:ln/>
+        </p:spPr>
+      </p:sp>
+      <p:sp>
+        <p:nvSpPr>
+          <p:cNvPr id="17" name="Text 15"/>
+          <p:cNvSpPr/>
+          <p:nvPr/>
+        </p:nvSpPr>
+        <p:spPr>
+          <a:xfrm>
+            <a:off x="5500116" y="1005840"/>
+            <a:ext cx="1143000" cy="237744"/>
+          </a:xfrm>
+          <a:prstGeom prst="rect">
+            <a:avLst/>
+          </a:prstGeom>
+          <a:noFill/>
+          <a:ln/>
+        </p:spPr>
+        <p:txBody>
+          <a:bodyPr wrap="square" rtlCol="0" anchor="ctr"/>
+          <a:lstStyle/>
+          <a:p>
+            <a:pPr algn="ctr" indent="0" marL="0">
+              <a:buNone/>
+            </a:pPr>
+            <a:r>
+              <a:rPr lang="en-US" sz="950" b="1" dirty="0">
+                <a:solidFill>
+                  <a:srgbClr val="1C1917"/>
+                </a:solidFill>
+                <a:latin typeface="Arial" pitchFamily="34" charset="0"/>
+                <a:ea typeface="Arial" pitchFamily="34" charset="-122"/>
+                <a:cs typeface="Arial" pitchFamily="34" charset="-120"/>
+              </a:rPr>
+              <a:t>40</a:t>
+            </a:r>
+            <a:endParaRPr lang="en-US" sz="950" dirty="0"/>
+          </a:p>
+        </p:txBody>
+      </p:sp>
+      <p:sp>
+        <p:nvSpPr>
+          <p:cNvPr id="18" name="Text 16"/>
+          <p:cNvSpPr/>
+          <p:nvPr/>
+        </p:nvSpPr>
+        <p:spPr>
+          <a:xfrm>
+            <a:off x="5454396" y="4315968"/>
+            <a:ext cx="1234440" cy="502920"/>
+          </a:xfrm>
+          <a:prstGeom prst="rect">
+            <a:avLst/>
+          </a:prstGeom>
+          <a:noFill/>
+          <a:ln/>
+        </p:spPr>
+        <p:txBody>
+          <a:bodyPr wrap="square" rtlCol="0" anchor="ctr"/>
+          <a:lstStyle/>
+          <a:p>
+            <a:pPr algn="ctr" indent="0" marL="0">
+              <a:buNone/>
+            </a:pPr>
+            <a:r>
+              <a:rPr lang="en-US" sz="850" dirty="0">
+                <a:solidFill>
+                  <a:srgbClr val="78716C"/>
+                </a:solidFill>
+                <a:latin typeface="Arial" pitchFamily="34" charset="0"/>
+                <a:ea typeface="Arial" pitchFamily="34" charset="-122"/>
+                <a:cs typeface="Arial" pitchFamily="34" charset="-120"/>
+              </a:rPr>
+              <a:t>EBITDA</a:t>
+            </a:r>
+            <a:endParaRPr lang="en-US" sz="850" dirty="0"/>
+          </a:p>
+        </p:txBody>
+      </p:sp>
+      <p:sp>
+        <p:nvSpPr>
+          <p:cNvPr id="19" name="Shape 17"/>
+          <p:cNvSpPr/>
+          <p:nvPr/>
+        </p:nvSpPr>
+        <p:spPr>
+          <a:xfrm>
+            <a:off x="7182612" y="4170381"/>
+            <a:ext cx="777240" cy="35859"/>
+          </a:xfrm>
+          <a:prstGeom prst="rect">
+            <a:avLst/>
+          </a:prstGeom>
+          <a:solidFill>
+            <a:srgbClr val="B45309"/>
+          </a:solidFill>
+          <a:ln/>
+        </p:spPr>
+      </p:sp>
+      <p:sp>
+        <p:nvSpPr>
+          <p:cNvPr id="20" name="Text 18"/>
+          <p:cNvSpPr/>
+          <p:nvPr/>
+        </p:nvSpPr>
+        <p:spPr>
+          <a:xfrm>
+            <a:off x="6999732" y="3896061"/>
+            <a:ext cx="1143000" cy="237744"/>
+          </a:xfrm>
+          <a:prstGeom prst="rect">
+            <a:avLst/>
+          </a:prstGeom>
+          <a:noFill/>
+          <a:ln/>
+        </p:spPr>
+        <p:txBody>
+          <a:bodyPr wrap="square" rtlCol="0" anchor="ctr"/>
+          <a:lstStyle/>
+          <a:p>
+            <a:pPr algn="ctr" indent="0" marL="0">
+              <a:buNone/>
+            </a:pPr>
+            <a:r>
+              <a:rPr lang="en-US" sz="950" b="1" dirty="0">
+                <a:solidFill>
+                  <a:srgbClr val="1C1917"/>
+                </a:solidFill>
+                <a:latin typeface="Arial" pitchFamily="34" charset="0"/>
+                <a:ea typeface="Arial" pitchFamily="34" charset="-122"/>
+                <a:cs typeface="Arial" pitchFamily="34" charset="-120"/>
+              </a:rPr>
+              <a:t>25</a:t>
+            </a:r>
+            <a:endParaRPr lang="en-US" sz="950" dirty="0"/>
+          </a:p>
+        </p:txBody>
+      </p:sp>
+      <p:sp>
+        <p:nvSpPr>
+          <p:cNvPr id="21" name="Text 19"/>
+          <p:cNvSpPr/>
+          <p:nvPr/>
+        </p:nvSpPr>
+        <p:spPr>
+          <a:xfrm>
+            <a:off x="6954012" y="4315968"/>
+            <a:ext cx="1234440" cy="502920"/>
+          </a:xfrm>
+          <a:prstGeom prst="rect">
+            <a:avLst/>
+          </a:prstGeom>
+          <a:noFill/>
+          <a:ln/>
+        </p:spPr>
+        <p:txBody>
+          <a:bodyPr wrap="square" rtlCol="0" anchor="ctr"/>
+          <a:lstStyle/>
+          <a:p>
+            <a:pPr algn="ctr" indent="0" marL="0">
+              <a:buNone/>
+            </a:pPr>
+            <a:r>
+              <a:rPr lang="en-US" sz="850" dirty="0">
+                <a:solidFill>
+                  <a:srgbClr val="78716C"/>
+                </a:solidFill>
+                <a:latin typeface="Arial" pitchFamily="34" charset="0"/>
+                <a:ea typeface="Arial" pitchFamily="34" charset="-122"/>
+                <a:cs typeface="Arial" pitchFamily="34" charset="-120"/>
+              </a:rPr>
+              <a:t>EV/EBITDA Multiple</a:t>
+            </a:r>
+            <a:endParaRPr lang="en-US" sz="850" dirty="0"/>
+          </a:p>
+        </p:txBody>
+      </p:sp>
+    </p:spTree>
+  </p:cSld>
+  <p:clrMapOvr>
+    <a:masterClrMapping/>
+  </p:clrMapOvr>
+</p:sld>
+</file>
+
+<file path=ppt/slides/slide7.xml><?xml version="1.0" encoding="utf-8"?>
+<p:sld xmlns:a="http://schemas.openxmlformats.org/drawingml/2006/main" xmlns:r="http://schemas.openxmlformats.org/officeDocument/2006/relationships" xmlns:p="http://schemas.openxmlformats.org/presentationml/2006/main">
+  <p:cSld name="Slide 7">
+    <p:bg>
+      <p:bgPr>
+        <a:solidFill>
+          <a:srgbClr val="FFFFFF"/>
+        </a:solidFill>
+      </p:bgPr>
+    </p:bg>
+    <p:spTree>
+      <p:nvGrpSpPr>
+        <p:cNvPr id="1" name=""/>
+        <p:cNvGrpSpPr/>
+        <p:nvPr/>
+      </p:nvGrpSpPr>
+      <p:grpSpPr>
+        <a:xfrm>
+          <a:off x="0" y="0"/>
+          <a:ext cx="0" cy="0"/>
+          <a:chOff x="0" y="0"/>
+          <a:chExt cx="0" cy="0"/>
+        </a:xfrm>
+      </p:grpSpPr>
+      <p:sp>
+        <p:nvSpPr>
+          <p:cNvPr id="2" name="Shape 0"/>
+          <p:cNvSpPr/>
+          <p:nvPr/>
+        </p:nvSpPr>
+        <p:spPr>
+          <a:xfrm>
+            <a:off x="411480" y="402336"/>
+            <a:ext cx="82296" cy="329184"/>
+          </a:xfrm>
+          <a:prstGeom prst="rect">
+            <a:avLst/>
+          </a:prstGeom>
+          <a:solidFill>
+            <a:srgbClr val="B45309"/>
+          </a:solidFill>
+          <a:ln/>
+        </p:spPr>
+      </p:sp>
+      <p:sp>
+        <p:nvSpPr>
+          <p:cNvPr id="3" name="Text 1"/>
+          <p:cNvSpPr/>
+          <p:nvPr/>
+        </p:nvSpPr>
+        <p:spPr>
+          <a:xfrm>
+            <a:off x="566928" y="292608"/>
+            <a:ext cx="8138160" cy="548640"/>
+          </a:xfrm>
+          <a:prstGeom prst="rect">
+            <a:avLst/>
+          </a:prstGeom>
+          <a:noFill/>
+          <a:ln/>
+        </p:spPr>
+        <p:txBody>
+          <a:bodyPr wrap="square" rtlCol="0" anchor="ctr"/>
+          <a:lstStyle/>
+          <a:p>
+            <a:pPr indent="0" marL="0">
+              <a:buNone/>
+            </a:pPr>
+            <a:r>
+              <a:rPr lang="en-US" sz="2100" b="1" dirty="0">
+                <a:solidFill>
+                  <a:srgbClr val="1C1917"/>
+                </a:solidFill>
+                <a:latin typeface="Arial" pitchFamily="34" charset="0"/>
+                <a:ea typeface="Arial" pitchFamily="34" charset="-122"/>
+                <a:cs typeface="Arial" pitchFamily="34" charset="-120"/>
+              </a:rPr>
+              <a:t>Standard Notation</a:t>
+            </a:r>
+            <a:endParaRPr lang="en-US" sz="2100" dirty="0"/>
+          </a:p>
+        </p:txBody>
+      </p:sp>
+      <p:sp>
+        <p:nvSpPr>
+          <p:cNvPr id="4" name="Shape 2"/>
+          <p:cNvSpPr/>
+          <p:nvPr/>
+        </p:nvSpPr>
+        <p:spPr>
+          <a:xfrm>
+            <a:off x="411480" y="960120"/>
+            <a:ext cx="8321040" cy="0"/>
+          </a:xfrm>
+          <a:prstGeom prst="line">
+            <a:avLst/>
+          </a:prstGeom>
+          <a:noFill/>
+          <a:ln w="12700">
+            <a:solidFill>
+              <a:srgbClr val="E7E5E4"/>
+            </a:solidFill>
+            <a:prstDash val="solid"/>
+          </a:ln>
+        </p:spPr>
+      </p:sp>
+      <p:sp>
+        <p:nvSpPr>
+          <p:cNvPr id="5" name="Text 3"/>
+          <p:cNvSpPr/>
+          <p:nvPr/>
+        </p:nvSpPr>
+        <p:spPr>
+          <a:xfrm>
+            <a:off x="411480" y="4864608"/>
+            <a:ext cx="8321040" cy="237744"/>
+          </a:xfrm>
+          <a:prstGeom prst="rect">
+            <a:avLst/>
+          </a:prstGeom>
+          <a:noFill/>
+          <a:ln/>
+        </p:spPr>
+        <p:txBody>
+          <a:bodyPr wrap="square" rtlCol="0" anchor="ctr"/>
+          <a:lstStyle/>
+          <a:p>
+            <a:pPr indent="0" marL="0">
+              <a:buNone/>
+            </a:pPr>
+            <a:r>
+              <a:rPr lang="en-US" sz="750" dirty="0">
+                <a:solidFill>
+                  <a:srgbClr val="AAAAAA"/>
+                </a:solidFill>
+                <a:latin typeface="Arial" pitchFamily="34" charset="0"/>
+                <a:ea typeface="Arial" pitchFamily="34" charset="-122"/>
+                <a:cs typeface="Arial" pitchFamily="34" charset="-120"/>
+              </a:rPr>
+              <a:t>Lesson Forge Pro (owner) — This content is educational material only and does not constitute financial, investment, or trading advice.</a:t>
+            </a:r>
+            <a:endParaRPr lang="en-US" sz="750" dirty="0"/>
+          </a:p>
+        </p:txBody>
+      </p:sp>
+      <p:sp>
+        <p:nvSpPr>
+          <p:cNvPr id="6" name="Text 4"/>
+          <p:cNvSpPr/>
+          <p:nvPr/>
+        </p:nvSpPr>
+        <p:spPr>
+          <a:xfrm>
+            <a:off x="731520" y="1188720"/>
+            <a:ext cx="7680960" cy="2743200"/>
+          </a:xfrm>
+          <a:prstGeom prst="rect">
+            <a:avLst/>
+          </a:prstGeom>
+          <a:noFill/>
+          <a:ln/>
+        </p:spPr>
+        <p:txBody>
+          <a:bodyPr wrap="square" rtlCol="0" anchor="t"/>
+          <a:lstStyle/>
+          <a:p>
+            <a:pPr marL="152400" indent="-152400">
+              <a:spcAft>
+                <a:spcPts val="800"/>
+              </a:spcAft>
+              <a:buSzPct val="100000"/>
+              <a:buChar char="•"/>
+            </a:pPr>
+            <a:r>
+              <a:rPr lang="en-US" sz="1500" dirty="0">
+                <a:solidFill>
+                  <a:srgbClr val="1C1917"/>
+                </a:solidFill>
+                <a:latin typeface="Arial" pitchFamily="34" charset="0"/>
+                <a:ea typeface="Arial" pitchFamily="34" charset="-122"/>
+                <a:cs typeface="Arial" pitchFamily="34" charset="-120"/>
+              </a:rPr>
+              <a:t>EV = Enterprise Value; Mkt Cap = Equity Value (Market Capitalization).</a:t>
+            </a:r>
+            <a:endParaRPr lang="en-US" sz="1500" dirty="0"/>
+          </a:p>
+          <a:p>
+            <a:pPr marL="152400" indent="-152400">
+              <a:spcAft>
+                <a:spcPts val="800"/>
+              </a:spcAft>
+              <a:buSzPct val="100000"/>
+              <a:buChar char="•"/>
+            </a:pPr>
+            <a:r>
+              <a:rPr lang="en-US" sz="1500" dirty="0">
+                <a:solidFill>
+                  <a:srgbClr val="1C1917"/>
+                </a:solidFill>
+                <a:latin typeface="Arial" pitchFamily="34" charset="0"/>
+                <a:ea typeface="Arial" pitchFamily="34" charset="-122"/>
+                <a:cs typeface="Arial" pitchFamily="34" charset="-120"/>
+              </a:rPr>
+              <a:t>EBITDA measures operating earnings before non-cash and financing charges.</a:t>
+            </a:r>
+            <a:endParaRPr lang="en-US" sz="1500" dirty="0"/>
+          </a:p>
+          <a:p>
+            <a:pPr marL="152400" indent="-152400">
+              <a:spcAft>
+                <a:spcPts val="800"/>
+              </a:spcAft>
+              <a:buSzPct val="100000"/>
+              <a:buChar char="•"/>
+            </a:pPr>
+            <a:r>
+              <a:rPr lang="en-US" sz="1500" dirty="0">
+                <a:solidFill>
+                  <a:srgbClr val="1C1917"/>
+                </a:solidFill>
+                <a:latin typeface="Arial" pitchFamily="34" charset="0"/>
+                <a:ea typeface="Arial" pitchFamily="34" charset="-122"/>
+                <a:cs typeface="Arial" pitchFamily="34" charset="-120"/>
+              </a:rPr>
+              <a:t>WACC is the blended required return across debt and equity capital.</a:t>
+            </a:r>
+            <a:endParaRPr lang="en-US" sz="1500" dirty="0"/>
+          </a:p>
+          <a:p>
+            <a:pPr marL="152400" indent="-152400">
+              <a:spcAft>
+                <a:spcPts val="800"/>
+              </a:spcAft>
+              <a:buSzPct val="100000"/>
+              <a:buChar char="•"/>
+            </a:pPr>
+            <a:r>
+              <a:rPr lang="en-US" sz="1500" dirty="0">
+                <a:solidFill>
+                  <a:srgbClr val="1C1917"/>
+                </a:solidFill>
+                <a:latin typeface="Arial" pitchFamily="34" charset="0"/>
+                <a:ea typeface="Arial" pitchFamily="34" charset="-122"/>
+                <a:cs typeface="Arial" pitchFamily="34" charset="-120"/>
+              </a:rPr>
+              <a:t>FCF is free cash flow; PV is present value; t is the corporate tax rate.</a:t>
+            </a:r>
+            <a:endParaRPr lang="en-US" sz="1500" dirty="0"/>
+          </a:p>
+          <a:p>
+            <a:pPr marL="152400" indent="-152400">
+              <a:spcAft>
+                <a:spcPts val="800"/>
+              </a:spcAft>
+              <a:buSzPct val="100000"/>
+              <a:buChar char="•"/>
+            </a:pPr>
+            <a:r>
+              <a:rPr lang="en-US" sz="1500" dirty="0">
+                <a:solidFill>
+                  <a:srgbClr val="1C1917"/>
+                </a:solidFill>
+                <a:latin typeface="Arial" pitchFamily="34" charset="0"/>
+                <a:ea typeface="Arial" pitchFamily="34" charset="-122"/>
+                <a:cs typeface="Arial" pitchFamily="34" charset="-120"/>
+              </a:rPr>
+              <a:t>ND (Net Debt) bridges enterprise value and equity value calculations.</a:t>
+            </a:r>
+            <a:endParaRPr lang="en-US" sz="1500" dirty="0"/>
+          </a:p>
+        </p:txBody>
+      </p:sp>
+      <p:sp>
+        <p:nvSpPr>
+          <p:cNvPr id="7" name="Shape 5"/>
+          <p:cNvSpPr/>
+          <p:nvPr/>
+        </p:nvSpPr>
+        <p:spPr>
+          <a:xfrm>
+            <a:off x="731520" y="4041648"/>
+            <a:ext cx="7680960" cy="566928"/>
+          </a:xfrm>
+          <a:prstGeom prst="roundRect">
+            <a:avLst>
+              <a:gd name="adj" fmla="val 12903"/>
+            </a:avLst>
+          </a:prstGeom>
+          <a:solidFill>
+            <a:srgbClr val="B45309">
+              <a:alpha val="12000"/>
+            </a:srgbClr>
+          </a:solidFill>
+          <a:ln w="12700">
+            <a:solidFill>
+              <a:srgbClr val="B45309"/>
+            </a:solidFill>
+            <a:prstDash val="solid"/>
+          </a:ln>
+        </p:spPr>
+      </p:sp>
+      <p:sp>
+        <p:nvSpPr>
+          <p:cNvPr id="8" name="Text 6"/>
+          <p:cNvSpPr/>
+          <p:nvPr/>
+        </p:nvSpPr>
+        <p:spPr>
+          <a:xfrm>
+            <a:off x="868680" y="4087368"/>
+            <a:ext cx="7406640" cy="475488"/>
+          </a:xfrm>
+          <a:prstGeom prst="rect">
+            <a:avLst/>
+          </a:prstGeom>
+          <a:noFill/>
+          <a:ln/>
+        </p:spPr>
+        <p:txBody>
+          <a:bodyPr wrap="square" rtlCol="0" anchor="ctr"/>
+          <a:lstStyle/>
+          <a:p>
+            <a:pPr indent="0" marL="0">
+              <a:buNone/>
+            </a:pPr>
+            <a:r>
+              <a:rPr lang="en-US" sz="1100" b="1" dirty="0">
+                <a:solidFill>
+                  <a:srgbClr val="B45309"/>
+                </a:solidFill>
+                <a:latin typeface="Arial" pitchFamily="34" charset="0"/>
+                <a:ea typeface="Arial" pitchFamily="34" charset="-122"/>
+                <a:cs typeface="Arial" pitchFamily="34" charset="-120"/>
+              </a:rPr>
+              <a:t>Takeaway  </a:t>
+            </a:r>
+            <a:pPr indent="0" marL="0">
+              <a:buNone/>
+            </a:pPr>
+            <a:r>
+              <a:rPr lang="en-US" sz="1150" dirty="0">
+                <a:solidFill>
+                  <a:srgbClr val="1C1917"/>
+                </a:solidFill>
+                <a:latin typeface="Arial" pitchFamily="34" charset="0"/>
+                <a:ea typeface="Arial" pitchFamily="34" charset="-122"/>
+                <a:cs typeface="Arial" pitchFamily="34" charset="-120"/>
+              </a:rPr>
+              <a:t>Consistent notation across a model eliminates ambiguity and makes formulas instantly auditable.</a:t>
+            </a:r>
+            <a:endParaRPr lang="en-US" sz="1100" dirty="0"/>
+          </a:p>
+        </p:txBody>
+      </p:sp>
+    </p:spTree>
+  </p:cSld>
+  <p:clrMapOvr>
+    <a:masterClrMapping/>
+  </p:clrMapOvr>
+</p:sld>
+</file>
+
+<file path=ppt/slides/slide8.xml><?xml version="1.0" encoding="utf-8"?>
+<p:sld xmlns:a="http://schemas.openxmlformats.org/drawingml/2006/main" xmlns:r="http://schemas.openxmlformats.org/officeDocument/2006/relationships" xmlns:p="http://schemas.openxmlformats.org/presentationml/2006/main">
+  <p:cSld name="Slide 8">
+    <p:bg>
+      <p:bgPr>
+        <a:solidFill>
+          <a:srgbClr val="FFFFFF"/>
+        </a:solidFill>
+      </p:bgPr>
+    </p:bg>
+    <p:spTree>
+      <p:nvGrpSpPr>
+        <p:cNvPr id="1" name=""/>
+        <p:cNvGrpSpPr/>
+        <p:nvPr/>
+      </p:nvGrpSpPr>
+      <p:grpSpPr>
+        <a:xfrm>
+          <a:off x="0" y="0"/>
+          <a:ext cx="0" cy="0"/>
+          <a:chOff x="0" y="0"/>
+          <a:chExt cx="0" cy="0"/>
+        </a:xfrm>
+      </p:grpSpPr>
+      <p:sp>
+        <p:nvSpPr>
+          <p:cNvPr id="2" name="Shape 0"/>
+          <p:cNvSpPr/>
+          <p:nvPr/>
+        </p:nvSpPr>
+        <p:spPr>
+          <a:xfrm>
+            <a:off x="411480" y="402336"/>
+            <a:ext cx="82296" cy="329184"/>
+          </a:xfrm>
+          <a:prstGeom prst="rect">
+            <a:avLst/>
+          </a:prstGeom>
+          <a:solidFill>
+            <a:srgbClr val="B45309"/>
+          </a:solidFill>
+          <a:ln/>
+        </p:spPr>
+      </p:sp>
+      <p:sp>
+        <p:nvSpPr>
+          <p:cNvPr id="3" name="Text 1"/>
+          <p:cNvSpPr/>
+          <p:nvPr/>
+        </p:nvSpPr>
+        <p:spPr>
+          <a:xfrm>
+            <a:off x="566928" y="292608"/>
+            <a:ext cx="8138160" cy="548640"/>
+          </a:xfrm>
+          <a:prstGeom prst="rect">
+            <a:avLst/>
+          </a:prstGeom>
+          <a:noFill/>
+          <a:ln/>
+        </p:spPr>
+        <p:txBody>
+          <a:bodyPr wrap="square" rtlCol="0" anchor="ctr"/>
+          <a:lstStyle/>
+          <a:p>
+            <a:pPr indent="0" marL="0">
+              <a:buNone/>
+            </a:pPr>
+            <a:r>
+              <a:rPr lang="en-US" sz="2100" b="1" dirty="0">
+                <a:solidFill>
+                  <a:srgbClr val="1C1917"/>
+                </a:solidFill>
+                <a:latin typeface="Arial" pitchFamily="34" charset="0"/>
+                <a:ea typeface="Arial" pitchFamily="34" charset="-122"/>
+                <a:cs typeface="Arial" pitchFamily="34" charset="-120"/>
+              </a:rPr>
+              <a:t>Worked Example: Terminology Applied</a:t>
+            </a:r>
+            <a:endParaRPr lang="en-US" sz="2100" dirty="0"/>
+          </a:p>
+        </p:txBody>
+      </p:sp>
+      <p:sp>
+        <p:nvSpPr>
+          <p:cNvPr id="4" name="Shape 2"/>
+          <p:cNvSpPr/>
+          <p:nvPr/>
+        </p:nvSpPr>
+        <p:spPr>
+          <a:xfrm>
+            <a:off x="411480" y="960120"/>
+            <a:ext cx="8321040" cy="0"/>
+          </a:xfrm>
+          <a:prstGeom prst="line">
+            <a:avLst/>
+          </a:prstGeom>
+          <a:noFill/>
+          <a:ln w="12700">
+            <a:solidFill>
+              <a:srgbClr val="E7E5E4"/>
+            </a:solidFill>
+            <a:prstDash val="solid"/>
+          </a:ln>
+        </p:spPr>
+      </p:sp>
+      <p:sp>
+        <p:nvSpPr>
+          <p:cNvPr id="5" name="Text 3"/>
+          <p:cNvSpPr/>
+          <p:nvPr/>
+        </p:nvSpPr>
+        <p:spPr>
+          <a:xfrm>
+            <a:off x="411480" y="4864608"/>
+            <a:ext cx="8321040" cy="237744"/>
+          </a:xfrm>
+          <a:prstGeom prst="rect">
+            <a:avLst/>
+          </a:prstGeom>
+          <a:noFill/>
+          <a:ln/>
+        </p:spPr>
+        <p:txBody>
+          <a:bodyPr wrap="square" rtlCol="0" anchor="ctr"/>
+          <a:lstStyle/>
+          <a:p>
+            <a:pPr indent="0" marL="0">
+              <a:buNone/>
+            </a:pPr>
+            <a:r>
+              <a:rPr lang="en-US" sz="750" dirty="0">
+                <a:solidFill>
+                  <a:srgbClr val="AAAAAA"/>
+                </a:solidFill>
+                <a:latin typeface="Arial" pitchFamily="34" charset="0"/>
+                <a:ea typeface="Arial" pitchFamily="34" charset="-122"/>
+                <a:cs typeface="Arial" pitchFamily="34" charset="-120"/>
+              </a:rPr>
+              <a:t>Lesson Forge Pro (owner) — This content is educational material only and does not constitute financial, investment, or trading advice.</a:t>
+            </a:r>
+            <a:endParaRPr lang="en-US" sz="750" dirty="0"/>
+          </a:p>
+        </p:txBody>
+      </p:sp>
+      <p:sp>
+        <p:nvSpPr>
+          <p:cNvPr id="6" name="Text 4"/>
+          <p:cNvSpPr/>
+          <p:nvPr/>
+        </p:nvSpPr>
+        <p:spPr>
+          <a:xfrm>
+            <a:off x="731520" y="1188720"/>
+            <a:ext cx="7680960" cy="2743200"/>
+          </a:xfrm>
+          <a:prstGeom prst="rect">
+            <a:avLst/>
+          </a:prstGeom>
+          <a:noFill/>
+          <a:ln/>
+        </p:spPr>
+        <p:txBody>
+          <a:bodyPr wrap="square" rtlCol="0" anchor="t"/>
+          <a:lstStyle/>
+          <a:p>
+            <a:pPr marL="152400" indent="-152400">
+              <a:spcAft>
+                <a:spcPts val="800"/>
+              </a:spcAft>
+              <a:buSzPct val="100000"/>
+              <a:buChar char="•"/>
+            </a:pPr>
+            <a:r>
+              <a:rPr lang="en-US" sz="1500" dirty="0">
+                <a:solidFill>
+                  <a:srgbClr val="1C1917"/>
+                </a:solidFill>
+                <a:latin typeface="Arial" pitchFamily="34" charset="0"/>
+                <a:ea typeface="Arial" pitchFamily="34" charset="-122"/>
+                <a:cs typeface="Arial" pitchFamily="34" charset="-120"/>
+              </a:rPr>
+              <a:t>Equity Value: $18.00 × 50M shares = $900M.</a:t>
+            </a:r>
+            <a:endParaRPr lang="en-US" sz="1500" dirty="0"/>
+          </a:p>
+          <a:p>
+            <a:pPr marL="152400" indent="-152400">
+              <a:spcAft>
+                <a:spcPts val="800"/>
+              </a:spcAft>
+              <a:buSzPct val="100000"/>
+              <a:buChar char="•"/>
+            </a:pPr>
+            <a:r>
+              <a:rPr lang="en-US" sz="1500" dirty="0">
+                <a:solidFill>
+                  <a:srgbClr val="1C1917"/>
+                </a:solidFill>
+                <a:latin typeface="Arial" pitchFamily="34" charset="0"/>
+                <a:ea typeface="Arial" pitchFamily="34" charset="-122"/>
+                <a:cs typeface="Arial" pitchFamily="34" charset="-120"/>
+              </a:rPr>
+              <a:t>Net Debt: $120M debt − $20M cash = $100M.</a:t>
+            </a:r>
+            <a:endParaRPr lang="en-US" sz="1500" dirty="0"/>
+          </a:p>
+          <a:p>
+            <a:pPr marL="152400" indent="-152400">
+              <a:spcAft>
+                <a:spcPts val="800"/>
+              </a:spcAft>
+              <a:buSzPct val="100000"/>
+              <a:buChar char="•"/>
+            </a:pPr>
+            <a:r>
+              <a:rPr lang="en-US" sz="1500" dirty="0">
+                <a:solidFill>
+                  <a:srgbClr val="1C1917"/>
+                </a:solidFill>
+                <a:latin typeface="Arial" pitchFamily="34" charset="0"/>
+                <a:ea typeface="Arial" pitchFamily="34" charset="-122"/>
+                <a:cs typeface="Arial" pitchFamily="34" charset="-120"/>
+              </a:rPr>
+              <a:t>Enterprise Value: $900M + $100M = $1,000M.</a:t>
+            </a:r>
+            <a:endParaRPr lang="en-US" sz="1500" dirty="0"/>
+          </a:p>
+          <a:p>
+            <a:pPr marL="152400" indent="-152400">
+              <a:spcAft>
+                <a:spcPts val="800"/>
+              </a:spcAft>
+              <a:buSzPct val="100000"/>
+              <a:buChar char="•"/>
+            </a:pPr>
+            <a:r>
+              <a:rPr lang="en-US" sz="1500" dirty="0">
+                <a:solidFill>
+                  <a:srgbClr val="1C1917"/>
+                </a:solidFill>
+                <a:latin typeface="Arial" pitchFamily="34" charset="0"/>
+                <a:ea typeface="Arial" pitchFamily="34" charset="-122"/>
+                <a:cs typeface="Arial" pitchFamily="34" charset="-120"/>
+              </a:rPr>
+              <a:t>EV/EBITDA: $1,000M ÷ $40M = 25.0×—above peer range of 18–22×.</a:t>
+            </a:r>
+            <a:endParaRPr lang="en-US" sz="1500" dirty="0"/>
+          </a:p>
+          <a:p>
+            <a:pPr marL="152400" indent="-152400">
+              <a:spcAft>
+                <a:spcPts val="800"/>
+              </a:spcAft>
+              <a:buSzPct val="100000"/>
+              <a:buChar char="•"/>
+            </a:pPr>
+            <a:r>
+              <a:rPr lang="en-US" sz="1500" dirty="0">
+                <a:solidFill>
+                  <a:srgbClr val="1C1917"/>
+                </a:solidFill>
+                <a:latin typeface="Arial" pitchFamily="34" charset="0"/>
+                <a:ea typeface="Arial" pitchFamily="34" charset="-122"/>
+                <a:cs typeface="Arial" pitchFamily="34" charset="-120"/>
+              </a:rPr>
+              <a:t>A rich multiple signals overpayment risk; a DCF must confirm or challenge it.</a:t>
+            </a:r>
+            <a:endParaRPr lang="en-US" sz="1500" dirty="0"/>
+          </a:p>
+        </p:txBody>
+      </p:sp>
+      <p:sp>
+        <p:nvSpPr>
+          <p:cNvPr id="7" name="Shape 5"/>
+          <p:cNvSpPr/>
+          <p:nvPr/>
+        </p:nvSpPr>
+        <p:spPr>
+          <a:xfrm>
+            <a:off x="731520" y="4041648"/>
+            <a:ext cx="7680960" cy="566928"/>
+          </a:xfrm>
+          <a:prstGeom prst="roundRect">
+            <a:avLst>
+              <a:gd name="adj" fmla="val 12903"/>
+            </a:avLst>
+          </a:prstGeom>
+          <a:solidFill>
+            <a:srgbClr val="B45309">
+              <a:alpha val="12000"/>
+            </a:srgbClr>
+          </a:solidFill>
+          <a:ln w="12700">
+            <a:solidFill>
+              <a:srgbClr val="B45309"/>
+            </a:solidFill>
+            <a:prstDash val="solid"/>
+          </a:ln>
+        </p:spPr>
+      </p:sp>
+      <p:sp>
+        <p:nvSpPr>
+          <p:cNvPr id="8" name="Text 6"/>
+          <p:cNvSpPr/>
+          <p:nvPr/>
+        </p:nvSpPr>
+        <p:spPr>
+          <a:xfrm>
+            <a:off x="868680" y="4087368"/>
+            <a:ext cx="7406640" cy="475488"/>
+          </a:xfrm>
+          <a:prstGeom prst="rect">
+            <a:avLst/>
+          </a:prstGeom>
+          <a:noFill/>
+          <a:ln/>
+        </p:spPr>
+        <p:txBody>
+          <a:bodyPr wrap="square" rtlCol="0" anchor="ctr"/>
+          <a:lstStyle/>
+          <a:p>
+            <a:pPr indent="0" marL="0">
+              <a:buNone/>
+            </a:pPr>
+            <a:r>
+              <a:rPr lang="en-US" sz="1100" b="1" dirty="0">
+                <a:solidFill>
+                  <a:srgbClr val="B45309"/>
+                </a:solidFill>
+                <a:latin typeface="Arial" pitchFamily="34" charset="0"/>
+                <a:ea typeface="Arial" pitchFamily="34" charset="-122"/>
+                <a:cs typeface="Arial" pitchFamily="34" charset="-120"/>
+              </a:rPr>
+              <a:t>Takeaway  </a:t>
+            </a:r>
+            <a:pPr indent="0" marL="0">
+              <a:buNone/>
+            </a:pPr>
+            <a:r>
+              <a:rPr lang="en-US" sz="1150" dirty="0">
+                <a:solidFill>
+                  <a:srgbClr val="1C1917"/>
+                </a:solidFill>
+                <a:latin typeface="Arial" pitchFamily="34" charset="0"/>
+                <a:ea typeface="Arial" pitchFamily="34" charset="-122"/>
+                <a:cs typeface="Arial" pitchFamily="34" charset="-120"/>
+              </a:rPr>
+              <a:t>Walking through EV and EV/EBITDA step-by-step reveals whether a target is fairly priced relative to peers.</a:t>
+            </a:r>
+            <a:endParaRPr lang="en-US" sz="1100" dirty="0"/>
+          </a:p>
+        </p:txBody>
+      </p:sp>
+    </p:spTree>
+  </p:cSld>
+  <p:clrMapOvr>
+    <a:masterClrMapping/>
+  </p:clrMapOvr>
+</p:sld>
+</file>
+
+<file path=ppt/slides/slide9.xml><?xml version="1.0" encoding="utf-8"?>
+<p:sld xmlns:a="http://schemas.openxmlformats.org/drawingml/2006/main" xmlns:r="http://schemas.openxmlformats.org/officeDocument/2006/relationships" xmlns:p="http://schemas.openxmlformats.org/presentationml/2006/main">
+  <p:cSld name="Slide 9">
+    <p:bg>
+      <p:bgPr>
+        <a:solidFill>
+          <a:srgbClr val="FFFFFF"/>
+        </a:solidFill>
+      </p:bgPr>
+    </p:bg>
+    <p:spTree>
+      <p:nvGrpSpPr>
+        <p:cNvPr id="1" name=""/>
+        <p:cNvGrpSpPr/>
+        <p:nvPr/>
+      </p:nvGrpSpPr>
+      <p:grpSpPr>
+        <a:xfrm>
+          <a:off x="0" y="0"/>
+          <a:ext cx="0" cy="0"/>
+          <a:chOff x="0" y="0"/>
+          <a:chExt cx="0" cy="0"/>
+        </a:xfrm>
+      </p:grpSpPr>
+      <p:sp>
+        <p:nvSpPr>
+          <p:cNvPr id="2" name="Shape 0"/>
+          <p:cNvSpPr/>
+          <p:nvPr/>
+        </p:nvSpPr>
+        <p:spPr>
+          <a:xfrm>
+            <a:off x="411480" y="402336"/>
+            <a:ext cx="82296" cy="329184"/>
+          </a:xfrm>
+          <a:prstGeom prst="rect">
+            <a:avLst/>
+          </a:prstGeom>
+          <a:solidFill>
+            <a:srgbClr val="B45309"/>
+          </a:solidFill>
+          <a:ln/>
+        </p:spPr>
+      </p:sp>
+      <p:sp>
+        <p:nvSpPr>
+          <p:cNvPr id="3" name="Text 1"/>
+          <p:cNvSpPr/>
+          <p:nvPr/>
+        </p:nvSpPr>
+        <p:spPr>
+          <a:xfrm>
+            <a:off x="566928" y="292608"/>
+            <a:ext cx="8138160" cy="548640"/>
+          </a:xfrm>
+          <a:prstGeom prst="rect">
+            <a:avLst/>
+          </a:prstGeom>
+          <a:noFill/>
+          <a:ln/>
+        </p:spPr>
+        <p:txBody>
+          <a:bodyPr wrap="square" rtlCol="0" anchor="ctr"/>
+          <a:lstStyle/>
+          <a:p>
+            <a:pPr indent="0" marL="0">
+              <a:buNone/>
+            </a:pPr>
+            <a:r>
+              <a:rPr lang="en-US" sz="2100" b="1" dirty="0">
+                <a:solidFill>
+                  <a:srgbClr val="1C1917"/>
+                </a:solidFill>
+                <a:latin typeface="Arial" pitchFamily="34" charset="0"/>
+                <a:ea typeface="Arial" pitchFamily="34" charset="-122"/>
+                <a:cs typeface="Arial" pitchFamily="34" charset="-120"/>
+              </a:rPr>
+              <a:t>The Standard M&amp;A Modeling Procedure</a:t>
+            </a:r>
+            <a:endParaRPr lang="en-US" sz="2100" dirty="0"/>
+          </a:p>
+        </p:txBody>
+      </p:sp>
+      <p:sp>
+        <p:nvSpPr>
+          <p:cNvPr id="4" name="Shape 2"/>
+          <p:cNvSpPr/>
+          <p:nvPr/>
+        </p:nvSpPr>
+        <p:spPr>
+          <a:xfrm>
+            <a:off x="411480" y="960120"/>
+            <a:ext cx="8321040" cy="0"/>
+          </a:xfrm>
+          <a:prstGeom prst="line">
+            <a:avLst/>
+          </a:prstGeom>
+          <a:noFill/>
+          <a:ln w="12700">
+            <a:solidFill>
+              <a:srgbClr val="E7E5E4"/>
+            </a:solidFill>
+            <a:prstDash val="solid"/>
+          </a:ln>
+        </p:spPr>
+      </p:sp>
+      <p:sp>
+        <p:nvSpPr>
+          <p:cNvPr id="5" name="Text 3"/>
+          <p:cNvSpPr/>
+          <p:nvPr/>
+        </p:nvSpPr>
+        <p:spPr>
+          <a:xfrm>
+            <a:off x="411480" y="4864608"/>
+            <a:ext cx="8321040" cy="237744"/>
+          </a:xfrm>
+          <a:prstGeom prst="rect">
+            <a:avLst/>
+          </a:prstGeom>
+          <a:noFill/>
+          <a:ln/>
+        </p:spPr>
+        <p:txBody>
+          <a:bodyPr wrap="square" rtlCol="0" anchor="ctr"/>
+          <a:lstStyle/>
+          <a:p>
+            <a:pPr indent="0" marL="0">
+              <a:buNone/>
+            </a:pPr>
+            <a:r>
+              <a:rPr lang="en-US" sz="750" dirty="0">
+                <a:solidFill>
+                  <a:srgbClr val="AAAAAA"/>
+                </a:solidFill>
+                <a:latin typeface="Arial" pitchFamily="34" charset="0"/>
+                <a:ea typeface="Arial" pitchFamily="34" charset="-122"/>
+                <a:cs typeface="Arial" pitchFamily="34" charset="-120"/>
+              </a:rPr>
+              <a:t>Lesson Forge Pro (owner) — This content is educational material only and does not constitute financial, investment, or trading advice.</a:t>
+            </a:r>
+            <a:endParaRPr lang="en-US" sz="750" dirty="0"/>
+          </a:p>
+        </p:txBody>
+      </p:sp>
+      <p:sp>
+        <p:nvSpPr>
+          <p:cNvPr id="6" name="Text 4"/>
+          <p:cNvSpPr/>
+          <p:nvPr/>
+        </p:nvSpPr>
+        <p:spPr>
+          <a:xfrm>
+            <a:off x="731520" y="1188720"/>
+            <a:ext cx="7680960" cy="2743200"/>
+          </a:xfrm>
+          <a:prstGeom prst="rect">
+            <a:avLst/>
+          </a:prstGeom>
+          <a:noFill/>
+          <a:ln/>
+        </p:spPr>
+        <p:txBody>
+          <a:bodyPr wrap="square" rtlCol="0" anchor="t"/>
+          <a:lstStyle/>
+          <a:p>
+            <a:pPr marL="152400" indent="-152400">
+              <a:spcAft>
+                <a:spcPts val="800"/>
+              </a:spcAft>
+              <a:buSzPct val="100000"/>
+              <a:buChar char="•"/>
+            </a:pPr>
+            <a:r>
+              <a:rPr lang="en-US" sz="1500" dirty="0">
+                <a:solidFill>
+                  <a:srgbClr val="1C1917"/>
+                </a:solidFill>
+                <a:latin typeface="Arial" pitchFamily="34" charset="0"/>
+                <a:ea typeface="Arial" pitchFamily="34" charset="-122"/>
+                <a:cs typeface="Arial" pitchFamily="34" charset="-120"/>
+              </a:rPr>
+              <a:t>Every model follows a disciplined, repeatable sequence of stages.</a:t>
+            </a:r>
+            <a:endParaRPr lang="en-US" sz="1500" dirty="0"/>
+          </a:p>
+          <a:p>
+            <a:pPr marL="152400" indent="-152400">
+              <a:spcAft>
+                <a:spcPts val="800"/>
+              </a:spcAft>
+              <a:buSzPct val="100000"/>
+              <a:buChar char="•"/>
+            </a:pPr>
+            <a:r>
+              <a:rPr lang="en-US" sz="1500" dirty="0">
+                <a:solidFill>
+                  <a:srgbClr val="1C1917"/>
+                </a:solidFill>
+                <a:latin typeface="Arial" pitchFamily="34" charset="0"/>
+                <a:ea typeface="Arial" pitchFamily="34" charset="-122"/>
+                <a:cs typeface="Arial" pitchFamily="34" charset="-120"/>
+              </a:rPr>
+              <a:t>Inputs, steps, outputs, and checks must all be completed without skipping.</a:t>
+            </a:r>
+            <a:endParaRPr lang="en-US" sz="1500" dirty="0"/>
+          </a:p>
+          <a:p>
+            <a:pPr marL="152400" indent="-152400">
+              <a:spcAft>
+                <a:spcPts val="800"/>
+              </a:spcAft>
+              <a:buSzPct val="100000"/>
+              <a:buChar char="•"/>
+            </a:pPr>
+            <a:r>
+              <a:rPr lang="en-US" sz="1500" dirty="0">
+                <a:solidFill>
+                  <a:srgbClr val="1C1917"/>
+                </a:solidFill>
+                <a:latin typeface="Arial" pitchFamily="34" charset="0"/>
+                <a:ea typeface="Arial" pitchFamily="34" charset="-122"/>
+                <a:cs typeface="Arial" pitchFamily="34" charset="-120"/>
+              </a:rPr>
+              <a:t>A defensible model is auditable by any qualified third party.</a:t>
+            </a:r>
+            <a:endParaRPr lang="en-US" sz="1500" dirty="0"/>
+          </a:p>
+          <a:p>
+            <a:pPr marL="152400" indent="-152400">
+              <a:spcAft>
+                <a:spcPts val="800"/>
+              </a:spcAft>
+              <a:buSzPct val="100000"/>
+              <a:buChar char="•"/>
+            </a:pPr>
+            <a:r>
+              <a:rPr lang="en-US" sz="1500" dirty="0">
+                <a:solidFill>
+                  <a:srgbClr val="1C1917"/>
+                </a:solidFill>
+                <a:latin typeface="Arial" pitchFamily="34" charset="0"/>
+                <a:ea typeface="Arial" pitchFamily="34" charset="-122"/>
+                <a:cs typeface="Arial" pitchFamily="34" charset="-120"/>
+              </a:rPr>
+              <a:t>Discipline at each stage prevents errors from compounding downstream.</a:t>
+            </a:r>
+            <a:endParaRPr lang="en-US" sz="1500" dirty="0"/>
+          </a:p>
+        </p:txBody>
+      </p:sp>
+      <p:sp>
+        <p:nvSpPr>
+          <p:cNvPr id="7" name="Shape 5"/>
+          <p:cNvSpPr/>
+          <p:nvPr/>
+        </p:nvSpPr>
+        <p:spPr>
+          <a:xfrm>
+            <a:off x="731520" y="4041648"/>
+            <a:ext cx="7680960" cy="566928"/>
+          </a:xfrm>
+          <a:prstGeom prst="roundRect">
+            <a:avLst>
+              <a:gd name="adj" fmla="val 12903"/>
+            </a:avLst>
+          </a:prstGeom>
+          <a:solidFill>
+            <a:srgbClr val="B45309">
+              <a:alpha val="12000"/>
+            </a:srgbClr>
+          </a:solidFill>
+          <a:ln w="12700">
+            <a:solidFill>
+              <a:srgbClr val="B45309"/>
+            </a:solidFill>
+            <a:prstDash val="solid"/>
+          </a:ln>
+        </p:spPr>
+      </p:sp>
+      <p:sp>
+        <p:nvSpPr>
+          <p:cNvPr id="8" name="Text 6"/>
+          <p:cNvSpPr/>
+          <p:nvPr/>
+        </p:nvSpPr>
+        <p:spPr>
+          <a:xfrm>
+            <a:off x="868680" y="4087368"/>
+            <a:ext cx="7406640" cy="475488"/>
+          </a:xfrm>
+          <a:prstGeom prst="rect">
+            <a:avLst/>
+          </a:prstGeom>
+          <a:noFill/>
+          <a:ln/>
+        </p:spPr>
+        <p:txBody>
+          <a:bodyPr wrap="square" rtlCol="0" anchor="ctr"/>
+          <a:lstStyle/>
+          <a:p>
+            <a:pPr indent="0" marL="0">
+              <a:buNone/>
+            </a:pPr>
+            <a:r>
+              <a:rPr lang="en-US" sz="1100" b="1" dirty="0">
+                <a:solidFill>
+                  <a:srgbClr val="B45309"/>
+                </a:solidFill>
+                <a:latin typeface="Arial" pitchFamily="34" charset="0"/>
+                <a:ea typeface="Arial" pitchFamily="34" charset="-122"/>
+                <a:cs typeface="Arial" pitchFamily="34" charset="-120"/>
+              </a:rPr>
+              <a:t>Takeaway  </a:t>
+            </a:r>
+            <a:pPr indent="0" marL="0">
+              <a:buNone/>
+            </a:pPr>
+            <a:r>
+              <a:rPr lang="en-US" sz="1150" dirty="0">
+                <a:solidFill>
+                  <a:srgbClr val="1C1917"/>
+                </a:solidFill>
+                <a:latin typeface="Arial" pitchFamily="34" charset="0"/>
+                <a:ea typeface="Arial" pitchFamily="34" charset="-122"/>
+                <a:cs typeface="Arial" pitchFamily="34" charset="-120"/>
+              </a:rPr>
+              <a:t>A structured, stage-by-stage process is what separates a boardroom-ready model from a risky guess.</a:t>
+            </a:r>
+            <a:endParaRPr lang="en-US" sz="1100" dirty="0"/>
           </a:p>
         </p:txBody>
       </p:sp>

--- a/docs/fmva/packs/day5-slides.pptx
+++ b/docs/fmva/packs/day5-slides.pptx
@@ -17,14 +17,9 @@
     <p:sldId id="265" r:id="rId11"/>
     <p:sldId id="266" r:id="rId12"/>
     <p:sldId id="267" r:id="rId13"/>
-    <p:sldId id="268" r:id="rId14"/>
-    <p:sldId id="269" r:id="rId15"/>
-    <p:sldId id="270" r:id="rId16"/>
-    <p:sldId id="271" r:id="rId17"/>
-    <p:sldId id="272" r:id="rId18"/>
   </p:sldIdLst>
   <p:notesMasterIdLst>
-    <p:notesMasterId r:id="rId19"/>
+    <p:notesMasterId r:id="rId14"/>
   </p:notesMasterIdLst>
   <p:sldSz cx="9144000" cy="5148072"/>
   <p:notesSz cx="5148072" cy="9144000"/>
@@ -806,446 +801,6 @@
             <a:fld id="{F7021451-1387-4CA6-816F-3879F97B5CBC}" type="slidenum">
               <a:rPr lang="en-US"/>
               <a:t>12</a:t>
-            </a:fld>
-            <a:endParaRPr lang="en-US"/>
-          </a:p>
-        </p:txBody>
-      </p:sp>
-    </p:spTree>
-    <p:extLst>
-      <p:ext uri="{BB962C8B-B14F-4D97-AF65-F5344CB8AC3E}">
-        <p14:creationId xmlns:p14="http://schemas.microsoft.com/office/powerpoint/2010/main" val="1024086991"/>
-      </p:ext>
-    </p:extLst>
-  </p:cSld>
-  <p:clrMapOvr>
-    <a:masterClrMapping/>
-  </p:clrMapOvr>
-</p:notes>
-</file>
-
-<file path=ppt/notesSlides/notesSlide13.xml><?xml version="1.0" encoding="utf-8"?>
-<p:notes xmlns:a="http://schemas.openxmlformats.org/drawingml/2006/main" xmlns:r="http://schemas.openxmlformats.org/officeDocument/2006/relationships" xmlns:p="http://schemas.openxmlformats.org/presentationml/2006/main">
-  <p:cSld>
-    <p:spTree>
-      <p:nvGrpSpPr>
-        <p:cNvPr id="1" name=""/>
-        <p:cNvGrpSpPr/>
-        <p:nvPr/>
-      </p:nvGrpSpPr>
-      <p:grpSpPr>
-        <a:xfrm>
-          <a:off x="0" y="0"/>
-          <a:ext cx="0" cy="0"/>
-          <a:chOff x="0" y="0"/>
-          <a:chExt cx="0" cy="0"/>
-        </a:xfrm>
-      </p:grpSpPr>
-      <p:sp>
-        <p:nvSpPr>
-          <p:cNvPr id="2" name="Slide Image Placeholder 1"/>
-          <p:cNvSpPr>
-            <a:spLocks noGrp="1" noRot="1" noChangeAspect="1"/>
-          </p:cNvSpPr>
-          <p:nvPr>
-            <p:ph type="sldImg"/>
-          </p:nvPr>
-        </p:nvSpPr>
-        <p:spPr/>
-      </p:sp>
-      <p:sp>
-        <p:nvSpPr>
-          <p:cNvPr id="3" name="Notes Placeholder 2"/>
-          <p:cNvSpPr>
-            <a:spLocks noGrp="1"/>
-          </p:cNvSpPr>
-          <p:nvPr>
-            <p:ph type="body" idx="1"/>
-          </p:nvPr>
-        </p:nvSpPr>
-        <p:spPr/>
-        <p:txBody>
-          <a:bodyPr/>
-          <a:lstStyle/>
-          <a:p>
-            <a:r>
-              <a:rPr lang="en-US" dirty="0"/>
-              <a:t/>
-            </a:r>
-            <a:endParaRPr lang="en-US" dirty="0"/>
-          </a:p>
-        </p:txBody>
-      </p:sp>
-      <p:sp>
-        <p:nvSpPr>
-          <p:cNvPr id="4" name="Slide Number Placeholder 3"/>
-          <p:cNvSpPr>
-            <a:spLocks noGrp="1"/>
-          </p:cNvSpPr>
-          <p:nvPr>
-            <p:ph type="sldNum" sz="quarter" idx="10"/>
-          </p:nvPr>
-        </p:nvSpPr>
-        <p:spPr/>
-        <p:txBody>
-          <a:bodyPr/>
-          <a:lstStyle/>
-          <a:p>
-            <a:fld id="{F7021451-1387-4CA6-816F-3879F97B5CBC}" type="slidenum">
-              <a:rPr lang="en-US"/>
-              <a:t>13</a:t>
-            </a:fld>
-            <a:endParaRPr lang="en-US"/>
-          </a:p>
-        </p:txBody>
-      </p:sp>
-    </p:spTree>
-    <p:extLst>
-      <p:ext uri="{BB962C8B-B14F-4D97-AF65-F5344CB8AC3E}">
-        <p14:creationId xmlns:p14="http://schemas.microsoft.com/office/powerpoint/2010/main" val="1024086991"/>
-      </p:ext>
-    </p:extLst>
-  </p:cSld>
-  <p:clrMapOvr>
-    <a:masterClrMapping/>
-  </p:clrMapOvr>
-</p:notes>
-</file>
-
-<file path=ppt/notesSlides/notesSlide14.xml><?xml version="1.0" encoding="utf-8"?>
-<p:notes xmlns:a="http://schemas.openxmlformats.org/drawingml/2006/main" xmlns:r="http://schemas.openxmlformats.org/officeDocument/2006/relationships" xmlns:p="http://schemas.openxmlformats.org/presentationml/2006/main">
-  <p:cSld>
-    <p:spTree>
-      <p:nvGrpSpPr>
-        <p:cNvPr id="1" name=""/>
-        <p:cNvGrpSpPr/>
-        <p:nvPr/>
-      </p:nvGrpSpPr>
-      <p:grpSpPr>
-        <a:xfrm>
-          <a:off x="0" y="0"/>
-          <a:ext cx="0" cy="0"/>
-          <a:chOff x="0" y="0"/>
-          <a:chExt cx="0" cy="0"/>
-        </a:xfrm>
-      </p:grpSpPr>
-      <p:sp>
-        <p:nvSpPr>
-          <p:cNvPr id="2" name="Slide Image Placeholder 1"/>
-          <p:cNvSpPr>
-            <a:spLocks noGrp="1" noRot="1" noChangeAspect="1"/>
-          </p:cNvSpPr>
-          <p:nvPr>
-            <p:ph type="sldImg"/>
-          </p:nvPr>
-        </p:nvSpPr>
-        <p:spPr/>
-      </p:sp>
-      <p:sp>
-        <p:nvSpPr>
-          <p:cNvPr id="3" name="Notes Placeholder 2"/>
-          <p:cNvSpPr>
-            <a:spLocks noGrp="1"/>
-          </p:cNvSpPr>
-          <p:nvPr>
-            <p:ph type="body" idx="1"/>
-          </p:nvPr>
-        </p:nvSpPr>
-        <p:spPr/>
-        <p:txBody>
-          <a:bodyPr/>
-          <a:lstStyle/>
-          <a:p>
-            <a:r>
-              <a:rPr lang="en-US" dirty="0"/>
-              <a:t/>
-            </a:r>
-            <a:endParaRPr lang="en-US" dirty="0"/>
-          </a:p>
-        </p:txBody>
-      </p:sp>
-      <p:sp>
-        <p:nvSpPr>
-          <p:cNvPr id="4" name="Slide Number Placeholder 3"/>
-          <p:cNvSpPr>
-            <a:spLocks noGrp="1"/>
-          </p:cNvSpPr>
-          <p:nvPr>
-            <p:ph type="sldNum" sz="quarter" idx="10"/>
-          </p:nvPr>
-        </p:nvSpPr>
-        <p:spPr/>
-        <p:txBody>
-          <a:bodyPr/>
-          <a:lstStyle/>
-          <a:p>
-            <a:fld id="{F7021451-1387-4CA6-816F-3879F97B5CBC}" type="slidenum">
-              <a:rPr lang="en-US"/>
-              <a:t>14</a:t>
-            </a:fld>
-            <a:endParaRPr lang="en-US"/>
-          </a:p>
-        </p:txBody>
-      </p:sp>
-    </p:spTree>
-    <p:extLst>
-      <p:ext uri="{BB962C8B-B14F-4D97-AF65-F5344CB8AC3E}">
-        <p14:creationId xmlns:p14="http://schemas.microsoft.com/office/powerpoint/2010/main" val="1024086991"/>
-      </p:ext>
-    </p:extLst>
-  </p:cSld>
-  <p:clrMapOvr>
-    <a:masterClrMapping/>
-  </p:clrMapOvr>
-</p:notes>
-</file>
-
-<file path=ppt/notesSlides/notesSlide15.xml><?xml version="1.0" encoding="utf-8"?>
-<p:notes xmlns:a="http://schemas.openxmlformats.org/drawingml/2006/main" xmlns:r="http://schemas.openxmlformats.org/officeDocument/2006/relationships" xmlns:p="http://schemas.openxmlformats.org/presentationml/2006/main">
-  <p:cSld>
-    <p:spTree>
-      <p:nvGrpSpPr>
-        <p:cNvPr id="1" name=""/>
-        <p:cNvGrpSpPr/>
-        <p:nvPr/>
-      </p:nvGrpSpPr>
-      <p:grpSpPr>
-        <a:xfrm>
-          <a:off x="0" y="0"/>
-          <a:ext cx="0" cy="0"/>
-          <a:chOff x="0" y="0"/>
-          <a:chExt cx="0" cy="0"/>
-        </a:xfrm>
-      </p:grpSpPr>
-      <p:sp>
-        <p:nvSpPr>
-          <p:cNvPr id="2" name="Slide Image Placeholder 1"/>
-          <p:cNvSpPr>
-            <a:spLocks noGrp="1" noRot="1" noChangeAspect="1"/>
-          </p:cNvSpPr>
-          <p:nvPr>
-            <p:ph type="sldImg"/>
-          </p:nvPr>
-        </p:nvSpPr>
-        <p:spPr/>
-      </p:sp>
-      <p:sp>
-        <p:nvSpPr>
-          <p:cNvPr id="3" name="Notes Placeholder 2"/>
-          <p:cNvSpPr>
-            <a:spLocks noGrp="1"/>
-          </p:cNvSpPr>
-          <p:nvPr>
-            <p:ph type="body" idx="1"/>
-          </p:nvPr>
-        </p:nvSpPr>
-        <p:spPr/>
-        <p:txBody>
-          <a:bodyPr/>
-          <a:lstStyle/>
-          <a:p>
-            <a:r>
-              <a:rPr lang="en-US" dirty="0"/>
-              <a:t/>
-            </a:r>
-            <a:endParaRPr lang="en-US" dirty="0"/>
-          </a:p>
-        </p:txBody>
-      </p:sp>
-      <p:sp>
-        <p:nvSpPr>
-          <p:cNvPr id="4" name="Slide Number Placeholder 3"/>
-          <p:cNvSpPr>
-            <a:spLocks noGrp="1"/>
-          </p:cNvSpPr>
-          <p:nvPr>
-            <p:ph type="sldNum" sz="quarter" idx="10"/>
-          </p:nvPr>
-        </p:nvSpPr>
-        <p:spPr/>
-        <p:txBody>
-          <a:bodyPr/>
-          <a:lstStyle/>
-          <a:p>
-            <a:fld id="{F7021451-1387-4CA6-816F-3879F97B5CBC}" type="slidenum">
-              <a:rPr lang="en-US"/>
-              <a:t>15</a:t>
-            </a:fld>
-            <a:endParaRPr lang="en-US"/>
-          </a:p>
-        </p:txBody>
-      </p:sp>
-    </p:spTree>
-    <p:extLst>
-      <p:ext uri="{BB962C8B-B14F-4D97-AF65-F5344CB8AC3E}">
-        <p14:creationId xmlns:p14="http://schemas.microsoft.com/office/powerpoint/2010/main" val="1024086991"/>
-      </p:ext>
-    </p:extLst>
-  </p:cSld>
-  <p:clrMapOvr>
-    <a:masterClrMapping/>
-  </p:clrMapOvr>
-</p:notes>
-</file>
-
-<file path=ppt/notesSlides/notesSlide16.xml><?xml version="1.0" encoding="utf-8"?>
-<p:notes xmlns:a="http://schemas.openxmlformats.org/drawingml/2006/main" xmlns:r="http://schemas.openxmlformats.org/officeDocument/2006/relationships" xmlns:p="http://schemas.openxmlformats.org/presentationml/2006/main">
-  <p:cSld>
-    <p:spTree>
-      <p:nvGrpSpPr>
-        <p:cNvPr id="1" name=""/>
-        <p:cNvGrpSpPr/>
-        <p:nvPr/>
-      </p:nvGrpSpPr>
-      <p:grpSpPr>
-        <a:xfrm>
-          <a:off x="0" y="0"/>
-          <a:ext cx="0" cy="0"/>
-          <a:chOff x="0" y="0"/>
-          <a:chExt cx="0" cy="0"/>
-        </a:xfrm>
-      </p:grpSpPr>
-      <p:sp>
-        <p:nvSpPr>
-          <p:cNvPr id="2" name="Slide Image Placeholder 1"/>
-          <p:cNvSpPr>
-            <a:spLocks noGrp="1" noRot="1" noChangeAspect="1"/>
-          </p:cNvSpPr>
-          <p:nvPr>
-            <p:ph type="sldImg"/>
-          </p:nvPr>
-        </p:nvSpPr>
-        <p:spPr/>
-      </p:sp>
-      <p:sp>
-        <p:nvSpPr>
-          <p:cNvPr id="3" name="Notes Placeholder 2"/>
-          <p:cNvSpPr>
-            <a:spLocks noGrp="1"/>
-          </p:cNvSpPr>
-          <p:nvPr>
-            <p:ph type="body" idx="1"/>
-          </p:nvPr>
-        </p:nvSpPr>
-        <p:spPr/>
-        <p:txBody>
-          <a:bodyPr/>
-          <a:lstStyle/>
-          <a:p>
-            <a:r>
-              <a:rPr lang="en-US" dirty="0"/>
-              <a:t/>
-            </a:r>
-            <a:endParaRPr lang="en-US" dirty="0"/>
-          </a:p>
-        </p:txBody>
-      </p:sp>
-      <p:sp>
-        <p:nvSpPr>
-          <p:cNvPr id="4" name="Slide Number Placeholder 3"/>
-          <p:cNvSpPr>
-            <a:spLocks noGrp="1"/>
-          </p:cNvSpPr>
-          <p:nvPr>
-            <p:ph type="sldNum" sz="quarter" idx="10"/>
-          </p:nvPr>
-        </p:nvSpPr>
-        <p:spPr/>
-        <p:txBody>
-          <a:bodyPr/>
-          <a:lstStyle/>
-          <a:p>
-            <a:fld id="{F7021451-1387-4CA6-816F-3879F97B5CBC}" type="slidenum">
-              <a:rPr lang="en-US"/>
-              <a:t>16</a:t>
-            </a:fld>
-            <a:endParaRPr lang="en-US"/>
-          </a:p>
-        </p:txBody>
-      </p:sp>
-    </p:spTree>
-    <p:extLst>
-      <p:ext uri="{BB962C8B-B14F-4D97-AF65-F5344CB8AC3E}">
-        <p14:creationId xmlns:p14="http://schemas.microsoft.com/office/powerpoint/2010/main" val="1024086991"/>
-      </p:ext>
-    </p:extLst>
-  </p:cSld>
-  <p:clrMapOvr>
-    <a:masterClrMapping/>
-  </p:clrMapOvr>
-</p:notes>
-</file>
-
-<file path=ppt/notesSlides/notesSlide17.xml><?xml version="1.0" encoding="utf-8"?>
-<p:notes xmlns:a="http://schemas.openxmlformats.org/drawingml/2006/main" xmlns:r="http://schemas.openxmlformats.org/officeDocument/2006/relationships" xmlns:p="http://schemas.openxmlformats.org/presentationml/2006/main">
-  <p:cSld>
-    <p:spTree>
-      <p:nvGrpSpPr>
-        <p:cNvPr id="1" name=""/>
-        <p:cNvGrpSpPr/>
-        <p:nvPr/>
-      </p:nvGrpSpPr>
-      <p:grpSpPr>
-        <a:xfrm>
-          <a:off x="0" y="0"/>
-          <a:ext cx="0" cy="0"/>
-          <a:chOff x="0" y="0"/>
-          <a:chExt cx="0" cy="0"/>
-        </a:xfrm>
-      </p:grpSpPr>
-      <p:sp>
-        <p:nvSpPr>
-          <p:cNvPr id="2" name="Slide Image Placeholder 1"/>
-          <p:cNvSpPr>
-            <a:spLocks noGrp="1" noRot="1" noChangeAspect="1"/>
-          </p:cNvSpPr>
-          <p:nvPr>
-            <p:ph type="sldImg"/>
-          </p:nvPr>
-        </p:nvSpPr>
-        <p:spPr/>
-      </p:sp>
-      <p:sp>
-        <p:nvSpPr>
-          <p:cNvPr id="3" name="Notes Placeholder 2"/>
-          <p:cNvSpPr>
-            <a:spLocks noGrp="1"/>
-          </p:cNvSpPr>
-          <p:nvPr>
-            <p:ph type="body" idx="1"/>
-          </p:nvPr>
-        </p:nvSpPr>
-        <p:spPr/>
-        <p:txBody>
-          <a:bodyPr/>
-          <a:lstStyle/>
-          <a:p>
-            <a:r>
-              <a:rPr lang="en-US" dirty="0"/>
-              <a:t/>
-            </a:r>
-            <a:endParaRPr lang="en-US" dirty="0"/>
-          </a:p>
-        </p:txBody>
-      </p:sp>
-      <p:sp>
-        <p:nvSpPr>
-          <p:cNvPr id="4" name="Slide Number Placeholder 3"/>
-          <p:cNvSpPr>
-            <a:spLocks noGrp="1"/>
-          </p:cNvSpPr>
-          <p:nvPr>
-            <p:ph type="sldNum" sz="quarter" idx="10"/>
-          </p:nvPr>
-        </p:nvSpPr>
-        <p:spPr/>
-        <p:txBody>
-          <a:bodyPr/>
-          <a:lstStyle/>
-          <a:p>
-            <a:fld id="{F7021451-1387-4CA6-816F-3879F97B5CBC}" type="slidenum">
-              <a:rPr lang="en-US"/>
-              <a:t>17</a:t>
             </a:fld>
             <a:endParaRPr lang="en-US"/>
           </a:p>
@@ -2621,7 +2176,7 @@
                 <a:ea typeface="Arial" pitchFamily="34" charset="-122"/>
                 <a:cs typeface="Arial" pitchFamily="34" charset="-120"/>
               </a:rPr>
-              <a:t>M&amp;A Modeling Procedure</a:t>
+              <a:t>Synergy Risk Hierarchy</a:t>
             </a:r>
             <a:endParaRPr lang="en-US" sz="2000" dirty="0"/>
           </a:p>
@@ -2660,7 +2215,7 @@
                 <a:ea typeface="Arial" pitchFamily="34" charset="-122"/>
                 <a:cs typeface="Arial" pitchFamily="34" charset="-120"/>
               </a:rPr>
-              <a:t>Follow all six stages in sequence; skipping steps creates unauditable models</a:t>
+              <a:t>Cost synergies are more predictable; revenue synergies require aggressive haircuts</a:t>
             </a:r>
             <a:endParaRPr lang="en-US" sz="1000" dirty="0"/>
           </a:p>
@@ -2712,24 +2267,19 @@
           <p:nvPr/>
         </p:nvSpPr>
         <p:spPr>
-          <a:xfrm>
-            <a:off x="411480" y="1463040"/>
-            <a:ext cx="2011680" cy="960120"/>
-          </a:xfrm>
-          <a:prstGeom prst="roundRect">
-            <a:avLst>
-              <a:gd name="adj" fmla="val 7619"/>
-            </a:avLst>
+          <a:xfrm flipV="1">
+            <a:off x="1988820" y="1234440"/>
+            <a:ext cx="2240280" cy="713232"/>
+          </a:xfrm>
+          <a:prstGeom prst="trapezoid">
+            <a:avLst/>
           </a:prstGeom>
           <a:solidFill>
-            <a:srgbClr val="F5F5F4"/>
+            <a:srgbClr val="B45309">
+              <a:alpha val="40000"/>
+            </a:srgbClr>
           </a:solidFill>
-          <a:ln w="15240">
-            <a:solidFill>
-              <a:srgbClr val="B45309"/>
-            </a:solidFill>
-            <a:prstDash val="solid"/>
-          </a:ln>
+          <a:ln/>
         </p:spPr>
       </p:sp>
       <p:sp>
@@ -2740,17 +2290,115 @@
         </p:nvSpPr>
         <p:spPr>
           <a:xfrm>
-            <a:off x="484632" y="1536192"/>
-            <a:ext cx="310896" cy="274320"/>
-          </a:xfrm>
-          <a:prstGeom prst="rect">
+            <a:off x="1988820" y="1289304"/>
+            <a:ext cx="2240280" cy="621792"/>
+          </a:xfrm>
+          <a:prstGeom prst="rect">
+            <a:avLst/>
+          </a:prstGeom>
+          <a:noFill/>
+          <a:ln/>
+        </p:spPr>
+        <p:txBody>
+          <a:bodyPr wrap="square" rtlCol="0" anchor="ctr"/>
+          <a:lstStyle/>
+          <a:p>
+            <a:pPr algn="ctr" indent="0" marL="0">
+              <a:buNone/>
+            </a:pPr>
+            <a:r>
+              <a:rPr lang="en-US" sz="1200" b="1" dirty="0">
+                <a:solidFill>
+                  <a:srgbClr val="FFFFFF"/>
+                </a:solidFill>
+                <a:latin typeface="Arial" pitchFamily="34" charset="0"/>
+                <a:ea typeface="Arial" pitchFamily="34" charset="-122"/>
+                <a:cs typeface="Arial" pitchFamily="34" charset="-120"/>
+              </a:rPr>
+              <a:t>Revenue Synergies</a:t>
+            </a:r>
+            <a:endParaRPr lang="en-US" sz="1200" dirty="0"/>
+          </a:p>
+        </p:txBody>
+      </p:sp>
+      <p:sp>
+        <p:nvSpPr>
+          <p:cNvPr id="8" name="Text 6"/>
+          <p:cNvSpPr/>
+          <p:nvPr/>
+        </p:nvSpPr>
+        <p:spPr>
+          <a:xfrm>
+            <a:off x="5760720" y="1444752"/>
+            <a:ext cx="2926080" cy="310896"/>
+          </a:xfrm>
+          <a:prstGeom prst="rect">
+            <a:avLst/>
+          </a:prstGeom>
+          <a:noFill/>
+          <a:ln/>
+        </p:spPr>
+        <p:txBody>
+          <a:bodyPr wrap="square" rtlCol="0" anchor="ctr"/>
+          <a:lstStyle/>
+          <a:p>
+            <a:pPr indent="0" marL="0">
+              <a:buNone/>
+            </a:pPr>
+            <a:r>
+              <a:rPr lang="en-US" sz="1000" dirty="0">
+                <a:solidFill>
+                  <a:srgbClr val="78716C"/>
+                </a:solidFill>
+                <a:latin typeface="Arial" pitchFamily="34" charset="0"/>
+                <a:ea typeface="Arial" pitchFamily="34" charset="-122"/>
+                <a:cs typeface="Arial" pitchFamily="34" charset="-120"/>
+              </a:rPr>
+              <a:t>Highest risk; discount 200-400bps above WACC</a:t>
+            </a:r>
+            <a:endParaRPr lang="en-US" sz="1000" dirty="0"/>
+          </a:p>
+        </p:txBody>
+      </p:sp>
+      <p:sp>
+        <p:nvSpPr>
+          <p:cNvPr id="9" name="Shape 7"/>
+          <p:cNvSpPr/>
+          <p:nvPr/>
+        </p:nvSpPr>
+        <p:spPr>
+          <a:xfrm flipV="1">
+            <a:off x="1508760" y="2039112"/>
+            <a:ext cx="3200400" cy="713232"/>
+          </a:xfrm>
+          <a:prstGeom prst="trapezoid">
             <a:avLst/>
           </a:prstGeom>
           <a:solidFill>
-            <a:srgbClr val="B45309"/>
+            <a:srgbClr val="B45309">
+              <a:alpha val="58000"/>
+            </a:srgbClr>
           </a:solidFill>
           <a:ln/>
         </p:spPr>
+      </p:sp>
+      <p:sp>
+        <p:nvSpPr>
+          <p:cNvPr id="10" name="Text 8"/>
+          <p:cNvSpPr/>
+          <p:nvPr/>
+        </p:nvSpPr>
+        <p:spPr>
+          <a:xfrm>
+            <a:off x="1508760" y="2093976"/>
+            <a:ext cx="3200400" cy="621792"/>
+          </a:xfrm>
+          <a:prstGeom prst="rect">
+            <a:avLst/>
+          </a:prstGeom>
+          <a:noFill/>
+          <a:ln/>
+        </p:spPr>
         <p:txBody>
           <a:bodyPr wrap="square" rtlCol="0" anchor="ctr"/>
           <a:lstStyle/>
@@ -2759,7 +2407,7 @@
               <a:buNone/>
             </a:pPr>
             <a:r>
-              <a:rPr lang="en-US" sz="1000" b="1" dirty="0">
+              <a:rPr lang="en-US" sz="1200" b="1" dirty="0">
                 <a:solidFill>
                   <a:srgbClr val="FFFFFF"/>
                 </a:solidFill>
@@ -2767,7 +2415,46 @@
                 <a:ea typeface="Arial" pitchFamily="34" charset="-122"/>
                 <a:cs typeface="Arial" pitchFamily="34" charset="-120"/>
               </a:rPr>
-              <a:t>1</a:t>
+              <a:t>Procurement Savings</a:t>
+            </a:r>
+            <a:endParaRPr lang="en-US" sz="1200" dirty="0"/>
+          </a:p>
+        </p:txBody>
+      </p:sp>
+      <p:sp>
+        <p:nvSpPr>
+          <p:cNvPr id="11" name="Text 9"/>
+          <p:cNvSpPr/>
+          <p:nvPr/>
+        </p:nvSpPr>
+        <p:spPr>
+          <a:xfrm>
+            <a:off x="5760720" y="2249424"/>
+            <a:ext cx="2926080" cy="310896"/>
+          </a:xfrm>
+          <a:prstGeom prst="rect">
+            <a:avLst/>
+          </a:prstGeom>
+          <a:noFill/>
+          <a:ln/>
+        </p:spPr>
+        <p:txBody>
+          <a:bodyPr wrap="square" rtlCol="0" anchor="ctr"/>
+          <a:lstStyle/>
+          <a:p>
+            <a:pPr indent="0" marL="0">
+              <a:buNone/>
+            </a:pPr>
+            <a:r>
+              <a:rPr lang="en-US" sz="1000" dirty="0">
+                <a:solidFill>
+                  <a:srgbClr val="78716C"/>
+                </a:solidFill>
+                <a:latin typeface="Arial" pitchFamily="34" charset="0"/>
+                <a:ea typeface="Arial" pitchFamily="34" charset="-122"/>
+                <a:cs typeface="Arial" pitchFamily="34" charset="-120"/>
+              </a:rPr>
+              <a:t>Moderate risk; volume leverage uncertain</a:t>
             </a:r>
             <a:endParaRPr lang="en-US" sz="1000" dirty="0"/>
           </a:p>
@@ -2775,14 +2462,36 @@
       </p:sp>
       <p:sp>
         <p:nvSpPr>
-          <p:cNvPr id="8" name="Text 6"/>
-          <p:cNvSpPr/>
-          <p:nvPr/>
-        </p:nvSpPr>
-        <p:spPr>
-          <a:xfrm>
-            <a:off x="411480" y="1737360"/>
-            <a:ext cx="2011680" cy="384048"/>
+          <p:cNvPr id="12" name="Shape 10"/>
+          <p:cNvSpPr/>
+          <p:nvPr/>
+        </p:nvSpPr>
+        <p:spPr>
+          <a:xfrm flipV="1">
+            <a:off x="1028700" y="2843784"/>
+            <a:ext cx="4160520" cy="713232"/>
+          </a:xfrm>
+          <a:prstGeom prst="trapezoid">
+            <a:avLst/>
+          </a:prstGeom>
+          <a:solidFill>
+            <a:srgbClr val="B45309">
+              <a:alpha val="77000"/>
+            </a:srgbClr>
+          </a:solidFill>
+          <a:ln/>
+        </p:spPr>
+      </p:sp>
+      <p:sp>
+        <p:nvSpPr>
+          <p:cNvPr id="13" name="Text 11"/>
+          <p:cNvSpPr/>
+          <p:nvPr/>
+        </p:nvSpPr>
+        <p:spPr>
+          <a:xfrm>
+            <a:off x="1028700" y="2898648"/>
+            <a:ext cx="4160520" cy="621792"/>
           </a:xfrm>
           <a:prstGeom prst="rect">
             <a:avLst/>
@@ -2800,13 +2509,13 @@
             <a:r>
               <a:rPr lang="en-US" sz="1200" b="1" dirty="0">
                 <a:solidFill>
-                  <a:srgbClr val="1C1917"/>
-                </a:solidFill>
-                <a:latin typeface="Arial" pitchFamily="34" charset="0"/>
-                <a:ea typeface="Arial" pitchFamily="34" charset="-122"/>
-                <a:cs typeface="Arial" pitchFamily="34" charset="-120"/>
-              </a:rPr>
-              <a:t>Gather Inputs</a:t>
+                  <a:srgbClr val="FFFFFF"/>
+                </a:solidFill>
+                <a:latin typeface="Arial" pitchFamily="34" charset="0"/>
+                <a:ea typeface="Arial" pitchFamily="34" charset="-122"/>
+                <a:cs typeface="Arial" pitchFamily="34" charset="-120"/>
+              </a:rPr>
+              <a:t>Facility Consolidation</a:t>
             </a:r>
             <a:endParaRPr lang="en-US" sz="1200" dirty="0"/>
           </a:p>
@@ -2814,14 +2523,14 @@
       </p:sp>
       <p:sp>
         <p:nvSpPr>
-          <p:cNvPr id="9" name="Text 7"/>
-          <p:cNvSpPr/>
-          <p:nvPr/>
-        </p:nvSpPr>
-        <p:spPr>
-          <a:xfrm>
-            <a:off x="411480" y="2084832"/>
-            <a:ext cx="2011680" cy="310896"/>
+          <p:cNvPr id="14" name="Text 12"/>
+          <p:cNvSpPr/>
+          <p:nvPr/>
+        </p:nvSpPr>
+        <p:spPr>
+          <a:xfrm>
+            <a:off x="5760720" y="3054096"/>
+            <a:ext cx="2926080" cy="310896"/>
           </a:xfrm>
           <a:prstGeom prst="rect">
             <a:avLst/>
@@ -2833,11 +2542,111 @@
           <a:bodyPr wrap="square" rtlCol="0" anchor="ctr"/>
           <a:lstStyle/>
           <a:p>
+            <a:pPr indent="0" marL="0">
+              <a:buNone/>
+            </a:pPr>
+            <a:r>
+              <a:rPr lang="en-US" sz="1000" dirty="0">
+                <a:solidFill>
+                  <a:srgbClr val="78716C"/>
+                </a:solidFill>
+                <a:latin typeface="Arial" pitchFamily="34" charset="0"/>
+                <a:ea typeface="Arial" pitchFamily="34" charset="-122"/>
+                <a:cs typeface="Arial" pitchFamily="34" charset="-120"/>
+              </a:rPr>
+              <a:t>Lower risk; contractually plannable</a:t>
+            </a:r>
+            <a:endParaRPr lang="en-US" sz="1000" dirty="0"/>
+          </a:p>
+        </p:txBody>
+      </p:sp>
+      <p:sp>
+        <p:nvSpPr>
+          <p:cNvPr id="15" name="Shape 13"/>
+          <p:cNvSpPr/>
+          <p:nvPr/>
+        </p:nvSpPr>
+        <p:spPr>
+          <a:xfrm flipV="1">
+            <a:off x="548640" y="3648456"/>
+            <a:ext cx="5120640" cy="713232"/>
+          </a:xfrm>
+          <a:prstGeom prst="trapezoid">
+            <a:avLst/>
+          </a:prstGeom>
+          <a:solidFill>
+            <a:srgbClr val="B45309">
+              <a:alpha val="95000"/>
+            </a:srgbClr>
+          </a:solidFill>
+          <a:ln/>
+        </p:spPr>
+      </p:sp>
+      <p:sp>
+        <p:nvSpPr>
+          <p:cNvPr id="16" name="Text 14"/>
+          <p:cNvSpPr/>
+          <p:nvPr/>
+        </p:nvSpPr>
+        <p:spPr>
+          <a:xfrm>
+            <a:off x="548640" y="3703320"/>
+            <a:ext cx="5120640" cy="621792"/>
+          </a:xfrm>
+          <a:prstGeom prst="rect">
+            <a:avLst/>
+          </a:prstGeom>
+          <a:noFill/>
+          <a:ln/>
+        </p:spPr>
+        <p:txBody>
+          <a:bodyPr wrap="square" rtlCol="0" anchor="ctr"/>
+          <a:lstStyle/>
+          <a:p>
             <a:pPr algn="ctr" indent="0" marL="0">
               <a:buNone/>
             </a:pPr>
             <a:r>
-              <a:rPr lang="en-US" sz="900" dirty="0">
+              <a:rPr lang="en-US" sz="1200" b="1" dirty="0">
+                <a:solidFill>
+                  <a:srgbClr val="FFFFFF"/>
+                </a:solidFill>
+                <a:latin typeface="Arial" pitchFamily="34" charset="0"/>
+                <a:ea typeface="Arial" pitchFamily="34" charset="-122"/>
+                <a:cs typeface="Arial" pitchFamily="34" charset="-120"/>
+              </a:rPr>
+              <a:t>Headcount Reduction</a:t>
+            </a:r>
+            <a:endParaRPr lang="en-US" sz="1200" dirty="0"/>
+          </a:p>
+        </p:txBody>
+      </p:sp>
+      <p:sp>
+        <p:nvSpPr>
+          <p:cNvPr id="17" name="Text 15"/>
+          <p:cNvSpPr/>
+          <p:nvPr/>
+        </p:nvSpPr>
+        <p:spPr>
+          <a:xfrm>
+            <a:off x="5760720" y="3858768"/>
+            <a:ext cx="2926080" cy="310896"/>
+          </a:xfrm>
+          <a:prstGeom prst="rect">
+            <a:avLst/>
+          </a:prstGeom>
+          <a:noFill/>
+          <a:ln/>
+        </p:spPr>
+        <p:txBody>
+          <a:bodyPr wrap="square" rtlCol="0" anchor="ctr"/>
+          <a:lstStyle/>
+          <a:p>
+            <a:pPr indent="0" marL="0">
+              <a:buNone/>
+            </a:pPr>
+            <a:r>
+              <a:rPr lang="en-US" sz="1000" dirty="0">
                 <a:solidFill>
                   <a:srgbClr val="78716C"/>
                 </a:solidFill>
@@ -2845,839 +2654,9 @@
                 <a:ea typeface="Arial" pitchFamily="34" charset="-122"/>
                 <a:cs typeface="Arial" pitchFamily="34" charset="-120"/>
               </a:rPr>
-              <a:t>3–5 yrs financials, market data, deal terms</a:t>
-            </a:r>
-            <a:endParaRPr lang="en-US" sz="900" dirty="0"/>
-          </a:p>
-        </p:txBody>
-      </p:sp>
-      <p:sp>
-        <p:nvSpPr>
-          <p:cNvPr id="10" name="Shape 8"/>
-          <p:cNvSpPr/>
-          <p:nvPr/>
-        </p:nvSpPr>
-        <p:spPr>
-          <a:xfrm>
-            <a:off x="2478024" y="1842516"/>
-            <a:ext cx="301752" cy="201168"/>
-          </a:xfrm>
-          <a:prstGeom prst="rightArrow">
-            <a:avLst/>
-          </a:prstGeom>
-          <a:solidFill>
-            <a:srgbClr val="B45309"/>
-          </a:solidFill>
-          <a:ln/>
-        </p:spPr>
-      </p:sp>
-      <p:sp>
-        <p:nvSpPr>
-          <p:cNvPr id="11" name="Shape 9"/>
-          <p:cNvSpPr/>
-          <p:nvPr/>
-        </p:nvSpPr>
-        <p:spPr>
-          <a:xfrm>
-            <a:off x="2834640" y="1463040"/>
-            <a:ext cx="2011680" cy="960120"/>
-          </a:xfrm>
-          <a:prstGeom prst="roundRect">
-            <a:avLst>
-              <a:gd name="adj" fmla="val 7619"/>
-            </a:avLst>
-          </a:prstGeom>
-          <a:solidFill>
-            <a:srgbClr val="F5F5F4"/>
-          </a:solidFill>
-          <a:ln w="15240">
-            <a:solidFill>
-              <a:srgbClr val="B45309"/>
-            </a:solidFill>
-            <a:prstDash val="solid"/>
-          </a:ln>
-        </p:spPr>
-      </p:sp>
-      <p:sp>
-        <p:nvSpPr>
-          <p:cNvPr id="12" name="Text 10"/>
-          <p:cNvSpPr/>
-          <p:nvPr/>
-        </p:nvSpPr>
-        <p:spPr>
-          <a:xfrm>
-            <a:off x="2907792" y="1536192"/>
-            <a:ext cx="310896" cy="274320"/>
-          </a:xfrm>
-          <a:prstGeom prst="rect">
-            <a:avLst/>
-          </a:prstGeom>
-          <a:solidFill>
-            <a:srgbClr val="B45309"/>
-          </a:solidFill>
-          <a:ln/>
-        </p:spPr>
-        <p:txBody>
-          <a:bodyPr wrap="square" rtlCol="0" anchor="ctr"/>
-          <a:lstStyle/>
-          <a:p>
-            <a:pPr algn="ctr" indent="0" marL="0">
-              <a:buNone/>
-            </a:pPr>
-            <a:r>
-              <a:rPr lang="en-US" sz="1000" b="1" dirty="0">
-                <a:solidFill>
-                  <a:srgbClr val="FFFFFF"/>
-                </a:solidFill>
-                <a:latin typeface="Arial" pitchFamily="34" charset="0"/>
-                <a:ea typeface="Arial" pitchFamily="34" charset="-122"/>
-                <a:cs typeface="Arial" pitchFamily="34" charset="-120"/>
-              </a:rPr>
-              <a:t>2</a:t>
+              <a:t>Most certain; discount at WACC</a:t>
             </a:r>
             <a:endParaRPr lang="en-US" sz="1000" dirty="0"/>
-          </a:p>
-        </p:txBody>
-      </p:sp>
-      <p:sp>
-        <p:nvSpPr>
-          <p:cNvPr id="13" name="Text 11"/>
-          <p:cNvSpPr/>
-          <p:nvPr/>
-        </p:nvSpPr>
-        <p:spPr>
-          <a:xfrm>
-            <a:off x="2834640" y="1737360"/>
-            <a:ext cx="2011680" cy="384048"/>
-          </a:xfrm>
-          <a:prstGeom prst="rect">
-            <a:avLst/>
-          </a:prstGeom>
-          <a:noFill/>
-          <a:ln/>
-        </p:spPr>
-        <p:txBody>
-          <a:bodyPr wrap="square" rtlCol="0" anchor="ctr"/>
-          <a:lstStyle/>
-          <a:p>
-            <a:pPr algn="ctr" indent="0" marL="0">
-              <a:buNone/>
-            </a:pPr>
-            <a:r>
-              <a:rPr lang="en-US" sz="1200" b="1" dirty="0">
-                <a:solidFill>
-                  <a:srgbClr val="1C1917"/>
-                </a:solidFill>
-                <a:latin typeface="Arial" pitchFamily="34" charset="0"/>
-                <a:ea typeface="Arial" pitchFamily="34" charset="-122"/>
-                <a:cs typeface="Arial" pitchFamily="34" charset="-120"/>
-              </a:rPr>
-              <a:t>Normalize Financials</a:t>
-            </a:r>
-            <a:endParaRPr lang="en-US" sz="1200" dirty="0"/>
-          </a:p>
-        </p:txBody>
-      </p:sp>
-      <p:sp>
-        <p:nvSpPr>
-          <p:cNvPr id="14" name="Text 12"/>
-          <p:cNvSpPr/>
-          <p:nvPr/>
-        </p:nvSpPr>
-        <p:spPr>
-          <a:xfrm>
-            <a:off x="2834640" y="2084832"/>
-            <a:ext cx="2011680" cy="310896"/>
-          </a:xfrm>
-          <a:prstGeom prst="rect">
-            <a:avLst/>
-          </a:prstGeom>
-          <a:noFill/>
-          <a:ln/>
-        </p:spPr>
-        <p:txBody>
-          <a:bodyPr wrap="square" rtlCol="0" anchor="ctr"/>
-          <a:lstStyle/>
-          <a:p>
-            <a:pPr algn="ctr" indent="0" marL="0">
-              <a:buNone/>
-            </a:pPr>
-            <a:r>
-              <a:rPr lang="en-US" sz="900" dirty="0">
-                <a:solidFill>
-                  <a:srgbClr val="78716C"/>
-                </a:solidFill>
-                <a:latin typeface="Arial" pitchFamily="34" charset="0"/>
-                <a:ea typeface="Arial" pitchFamily="34" charset="-122"/>
-                <a:cs typeface="Arial" pitchFamily="34" charset="-120"/>
-              </a:rPr>
-              <a:t>Remove one-time items for clean baseline</a:t>
-            </a:r>
-            <a:endParaRPr lang="en-US" sz="900" dirty="0"/>
-          </a:p>
-        </p:txBody>
-      </p:sp>
-      <p:sp>
-        <p:nvSpPr>
-          <p:cNvPr id="15" name="Shape 13"/>
-          <p:cNvSpPr/>
-          <p:nvPr/>
-        </p:nvSpPr>
-        <p:spPr>
-          <a:xfrm>
-            <a:off x="4901184" y="1842516"/>
-            <a:ext cx="301752" cy="201168"/>
-          </a:xfrm>
-          <a:prstGeom prst="rightArrow">
-            <a:avLst/>
-          </a:prstGeom>
-          <a:solidFill>
-            <a:srgbClr val="B45309"/>
-          </a:solidFill>
-          <a:ln/>
-        </p:spPr>
-      </p:sp>
-      <p:sp>
-        <p:nvSpPr>
-          <p:cNvPr id="16" name="Shape 14"/>
-          <p:cNvSpPr/>
-          <p:nvPr/>
-        </p:nvSpPr>
-        <p:spPr>
-          <a:xfrm>
-            <a:off x="5257800" y="1463040"/>
-            <a:ext cx="2011680" cy="960120"/>
-          </a:xfrm>
-          <a:prstGeom prst="roundRect">
-            <a:avLst>
-              <a:gd name="adj" fmla="val 7619"/>
-            </a:avLst>
-          </a:prstGeom>
-          <a:solidFill>
-            <a:srgbClr val="F5F5F4"/>
-          </a:solidFill>
-          <a:ln w="15240">
-            <a:solidFill>
-              <a:srgbClr val="B45309"/>
-            </a:solidFill>
-            <a:prstDash val="solid"/>
-          </a:ln>
-        </p:spPr>
-      </p:sp>
-      <p:sp>
-        <p:nvSpPr>
-          <p:cNvPr id="17" name="Text 15"/>
-          <p:cNvSpPr/>
-          <p:nvPr/>
-        </p:nvSpPr>
-        <p:spPr>
-          <a:xfrm>
-            <a:off x="5330952" y="1536192"/>
-            <a:ext cx="310896" cy="274320"/>
-          </a:xfrm>
-          <a:prstGeom prst="rect">
-            <a:avLst/>
-          </a:prstGeom>
-          <a:solidFill>
-            <a:srgbClr val="B45309"/>
-          </a:solidFill>
-          <a:ln/>
-        </p:spPr>
-        <p:txBody>
-          <a:bodyPr wrap="square" rtlCol="0" anchor="ctr"/>
-          <a:lstStyle/>
-          <a:p>
-            <a:pPr algn="ctr" indent="0" marL="0">
-              <a:buNone/>
-            </a:pPr>
-            <a:r>
-              <a:rPr lang="en-US" sz="1000" b="1" dirty="0">
-                <a:solidFill>
-                  <a:srgbClr val="FFFFFF"/>
-                </a:solidFill>
-                <a:latin typeface="Arial" pitchFamily="34" charset="0"/>
-                <a:ea typeface="Arial" pitchFamily="34" charset="-122"/>
-                <a:cs typeface="Arial" pitchFamily="34" charset="-120"/>
-              </a:rPr>
-              <a:t>3</a:t>
-            </a:r>
-            <a:endParaRPr lang="en-US" sz="1000" dirty="0"/>
-          </a:p>
-        </p:txBody>
-      </p:sp>
-      <p:sp>
-        <p:nvSpPr>
-          <p:cNvPr id="18" name="Text 16"/>
-          <p:cNvSpPr/>
-          <p:nvPr/>
-        </p:nvSpPr>
-        <p:spPr>
-          <a:xfrm>
-            <a:off x="5257800" y="1737360"/>
-            <a:ext cx="2011680" cy="384048"/>
-          </a:xfrm>
-          <a:prstGeom prst="rect">
-            <a:avLst/>
-          </a:prstGeom>
-          <a:noFill/>
-          <a:ln/>
-        </p:spPr>
-        <p:txBody>
-          <a:bodyPr wrap="square" rtlCol="0" anchor="ctr"/>
-          <a:lstStyle/>
-          <a:p>
-            <a:pPr algn="ctr" indent="0" marL="0">
-              <a:buNone/>
-            </a:pPr>
-            <a:r>
-              <a:rPr lang="en-US" sz="1200" b="1" dirty="0">
-                <a:solidFill>
-                  <a:srgbClr val="1C1917"/>
-                </a:solidFill>
-                <a:latin typeface="Arial" pitchFamily="34" charset="0"/>
-                <a:ea typeface="Arial" pitchFamily="34" charset="-122"/>
-                <a:cs typeface="Arial" pitchFamily="34" charset="-120"/>
-              </a:rPr>
-              <a:t>Project Income Statement</a:t>
-            </a:r>
-            <a:endParaRPr lang="en-US" sz="1200" dirty="0"/>
-          </a:p>
-        </p:txBody>
-      </p:sp>
-      <p:sp>
-        <p:nvSpPr>
-          <p:cNvPr id="19" name="Text 17"/>
-          <p:cNvSpPr/>
-          <p:nvPr/>
-        </p:nvSpPr>
-        <p:spPr>
-          <a:xfrm>
-            <a:off x="5257800" y="2084832"/>
-            <a:ext cx="2011680" cy="310896"/>
-          </a:xfrm>
-          <a:prstGeom prst="rect">
-            <a:avLst/>
-          </a:prstGeom>
-          <a:noFill/>
-          <a:ln/>
-        </p:spPr>
-        <p:txBody>
-          <a:bodyPr wrap="square" rtlCol="0" anchor="ctr"/>
-          <a:lstStyle/>
-          <a:p>
-            <a:pPr algn="ctr" indent="0" marL="0">
-              <a:buNone/>
-            </a:pPr>
-            <a:r>
-              <a:rPr lang="en-US" sz="900" dirty="0">
-                <a:solidFill>
-                  <a:srgbClr val="78716C"/>
-                </a:solidFill>
-                <a:latin typeface="Arial" pitchFamily="34" charset="0"/>
-                <a:ea typeface="Arial" pitchFamily="34" charset="-122"/>
-                <a:cs typeface="Arial" pitchFamily="34" charset="-120"/>
-              </a:rPr>
-              <a:t>Forecast revenue, COGS, operating expenses</a:t>
-            </a:r>
-            <a:endParaRPr lang="en-US" sz="900" dirty="0"/>
-          </a:p>
-        </p:txBody>
-      </p:sp>
-      <p:sp>
-        <p:nvSpPr>
-          <p:cNvPr id="20" name="Shape 18"/>
-          <p:cNvSpPr/>
-          <p:nvPr/>
-        </p:nvSpPr>
-        <p:spPr>
-          <a:xfrm>
-            <a:off x="6163056" y="2496312"/>
-            <a:ext cx="201168" cy="548640"/>
-          </a:xfrm>
-          <a:prstGeom prst="downArrow">
-            <a:avLst/>
-          </a:prstGeom>
-          <a:solidFill>
-            <a:srgbClr val="B45309"/>
-          </a:solidFill>
-          <a:ln/>
-        </p:spPr>
-      </p:sp>
-      <p:sp>
-        <p:nvSpPr>
-          <p:cNvPr id="21" name="Shape 19"/>
-          <p:cNvSpPr/>
-          <p:nvPr/>
-        </p:nvSpPr>
-        <p:spPr>
-          <a:xfrm>
-            <a:off x="5257800" y="3108960"/>
-            <a:ext cx="2011680" cy="960120"/>
-          </a:xfrm>
-          <a:prstGeom prst="roundRect">
-            <a:avLst>
-              <a:gd name="adj" fmla="val 7619"/>
-            </a:avLst>
-          </a:prstGeom>
-          <a:solidFill>
-            <a:srgbClr val="F5F5F4"/>
-          </a:solidFill>
-          <a:ln w="15240">
-            <a:solidFill>
-              <a:srgbClr val="B45309"/>
-            </a:solidFill>
-            <a:prstDash val="solid"/>
-          </a:ln>
-        </p:spPr>
-      </p:sp>
-      <p:sp>
-        <p:nvSpPr>
-          <p:cNvPr id="22" name="Text 20"/>
-          <p:cNvSpPr/>
-          <p:nvPr/>
-        </p:nvSpPr>
-        <p:spPr>
-          <a:xfrm>
-            <a:off x="5330952" y="3182112"/>
-            <a:ext cx="310896" cy="274320"/>
-          </a:xfrm>
-          <a:prstGeom prst="rect">
-            <a:avLst/>
-          </a:prstGeom>
-          <a:solidFill>
-            <a:srgbClr val="B45309"/>
-          </a:solidFill>
-          <a:ln/>
-        </p:spPr>
-        <p:txBody>
-          <a:bodyPr wrap="square" rtlCol="0" anchor="ctr"/>
-          <a:lstStyle/>
-          <a:p>
-            <a:pPr algn="ctr" indent="0" marL="0">
-              <a:buNone/>
-            </a:pPr>
-            <a:r>
-              <a:rPr lang="en-US" sz="1000" b="1" dirty="0">
-                <a:solidFill>
-                  <a:srgbClr val="FFFFFF"/>
-                </a:solidFill>
-                <a:latin typeface="Arial" pitchFamily="34" charset="0"/>
-                <a:ea typeface="Arial" pitchFamily="34" charset="-122"/>
-                <a:cs typeface="Arial" pitchFamily="34" charset="-120"/>
-              </a:rPr>
-              <a:t>4</a:t>
-            </a:r>
-            <a:endParaRPr lang="en-US" sz="1000" dirty="0"/>
-          </a:p>
-        </p:txBody>
-      </p:sp>
-      <p:sp>
-        <p:nvSpPr>
-          <p:cNvPr id="23" name="Text 21"/>
-          <p:cNvSpPr/>
-          <p:nvPr/>
-        </p:nvSpPr>
-        <p:spPr>
-          <a:xfrm>
-            <a:off x="5257800" y="3383280"/>
-            <a:ext cx="2011680" cy="384048"/>
-          </a:xfrm>
-          <a:prstGeom prst="rect">
-            <a:avLst/>
-          </a:prstGeom>
-          <a:noFill/>
-          <a:ln/>
-        </p:spPr>
-        <p:txBody>
-          <a:bodyPr wrap="square" rtlCol="0" anchor="ctr"/>
-          <a:lstStyle/>
-          <a:p>
-            <a:pPr algn="ctr" indent="0" marL="0">
-              <a:buNone/>
-            </a:pPr>
-            <a:r>
-              <a:rPr lang="en-US" sz="1200" b="1" dirty="0">
-                <a:solidFill>
-                  <a:srgbClr val="1C1917"/>
-                </a:solidFill>
-                <a:latin typeface="Arial" pitchFamily="34" charset="0"/>
-                <a:ea typeface="Arial" pitchFamily="34" charset="-122"/>
-                <a:cs typeface="Arial" pitchFamily="34" charset="-120"/>
-              </a:rPr>
-              <a:t>Build Balance Sheet</a:t>
-            </a:r>
-            <a:endParaRPr lang="en-US" sz="1200" dirty="0"/>
-          </a:p>
-        </p:txBody>
-      </p:sp>
-      <p:sp>
-        <p:nvSpPr>
-          <p:cNvPr id="24" name="Text 22"/>
-          <p:cNvSpPr/>
-          <p:nvPr/>
-        </p:nvSpPr>
-        <p:spPr>
-          <a:xfrm>
-            <a:off x="5257800" y="3730752"/>
-            <a:ext cx="2011680" cy="310896"/>
-          </a:xfrm>
-          <a:prstGeom prst="rect">
-            <a:avLst/>
-          </a:prstGeom>
-          <a:noFill/>
-          <a:ln/>
-        </p:spPr>
-        <p:txBody>
-          <a:bodyPr wrap="square" rtlCol="0" anchor="ctr"/>
-          <a:lstStyle/>
-          <a:p>
-            <a:pPr algn="ctr" indent="0" marL="0">
-              <a:buNone/>
-            </a:pPr>
-            <a:r>
-              <a:rPr lang="en-US" sz="900" dirty="0">
-                <a:solidFill>
-                  <a:srgbClr val="78716C"/>
-                </a:solidFill>
-                <a:latin typeface="Arial" pitchFamily="34" charset="0"/>
-                <a:ea typeface="Arial" pitchFamily="34" charset="-122"/>
-                <a:cs typeface="Arial" pitchFamily="34" charset="-120"/>
-              </a:rPr>
-              <a:t>Model working capital using days-outstanding</a:t>
-            </a:r>
-            <a:endParaRPr lang="en-US" sz="900" dirty="0"/>
-          </a:p>
-        </p:txBody>
-      </p:sp>
-      <p:sp>
-        <p:nvSpPr>
-          <p:cNvPr id="25" name="Shape 23"/>
-          <p:cNvSpPr/>
-          <p:nvPr/>
-        </p:nvSpPr>
-        <p:spPr>
-          <a:xfrm>
-            <a:off x="4901184" y="3488436"/>
-            <a:ext cx="301752" cy="201168"/>
-          </a:xfrm>
-          <a:prstGeom prst="leftArrow">
-            <a:avLst/>
-          </a:prstGeom>
-          <a:solidFill>
-            <a:srgbClr val="B45309"/>
-          </a:solidFill>
-          <a:ln/>
-        </p:spPr>
-      </p:sp>
-      <p:sp>
-        <p:nvSpPr>
-          <p:cNvPr id="26" name="Shape 24"/>
-          <p:cNvSpPr/>
-          <p:nvPr/>
-        </p:nvSpPr>
-        <p:spPr>
-          <a:xfrm>
-            <a:off x="2834640" y="3108960"/>
-            <a:ext cx="2011680" cy="960120"/>
-          </a:xfrm>
-          <a:prstGeom prst="roundRect">
-            <a:avLst>
-              <a:gd name="adj" fmla="val 7619"/>
-            </a:avLst>
-          </a:prstGeom>
-          <a:solidFill>
-            <a:srgbClr val="F5F5F4"/>
-          </a:solidFill>
-          <a:ln w="15240">
-            <a:solidFill>
-              <a:srgbClr val="B45309"/>
-            </a:solidFill>
-            <a:prstDash val="solid"/>
-          </a:ln>
-        </p:spPr>
-      </p:sp>
-      <p:sp>
-        <p:nvSpPr>
-          <p:cNvPr id="27" name="Text 25"/>
-          <p:cNvSpPr/>
-          <p:nvPr/>
-        </p:nvSpPr>
-        <p:spPr>
-          <a:xfrm>
-            <a:off x="2907792" y="3182112"/>
-            <a:ext cx="310896" cy="274320"/>
-          </a:xfrm>
-          <a:prstGeom prst="rect">
-            <a:avLst/>
-          </a:prstGeom>
-          <a:solidFill>
-            <a:srgbClr val="B45309"/>
-          </a:solidFill>
-          <a:ln/>
-        </p:spPr>
-        <p:txBody>
-          <a:bodyPr wrap="square" rtlCol="0" anchor="ctr"/>
-          <a:lstStyle/>
-          <a:p>
-            <a:pPr algn="ctr" indent="0" marL="0">
-              <a:buNone/>
-            </a:pPr>
-            <a:r>
-              <a:rPr lang="en-US" sz="1000" b="1" dirty="0">
-                <a:solidFill>
-                  <a:srgbClr val="FFFFFF"/>
-                </a:solidFill>
-                <a:latin typeface="Arial" pitchFamily="34" charset="0"/>
-                <a:ea typeface="Arial" pitchFamily="34" charset="-122"/>
-                <a:cs typeface="Arial" pitchFamily="34" charset="-120"/>
-              </a:rPr>
-              <a:t>5</a:t>
-            </a:r>
-            <a:endParaRPr lang="en-US" sz="1000" dirty="0"/>
-          </a:p>
-        </p:txBody>
-      </p:sp>
-      <p:sp>
-        <p:nvSpPr>
-          <p:cNvPr id="28" name="Text 26"/>
-          <p:cNvSpPr/>
-          <p:nvPr/>
-        </p:nvSpPr>
-        <p:spPr>
-          <a:xfrm>
-            <a:off x="2834640" y="3383280"/>
-            <a:ext cx="2011680" cy="384048"/>
-          </a:xfrm>
-          <a:prstGeom prst="rect">
-            <a:avLst/>
-          </a:prstGeom>
-          <a:noFill/>
-          <a:ln/>
-        </p:spPr>
-        <p:txBody>
-          <a:bodyPr wrap="square" rtlCol="0" anchor="ctr"/>
-          <a:lstStyle/>
-          <a:p>
-            <a:pPr algn="ctr" indent="0" marL="0">
-              <a:buNone/>
-            </a:pPr>
-            <a:r>
-              <a:rPr lang="en-US" sz="1200" b="1" dirty="0">
-                <a:solidFill>
-                  <a:srgbClr val="1C1917"/>
-                </a:solidFill>
-                <a:latin typeface="Arial" pitchFamily="34" charset="0"/>
-                <a:ea typeface="Arial" pitchFamily="34" charset="-122"/>
-                <a:cs typeface="Arial" pitchFamily="34" charset="-120"/>
-              </a:rPr>
-              <a:t>Construct Cash Flows</a:t>
-            </a:r>
-            <a:endParaRPr lang="en-US" sz="1200" dirty="0"/>
-          </a:p>
-        </p:txBody>
-      </p:sp>
-      <p:sp>
-        <p:nvSpPr>
-          <p:cNvPr id="29" name="Text 27"/>
-          <p:cNvSpPr/>
-          <p:nvPr/>
-        </p:nvSpPr>
-        <p:spPr>
-          <a:xfrm>
-            <a:off x="2834640" y="3730752"/>
-            <a:ext cx="2011680" cy="310896"/>
-          </a:xfrm>
-          <a:prstGeom prst="rect">
-            <a:avLst/>
-          </a:prstGeom>
-          <a:noFill/>
-          <a:ln/>
-        </p:spPr>
-        <p:txBody>
-          <a:bodyPr wrap="square" rtlCol="0" anchor="ctr"/>
-          <a:lstStyle/>
-          <a:p>
-            <a:pPr algn="ctr" indent="0" marL="0">
-              <a:buNone/>
-            </a:pPr>
-            <a:r>
-              <a:rPr lang="en-US" sz="900" dirty="0">
-                <a:solidFill>
-                  <a:srgbClr val="78716C"/>
-                </a:solidFill>
-                <a:latin typeface="Arial" pitchFamily="34" charset="0"/>
-                <a:ea typeface="Arial" pitchFamily="34" charset="-122"/>
-                <a:cs typeface="Arial" pitchFamily="34" charset="-120"/>
-              </a:rPr>
-              <a:t>Derive FCF from EBIT and working capital</a:t>
-            </a:r>
-            <a:endParaRPr lang="en-US" sz="900" dirty="0"/>
-          </a:p>
-        </p:txBody>
-      </p:sp>
-      <p:sp>
-        <p:nvSpPr>
-          <p:cNvPr id="30" name="Shape 28"/>
-          <p:cNvSpPr/>
-          <p:nvPr/>
-        </p:nvSpPr>
-        <p:spPr>
-          <a:xfrm>
-            <a:off x="2478024" y="3488436"/>
-            <a:ext cx="301752" cy="201168"/>
-          </a:xfrm>
-          <a:prstGeom prst="leftArrow">
-            <a:avLst/>
-          </a:prstGeom>
-          <a:solidFill>
-            <a:srgbClr val="B45309"/>
-          </a:solidFill>
-          <a:ln/>
-        </p:spPr>
-      </p:sp>
-      <p:sp>
-        <p:nvSpPr>
-          <p:cNvPr id="31" name="Shape 29"/>
-          <p:cNvSpPr/>
-          <p:nvPr/>
-        </p:nvSpPr>
-        <p:spPr>
-          <a:xfrm>
-            <a:off x="411480" y="3108960"/>
-            <a:ext cx="2011680" cy="960120"/>
-          </a:xfrm>
-          <a:prstGeom prst="roundRect">
-            <a:avLst>
-              <a:gd name="adj" fmla="val 7619"/>
-            </a:avLst>
-          </a:prstGeom>
-          <a:solidFill>
-            <a:srgbClr val="F5F5F4"/>
-          </a:solidFill>
-          <a:ln w="15240">
-            <a:solidFill>
-              <a:srgbClr val="B45309"/>
-            </a:solidFill>
-            <a:prstDash val="solid"/>
-          </a:ln>
-        </p:spPr>
-      </p:sp>
-      <p:sp>
-        <p:nvSpPr>
-          <p:cNvPr id="32" name="Text 30"/>
-          <p:cNvSpPr/>
-          <p:nvPr/>
-        </p:nvSpPr>
-        <p:spPr>
-          <a:xfrm>
-            <a:off x="484632" y="3182112"/>
-            <a:ext cx="310896" cy="274320"/>
-          </a:xfrm>
-          <a:prstGeom prst="rect">
-            <a:avLst/>
-          </a:prstGeom>
-          <a:solidFill>
-            <a:srgbClr val="B45309"/>
-          </a:solidFill>
-          <a:ln/>
-        </p:spPr>
-        <p:txBody>
-          <a:bodyPr wrap="square" rtlCol="0" anchor="ctr"/>
-          <a:lstStyle/>
-          <a:p>
-            <a:pPr algn="ctr" indent="0" marL="0">
-              <a:buNone/>
-            </a:pPr>
-            <a:r>
-              <a:rPr lang="en-US" sz="1000" b="1" dirty="0">
-                <a:solidFill>
-                  <a:srgbClr val="FFFFFF"/>
-                </a:solidFill>
-                <a:latin typeface="Arial" pitchFamily="34" charset="0"/>
-                <a:ea typeface="Arial" pitchFamily="34" charset="-122"/>
-                <a:cs typeface="Arial" pitchFamily="34" charset="-120"/>
-              </a:rPr>
-              <a:t>6</a:t>
-            </a:r>
-            <a:endParaRPr lang="en-US" sz="1000" dirty="0"/>
-          </a:p>
-        </p:txBody>
-      </p:sp>
-      <p:sp>
-        <p:nvSpPr>
-          <p:cNvPr id="33" name="Text 31"/>
-          <p:cNvSpPr/>
-          <p:nvPr/>
-        </p:nvSpPr>
-        <p:spPr>
-          <a:xfrm>
-            <a:off x="411480" y="3383280"/>
-            <a:ext cx="2011680" cy="384048"/>
-          </a:xfrm>
-          <a:prstGeom prst="rect">
-            <a:avLst/>
-          </a:prstGeom>
-          <a:noFill/>
-          <a:ln/>
-        </p:spPr>
-        <p:txBody>
-          <a:bodyPr wrap="square" rtlCol="0" anchor="ctr"/>
-          <a:lstStyle/>
-          <a:p>
-            <a:pPr algn="ctr" indent="0" marL="0">
-              <a:buNone/>
-            </a:pPr>
-            <a:r>
-              <a:rPr lang="en-US" sz="1200" b="1" dirty="0">
-                <a:solidFill>
-                  <a:srgbClr val="1C1917"/>
-                </a:solidFill>
-                <a:latin typeface="Arial" pitchFamily="34" charset="0"/>
-                <a:ea typeface="Arial" pitchFamily="34" charset="-122"/>
-                <a:cs typeface="Arial" pitchFamily="34" charset="-120"/>
-              </a:rPr>
-              <a:t>Value &amp; Stress-Test</a:t>
-            </a:r>
-            <a:endParaRPr lang="en-US" sz="1200" dirty="0"/>
-          </a:p>
-        </p:txBody>
-      </p:sp>
-      <p:sp>
-        <p:nvSpPr>
-          <p:cNvPr id="34" name="Text 32"/>
-          <p:cNvSpPr/>
-          <p:nvPr/>
-        </p:nvSpPr>
-        <p:spPr>
-          <a:xfrm>
-            <a:off x="411480" y="3730752"/>
-            <a:ext cx="2011680" cy="310896"/>
-          </a:xfrm>
-          <a:prstGeom prst="rect">
-            <a:avLst/>
-          </a:prstGeom>
-          <a:noFill/>
-          <a:ln/>
-        </p:spPr>
-        <p:txBody>
-          <a:bodyPr wrap="square" rtlCol="0" anchor="ctr"/>
-          <a:lstStyle/>
-          <a:p>
-            <a:pPr algn="ctr" indent="0" marL="0">
-              <a:buNone/>
-            </a:pPr>
-            <a:r>
-              <a:rPr lang="en-US" sz="900" dirty="0">
-                <a:solidFill>
-                  <a:srgbClr val="78716C"/>
-                </a:solidFill>
-                <a:latin typeface="Arial" pitchFamily="34" charset="0"/>
-                <a:ea typeface="Arial" pitchFamily="34" charset="-122"/>
-                <a:cs typeface="Arial" pitchFamily="34" charset="-120"/>
-              </a:rPr>
-              <a:t>Apply WACC, run bear/base/bull scenarios</a:t>
-            </a:r>
-            <a:endParaRPr lang="en-US" sz="900" dirty="0"/>
           </a:p>
         </p:txBody>
       </p:sp>
@@ -3766,7 +2745,7 @@
                 <a:ea typeface="Arial" pitchFamily="34" charset="-122"/>
                 <a:cs typeface="Arial" pitchFamily="34" charset="-120"/>
               </a:rPr>
-              <a:t>Inputs: Building the Foundation</a:t>
+              <a:t>Model Governance, Audit Trails, and Assumption Documentation</a:t>
             </a:r>
             <a:endParaRPr lang="en-US" sz="2100" dirty="0"/>
           </a:p>
@@ -3871,7 +2850,7 @@
                 <a:ea typeface="Arial" pitchFamily="34" charset="-122"/>
                 <a:cs typeface="Arial" pitchFamily="34" charset="-120"/>
               </a:rPr>
-              <a:t>Use three to five years of historical income statements, balance sheets, and cash flows.</a:t>
+              <a:t>Separate Inputs, Calculations, and Outputs sheets for full structural transparency.</a:t>
             </a:r>
             <a:endParaRPr lang="en-US" sz="1500" dirty="0"/>
           </a:p>
@@ -3892,7 +2871,7 @@
                 <a:ea typeface="Arial" pitchFamily="34" charset="-122"/>
                 <a:cs typeface="Arial" pitchFamily="34" charset="-120"/>
               </a:rPr>
-              <a:t>Gather market data: growth rates, comparable multiples, and discount rates.</a:t>
+              <a:t>All hardcoded assumptions live only on the Inputs sheet—no buried constants.</a:t>
             </a:r>
             <a:endParaRPr lang="en-US" sz="1500" dirty="0"/>
           </a:p>
@@ -3913,7 +2892,7 @@
                 <a:ea typeface="Arial" pitchFamily="34" charset="-122"/>
                 <a:cs typeface="Arial" pitchFamily="34" charset="-120"/>
               </a:rPr>
-              <a:t>Capture deal-specific assumptions: price, financing, synergies, integration costs.</a:t>
+              <a:t>Calculations sheet references Inputs exclusively; no raw numbers in formulas.</a:t>
             </a:r>
             <a:endParaRPr lang="en-US" sz="1500" dirty="0"/>
           </a:p>
@@ -3934,7 +2913,7 @@
                 <a:ea typeface="Arial" pitchFamily="34" charset="-122"/>
                 <a:cs typeface="Arial" pitchFamily="34" charset="-120"/>
               </a:rPr>
-              <a:t>Store all assumptions on a dedicated inputs tab—never bury hard-coded numbers.</a:t>
+              <a:t>Outputs sheet pulls final metrics: IRR, MOIC, accretion/dilution.</a:t>
             </a:r>
             <a:endParaRPr lang="en-US" sz="1500" dirty="0"/>
           </a:p>
@@ -3955,7 +2934,7 @@
                 <a:ea typeface="Arial" pitchFamily="34" charset="-122"/>
                 <a:cs typeface="Arial" pitchFamily="34" charset="-120"/>
               </a:rPr>
-              <a:t>Explicit labeling of every assumption is the single best error-prevention habit.</a:t>
+              <a:t>Stress testing requires changing one cell; every result updates automatically.</a:t>
             </a:r>
             <a:endParaRPr lang="en-US" sz="1500" dirty="0"/>
           </a:p>
@@ -4037,7 +3016,7 @@
                 <a:ea typeface="Arial" pitchFamily="34" charset="-122"/>
                 <a:cs typeface="Arial" pitchFamily="34" charset="-120"/>
               </a:rPr>
-              <a:t>A clean, centralized inputs tab is the most important structural decision in any M&amp;A model.</a:t>
+              <a:t>Rigorous model governance makes M&amp;A spreadsheets auditable, defensible, and stress-test ready.</a:t>
             </a:r>
             <a:endParaRPr lang="en-US" sz="1100" dirty="0"/>
           </a:p>
@@ -4083,2023 +3062,6 @@
         </p:nvSpPr>
         <p:spPr>
           <a:xfrm>
-            <a:off x="411480" y="402336"/>
-            <a:ext cx="82296" cy="329184"/>
-          </a:xfrm>
-          <a:prstGeom prst="rect">
-            <a:avLst/>
-          </a:prstGeom>
-          <a:solidFill>
-            <a:srgbClr val="B45309"/>
-          </a:solidFill>
-          <a:ln/>
-        </p:spPr>
-      </p:sp>
-      <p:sp>
-        <p:nvSpPr>
-          <p:cNvPr id="3" name="Text 1"/>
-          <p:cNvSpPr/>
-          <p:nvPr/>
-        </p:nvSpPr>
-        <p:spPr>
-          <a:xfrm>
-            <a:off x="566928" y="292608"/>
-            <a:ext cx="8138160" cy="548640"/>
-          </a:xfrm>
-          <a:prstGeom prst="rect">
-            <a:avLst/>
-          </a:prstGeom>
-          <a:noFill/>
-          <a:ln/>
-        </p:spPr>
-        <p:txBody>
-          <a:bodyPr wrap="square" rtlCol="0" anchor="ctr"/>
-          <a:lstStyle/>
-          <a:p>
-            <a:pPr indent="0" marL="0">
-              <a:buNone/>
-            </a:pPr>
-            <a:r>
-              <a:rPr lang="en-US" sz="2100" b="1" dirty="0">
-                <a:solidFill>
-                  <a:srgbClr val="1C1917"/>
-                </a:solidFill>
-                <a:latin typeface="Arial" pitchFamily="34" charset="0"/>
-                <a:ea typeface="Arial" pitchFamily="34" charset="-122"/>
-                <a:cs typeface="Arial" pitchFamily="34" charset="-120"/>
-              </a:rPr>
-              <a:t>Steps: Building the Model</a:t>
-            </a:r>
-            <a:endParaRPr lang="en-US" sz="2100" dirty="0"/>
-          </a:p>
-        </p:txBody>
-      </p:sp>
-      <p:sp>
-        <p:nvSpPr>
-          <p:cNvPr id="4" name="Shape 2"/>
-          <p:cNvSpPr/>
-          <p:nvPr/>
-        </p:nvSpPr>
-        <p:spPr>
-          <a:xfrm>
-            <a:off x="411480" y="960120"/>
-            <a:ext cx="8321040" cy="0"/>
-          </a:xfrm>
-          <a:prstGeom prst="line">
-            <a:avLst/>
-          </a:prstGeom>
-          <a:noFill/>
-          <a:ln w="12700">
-            <a:solidFill>
-              <a:srgbClr val="E7E5E4"/>
-            </a:solidFill>
-            <a:prstDash val="solid"/>
-          </a:ln>
-        </p:spPr>
-      </p:sp>
-      <p:sp>
-        <p:nvSpPr>
-          <p:cNvPr id="5" name="Text 3"/>
-          <p:cNvSpPr/>
-          <p:nvPr/>
-        </p:nvSpPr>
-        <p:spPr>
-          <a:xfrm>
-            <a:off x="411480" y="4864608"/>
-            <a:ext cx="8321040" cy="237744"/>
-          </a:xfrm>
-          <a:prstGeom prst="rect">
-            <a:avLst/>
-          </a:prstGeom>
-          <a:noFill/>
-          <a:ln/>
-        </p:spPr>
-        <p:txBody>
-          <a:bodyPr wrap="square" rtlCol="0" anchor="ctr"/>
-          <a:lstStyle/>
-          <a:p>
-            <a:pPr indent="0" marL="0">
-              <a:buNone/>
-            </a:pPr>
-            <a:r>
-              <a:rPr lang="en-US" sz="750" dirty="0">
-                <a:solidFill>
-                  <a:srgbClr val="AAAAAA"/>
-                </a:solidFill>
-                <a:latin typeface="Arial" pitchFamily="34" charset="0"/>
-                <a:ea typeface="Arial" pitchFamily="34" charset="-122"/>
-                <a:cs typeface="Arial" pitchFamily="34" charset="-120"/>
-              </a:rPr>
-              <a:t>Lesson Forge Pro (owner) — This content is educational material only and does not constitute financial, investment, or trading advice.</a:t>
-            </a:r>
-            <a:endParaRPr lang="en-US" sz="750" dirty="0"/>
-          </a:p>
-        </p:txBody>
-      </p:sp>
-      <p:sp>
-        <p:nvSpPr>
-          <p:cNvPr id="6" name="Text 4"/>
-          <p:cNvSpPr/>
-          <p:nvPr/>
-        </p:nvSpPr>
-        <p:spPr>
-          <a:xfrm>
-            <a:off x="731520" y="1188720"/>
-            <a:ext cx="7680960" cy="2743200"/>
-          </a:xfrm>
-          <a:prstGeom prst="rect">
-            <a:avLst/>
-          </a:prstGeom>
-          <a:noFill/>
-          <a:ln/>
-        </p:spPr>
-        <p:txBody>
-          <a:bodyPr wrap="square" rtlCol="0" anchor="t"/>
-          <a:lstStyle/>
-          <a:p>
-            <a:pPr marL="152400" indent="-152400">
-              <a:spcAft>
-                <a:spcPts val="800"/>
-              </a:spcAft>
-              <a:buSzPct val="100000"/>
-              <a:buChar char="•"/>
-            </a:pPr>
-            <a:r>
-              <a:rPr lang="en-US" sz="1500" dirty="0">
-                <a:solidFill>
-                  <a:srgbClr val="1C1917"/>
-                </a:solidFill>
-                <a:latin typeface="Arial" pitchFamily="34" charset="0"/>
-                <a:ea typeface="Arial" pitchFamily="34" charset="-122"/>
-                <a:cs typeface="Arial" pitchFamily="34" charset="-120"/>
-              </a:rPr>
-              <a:t>Normalize historicals first—remove litigation, write-downs, and restructuring charges.</a:t>
-            </a:r>
-            <a:endParaRPr lang="en-US" sz="1500" dirty="0"/>
-          </a:p>
-          <a:p>
-            <a:pPr marL="152400" indent="-152400">
-              <a:spcAft>
-                <a:spcPts val="800"/>
-              </a:spcAft>
-              <a:buSzPct val="100000"/>
-              <a:buChar char="•"/>
-            </a:pPr>
-            <a:r>
-              <a:rPr lang="en-US" sz="1500" dirty="0">
-                <a:solidFill>
-                  <a:srgbClr val="1C1917"/>
-                </a:solidFill>
-                <a:latin typeface="Arial" pitchFamily="34" charset="0"/>
-                <a:ea typeface="Arial" pitchFamily="34" charset="-122"/>
-                <a:cs typeface="Arial" pitchFamily="34" charset="-120"/>
-              </a:rPr>
-              <a:t>Project revenue via bottom-up or top-down growth; forecast costs as revenue percentages.</a:t>
-            </a:r>
-            <a:endParaRPr lang="en-US" sz="1500" dirty="0"/>
-          </a:p>
-          <a:p>
-            <a:pPr marL="152400" indent="-152400">
-              <a:spcAft>
-                <a:spcPts val="800"/>
-              </a:spcAft>
-              <a:buSzPct val="100000"/>
-              <a:buChar char="•"/>
-            </a:pPr>
-            <a:r>
-              <a:rPr lang="en-US" sz="1500" dirty="0">
-                <a:solidFill>
-                  <a:srgbClr val="1C1917"/>
-                </a:solidFill>
-                <a:latin typeface="Arial" pitchFamily="34" charset="0"/>
-                <a:ea typeface="Arial" pitchFamily="34" charset="-122"/>
-                <a:cs typeface="Arial" pitchFamily="34" charset="-120"/>
-              </a:rPr>
-              <a:t>Build working capital schedules using days-outstanding metrics from history.</a:t>
-            </a:r>
-            <a:endParaRPr lang="en-US" sz="1500" dirty="0"/>
-          </a:p>
-          <a:p>
-            <a:pPr marL="152400" indent="-152400">
-              <a:spcAft>
-                <a:spcPts val="800"/>
-              </a:spcAft>
-              <a:buSzPct val="100000"/>
-              <a:buChar char="•"/>
-            </a:pPr>
-            <a:r>
-              <a:rPr lang="en-US" sz="1500" dirty="0">
-                <a:solidFill>
-                  <a:srgbClr val="1C1917"/>
-                </a:solidFill>
-                <a:latin typeface="Arial" pitchFamily="34" charset="0"/>
-                <a:ea typeface="Arial" pitchFamily="34" charset="-122"/>
-                <a:cs typeface="Arial" pitchFamily="34" charset="-120"/>
-              </a:rPr>
-              <a:t>Derive FCF from EBIT: apply taxes, add D&amp;A, subtract capex and working capital changes.</a:t>
-            </a:r>
-            <a:endParaRPr lang="en-US" sz="1500" dirty="0"/>
-          </a:p>
-          <a:p>
-            <a:pPr marL="152400" indent="-152400">
-              <a:spcAft>
-                <a:spcPts val="800"/>
-              </a:spcAft>
-              <a:buSzPct val="100000"/>
-              <a:buChar char="•"/>
-            </a:pPr>
-            <a:r>
-              <a:rPr lang="en-US" sz="1500" dirty="0">
-                <a:solidFill>
-                  <a:srgbClr val="1C1917"/>
-                </a:solidFill>
-                <a:latin typeface="Arial" pitchFamily="34" charset="0"/>
-                <a:ea typeface="Arial" pitchFamily="34" charset="-122"/>
-                <a:cs typeface="Arial" pitchFamily="34" charset="-120"/>
-              </a:rPr>
-              <a:t>Layer in acquisition price, goodwill, new debt, and equity to form the pro-forma balance sheet.</a:t>
-            </a:r>
-            <a:endParaRPr lang="en-US" sz="1500" dirty="0"/>
-          </a:p>
-        </p:txBody>
-      </p:sp>
-      <p:sp>
-        <p:nvSpPr>
-          <p:cNvPr id="7" name="Shape 5"/>
-          <p:cNvSpPr/>
-          <p:nvPr/>
-        </p:nvSpPr>
-        <p:spPr>
-          <a:xfrm>
-            <a:off x="731520" y="4041648"/>
-            <a:ext cx="7680960" cy="566928"/>
-          </a:xfrm>
-          <a:prstGeom prst="roundRect">
-            <a:avLst>
-              <a:gd name="adj" fmla="val 12903"/>
-            </a:avLst>
-          </a:prstGeom>
-          <a:solidFill>
-            <a:srgbClr val="B45309">
-              <a:alpha val="12000"/>
-            </a:srgbClr>
-          </a:solidFill>
-          <a:ln w="12700">
-            <a:solidFill>
-              <a:srgbClr val="B45309"/>
-            </a:solidFill>
-            <a:prstDash val="solid"/>
-          </a:ln>
-        </p:spPr>
-      </p:sp>
-      <p:sp>
-        <p:nvSpPr>
-          <p:cNvPr id="8" name="Text 6"/>
-          <p:cNvSpPr/>
-          <p:nvPr/>
-        </p:nvSpPr>
-        <p:spPr>
-          <a:xfrm>
-            <a:off x="868680" y="4087368"/>
-            <a:ext cx="7406640" cy="475488"/>
-          </a:xfrm>
-          <a:prstGeom prst="rect">
-            <a:avLst/>
-          </a:prstGeom>
-          <a:noFill/>
-          <a:ln/>
-        </p:spPr>
-        <p:txBody>
-          <a:bodyPr wrap="square" rtlCol="0" anchor="ctr"/>
-          <a:lstStyle/>
-          <a:p>
-            <a:pPr indent="0" marL="0">
-              <a:buNone/>
-            </a:pPr>
-            <a:r>
-              <a:rPr lang="en-US" sz="1100" b="1" dirty="0">
-                <a:solidFill>
-                  <a:srgbClr val="B45309"/>
-                </a:solidFill>
-                <a:latin typeface="Arial" pitchFamily="34" charset="0"/>
-                <a:ea typeface="Arial" pitchFamily="34" charset="-122"/>
-                <a:cs typeface="Arial" pitchFamily="34" charset="-120"/>
-              </a:rPr>
-              <a:t>Takeaway  </a:t>
-            </a:r>
-            <a:pPr indent="0" marL="0">
-              <a:buNone/>
-            </a:pPr>
-            <a:r>
-              <a:rPr lang="en-US" sz="1150" dirty="0">
-                <a:solidFill>
-                  <a:srgbClr val="1C1917"/>
-                </a:solidFill>
-                <a:latin typeface="Arial" pitchFamily="34" charset="0"/>
-                <a:ea typeface="Arial" pitchFamily="34" charset="-122"/>
-                <a:cs typeface="Arial" pitchFamily="34" charset="-120"/>
-              </a:rPr>
-              <a:t>Following each modeling step in sequence ensures every output traces back to a defensible assumption.</a:t>
-            </a:r>
-            <a:endParaRPr lang="en-US" sz="1100" dirty="0"/>
-          </a:p>
-        </p:txBody>
-      </p:sp>
-    </p:spTree>
-  </p:cSld>
-  <p:clrMapOvr>
-    <a:masterClrMapping/>
-  </p:clrMapOvr>
-</p:sld>
-</file>
-
-<file path=ppt/slides/slide13.xml><?xml version="1.0" encoding="utf-8"?>
-<p:sld xmlns:a="http://schemas.openxmlformats.org/drawingml/2006/main" xmlns:r="http://schemas.openxmlformats.org/officeDocument/2006/relationships" xmlns:p="http://schemas.openxmlformats.org/presentationml/2006/main">
-  <p:cSld name="Slide 13">
-    <p:bg>
-      <p:bgPr>
-        <a:solidFill>
-          <a:srgbClr val="FFFFFF"/>
-        </a:solidFill>
-      </p:bgPr>
-    </p:bg>
-    <p:spTree>
-      <p:nvGrpSpPr>
-        <p:cNvPr id="1" name=""/>
-        <p:cNvGrpSpPr/>
-        <p:nvPr/>
-      </p:nvGrpSpPr>
-      <p:grpSpPr>
-        <a:xfrm>
-          <a:off x="0" y="0"/>
-          <a:ext cx="0" cy="0"/>
-          <a:chOff x="0" y="0"/>
-          <a:chExt cx="0" cy="0"/>
-        </a:xfrm>
-      </p:grpSpPr>
-      <p:sp>
-        <p:nvSpPr>
-          <p:cNvPr id="2" name="Shape 0"/>
-          <p:cNvSpPr/>
-          <p:nvPr/>
-        </p:nvSpPr>
-        <p:spPr>
-          <a:xfrm>
-            <a:off x="411480" y="402336"/>
-            <a:ext cx="82296" cy="329184"/>
-          </a:xfrm>
-          <a:prstGeom prst="rect">
-            <a:avLst/>
-          </a:prstGeom>
-          <a:solidFill>
-            <a:srgbClr val="B45309"/>
-          </a:solidFill>
-          <a:ln/>
-        </p:spPr>
-      </p:sp>
-      <p:sp>
-        <p:nvSpPr>
-          <p:cNvPr id="3" name="Text 1"/>
-          <p:cNvSpPr/>
-          <p:nvPr/>
-        </p:nvSpPr>
-        <p:spPr>
-          <a:xfrm>
-            <a:off x="566928" y="292608"/>
-            <a:ext cx="8138160" cy="548640"/>
-          </a:xfrm>
-          <a:prstGeom prst="rect">
-            <a:avLst/>
-          </a:prstGeom>
-          <a:noFill/>
-          <a:ln/>
-        </p:spPr>
-        <p:txBody>
-          <a:bodyPr wrap="square" rtlCol="0" anchor="ctr"/>
-          <a:lstStyle/>
-          <a:p>
-            <a:pPr indent="0" marL="0">
-              <a:buNone/>
-            </a:pPr>
-            <a:r>
-              <a:rPr lang="en-US" sz="2100" b="1" dirty="0">
-                <a:solidFill>
-                  <a:srgbClr val="1C1917"/>
-                </a:solidFill>
-                <a:latin typeface="Arial" pitchFamily="34" charset="0"/>
-                <a:ea typeface="Arial" pitchFamily="34" charset="-122"/>
-                <a:cs typeface="Arial" pitchFamily="34" charset="-120"/>
-              </a:rPr>
-              <a:t>Worked Example: DCF Valuation</a:t>
-            </a:r>
-            <a:endParaRPr lang="en-US" sz="2100" dirty="0"/>
-          </a:p>
-        </p:txBody>
-      </p:sp>
-      <p:sp>
-        <p:nvSpPr>
-          <p:cNvPr id="4" name="Shape 2"/>
-          <p:cNvSpPr/>
-          <p:nvPr/>
-        </p:nvSpPr>
-        <p:spPr>
-          <a:xfrm>
-            <a:off x="411480" y="960120"/>
-            <a:ext cx="8321040" cy="0"/>
-          </a:xfrm>
-          <a:prstGeom prst="line">
-            <a:avLst/>
-          </a:prstGeom>
-          <a:noFill/>
-          <a:ln w="12700">
-            <a:solidFill>
-              <a:srgbClr val="E7E5E4"/>
-            </a:solidFill>
-            <a:prstDash val="solid"/>
-          </a:ln>
-        </p:spPr>
-      </p:sp>
-      <p:sp>
-        <p:nvSpPr>
-          <p:cNvPr id="5" name="Text 3"/>
-          <p:cNvSpPr/>
-          <p:nvPr/>
-        </p:nvSpPr>
-        <p:spPr>
-          <a:xfrm>
-            <a:off x="411480" y="4864608"/>
-            <a:ext cx="8321040" cy="237744"/>
-          </a:xfrm>
-          <a:prstGeom prst="rect">
-            <a:avLst/>
-          </a:prstGeom>
-          <a:noFill/>
-          <a:ln/>
-        </p:spPr>
-        <p:txBody>
-          <a:bodyPr wrap="square" rtlCol="0" anchor="ctr"/>
-          <a:lstStyle/>
-          <a:p>
-            <a:pPr indent="0" marL="0">
-              <a:buNone/>
-            </a:pPr>
-            <a:r>
-              <a:rPr lang="en-US" sz="750" dirty="0">
-                <a:solidFill>
-                  <a:srgbClr val="AAAAAA"/>
-                </a:solidFill>
-                <a:latin typeface="Arial" pitchFamily="34" charset="0"/>
-                <a:ea typeface="Arial" pitchFamily="34" charset="-122"/>
-                <a:cs typeface="Arial" pitchFamily="34" charset="-120"/>
-              </a:rPr>
-              <a:t>Lesson Forge Pro (owner) — This content is educational material only and does not constitute financial, investment, or trading advice.</a:t>
-            </a:r>
-            <a:endParaRPr lang="en-US" sz="750" dirty="0"/>
-          </a:p>
-        </p:txBody>
-      </p:sp>
-      <p:sp>
-        <p:nvSpPr>
-          <p:cNvPr id="6" name="Text 4"/>
-          <p:cNvSpPr/>
-          <p:nvPr/>
-        </p:nvSpPr>
-        <p:spPr>
-          <a:xfrm>
-            <a:off x="731520" y="1188720"/>
-            <a:ext cx="7680960" cy="2743200"/>
-          </a:xfrm>
-          <a:prstGeom prst="rect">
-            <a:avLst/>
-          </a:prstGeom>
-          <a:noFill/>
-          <a:ln/>
-        </p:spPr>
-        <p:txBody>
-          <a:bodyPr wrap="square" rtlCol="0" anchor="t"/>
-          <a:lstStyle/>
-          <a:p>
-            <a:pPr marL="152400" indent="-152400">
-              <a:spcAft>
-                <a:spcPts val="800"/>
-              </a:spcAft>
-              <a:buSzPct val="100000"/>
-              <a:buChar char="•"/>
-            </a:pPr>
-            <a:r>
-              <a:rPr lang="en-US" sz="1500" dirty="0">
-                <a:solidFill>
-                  <a:srgbClr val="1C1917"/>
-                </a:solidFill>
-                <a:latin typeface="Arial" pitchFamily="34" charset="0"/>
-                <a:ea typeface="Arial" pitchFamily="34" charset="-122"/>
-                <a:cs typeface="Arial" pitchFamily="34" charset="-120"/>
-              </a:rPr>
-              <a:t>Year 1 FCF: $60M × 0.75 + $10M − $8M − $4M = $43M.</a:t>
-            </a:r>
-            <a:endParaRPr lang="en-US" sz="1500" dirty="0"/>
-          </a:p>
-          <a:p>
-            <a:pPr marL="152400" indent="-152400">
-              <a:spcAft>
-                <a:spcPts val="800"/>
-              </a:spcAft>
-              <a:buSzPct val="100000"/>
-              <a:buChar char="•"/>
-            </a:pPr>
-            <a:r>
-              <a:rPr lang="en-US" sz="1500" dirty="0">
-                <a:solidFill>
-                  <a:srgbClr val="1C1917"/>
-                </a:solidFill>
-                <a:latin typeface="Arial" pitchFamily="34" charset="0"/>
-                <a:ea typeface="Arial" pitchFamily="34" charset="-122"/>
-                <a:cs typeface="Arial" pitchFamily="34" charset="-120"/>
-              </a:rPr>
-              <a:t>FCFs grow 5% annually through Year 5, reaching $52.3M.</a:t>
-            </a:r>
-            <a:endParaRPr lang="en-US" sz="1500" dirty="0"/>
-          </a:p>
-          <a:p>
-            <a:pPr marL="152400" indent="-152400">
-              <a:spcAft>
-                <a:spcPts val="800"/>
-              </a:spcAft>
-              <a:buSzPct val="100000"/>
-              <a:buChar char="•"/>
-            </a:pPr>
-            <a:r>
-              <a:rPr lang="en-US" sz="1500" dirty="0">
-                <a:solidFill>
-                  <a:srgbClr val="1C1917"/>
-                </a:solidFill>
-                <a:latin typeface="Arial" pitchFamily="34" charset="0"/>
-                <a:ea typeface="Arial" pitchFamily="34" charset="-122"/>
-                <a:cs typeface="Arial" pitchFamily="34" charset="-120"/>
-              </a:rPr>
-              <a:t>Terminal Value (Gordon Growth): $52.3M × 1.03 ÷ 0.06 = $898M.</a:t>
-            </a:r>
-            <a:endParaRPr lang="en-US" sz="1500" dirty="0"/>
-          </a:p>
-          <a:p>
-            <a:pPr marL="152400" indent="-152400">
-              <a:spcAft>
-                <a:spcPts val="800"/>
-              </a:spcAft>
-              <a:buSzPct val="100000"/>
-              <a:buChar char="•"/>
-            </a:pPr>
-            <a:r>
-              <a:rPr lang="en-US" sz="1500" dirty="0">
-                <a:solidFill>
-                  <a:srgbClr val="1C1917"/>
-                </a:solidFill>
-                <a:latin typeface="Arial" pitchFamily="34" charset="0"/>
-                <a:ea typeface="Arial" pitchFamily="34" charset="-122"/>
-                <a:cs typeface="Arial" pitchFamily="34" charset="-120"/>
-              </a:rPr>
-              <a:t>PV of Years 1–5 ≈ $185M; discounting terminal value at 9% anchors total valuation.</a:t>
-            </a:r>
-            <a:endParaRPr lang="en-US" sz="1500" dirty="0"/>
-          </a:p>
-          <a:p>
-            <a:pPr marL="152400" indent="-152400">
-              <a:spcAft>
-                <a:spcPts val="800"/>
-              </a:spcAft>
-              <a:buSzPct val="100000"/>
-              <a:buChar char="•"/>
-            </a:pPr>
-            <a:r>
-              <a:rPr lang="en-US" sz="1500" dirty="0">
-                <a:solidFill>
-                  <a:srgbClr val="1C1917"/>
-                </a:solidFill>
-                <a:latin typeface="Arial" pitchFamily="34" charset="0"/>
-                <a:ea typeface="Arial" pitchFamily="34" charset="-122"/>
-                <a:cs typeface="Arial" pitchFamily="34" charset="-120"/>
-              </a:rPr>
-              <a:t>Compare implied EV to $500M purchase price to assess value creation.</a:t>
-            </a:r>
-            <a:endParaRPr lang="en-US" sz="1500" dirty="0"/>
-          </a:p>
-        </p:txBody>
-      </p:sp>
-      <p:sp>
-        <p:nvSpPr>
-          <p:cNvPr id="7" name="Shape 5"/>
-          <p:cNvSpPr/>
-          <p:nvPr/>
-        </p:nvSpPr>
-        <p:spPr>
-          <a:xfrm>
-            <a:off x="731520" y="4041648"/>
-            <a:ext cx="7680960" cy="566928"/>
-          </a:xfrm>
-          <a:prstGeom prst="roundRect">
-            <a:avLst>
-              <a:gd name="adj" fmla="val 12903"/>
-            </a:avLst>
-          </a:prstGeom>
-          <a:solidFill>
-            <a:srgbClr val="B45309">
-              <a:alpha val="12000"/>
-            </a:srgbClr>
-          </a:solidFill>
-          <a:ln w="12700">
-            <a:solidFill>
-              <a:srgbClr val="B45309"/>
-            </a:solidFill>
-            <a:prstDash val="solid"/>
-          </a:ln>
-        </p:spPr>
-      </p:sp>
-      <p:sp>
-        <p:nvSpPr>
-          <p:cNvPr id="8" name="Text 6"/>
-          <p:cNvSpPr/>
-          <p:nvPr/>
-        </p:nvSpPr>
-        <p:spPr>
-          <a:xfrm>
-            <a:off x="868680" y="4087368"/>
-            <a:ext cx="7406640" cy="475488"/>
-          </a:xfrm>
-          <a:prstGeom prst="rect">
-            <a:avLst/>
-          </a:prstGeom>
-          <a:noFill/>
-          <a:ln/>
-        </p:spPr>
-        <p:txBody>
-          <a:bodyPr wrap="square" rtlCol="0" anchor="ctr"/>
-          <a:lstStyle/>
-          <a:p>
-            <a:pPr indent="0" marL="0">
-              <a:buNone/>
-            </a:pPr>
-            <a:r>
-              <a:rPr lang="en-US" sz="1100" b="1" dirty="0">
-                <a:solidFill>
-                  <a:srgbClr val="B45309"/>
-                </a:solidFill>
-                <a:latin typeface="Arial" pitchFamily="34" charset="0"/>
-                <a:ea typeface="Arial" pitchFamily="34" charset="-122"/>
-                <a:cs typeface="Arial" pitchFamily="34" charset="-120"/>
-              </a:rPr>
-              <a:t>Takeaway  </a:t>
-            </a:r>
-            <a:pPr indent="0" marL="0">
-              <a:buNone/>
-            </a:pPr>
-            <a:r>
-              <a:rPr lang="en-US" sz="1150" dirty="0">
-                <a:solidFill>
-                  <a:srgbClr val="1C1917"/>
-                </a:solidFill>
-                <a:latin typeface="Arial" pitchFamily="34" charset="0"/>
-                <a:ea typeface="Arial" pitchFamily="34" charset="-122"/>
-                <a:cs typeface="Arial" pitchFamily="34" charset="-120"/>
-              </a:rPr>
-              <a:t>A five-step DCF converts operating assumptions into a concrete, comparable valuation for any acquisition target.</a:t>
-            </a:r>
-            <a:endParaRPr lang="en-US" sz="1100" dirty="0"/>
-          </a:p>
-        </p:txBody>
-      </p:sp>
-    </p:spTree>
-  </p:cSld>
-  <p:clrMapOvr>
-    <a:masterClrMapping/>
-  </p:clrMapOvr>
-</p:sld>
-</file>
-
-<file path=ppt/slides/slide14.xml><?xml version="1.0" encoding="utf-8"?>
-<p:sld xmlns:a="http://schemas.openxmlformats.org/drawingml/2006/main" xmlns:r="http://schemas.openxmlformats.org/officeDocument/2006/relationships" xmlns:p="http://schemas.openxmlformats.org/presentationml/2006/main">
-  <p:cSld name="Slide 14">
-    <p:bg>
-      <p:bgPr>
-        <a:solidFill>
-          <a:srgbClr val="FFFFFF"/>
-        </a:solidFill>
-      </p:bgPr>
-    </p:bg>
-    <p:spTree>
-      <p:nvGrpSpPr>
-        <p:cNvPr id="1" name=""/>
-        <p:cNvGrpSpPr/>
-        <p:nvPr/>
-      </p:nvGrpSpPr>
-      <p:grpSpPr>
-        <a:xfrm>
-          <a:off x="0" y="0"/>
-          <a:ext cx="0" cy="0"/>
-          <a:chOff x="0" y="0"/>
-          <a:chExt cx="0" cy="0"/>
-        </a:xfrm>
-      </p:grpSpPr>
-      <p:sp>
-        <p:nvSpPr>
-          <p:cNvPr id="2" name="Shape 0"/>
-          <p:cNvSpPr/>
-          <p:nvPr/>
-        </p:nvSpPr>
-        <p:spPr>
-          <a:xfrm>
-            <a:off x="411480" y="384048"/>
-            <a:ext cx="82296" cy="310896"/>
-          </a:xfrm>
-          <a:prstGeom prst="rect">
-            <a:avLst/>
-          </a:prstGeom>
-          <a:solidFill>
-            <a:srgbClr val="B45309"/>
-          </a:solidFill>
-          <a:ln/>
-        </p:spPr>
-      </p:sp>
-      <p:sp>
-        <p:nvSpPr>
-          <p:cNvPr id="3" name="Text 1"/>
-          <p:cNvSpPr/>
-          <p:nvPr/>
-        </p:nvSpPr>
-        <p:spPr>
-          <a:xfrm>
-            <a:off x="566928" y="292608"/>
-            <a:ext cx="8138160" cy="502920"/>
-          </a:xfrm>
-          <a:prstGeom prst="rect">
-            <a:avLst/>
-          </a:prstGeom>
-          <a:noFill/>
-          <a:ln/>
-        </p:spPr>
-        <p:txBody>
-          <a:bodyPr wrap="square" rtlCol="0" anchor="ctr"/>
-          <a:lstStyle/>
-          <a:p>
-            <a:pPr indent="0" marL="0">
-              <a:buNone/>
-            </a:pPr>
-            <a:r>
-              <a:rPr lang="en-US" sz="2000" b="1" dirty="0">
-                <a:solidFill>
-                  <a:srgbClr val="1C1917"/>
-                </a:solidFill>
-                <a:latin typeface="Arial" pitchFamily="34" charset="0"/>
-                <a:ea typeface="Arial" pitchFamily="34" charset="-122"/>
-                <a:cs typeface="Arial" pitchFamily="34" charset="-120"/>
-              </a:rPr>
-              <a:t>M&amp;A Model Output Hierarchy</a:t>
-            </a:r>
-            <a:endParaRPr lang="en-US" sz="2000" dirty="0"/>
-          </a:p>
-        </p:txBody>
-      </p:sp>
-      <p:sp>
-        <p:nvSpPr>
-          <p:cNvPr id="4" name="Text 2"/>
-          <p:cNvSpPr/>
-          <p:nvPr/>
-        </p:nvSpPr>
-        <p:spPr>
-          <a:xfrm>
-            <a:off x="566928" y="4681728"/>
-            <a:ext cx="8138160" cy="320040"/>
-          </a:xfrm>
-          <a:prstGeom prst="rect">
-            <a:avLst/>
-          </a:prstGeom>
-          <a:noFill/>
-          <a:ln/>
-        </p:spPr>
-        <p:txBody>
-          <a:bodyPr wrap="square" rtlCol="0" anchor="ctr"/>
-          <a:lstStyle/>
-          <a:p>
-            <a:pPr indent="0" marL="0">
-              <a:buNone/>
-            </a:pPr>
-            <a:r>
-              <a:rPr lang="en-US" sz="1000" i="1" dirty="0">
-                <a:solidFill>
-                  <a:srgbClr val="78716C"/>
-                </a:solidFill>
-                <a:latin typeface="Arial" pitchFamily="34" charset="0"/>
-                <a:ea typeface="Arial" pitchFamily="34" charset="-122"/>
-                <a:cs typeface="Arial" pitchFamily="34" charset="-120"/>
-              </a:rPr>
-              <a:t>Higher tiers depend on accuracy of lower-tier inputs; errors cascade upward</a:t>
-            </a:r>
-            <a:endParaRPr lang="en-US" sz="1000" dirty="0"/>
-          </a:p>
-        </p:txBody>
-      </p:sp>
-      <p:sp>
-        <p:nvSpPr>
-          <p:cNvPr id="5" name="Text 3"/>
-          <p:cNvSpPr/>
-          <p:nvPr/>
-        </p:nvSpPr>
-        <p:spPr>
-          <a:xfrm>
-            <a:off x="411480" y="4919472"/>
-            <a:ext cx="8321040" cy="219456"/>
-          </a:xfrm>
-          <a:prstGeom prst="rect">
-            <a:avLst/>
-          </a:prstGeom>
-          <a:noFill/>
-          <a:ln/>
-        </p:spPr>
-        <p:txBody>
-          <a:bodyPr wrap="square" rtlCol="0" anchor="ctr"/>
-          <a:lstStyle/>
-          <a:p>
-            <a:pPr indent="0" marL="0">
-              <a:buNone/>
-            </a:pPr>
-            <a:r>
-              <a:rPr lang="en-US" sz="750" dirty="0">
-                <a:solidFill>
-                  <a:srgbClr val="AAAAAA"/>
-                </a:solidFill>
-                <a:latin typeface="Arial" pitchFamily="34" charset="0"/>
-                <a:ea typeface="Arial" pitchFamily="34" charset="-122"/>
-                <a:cs typeface="Arial" pitchFamily="34" charset="-120"/>
-              </a:rPr>
-              <a:t>Lesson Forge Pro (owner) — This content is educational material only and does not constitute financial, investment, or trading advice.</a:t>
-            </a:r>
-            <a:endParaRPr lang="en-US" sz="750" dirty="0"/>
-          </a:p>
-        </p:txBody>
-      </p:sp>
-      <p:sp>
-        <p:nvSpPr>
-          <p:cNvPr id="6" name="Shape 4"/>
-          <p:cNvSpPr/>
-          <p:nvPr/>
-        </p:nvSpPr>
-        <p:spPr>
-          <a:xfrm flipV="1">
-            <a:off x="1988820" y="1234440"/>
-            <a:ext cx="2240280" cy="713232"/>
-          </a:xfrm>
-          <a:prstGeom prst="trapezoid">
-            <a:avLst/>
-          </a:prstGeom>
-          <a:solidFill>
-            <a:srgbClr val="B45309">
-              <a:alpha val="40000"/>
-            </a:srgbClr>
-          </a:solidFill>
-          <a:ln/>
-        </p:spPr>
-      </p:sp>
-      <p:sp>
-        <p:nvSpPr>
-          <p:cNvPr id="7" name="Text 5"/>
-          <p:cNvSpPr/>
-          <p:nvPr/>
-        </p:nvSpPr>
-        <p:spPr>
-          <a:xfrm>
-            <a:off x="1988820" y="1289304"/>
-            <a:ext cx="2240280" cy="621792"/>
-          </a:xfrm>
-          <a:prstGeom prst="rect">
-            <a:avLst/>
-          </a:prstGeom>
-          <a:noFill/>
-          <a:ln/>
-        </p:spPr>
-        <p:txBody>
-          <a:bodyPr wrap="square" rtlCol="0" anchor="ctr"/>
-          <a:lstStyle/>
-          <a:p>
-            <a:pPr algn="ctr" indent="0" marL="0">
-              <a:buNone/>
-            </a:pPr>
-            <a:r>
-              <a:rPr lang="en-US" sz="1200" b="1" dirty="0">
-                <a:solidFill>
-                  <a:srgbClr val="FFFFFF"/>
-                </a:solidFill>
-                <a:latin typeface="Arial" pitchFamily="34" charset="0"/>
-                <a:ea typeface="Arial" pitchFamily="34" charset="-122"/>
-                <a:cs typeface="Arial" pitchFamily="34" charset="-120"/>
-              </a:rPr>
-              <a:t>Accretion / Dilution</a:t>
-            </a:r>
-            <a:endParaRPr lang="en-US" sz="1200" dirty="0"/>
-          </a:p>
-        </p:txBody>
-      </p:sp>
-      <p:sp>
-        <p:nvSpPr>
-          <p:cNvPr id="8" name="Text 6"/>
-          <p:cNvSpPr/>
-          <p:nvPr/>
-        </p:nvSpPr>
-        <p:spPr>
-          <a:xfrm>
-            <a:off x="5760720" y="1444752"/>
-            <a:ext cx="2926080" cy="310896"/>
-          </a:xfrm>
-          <a:prstGeom prst="rect">
-            <a:avLst/>
-          </a:prstGeom>
-          <a:noFill/>
-          <a:ln/>
-        </p:spPr>
-        <p:txBody>
-          <a:bodyPr wrap="square" rtlCol="0" anchor="ctr"/>
-          <a:lstStyle/>
-          <a:p>
-            <a:pPr indent="0" marL="0">
-              <a:buNone/>
-            </a:pPr>
-            <a:r>
-              <a:rPr lang="en-US" sz="1000" dirty="0">
-                <a:solidFill>
-                  <a:srgbClr val="78716C"/>
-                </a:solidFill>
-                <a:latin typeface="Arial" pitchFamily="34" charset="0"/>
-                <a:ea typeface="Arial" pitchFamily="34" charset="-122"/>
-                <a:cs typeface="Arial" pitchFamily="34" charset="-120"/>
-              </a:rPr>
-              <a:t>Ultimate EPS impact test for any deal</a:t>
-            </a:r>
-            <a:endParaRPr lang="en-US" sz="1000" dirty="0"/>
-          </a:p>
-        </p:txBody>
-      </p:sp>
-      <p:sp>
-        <p:nvSpPr>
-          <p:cNvPr id="9" name="Shape 7"/>
-          <p:cNvSpPr/>
-          <p:nvPr/>
-        </p:nvSpPr>
-        <p:spPr>
-          <a:xfrm flipV="1">
-            <a:off x="1508760" y="2039112"/>
-            <a:ext cx="3200400" cy="713232"/>
-          </a:xfrm>
-          <a:prstGeom prst="trapezoid">
-            <a:avLst/>
-          </a:prstGeom>
-          <a:solidFill>
-            <a:srgbClr val="B45309">
-              <a:alpha val="58000"/>
-            </a:srgbClr>
-          </a:solidFill>
-          <a:ln/>
-        </p:spPr>
-      </p:sp>
-      <p:sp>
-        <p:nvSpPr>
-          <p:cNvPr id="10" name="Text 8"/>
-          <p:cNvSpPr/>
-          <p:nvPr/>
-        </p:nvSpPr>
-        <p:spPr>
-          <a:xfrm>
-            <a:off x="1508760" y="2093976"/>
-            <a:ext cx="3200400" cy="621792"/>
-          </a:xfrm>
-          <a:prstGeom prst="rect">
-            <a:avLst/>
-          </a:prstGeom>
-          <a:noFill/>
-          <a:ln/>
-        </p:spPr>
-        <p:txBody>
-          <a:bodyPr wrap="square" rtlCol="0" anchor="ctr"/>
-          <a:lstStyle/>
-          <a:p>
-            <a:pPr algn="ctr" indent="0" marL="0">
-              <a:buNone/>
-            </a:pPr>
-            <a:r>
-              <a:rPr lang="en-US" sz="1200" b="1" dirty="0">
-                <a:solidFill>
-                  <a:srgbClr val="FFFFFF"/>
-                </a:solidFill>
-                <a:latin typeface="Arial" pitchFamily="34" charset="0"/>
-                <a:ea typeface="Arial" pitchFamily="34" charset="-122"/>
-                <a:cs typeface="Arial" pitchFamily="34" charset="-120"/>
-              </a:rPr>
-              <a:t>Intrinsic Value (DCF)</a:t>
-            </a:r>
-            <a:endParaRPr lang="en-US" sz="1200" dirty="0"/>
-          </a:p>
-        </p:txBody>
-      </p:sp>
-      <p:sp>
-        <p:nvSpPr>
-          <p:cNvPr id="11" name="Text 9"/>
-          <p:cNvSpPr/>
-          <p:nvPr/>
-        </p:nvSpPr>
-        <p:spPr>
-          <a:xfrm>
-            <a:off x="5760720" y="2249424"/>
-            <a:ext cx="2926080" cy="310896"/>
-          </a:xfrm>
-          <a:prstGeom prst="rect">
-            <a:avLst/>
-          </a:prstGeom>
-          <a:noFill/>
-          <a:ln/>
-        </p:spPr>
-        <p:txBody>
-          <a:bodyPr wrap="square" rtlCol="0" anchor="ctr"/>
-          <a:lstStyle/>
-          <a:p>
-            <a:pPr indent="0" marL="0">
-              <a:buNone/>
-            </a:pPr>
-            <a:r>
-              <a:rPr lang="en-US" sz="1000" dirty="0">
-                <a:solidFill>
-                  <a:srgbClr val="78716C"/>
-                </a:solidFill>
-                <a:latin typeface="Arial" pitchFamily="34" charset="0"/>
-                <a:ea typeface="Arial" pitchFamily="34" charset="-122"/>
-                <a:cs typeface="Arial" pitchFamily="34" charset="-120"/>
-              </a:rPr>
-              <a:t>PV of FCF discounted at 9% WACC</a:t>
-            </a:r>
-            <a:endParaRPr lang="en-US" sz="1000" dirty="0"/>
-          </a:p>
-        </p:txBody>
-      </p:sp>
-      <p:sp>
-        <p:nvSpPr>
-          <p:cNvPr id="12" name="Shape 10"/>
-          <p:cNvSpPr/>
-          <p:nvPr/>
-        </p:nvSpPr>
-        <p:spPr>
-          <a:xfrm flipV="1">
-            <a:off x="1028700" y="2843784"/>
-            <a:ext cx="4160520" cy="713232"/>
-          </a:xfrm>
-          <a:prstGeom prst="trapezoid">
-            <a:avLst/>
-          </a:prstGeom>
-          <a:solidFill>
-            <a:srgbClr val="B45309">
-              <a:alpha val="77000"/>
-            </a:srgbClr>
-          </a:solidFill>
-          <a:ln/>
-        </p:spPr>
-      </p:sp>
-      <p:sp>
-        <p:nvSpPr>
-          <p:cNvPr id="13" name="Text 11"/>
-          <p:cNvSpPr/>
-          <p:nvPr/>
-        </p:nvSpPr>
-        <p:spPr>
-          <a:xfrm>
-            <a:off x="1028700" y="2898648"/>
-            <a:ext cx="4160520" cy="621792"/>
-          </a:xfrm>
-          <a:prstGeom prst="rect">
-            <a:avLst/>
-          </a:prstGeom>
-          <a:noFill/>
-          <a:ln/>
-        </p:spPr>
-        <p:txBody>
-          <a:bodyPr wrap="square" rtlCol="0" anchor="ctr"/>
-          <a:lstStyle/>
-          <a:p>
-            <a:pPr algn="ctr" indent="0" marL="0">
-              <a:buNone/>
-            </a:pPr>
-            <a:r>
-              <a:rPr lang="en-US" sz="1200" b="1" dirty="0">
-                <a:solidFill>
-                  <a:srgbClr val="FFFFFF"/>
-                </a:solidFill>
-                <a:latin typeface="Arial" pitchFamily="34" charset="0"/>
-                <a:ea typeface="Arial" pitchFamily="34" charset="-122"/>
-                <a:cs typeface="Arial" pitchFamily="34" charset="-120"/>
-              </a:rPr>
-              <a:t>Valuation Multiples</a:t>
-            </a:r>
-            <a:endParaRPr lang="en-US" sz="1200" dirty="0"/>
-          </a:p>
-        </p:txBody>
-      </p:sp>
-      <p:sp>
-        <p:nvSpPr>
-          <p:cNvPr id="14" name="Text 12"/>
-          <p:cNvSpPr/>
-          <p:nvPr/>
-        </p:nvSpPr>
-        <p:spPr>
-          <a:xfrm>
-            <a:off x="5760720" y="3054096"/>
-            <a:ext cx="2926080" cy="310896"/>
-          </a:xfrm>
-          <a:prstGeom prst="rect">
-            <a:avLst/>
-          </a:prstGeom>
-          <a:noFill/>
-          <a:ln/>
-        </p:spPr>
-        <p:txBody>
-          <a:bodyPr wrap="square" rtlCol="0" anchor="ctr"/>
-          <a:lstStyle/>
-          <a:p>
-            <a:pPr indent="0" marL="0">
-              <a:buNone/>
-            </a:pPr>
-            <a:r>
-              <a:rPr lang="en-US" sz="1000" dirty="0">
-                <a:solidFill>
-                  <a:srgbClr val="78716C"/>
-                </a:solidFill>
-                <a:latin typeface="Arial" pitchFamily="34" charset="0"/>
-                <a:ea typeface="Arial" pitchFamily="34" charset="-122"/>
-                <a:cs typeface="Arial" pitchFamily="34" charset="-120"/>
-              </a:rPr>
-              <a:t>EV/EBITDA benchmarked to peer comps</a:t>
-            </a:r>
-            <a:endParaRPr lang="en-US" sz="1000" dirty="0"/>
-          </a:p>
-        </p:txBody>
-      </p:sp>
-      <p:sp>
-        <p:nvSpPr>
-          <p:cNvPr id="15" name="Shape 13"/>
-          <p:cNvSpPr/>
-          <p:nvPr/>
-        </p:nvSpPr>
-        <p:spPr>
-          <a:xfrm flipV="1">
-            <a:off x="548640" y="3648456"/>
-            <a:ext cx="5120640" cy="713232"/>
-          </a:xfrm>
-          <a:prstGeom prst="trapezoid">
-            <a:avLst/>
-          </a:prstGeom>
-          <a:solidFill>
-            <a:srgbClr val="B45309">
-              <a:alpha val="95000"/>
-            </a:srgbClr>
-          </a:solidFill>
-          <a:ln/>
-        </p:spPr>
-      </p:sp>
-      <p:sp>
-        <p:nvSpPr>
-          <p:cNvPr id="16" name="Text 14"/>
-          <p:cNvSpPr/>
-          <p:nvPr/>
-        </p:nvSpPr>
-        <p:spPr>
-          <a:xfrm>
-            <a:off x="548640" y="3703320"/>
-            <a:ext cx="5120640" cy="621792"/>
-          </a:xfrm>
-          <a:prstGeom prst="rect">
-            <a:avLst/>
-          </a:prstGeom>
-          <a:noFill/>
-          <a:ln/>
-        </p:spPr>
-        <p:txBody>
-          <a:bodyPr wrap="square" rtlCol="0" anchor="ctr"/>
-          <a:lstStyle/>
-          <a:p>
-            <a:pPr algn="ctr" indent="0" marL="0">
-              <a:buNone/>
-            </a:pPr>
-            <a:r>
-              <a:rPr lang="en-US" sz="1200" b="1" dirty="0">
-                <a:solidFill>
-                  <a:srgbClr val="FFFFFF"/>
-                </a:solidFill>
-                <a:latin typeface="Arial" pitchFamily="34" charset="0"/>
-                <a:ea typeface="Arial" pitchFamily="34" charset="-122"/>
-                <a:cs typeface="Arial" pitchFamily="34" charset="-120"/>
-              </a:rPr>
-              <a:t>Synergy Estimates</a:t>
-            </a:r>
-            <a:endParaRPr lang="en-US" sz="1200" dirty="0"/>
-          </a:p>
-        </p:txBody>
-      </p:sp>
-      <p:sp>
-        <p:nvSpPr>
-          <p:cNvPr id="17" name="Text 15"/>
-          <p:cNvSpPr/>
-          <p:nvPr/>
-        </p:nvSpPr>
-        <p:spPr>
-          <a:xfrm>
-            <a:off x="5760720" y="3858768"/>
-            <a:ext cx="2926080" cy="310896"/>
-          </a:xfrm>
-          <a:prstGeom prst="rect">
-            <a:avLst/>
-          </a:prstGeom>
-          <a:noFill/>
-          <a:ln/>
-        </p:spPr>
-        <p:txBody>
-          <a:bodyPr wrap="square" rtlCol="0" anchor="ctr"/>
-          <a:lstStyle/>
-          <a:p>
-            <a:pPr indent="0" marL="0">
-              <a:buNone/>
-            </a:pPr>
-            <a:r>
-              <a:rPr lang="en-US" sz="1000" dirty="0">
-                <a:solidFill>
-                  <a:srgbClr val="78716C"/>
-                </a:solidFill>
-                <a:latin typeface="Arial" pitchFamily="34" charset="0"/>
-                <a:ea typeface="Arial" pitchFamily="34" charset="-122"/>
-                <a:cs typeface="Arial" pitchFamily="34" charset="-120"/>
-              </a:rPr>
-              <a:t>Revenue and cost synergies quantified</a:t>
-            </a:r>
-            <a:endParaRPr lang="en-US" sz="1000" dirty="0"/>
-          </a:p>
-        </p:txBody>
-      </p:sp>
-    </p:spTree>
-  </p:cSld>
-  <p:clrMapOvr>
-    <a:masterClrMapping/>
-  </p:clrMapOvr>
-</p:sld>
-</file>
-
-<file path=ppt/slides/slide15.xml><?xml version="1.0" encoding="utf-8"?>
-<p:sld xmlns:a="http://schemas.openxmlformats.org/drawingml/2006/main" xmlns:r="http://schemas.openxmlformats.org/officeDocument/2006/relationships" xmlns:p="http://schemas.openxmlformats.org/presentationml/2006/main">
-  <p:cSld name="Slide 15">
-    <p:bg>
-      <p:bgPr>
-        <a:solidFill>
-          <a:srgbClr val="FFFFFF"/>
-        </a:solidFill>
-      </p:bgPr>
-    </p:bg>
-    <p:spTree>
-      <p:nvGrpSpPr>
-        <p:cNvPr id="1" name=""/>
-        <p:cNvGrpSpPr/>
-        <p:nvPr/>
-      </p:nvGrpSpPr>
-      <p:grpSpPr>
-        <a:xfrm>
-          <a:off x="0" y="0"/>
-          <a:ext cx="0" cy="0"/>
-          <a:chOff x="0" y="0"/>
-          <a:chExt cx="0" cy="0"/>
-        </a:xfrm>
-      </p:grpSpPr>
-      <p:sp>
-        <p:nvSpPr>
-          <p:cNvPr id="2" name="Shape 0"/>
-          <p:cNvSpPr/>
-          <p:nvPr/>
-        </p:nvSpPr>
-        <p:spPr>
-          <a:xfrm>
-            <a:off x="411480" y="402336"/>
-            <a:ext cx="82296" cy="329184"/>
-          </a:xfrm>
-          <a:prstGeom prst="rect">
-            <a:avLst/>
-          </a:prstGeom>
-          <a:solidFill>
-            <a:srgbClr val="B45309"/>
-          </a:solidFill>
-          <a:ln/>
-        </p:spPr>
-      </p:sp>
-      <p:sp>
-        <p:nvSpPr>
-          <p:cNvPr id="3" name="Text 1"/>
-          <p:cNvSpPr/>
-          <p:nvPr/>
-        </p:nvSpPr>
-        <p:spPr>
-          <a:xfrm>
-            <a:off x="566928" y="292608"/>
-            <a:ext cx="8138160" cy="548640"/>
-          </a:xfrm>
-          <a:prstGeom prst="rect">
-            <a:avLst/>
-          </a:prstGeom>
-          <a:noFill/>
-          <a:ln/>
-        </p:spPr>
-        <p:txBody>
-          <a:bodyPr wrap="square" rtlCol="0" anchor="ctr"/>
-          <a:lstStyle/>
-          <a:p>
-            <a:pPr indent="0" marL="0">
-              <a:buNone/>
-            </a:pPr>
-            <a:r>
-              <a:rPr lang="en-US" sz="2100" b="1" dirty="0">
-                <a:solidFill>
-                  <a:srgbClr val="1C1917"/>
-                </a:solidFill>
-                <a:latin typeface="Arial" pitchFamily="34" charset="0"/>
-                <a:ea typeface="Arial" pitchFamily="34" charset="-122"/>
-                <a:cs typeface="Arial" pitchFamily="34" charset="-120"/>
-              </a:rPr>
-              <a:t>Outputs and Checks</a:t>
-            </a:r>
-            <a:endParaRPr lang="en-US" sz="2100" dirty="0"/>
-          </a:p>
-        </p:txBody>
-      </p:sp>
-      <p:sp>
-        <p:nvSpPr>
-          <p:cNvPr id="4" name="Shape 2"/>
-          <p:cNvSpPr/>
-          <p:nvPr/>
-        </p:nvSpPr>
-        <p:spPr>
-          <a:xfrm>
-            <a:off x="411480" y="960120"/>
-            <a:ext cx="8321040" cy="0"/>
-          </a:xfrm>
-          <a:prstGeom prst="line">
-            <a:avLst/>
-          </a:prstGeom>
-          <a:noFill/>
-          <a:ln w="12700">
-            <a:solidFill>
-              <a:srgbClr val="E7E5E4"/>
-            </a:solidFill>
-            <a:prstDash val="solid"/>
-          </a:ln>
-        </p:spPr>
-      </p:sp>
-      <p:sp>
-        <p:nvSpPr>
-          <p:cNvPr id="5" name="Text 3"/>
-          <p:cNvSpPr/>
-          <p:nvPr/>
-        </p:nvSpPr>
-        <p:spPr>
-          <a:xfrm>
-            <a:off x="411480" y="4864608"/>
-            <a:ext cx="8321040" cy="237744"/>
-          </a:xfrm>
-          <a:prstGeom prst="rect">
-            <a:avLst/>
-          </a:prstGeom>
-          <a:noFill/>
-          <a:ln/>
-        </p:spPr>
-        <p:txBody>
-          <a:bodyPr wrap="square" rtlCol="0" anchor="ctr"/>
-          <a:lstStyle/>
-          <a:p>
-            <a:pPr indent="0" marL="0">
-              <a:buNone/>
-            </a:pPr>
-            <a:r>
-              <a:rPr lang="en-US" sz="750" dirty="0">
-                <a:solidFill>
-                  <a:srgbClr val="AAAAAA"/>
-                </a:solidFill>
-                <a:latin typeface="Arial" pitchFamily="34" charset="0"/>
-                <a:ea typeface="Arial" pitchFamily="34" charset="-122"/>
-                <a:cs typeface="Arial" pitchFamily="34" charset="-120"/>
-              </a:rPr>
-              <a:t>Lesson Forge Pro (owner) — This content is educational material only and does not constitute financial, investment, or trading advice.</a:t>
-            </a:r>
-            <a:endParaRPr lang="en-US" sz="750" dirty="0"/>
-          </a:p>
-        </p:txBody>
-      </p:sp>
-      <p:sp>
-        <p:nvSpPr>
-          <p:cNvPr id="6" name="Text 4"/>
-          <p:cNvSpPr/>
-          <p:nvPr/>
-        </p:nvSpPr>
-        <p:spPr>
-          <a:xfrm>
-            <a:off x="731520" y="1188720"/>
-            <a:ext cx="7680960" cy="2743200"/>
-          </a:xfrm>
-          <a:prstGeom prst="rect">
-            <a:avLst/>
-          </a:prstGeom>
-          <a:noFill/>
-          <a:ln/>
-        </p:spPr>
-        <p:txBody>
-          <a:bodyPr wrap="square" rtlCol="0" anchor="t"/>
-          <a:lstStyle/>
-          <a:p>
-            <a:pPr marL="152400" indent="-152400">
-              <a:spcAft>
-                <a:spcPts val="800"/>
-              </a:spcAft>
-              <a:buSzPct val="100000"/>
-              <a:buChar char="•"/>
-            </a:pPr>
-            <a:r>
-              <a:rPr lang="en-US" sz="1500" dirty="0">
-                <a:solidFill>
-                  <a:srgbClr val="1C1917"/>
-                </a:solidFill>
-                <a:latin typeface="Arial" pitchFamily="34" charset="0"/>
-                <a:ea typeface="Arial" pitchFamily="34" charset="-122"/>
-                <a:cs typeface="Arial" pitchFamily="34" charset="-120"/>
-              </a:rPr>
-              <a:t>Deliver a pro-forma three-statement model, DCF summary, accretion/dilution table, and sensitivity matrix.</a:t>
-            </a:r>
-            <a:endParaRPr lang="en-US" sz="1500" dirty="0"/>
-          </a:p>
-          <a:p>
-            <a:pPr marL="152400" indent="-152400">
-              <a:spcAft>
-                <a:spcPts val="800"/>
-              </a:spcAft>
-              <a:buSzPct val="100000"/>
-              <a:buChar char="•"/>
-            </a:pPr>
-            <a:r>
-              <a:rPr lang="en-US" sz="1500" dirty="0">
-                <a:solidFill>
-                  <a:srgbClr val="1C1917"/>
-                </a:solidFill>
-                <a:latin typeface="Arial" pitchFamily="34" charset="0"/>
-                <a:ea typeface="Arial" pitchFamily="34" charset="-122"/>
-                <a:cs typeface="Arial" pitchFamily="34" charset="-120"/>
-              </a:rPr>
-              <a:t>Balance sheet must balance—assets equal liabilities plus equity every period.</a:t>
-            </a:r>
-            <a:endParaRPr lang="en-US" sz="1500" dirty="0"/>
-          </a:p>
-          <a:p>
-            <a:pPr marL="152400" indent="-152400">
-              <a:spcAft>
-                <a:spcPts val="800"/>
-              </a:spcAft>
-              <a:buSzPct val="100000"/>
-              <a:buChar char="•"/>
-            </a:pPr>
-            <a:r>
-              <a:rPr lang="en-US" sz="1500" dirty="0">
-                <a:solidFill>
-                  <a:srgbClr val="1C1917"/>
-                </a:solidFill>
-                <a:latin typeface="Arial" pitchFamily="34" charset="0"/>
-                <a:ea typeface="Arial" pitchFamily="34" charset="-122"/>
-                <a:cs typeface="Arial" pitchFamily="34" charset="-120"/>
-              </a:rPr>
-              <a:t>Implied EV/EBITDA must fall within comparable transaction ranges.</a:t>
-            </a:r>
-            <a:endParaRPr lang="en-US" sz="1500" dirty="0"/>
-          </a:p>
-          <a:p>
-            <a:pPr marL="152400" indent="-152400">
-              <a:spcAft>
-                <a:spcPts val="800"/>
-              </a:spcAft>
-              <a:buSzPct val="100000"/>
-              <a:buChar char="•"/>
-            </a:pPr>
-            <a:r>
-              <a:rPr lang="en-US" sz="1500" dirty="0">
-                <a:solidFill>
-                  <a:srgbClr val="1C1917"/>
-                </a:solidFill>
-                <a:latin typeface="Arial" pitchFamily="34" charset="0"/>
-                <a:ea typeface="Arial" pitchFamily="34" charset="-122"/>
-                <a:cs typeface="Arial" pitchFamily="34" charset="-120"/>
-              </a:rPr>
-              <a:t>A 1% WACC shift that destroys deal value must be flagged explicitly.</a:t>
-            </a:r>
-            <a:endParaRPr lang="en-US" sz="1500" dirty="0"/>
-          </a:p>
-          <a:p>
-            <a:pPr marL="152400" indent="-152400">
-              <a:spcAft>
-                <a:spcPts val="800"/>
-              </a:spcAft>
-              <a:buSzPct val="100000"/>
-              <a:buChar char="•"/>
-            </a:pPr>
-            <a:r>
-              <a:rPr lang="en-US" sz="1500" dirty="0">
-                <a:solidFill>
-                  <a:srgbClr val="1C1917"/>
-                </a:solidFill>
-                <a:latin typeface="Arial" pitchFamily="34" charset="0"/>
-                <a:ea typeface="Arial" pitchFamily="34" charset="-122"/>
-                <a:cs typeface="Arial" pitchFamily="34" charset="-120"/>
-              </a:rPr>
-              <a:t>Never apply synergies at full run-rate in Year 1—phase them over two to three years.</a:t>
-            </a:r>
-            <a:endParaRPr lang="en-US" sz="1500" dirty="0"/>
-          </a:p>
-        </p:txBody>
-      </p:sp>
-      <p:sp>
-        <p:nvSpPr>
-          <p:cNvPr id="7" name="Shape 5"/>
-          <p:cNvSpPr/>
-          <p:nvPr/>
-        </p:nvSpPr>
-        <p:spPr>
-          <a:xfrm>
-            <a:off x="731520" y="4041648"/>
-            <a:ext cx="7680960" cy="566928"/>
-          </a:xfrm>
-          <a:prstGeom prst="roundRect">
-            <a:avLst>
-              <a:gd name="adj" fmla="val 12903"/>
-            </a:avLst>
-          </a:prstGeom>
-          <a:solidFill>
-            <a:srgbClr val="B45309">
-              <a:alpha val="12000"/>
-            </a:srgbClr>
-          </a:solidFill>
-          <a:ln w="12700">
-            <a:solidFill>
-              <a:srgbClr val="B45309"/>
-            </a:solidFill>
-            <a:prstDash val="solid"/>
-          </a:ln>
-        </p:spPr>
-      </p:sp>
-      <p:sp>
-        <p:nvSpPr>
-          <p:cNvPr id="8" name="Text 6"/>
-          <p:cNvSpPr/>
-          <p:nvPr/>
-        </p:nvSpPr>
-        <p:spPr>
-          <a:xfrm>
-            <a:off x="868680" y="4087368"/>
-            <a:ext cx="7406640" cy="475488"/>
-          </a:xfrm>
-          <a:prstGeom prst="rect">
-            <a:avLst/>
-          </a:prstGeom>
-          <a:noFill/>
-          <a:ln/>
-        </p:spPr>
-        <p:txBody>
-          <a:bodyPr wrap="square" rtlCol="0" anchor="ctr"/>
-          <a:lstStyle/>
-          <a:p>
-            <a:pPr indent="0" marL="0">
-              <a:buNone/>
-            </a:pPr>
-            <a:r>
-              <a:rPr lang="en-US" sz="1100" b="1" dirty="0">
-                <a:solidFill>
-                  <a:srgbClr val="B45309"/>
-                </a:solidFill>
-                <a:latin typeface="Arial" pitchFamily="34" charset="0"/>
-                <a:ea typeface="Arial" pitchFamily="34" charset="-122"/>
-                <a:cs typeface="Arial" pitchFamily="34" charset="-120"/>
-              </a:rPr>
-              <a:t>Takeaway  </a:t>
-            </a:r>
-            <a:pPr indent="0" marL="0">
-              <a:buNone/>
-            </a:pPr>
-            <a:r>
-              <a:rPr lang="en-US" sz="1150" dirty="0">
-                <a:solidFill>
-                  <a:srgbClr val="1C1917"/>
-                </a:solidFill>
-                <a:latin typeface="Arial" pitchFamily="34" charset="0"/>
-                <a:ea typeface="Arial" pitchFamily="34" charset="-122"/>
-                <a:cs typeface="Arial" pitchFamily="34" charset="-120"/>
-              </a:rPr>
-              <a:t>Rigorous output checks and honest synergy phasing are what keep a model from misleading decision-makers.</a:t>
-            </a:r>
-            <a:endParaRPr lang="en-US" sz="1100" dirty="0"/>
-          </a:p>
-        </p:txBody>
-      </p:sp>
-    </p:spTree>
-  </p:cSld>
-  <p:clrMapOvr>
-    <a:masterClrMapping/>
-  </p:clrMapOvr>
-</p:sld>
-</file>
-
-<file path=ppt/slides/slide16.xml><?xml version="1.0" encoding="utf-8"?>
-<p:sld xmlns:a="http://schemas.openxmlformats.org/drawingml/2006/main" xmlns:r="http://schemas.openxmlformats.org/officeDocument/2006/relationships" xmlns:p="http://schemas.openxmlformats.org/presentationml/2006/main">
-  <p:cSld name="Slide 16">
-    <p:bg>
-      <p:bgPr>
-        <a:solidFill>
-          <a:srgbClr val="FFFFFF"/>
-        </a:solidFill>
-      </p:bgPr>
-    </p:bg>
-    <p:spTree>
-      <p:nvGrpSpPr>
-        <p:cNvPr id="1" name=""/>
-        <p:cNvGrpSpPr/>
-        <p:nvPr/>
-      </p:nvGrpSpPr>
-      <p:grpSpPr>
-        <a:xfrm>
-          <a:off x="0" y="0"/>
-          <a:ext cx="0" cy="0"/>
-          <a:chOff x="0" y="0"/>
-          <a:chExt cx="0" cy="0"/>
-        </a:xfrm>
-      </p:grpSpPr>
-      <p:sp>
-        <p:nvSpPr>
-          <p:cNvPr id="2" name="Shape 0"/>
-          <p:cNvSpPr/>
-          <p:nvPr/>
-        </p:nvSpPr>
-        <p:spPr>
-          <a:xfrm>
-            <a:off x="411480" y="402336"/>
-            <a:ext cx="82296" cy="329184"/>
-          </a:xfrm>
-          <a:prstGeom prst="rect">
-            <a:avLst/>
-          </a:prstGeom>
-          <a:solidFill>
-            <a:srgbClr val="B45309"/>
-          </a:solidFill>
-          <a:ln/>
-        </p:spPr>
-      </p:sp>
-      <p:sp>
-        <p:nvSpPr>
-          <p:cNvPr id="3" name="Text 1"/>
-          <p:cNvSpPr/>
-          <p:nvPr/>
-        </p:nvSpPr>
-        <p:spPr>
-          <a:xfrm>
-            <a:off x="566928" y="292608"/>
-            <a:ext cx="8138160" cy="548640"/>
-          </a:xfrm>
-          <a:prstGeom prst="rect">
-            <a:avLst/>
-          </a:prstGeom>
-          <a:noFill/>
-          <a:ln/>
-        </p:spPr>
-        <p:txBody>
-          <a:bodyPr wrap="square" rtlCol="0" anchor="ctr"/>
-          <a:lstStyle/>
-          <a:p>
-            <a:pPr indent="0" marL="0">
-              <a:buNone/>
-            </a:pPr>
-            <a:r>
-              <a:rPr lang="en-US" sz="2100" b="1" dirty="0">
-                <a:solidFill>
-                  <a:srgbClr val="1C1917"/>
-                </a:solidFill>
-                <a:latin typeface="Arial" pitchFamily="34" charset="0"/>
-                <a:ea typeface="Arial" pitchFamily="34" charset="-122"/>
-                <a:cs typeface="Arial" pitchFamily="34" charset="-120"/>
-              </a:rPr>
-              <a:t>Applications and Pitfalls</a:t>
-            </a:r>
-            <a:endParaRPr lang="en-US" sz="2100" dirty="0"/>
-          </a:p>
-        </p:txBody>
-      </p:sp>
-      <p:sp>
-        <p:nvSpPr>
-          <p:cNvPr id="4" name="Shape 2"/>
-          <p:cNvSpPr/>
-          <p:nvPr/>
-        </p:nvSpPr>
-        <p:spPr>
-          <a:xfrm>
-            <a:off x="411480" y="960120"/>
-            <a:ext cx="8321040" cy="0"/>
-          </a:xfrm>
-          <a:prstGeom prst="line">
-            <a:avLst/>
-          </a:prstGeom>
-          <a:noFill/>
-          <a:ln w="12700">
-            <a:solidFill>
-              <a:srgbClr val="E7E5E4"/>
-            </a:solidFill>
-            <a:prstDash val="solid"/>
-          </a:ln>
-        </p:spPr>
-      </p:sp>
-      <p:sp>
-        <p:nvSpPr>
-          <p:cNvPr id="5" name="Text 3"/>
-          <p:cNvSpPr/>
-          <p:nvPr/>
-        </p:nvSpPr>
-        <p:spPr>
-          <a:xfrm>
-            <a:off x="411480" y="4864608"/>
-            <a:ext cx="8321040" cy="237744"/>
-          </a:xfrm>
-          <a:prstGeom prst="rect">
-            <a:avLst/>
-          </a:prstGeom>
-          <a:noFill/>
-          <a:ln/>
-        </p:spPr>
-        <p:txBody>
-          <a:bodyPr wrap="square" rtlCol="0" anchor="ctr"/>
-          <a:lstStyle/>
-          <a:p>
-            <a:pPr indent="0" marL="0">
-              <a:buNone/>
-            </a:pPr>
-            <a:r>
-              <a:rPr lang="en-US" sz="750" dirty="0">
-                <a:solidFill>
-                  <a:srgbClr val="AAAAAA"/>
-                </a:solidFill>
-                <a:latin typeface="Arial" pitchFamily="34" charset="0"/>
-                <a:ea typeface="Arial" pitchFamily="34" charset="-122"/>
-                <a:cs typeface="Arial" pitchFamily="34" charset="-120"/>
-              </a:rPr>
-              <a:t>Lesson Forge Pro (owner) — This content is educational material only and does not constitute financial, investment, or trading advice.</a:t>
-            </a:r>
-            <a:endParaRPr lang="en-US" sz="750" dirty="0"/>
-          </a:p>
-        </p:txBody>
-      </p:sp>
-      <p:sp>
-        <p:nvSpPr>
-          <p:cNvPr id="6" name="Text 4"/>
-          <p:cNvSpPr/>
-          <p:nvPr/>
-        </p:nvSpPr>
-        <p:spPr>
-          <a:xfrm>
-            <a:off x="731520" y="1188720"/>
-            <a:ext cx="7680960" cy="2743200"/>
-          </a:xfrm>
-          <a:prstGeom prst="rect">
-            <a:avLst/>
-          </a:prstGeom>
-          <a:noFill/>
-          <a:ln/>
-        </p:spPr>
-        <p:txBody>
-          <a:bodyPr wrap="square" rtlCol="0" anchor="t"/>
-          <a:lstStyle/>
-          <a:p>
-            <a:pPr marL="152400" indent="-152400">
-              <a:spcAft>
-                <a:spcPts val="800"/>
-              </a:spcAft>
-              <a:buSzPct val="100000"/>
-              <a:buChar char="•"/>
-            </a:pPr>
-            <a:r>
-              <a:rPr lang="en-US" sz="1500" dirty="0">
-                <a:solidFill>
-                  <a:srgbClr val="1C1917"/>
-                </a:solidFill>
-                <a:latin typeface="Arial" pitchFamily="34" charset="0"/>
-                <a:ea typeface="Arial" pitchFamily="34" charset="-122"/>
-                <a:cs typeface="Arial" pitchFamily="34" charset="-120"/>
-              </a:rPr>
-              <a:t>DCF models establish intrinsic value; LBO models test private-equity return hurdles.</a:t>
-            </a:r>
-            <a:endParaRPr lang="en-US" sz="1500" dirty="0"/>
-          </a:p>
-          <a:p>
-            <a:pPr marL="152400" indent="-152400">
-              <a:spcAft>
-                <a:spcPts val="800"/>
-              </a:spcAft>
-              <a:buSzPct val="100000"/>
-              <a:buChar char="•"/>
-            </a:pPr>
-            <a:r>
-              <a:rPr lang="en-US" sz="1500" dirty="0">
-                <a:solidFill>
-                  <a:srgbClr val="1C1917"/>
-                </a:solidFill>
-                <a:latin typeface="Arial" pitchFamily="34" charset="0"/>
-                <a:ea typeface="Arial" pitchFamily="34" charset="-122"/>
-                <a:cs typeface="Arial" pitchFamily="34" charset="-120"/>
-              </a:rPr>
-              <a:t>Accretion/dilution models answer whether a deal immediately helps or hurts EPS.</a:t>
-            </a:r>
-            <a:endParaRPr lang="en-US" sz="1500" dirty="0"/>
-          </a:p>
-          <a:p>
-            <a:pPr marL="152400" indent="-152400">
-              <a:spcAft>
-                <a:spcPts val="800"/>
-              </a:spcAft>
-              <a:buSzPct val="100000"/>
-              <a:buChar char="•"/>
-            </a:pPr>
-            <a:r>
-              <a:rPr lang="en-US" sz="1500" dirty="0">
-                <a:solidFill>
-                  <a:srgbClr val="1C1917"/>
-                </a:solidFill>
-                <a:latin typeface="Arial" pitchFamily="34" charset="0"/>
-                <a:ea typeface="Arial" pitchFamily="34" charset="-122"/>
-                <a:cs typeface="Arial" pitchFamily="34" charset="-120"/>
-              </a:rPr>
-              <a:t>Front-loading synergies is the most common valuation inflation mistake.</a:t>
-            </a:r>
-            <a:endParaRPr lang="en-US" sz="1500" dirty="0"/>
-          </a:p>
-          <a:p>
-            <a:pPr marL="152400" indent="-152400">
-              <a:spcAft>
-                <a:spcPts val="800"/>
-              </a:spcAft>
-              <a:buSzPct val="100000"/>
-              <a:buChar char="•"/>
-            </a:pPr>
-            <a:r>
-              <a:rPr lang="en-US" sz="1500" dirty="0">
-                <a:solidFill>
-                  <a:srgbClr val="1C1917"/>
-                </a:solidFill>
-                <a:latin typeface="Arial" pitchFamily="34" charset="0"/>
-                <a:ea typeface="Arial" pitchFamily="34" charset="-122"/>
-                <a:cs typeface="Arial" pitchFamily="34" charset="-120"/>
-              </a:rPr>
-              <a:t>Sensitivity matrices expose fragile deals before boards commit capital.</a:t>
-            </a:r>
-            <a:endParaRPr lang="en-US" sz="1500" dirty="0"/>
-          </a:p>
-          <a:p>
-            <a:pPr marL="152400" indent="-152400">
-              <a:spcAft>
-                <a:spcPts val="800"/>
-              </a:spcAft>
-              <a:buSzPct val="100000"/>
-              <a:buChar char="•"/>
-            </a:pPr>
-            <a:r>
-              <a:rPr lang="en-US" sz="1500" dirty="0">
-                <a:solidFill>
-                  <a:srgbClr val="1C1917"/>
-                </a:solidFill>
-                <a:latin typeface="Arial" pitchFamily="34" charset="0"/>
-                <a:ea typeface="Arial" pitchFamily="34" charset="-122"/>
-                <a:cs typeface="Arial" pitchFamily="34" charset="-120"/>
-              </a:rPr>
-              <a:t>Every assumption must be documented so any reviewer can challenge it.</a:t>
-            </a:r>
-            <a:endParaRPr lang="en-US" sz="1500" dirty="0"/>
-          </a:p>
-        </p:txBody>
-      </p:sp>
-      <p:sp>
-        <p:nvSpPr>
-          <p:cNvPr id="7" name="Shape 5"/>
-          <p:cNvSpPr/>
-          <p:nvPr/>
-        </p:nvSpPr>
-        <p:spPr>
-          <a:xfrm>
-            <a:off x="731520" y="4041648"/>
-            <a:ext cx="7680960" cy="566928"/>
-          </a:xfrm>
-          <a:prstGeom prst="roundRect">
-            <a:avLst>
-              <a:gd name="adj" fmla="val 12903"/>
-            </a:avLst>
-          </a:prstGeom>
-          <a:solidFill>
-            <a:srgbClr val="B45309">
-              <a:alpha val="12000"/>
-            </a:srgbClr>
-          </a:solidFill>
-          <a:ln w="12700">
-            <a:solidFill>
-              <a:srgbClr val="B45309"/>
-            </a:solidFill>
-            <a:prstDash val="solid"/>
-          </a:ln>
-        </p:spPr>
-      </p:sp>
-      <p:sp>
-        <p:nvSpPr>
-          <p:cNvPr id="8" name="Text 6"/>
-          <p:cNvSpPr/>
-          <p:nvPr/>
-        </p:nvSpPr>
-        <p:spPr>
-          <a:xfrm>
-            <a:off x="868680" y="4087368"/>
-            <a:ext cx="7406640" cy="475488"/>
-          </a:xfrm>
-          <a:prstGeom prst="rect">
-            <a:avLst/>
-          </a:prstGeom>
-          <a:noFill/>
-          <a:ln/>
-        </p:spPr>
-        <p:txBody>
-          <a:bodyPr wrap="square" rtlCol="0" anchor="ctr"/>
-          <a:lstStyle/>
-          <a:p>
-            <a:pPr indent="0" marL="0">
-              <a:buNone/>
-            </a:pPr>
-            <a:r>
-              <a:rPr lang="en-US" sz="1100" b="1" dirty="0">
-                <a:solidFill>
-                  <a:srgbClr val="B45309"/>
-                </a:solidFill>
-                <a:latin typeface="Arial" pitchFamily="34" charset="0"/>
-                <a:ea typeface="Arial" pitchFamily="34" charset="-122"/>
-                <a:cs typeface="Arial" pitchFamily="34" charset="-120"/>
-              </a:rPr>
-              <a:t>Takeaway  </a:t>
-            </a:r>
-            <a:pPr indent="0" marL="0">
-              <a:buNone/>
-            </a:pPr>
-            <a:r>
-              <a:rPr lang="en-US" sz="1150" dirty="0">
-                <a:solidFill>
-                  <a:srgbClr val="1C1917"/>
-                </a:solidFill>
-                <a:latin typeface="Arial" pitchFamily="34" charset="0"/>
-                <a:ea typeface="Arial" pitchFamily="34" charset="-122"/>
-                <a:cs typeface="Arial" pitchFamily="34" charset="-120"/>
-              </a:rPr>
-              <a:t>Knowing where models are used—and where analysts routinely err—is as valuable as knowing how to build them.</a:t>
-            </a:r>
-            <a:endParaRPr lang="en-US" sz="1100" dirty="0"/>
-          </a:p>
-        </p:txBody>
-      </p:sp>
-    </p:spTree>
-  </p:cSld>
-  <p:clrMapOvr>
-    <a:masterClrMapping/>
-  </p:clrMapOvr>
-</p:sld>
-</file>
-
-<file path=ppt/slides/slide17.xml><?xml version="1.0" encoding="utf-8"?>
-<p:sld xmlns:a="http://schemas.openxmlformats.org/drawingml/2006/main" xmlns:r="http://schemas.openxmlformats.org/officeDocument/2006/relationships" xmlns:p="http://schemas.openxmlformats.org/presentationml/2006/main">
-  <p:cSld name="Slide 17">
-    <p:bg>
-      <p:bgPr>
-        <a:solidFill>
-          <a:srgbClr val="FFFFFF"/>
-        </a:solidFill>
-      </p:bgPr>
-    </p:bg>
-    <p:spTree>
-      <p:nvGrpSpPr>
-        <p:cNvPr id="1" name=""/>
-        <p:cNvGrpSpPr/>
-        <p:nvPr/>
-      </p:nvGrpSpPr>
-      <p:grpSpPr>
-        <a:xfrm>
-          <a:off x="0" y="0"/>
-          <a:ext cx="0" cy="0"/>
-          <a:chOff x="0" y="0"/>
-          <a:chExt cx="0" cy="0"/>
-        </a:xfrm>
-      </p:grpSpPr>
-      <p:sp>
-        <p:nvSpPr>
-          <p:cNvPr id="2" name="Shape 0"/>
-          <p:cNvSpPr/>
-          <p:nvPr/>
-        </p:nvSpPr>
-        <p:spPr>
-          <a:xfrm>
             <a:off x="0" y="4480560"/>
             <a:ext cx="9144000" cy="667512"/>
           </a:xfrm>
@@ -6380,7 +3342,7 @@
                 <a:ea typeface="Arial" pitchFamily="34" charset="-122"/>
                 <a:cs typeface="Arial" pitchFamily="34" charset="-120"/>
               </a:rPr>
-              <a:t>Concepts and Vocabulary</a:t>
+              <a:t>M&amp;A Deal Structuring and Accretion/Dilution Analysis</a:t>
             </a:r>
             <a:endParaRPr lang="en-US" sz="1600" dirty="0"/>
           </a:p>
@@ -6401,7 +3363,7 @@
                 <a:ea typeface="Arial" pitchFamily="34" charset="-122"/>
                 <a:cs typeface="Arial" pitchFamily="34" charset="-120"/>
               </a:rPr>
-              <a:t>Core Definitions</a:t>
+              <a:t>Synergy Valuation and Purchase Price Allocation</a:t>
             </a:r>
             <a:endParaRPr lang="en-US" sz="1600" dirty="0"/>
           </a:p>
@@ -6422,7 +3384,7 @@
                 <a:ea typeface="Arial" pitchFamily="34" charset="-122"/>
                 <a:cs typeface="Arial" pitchFamily="34" charset="-120"/>
               </a:rPr>
-              <a:t>Where Financial Modeling Fits in Practice</a:t>
+              <a:t>Leveraged Buyout (LBO) Modeling and Return Analysis</a:t>
             </a:r>
             <a:endParaRPr lang="en-US" sz="1600" dirty="0"/>
           </a:p>
@@ -6443,7 +3405,7 @@
                 <a:ea typeface="Arial" pitchFamily="34" charset="-122"/>
                 <a:cs typeface="Arial" pitchFamily="34" charset="-120"/>
               </a:rPr>
-              <a:t>Standard Notation</a:t>
+              <a:t>Capital Budgeting: NPV, IRR, and Payback</a:t>
             </a:r>
             <a:endParaRPr lang="en-US" sz="1600" dirty="0"/>
           </a:p>
@@ -6464,7 +3426,7 @@
                 <a:ea typeface="Arial" pitchFamily="34" charset="-122"/>
                 <a:cs typeface="Arial" pitchFamily="34" charset="-120"/>
               </a:rPr>
-              <a:t>Worked Example: Terminology Applied</a:t>
+              <a:t>Financing Mix Optimization and Its Impact on Returns</a:t>
             </a:r>
             <a:endParaRPr lang="en-US" sz="1600" dirty="0"/>
           </a:p>
@@ -6485,112 +3447,7 @@
                 <a:ea typeface="Arial" pitchFamily="34" charset="-122"/>
                 <a:cs typeface="Arial" pitchFamily="34" charset="-120"/>
               </a:rPr>
-              <a:t>The Standard M&amp;A Modeling Procedure</a:t>
-            </a:r>
-            <a:endParaRPr lang="en-US" sz="1600" dirty="0"/>
-          </a:p>
-          <a:p>
-            <a:pPr marL="177800" indent="-177800">
-              <a:spcAft>
-                <a:spcPts val="1000"/>
-              </a:spcAft>
-              <a:buSzPct val="100000"/>
-              <a:buChar char="▪"/>
-            </a:pPr>
-            <a:r>
-              <a:rPr lang="en-US" sz="1600" dirty="0">
-                <a:solidFill>
-                  <a:srgbClr val="1C1917"/>
-                </a:solidFill>
-                <a:latin typeface="Arial" pitchFamily="34" charset="0"/>
-                <a:ea typeface="Arial" pitchFamily="34" charset="-122"/>
-                <a:cs typeface="Arial" pitchFamily="34" charset="-120"/>
-              </a:rPr>
-              <a:t>Inputs: Building the Foundation</a:t>
-            </a:r>
-            <a:endParaRPr lang="en-US" sz="1600" dirty="0"/>
-          </a:p>
-          <a:p>
-            <a:pPr marL="177800" indent="-177800">
-              <a:spcAft>
-                <a:spcPts val="1000"/>
-              </a:spcAft>
-              <a:buSzPct val="100000"/>
-              <a:buChar char="▪"/>
-            </a:pPr>
-            <a:r>
-              <a:rPr lang="en-US" sz="1600" dirty="0">
-                <a:solidFill>
-                  <a:srgbClr val="1C1917"/>
-                </a:solidFill>
-                <a:latin typeface="Arial" pitchFamily="34" charset="0"/>
-                <a:ea typeface="Arial" pitchFamily="34" charset="-122"/>
-                <a:cs typeface="Arial" pitchFamily="34" charset="-120"/>
-              </a:rPr>
-              <a:t>Steps: Building the Model</a:t>
-            </a:r>
-            <a:endParaRPr lang="en-US" sz="1600" dirty="0"/>
-          </a:p>
-          <a:p>
-            <a:pPr marL="177800" indent="-177800">
-              <a:spcAft>
-                <a:spcPts val="1000"/>
-              </a:spcAft>
-              <a:buSzPct val="100000"/>
-              <a:buChar char="▪"/>
-            </a:pPr>
-            <a:r>
-              <a:rPr lang="en-US" sz="1600" dirty="0">
-                <a:solidFill>
-                  <a:srgbClr val="1C1917"/>
-                </a:solidFill>
-                <a:latin typeface="Arial" pitchFamily="34" charset="0"/>
-                <a:ea typeface="Arial" pitchFamily="34" charset="-122"/>
-                <a:cs typeface="Arial" pitchFamily="34" charset="-120"/>
-              </a:rPr>
-              <a:t>Worked Example: DCF Valuation</a:t>
-            </a:r>
-            <a:endParaRPr lang="en-US" sz="1600" dirty="0"/>
-          </a:p>
-          <a:p>
-            <a:pPr marL="177800" indent="-177800">
-              <a:spcAft>
-                <a:spcPts val="1000"/>
-              </a:spcAft>
-              <a:buSzPct val="100000"/>
-              <a:buChar char="▪"/>
-            </a:pPr>
-            <a:r>
-              <a:rPr lang="en-US" sz="1600" dirty="0">
-                <a:solidFill>
-                  <a:srgbClr val="1C1917"/>
-                </a:solidFill>
-                <a:latin typeface="Arial" pitchFamily="34" charset="0"/>
-                <a:ea typeface="Arial" pitchFamily="34" charset="-122"/>
-                <a:cs typeface="Arial" pitchFamily="34" charset="-120"/>
-              </a:rPr>
-              <a:t>Outputs and Checks</a:t>
-            </a:r>
-            <a:endParaRPr lang="en-US" sz="1600" dirty="0"/>
-          </a:p>
-          <a:p>
-            <a:pPr marL="177800" indent="-177800">
-              <a:spcAft>
-                <a:spcPts val="1000"/>
-              </a:spcAft>
-              <a:buSzPct val="100000"/>
-              <a:buChar char="▪"/>
-            </a:pPr>
-            <a:r>
-              <a:rPr lang="en-US" sz="1600" dirty="0">
-                <a:solidFill>
-                  <a:srgbClr val="1C1917"/>
-                </a:solidFill>
-                <a:latin typeface="Arial" pitchFamily="34" charset="0"/>
-                <a:ea typeface="Arial" pitchFamily="34" charset="-122"/>
-                <a:cs typeface="Arial" pitchFamily="34" charset="-120"/>
-              </a:rPr>
-              <a:t>Applications and Pitfalls</a:t>
+              <a:t>Model Governance, Audit Trails, and Assumption Documentation</a:t>
             </a:r>
             <a:endParaRPr lang="en-US" sz="1600" dirty="0"/>
           </a:p>
@@ -6681,7 +3538,7 @@
                 <a:ea typeface="Arial" pitchFamily="34" charset="-122"/>
                 <a:cs typeface="Arial" pitchFamily="34" charset="-120"/>
               </a:rPr>
-              <a:t>Concepts and Vocabulary</a:t>
+              <a:t>M&amp;A Deal Structuring and Accretion/Dilution Analysis</a:t>
             </a:r>
             <a:endParaRPr lang="en-US" sz="2100" dirty="0"/>
           </a:p>
@@ -6786,7 +3643,7 @@
                 <a:ea typeface="Arial" pitchFamily="34" charset="-122"/>
                 <a:cs typeface="Arial" pitchFamily="34" charset="-120"/>
               </a:rPr>
-              <a:t>Financial modeling quantifies a company's past, present, and projected reality.</a:t>
+              <a:t>Accretion/dilution tests whether combined EPS exceeds acquirer's standalone EPS.</a:t>
             </a:r>
             <a:endParaRPr lang="en-US" sz="1500" dirty="0"/>
           </a:p>
@@ -6807,7 +3664,7 @@
                 <a:ea typeface="Arial" pitchFamily="34" charset="-122"/>
                 <a:cs typeface="Arial" pitchFamily="34" charset="-120"/>
               </a:rPr>
-              <a:t>Precise vocabulary prevents costly errors in high-stakes M&amp;A decisions.</a:t>
+              <a:t>Accretion = pro-forma EPS rises; dilution = pro-forma EPS falls post-deal.</a:t>
             </a:r>
             <a:endParaRPr lang="en-US" sz="1500" dirty="0"/>
           </a:p>
@@ -6828,7 +3685,7 @@
                 <a:ea typeface="Arial" pitchFamily="34" charset="-122"/>
                 <a:cs typeface="Arial" pitchFamily="34" charset="-120"/>
               </a:rPr>
-              <a:t>Models support acquisitions, divestitures, capital raises, and strategic investments.</a:t>
+              <a:t>Financing mix directly drives the EPS outcome: cash vs. stock matters.</a:t>
             </a:r>
             <a:endParaRPr lang="en-US" sz="1500" dirty="0"/>
           </a:p>
@@ -6849,7 +3706,28 @@
                 <a:ea typeface="Arial" pitchFamily="34" charset="-122"/>
                 <a:cs typeface="Arial" pitchFamily="34" charset="-120"/>
               </a:rPr>
-              <a:t>Imprecise language directly produces imprecise, unreliable models.</a:t>
+              <a:t>Formula: (Combined Net Income − After-Tax Interest) ÷ Total Shares Outstanding.</a:t>
+            </a:r>
+            <a:endParaRPr lang="en-US" sz="1500" dirty="0"/>
+          </a:p>
+          <a:p>
+            <a:pPr marL="152400" indent="-152400">
+              <a:spcAft>
+                <a:spcPts val="800"/>
+              </a:spcAft>
+              <a:buSzPct val="100000"/>
+              <a:buChar char="•"/>
+            </a:pPr>
+            <a:r>
+              <a:rPr lang="en-US" sz="1500" dirty="0">
+                <a:solidFill>
+                  <a:srgbClr val="1C1917"/>
+                </a:solidFill>
+                <a:latin typeface="Arial" pitchFamily="34" charset="0"/>
+                <a:ea typeface="Arial" pitchFamily="34" charset="-122"/>
+                <a:cs typeface="Arial" pitchFamily="34" charset="-120"/>
+              </a:rPr>
+              <a:t>Direction and magnitude shape board approval and negotiating strategy.</a:t>
             </a:r>
             <a:endParaRPr lang="en-US" sz="1500" dirty="0"/>
           </a:p>
@@ -6931,7 +3809,7 @@
                 <a:ea typeface="Arial" pitchFamily="34" charset="-122"/>
                 <a:cs typeface="Arial" pitchFamily="34" charset="-120"/>
               </a:rPr>
-              <a:t>In M&amp;A modeling, getting the language right is the first line of defense against expensive mistakes.</a:t>
+              <a:t>Accretion/dilution analysis is the first EPS reality check on any proposed acquisition.</a:t>
             </a:r>
             <a:endParaRPr lang="en-US" sz="1100" dirty="0"/>
           </a:p>
@@ -7022,7 +3900,7 @@
                 <a:ea typeface="Arial" pitchFamily="34" charset="-122"/>
                 <a:cs typeface="Arial" pitchFamily="34" charset="-120"/>
               </a:rPr>
-              <a:t>Core Definitions</a:t>
+              <a:t>Synergy Valuation and Purchase Price Allocation</a:t>
             </a:r>
             <a:endParaRPr lang="en-US" sz="2100" dirty="0"/>
           </a:p>
@@ -7127,7 +4005,7 @@
                 <a:ea typeface="Arial" pitchFamily="34" charset="-122"/>
                 <a:cs typeface="Arial" pitchFamily="34" charset="-120"/>
               </a:rPr>
-              <a:t>A financial model links assumptions to outputs through auditable formulas.</a:t>
+              <a:t>Synergy NPV must exceed the acquisition premium paid, or value is destroyed.</a:t>
             </a:r>
             <a:endParaRPr lang="en-US" sz="1500" dirty="0"/>
           </a:p>
@@ -7148,7 +4026,7 @@
                 <a:ea typeface="Arial" pitchFamily="34" charset="-122"/>
                 <a:cs typeface="Arial" pitchFamily="34" charset="-120"/>
               </a:rPr>
-              <a:t>Enterprise Value equals Equity Value plus Net Debt, ignoring capital structure.</a:t>
+              <a:t>Cost synergies: headcount cuts, facility consolidation, procurement savings.</a:t>
             </a:r>
             <a:endParaRPr lang="en-US" sz="1500" dirty="0"/>
           </a:p>
@@ -7169,7 +4047,7 @@
                 <a:ea typeface="Arial" pitchFamily="34" charset="-122"/>
                 <a:cs typeface="Arial" pitchFamily="34" charset="-120"/>
               </a:rPr>
-              <a:t>Synergies are incremental value neither company could create independently.</a:t>
+              <a:t>Revenue synergies carry higher risk and longer realization timelines.</a:t>
             </a:r>
             <a:endParaRPr lang="en-US" sz="1500" dirty="0"/>
           </a:p>
@@ -7190,7 +4068,7 @@
                 <a:ea typeface="Arial" pitchFamily="34" charset="-122"/>
                 <a:cs typeface="Arial" pitchFamily="34" charset="-120"/>
               </a:rPr>
-              <a:t>Revenue synergies come from cross-selling; cost synergies from eliminating redundancy.</a:t>
+              <a:t>Discount synergy cash flows at a risk-adjusted rate reflecting execution uncertainty.</a:t>
             </a:r>
             <a:endParaRPr lang="en-US" sz="1500" dirty="0"/>
           </a:p>
@@ -7211,7 +4089,7 @@
                 <a:ea typeface="Arial" pitchFamily="34" charset="-122"/>
                 <a:cs typeface="Arial" pitchFamily="34" charset="-120"/>
               </a:rPr>
-              <a:t>Net Debt equals Total Debt minus Cash and Cash Equivalents.</a:t>
+              <a:t>Premium paid above synergy NPV signals overpayment on day one.</a:t>
             </a:r>
             <a:endParaRPr lang="en-US" sz="1500" dirty="0"/>
           </a:p>
@@ -7293,7 +4171,7 @@
                 <a:ea typeface="Arial" pitchFamily="34" charset="-122"/>
                 <a:cs typeface="Arial" pitchFamily="34" charset="-120"/>
               </a:rPr>
-              <a:t>Mastering EV, equity value, and synergy definitions is foundational before building any M&amp;A model.</a:t>
+              <a:t>Disciplined synergy valuation prevents acquirers from paying more than the deal is worth.</a:t>
             </a:r>
             <a:endParaRPr lang="en-US" sz="1100" dirty="0"/>
           </a:p>
@@ -7339,8 +4217,8 @@
         </p:nvSpPr>
         <p:spPr>
           <a:xfrm>
-            <a:off x="411480" y="402336"/>
-            <a:ext cx="82296" cy="329184"/>
+            <a:off x="411480" y="384048"/>
+            <a:ext cx="82296" cy="310896"/>
           </a:xfrm>
           <a:prstGeom prst="rect">
             <a:avLst/>
@@ -7360,7 +4238,7 @@
         <p:spPr>
           <a:xfrm>
             <a:off x="566928" y="292608"/>
-            <a:ext cx="8138160" cy="548640"/>
+            <a:ext cx="8138160" cy="502920"/>
           </a:xfrm>
           <a:prstGeom prst="rect">
             <a:avLst/>
@@ -7376,7 +4254,7 @@
               <a:buNone/>
             </a:pPr>
             <a:r>
-              <a:rPr lang="en-US" sz="2100" b="1" dirty="0">
+              <a:rPr lang="en-US" sz="2000" b="1" dirty="0">
                 <a:solidFill>
                   <a:srgbClr val="1C1917"/>
                 </a:solidFill>
@@ -7384,22 +4262,100 @@
                 <a:ea typeface="Arial" pitchFamily="34" charset="-122"/>
                 <a:cs typeface="Arial" pitchFamily="34" charset="-120"/>
               </a:rPr>
-              <a:t>Where Financial Modeling Fits in Practice</a:t>
-            </a:r>
-            <a:endParaRPr lang="en-US" sz="2100" dirty="0"/>
-          </a:p>
-        </p:txBody>
-      </p:sp>
-      <p:sp>
-        <p:nvSpPr>
-          <p:cNvPr id="4" name="Shape 2"/>
-          <p:cNvSpPr/>
-          <p:nvPr/>
-        </p:nvSpPr>
-        <p:spPr>
-          <a:xfrm>
-            <a:off x="411480" y="960120"/>
-            <a:ext cx="8321040" cy="0"/>
+              <a:t>Accretion/Dilution Build</a:t>
+            </a:r>
+            <a:endParaRPr lang="en-US" sz="2000" dirty="0"/>
+          </a:p>
+        </p:txBody>
+      </p:sp>
+      <p:sp>
+        <p:nvSpPr>
+          <p:cNvPr id="4" name="Text 2"/>
+          <p:cNvSpPr/>
+          <p:nvPr/>
+        </p:nvSpPr>
+        <p:spPr>
+          <a:xfrm>
+            <a:off x="566928" y="4681728"/>
+            <a:ext cx="8138160" cy="320040"/>
+          </a:xfrm>
+          <a:prstGeom prst="rect">
+            <a:avLst/>
+          </a:prstGeom>
+          <a:noFill/>
+          <a:ln/>
+        </p:spPr>
+        <p:txBody>
+          <a:bodyPr wrap="square" rtlCol="0" anchor="ctr"/>
+          <a:lstStyle/>
+          <a:p>
+            <a:pPr indent="0" marL="0">
+              <a:buNone/>
+            </a:pPr>
+            <a:r>
+              <a:rPr lang="en-US" sz="1000" i="1" dirty="0">
+                <a:solidFill>
+                  <a:srgbClr val="78716C"/>
+                </a:solidFill>
+                <a:latin typeface="Arial" pitchFamily="34" charset="0"/>
+                <a:ea typeface="Arial" pitchFamily="34" charset="-122"/>
+                <a:cs typeface="Arial" pitchFamily="34" charset="-120"/>
+              </a:rPr>
+              <a:t>Deal is accretive: pro-forma EPS $4.10 vs. standalone $4.00 (+2.5%)</a:t>
+            </a:r>
+            <a:endParaRPr lang="en-US" sz="1000" dirty="0"/>
+          </a:p>
+        </p:txBody>
+      </p:sp>
+      <p:sp>
+        <p:nvSpPr>
+          <p:cNvPr id="5" name="Text 3"/>
+          <p:cNvSpPr/>
+          <p:nvPr/>
+        </p:nvSpPr>
+        <p:spPr>
+          <a:xfrm>
+            <a:off x="411480" y="4919472"/>
+            <a:ext cx="8321040" cy="219456"/>
+          </a:xfrm>
+          <a:prstGeom prst="rect">
+            <a:avLst/>
+          </a:prstGeom>
+          <a:noFill/>
+          <a:ln/>
+        </p:spPr>
+        <p:txBody>
+          <a:bodyPr wrap="square" rtlCol="0" anchor="ctr"/>
+          <a:lstStyle/>
+          <a:p>
+            <a:pPr indent="0" marL="0">
+              <a:buNone/>
+            </a:pPr>
+            <a:r>
+              <a:rPr lang="en-US" sz="750" dirty="0">
+                <a:solidFill>
+                  <a:srgbClr val="AAAAAA"/>
+                </a:solidFill>
+                <a:latin typeface="Arial" pitchFamily="34" charset="0"/>
+                <a:ea typeface="Arial" pitchFamily="34" charset="-122"/>
+                <a:cs typeface="Arial" pitchFamily="34" charset="-120"/>
+              </a:rPr>
+              <a:t>Lesson Forge Pro (owner) — This content is educational material only and does not constitute financial, investment, or trading advice.</a:t>
+            </a:r>
+            <a:endParaRPr lang="en-US" sz="750" dirty="0"/>
+          </a:p>
+        </p:txBody>
+      </p:sp>
+      <p:sp>
+        <p:nvSpPr>
+          <p:cNvPr id="6" name="Shape 4"/>
+          <p:cNvSpPr/>
+          <p:nvPr/>
+        </p:nvSpPr>
+        <p:spPr>
+          <a:xfrm>
+            <a:off x="685800" y="4206240"/>
+            <a:ext cx="7772400" cy="0"/>
           </a:xfrm>
           <a:prstGeom prst="line">
             <a:avLst/>
@@ -7407,7 +4363,7 @@
           <a:noFill/>
           <a:ln w="12700">
             <a:solidFill>
-              <a:srgbClr val="E7E5E4"/>
+              <a:srgbClr val="1C1917"/>
             </a:solidFill>
             <a:prstDash val="solid"/>
           </a:ln>
@@ -7415,14 +4371,34 @@
       </p:sp>
       <p:sp>
         <p:nvSpPr>
-          <p:cNvPr id="5" name="Text 3"/>
-          <p:cNvSpPr/>
-          <p:nvPr/>
-        </p:nvSpPr>
-        <p:spPr>
-          <a:xfrm>
-            <a:off x="411480" y="4864608"/>
-            <a:ext cx="8321040" cy="237744"/>
+          <p:cNvPr id="7" name="Shape 5"/>
+          <p:cNvSpPr/>
+          <p:nvPr/>
+        </p:nvSpPr>
+        <p:spPr>
+          <a:xfrm>
+            <a:off x="1371600" y="1767840"/>
+            <a:ext cx="777240" cy="2438400"/>
+          </a:xfrm>
+          <a:prstGeom prst="rect">
+            <a:avLst/>
+          </a:prstGeom>
+          <a:solidFill>
+            <a:srgbClr val="15803D"/>
+          </a:solidFill>
+          <a:ln/>
+        </p:spPr>
+      </p:sp>
+      <p:sp>
+        <p:nvSpPr>
+          <p:cNvPr id="8" name="Text 6"/>
+          <p:cNvSpPr/>
+          <p:nvPr/>
+        </p:nvSpPr>
+        <p:spPr>
+          <a:xfrm>
+            <a:off x="1188720" y="1493520"/>
+            <a:ext cx="1143000" cy="237744"/>
           </a:xfrm>
           <a:prstGeom prst="rect">
             <a:avLst/>
@@ -7434,54 +4410,11 @@
           <a:bodyPr wrap="square" rtlCol="0" anchor="ctr"/>
           <a:lstStyle/>
           <a:p>
-            <a:pPr indent="0" marL="0">
-              <a:buNone/>
-            </a:pPr>
-            <a:r>
-              <a:rPr lang="en-US" sz="750" dirty="0">
-                <a:solidFill>
-                  <a:srgbClr val="AAAAAA"/>
-                </a:solidFill>
-                <a:latin typeface="Arial" pitchFamily="34" charset="0"/>
-                <a:ea typeface="Arial" pitchFamily="34" charset="-122"/>
-                <a:cs typeface="Arial" pitchFamily="34" charset="-120"/>
-              </a:rPr>
-              <a:t>Lesson Forge Pro (owner) — This content is educational material only and does not constitute financial, investment, or trading advice.</a:t>
-            </a:r>
-            <a:endParaRPr lang="en-US" sz="750" dirty="0"/>
-          </a:p>
-        </p:txBody>
-      </p:sp>
-      <p:sp>
-        <p:nvSpPr>
-          <p:cNvPr id="6" name="Text 4"/>
-          <p:cNvSpPr/>
-          <p:nvPr/>
-        </p:nvSpPr>
-        <p:spPr>
-          <a:xfrm>
-            <a:off x="731520" y="1188720"/>
-            <a:ext cx="7680960" cy="2743200"/>
-          </a:xfrm>
-          <a:prstGeom prst="rect">
-            <a:avLst/>
-          </a:prstGeom>
-          <a:noFill/>
-          <a:ln/>
-        </p:spPr>
-        <p:txBody>
-          <a:bodyPr wrap="square" rtlCol="0" anchor="t"/>
-          <a:lstStyle/>
-          <a:p>
-            <a:pPr marL="152400" indent="-152400">
-              <a:spcAft>
-                <a:spcPts val="800"/>
-              </a:spcAft>
-              <a:buSzPct val="100000"/>
-              <a:buChar char="•"/>
-            </a:pPr>
-            <a:r>
-              <a:rPr lang="en-US" sz="1500" dirty="0">
+            <a:pPr algn="ctr" indent="0" marL="0">
+              <a:buNone/>
+            </a:pPr>
+            <a:r>
+              <a:rPr lang="en-US" sz="950" b="1" dirty="0">
                 <a:solidFill>
                   <a:srgbClr val="1C1917"/>
                 </a:solidFill>
@@ -7489,20 +4422,97 @@
                 <a:ea typeface="Arial" pitchFamily="34" charset="-122"/>
                 <a:cs typeface="Arial" pitchFamily="34" charset="-120"/>
               </a:rPr>
-              <a:t>Models determine fair offer prices for acquisition targets.</a:t>
-            </a:r>
-            <a:endParaRPr lang="en-US" sz="1500" dirty="0"/>
-          </a:p>
-          <a:p>
-            <a:pPr marL="152400" indent="-152400">
-              <a:spcAft>
-                <a:spcPts val="800"/>
-              </a:spcAft>
-              <a:buSzPct val="100000"/>
-              <a:buChar char="•"/>
-            </a:pPr>
-            <a:r>
-              <a:rPr lang="en-US" sz="1500" dirty="0">
+              <a:t>400</a:t>
+            </a:r>
+            <a:endParaRPr lang="en-US" sz="950" dirty="0"/>
+          </a:p>
+        </p:txBody>
+      </p:sp>
+      <p:sp>
+        <p:nvSpPr>
+          <p:cNvPr id="9" name="Text 7"/>
+          <p:cNvSpPr/>
+          <p:nvPr/>
+        </p:nvSpPr>
+        <p:spPr>
+          <a:xfrm>
+            <a:off x="1143000" y="4315968"/>
+            <a:ext cx="1234440" cy="502920"/>
+          </a:xfrm>
+          <a:prstGeom prst="rect">
+            <a:avLst/>
+          </a:prstGeom>
+          <a:noFill/>
+          <a:ln/>
+        </p:spPr>
+        <p:txBody>
+          <a:bodyPr wrap="square" rtlCol="0" anchor="ctr"/>
+          <a:lstStyle/>
+          <a:p>
+            <a:pPr algn="ctr" indent="0" marL="0">
+              <a:buNone/>
+            </a:pPr>
+            <a:r>
+              <a:rPr lang="en-US" sz="850" dirty="0">
+                <a:solidFill>
+                  <a:srgbClr val="78716C"/>
+                </a:solidFill>
+                <a:latin typeface="Arial" pitchFamily="34" charset="0"/>
+                <a:ea typeface="Arial" pitchFamily="34" charset="-122"/>
+                <a:cs typeface="Arial" pitchFamily="34" charset="-120"/>
+              </a:rPr>
+              <a:t>Acquirer Net Income</a:t>
+            </a:r>
+            <a:endParaRPr lang="en-US" sz="850" dirty="0"/>
+          </a:p>
+        </p:txBody>
+      </p:sp>
+      <p:sp>
+        <p:nvSpPr>
+          <p:cNvPr id="10" name="Shape 8"/>
+          <p:cNvSpPr/>
+          <p:nvPr/>
+        </p:nvSpPr>
+        <p:spPr>
+          <a:xfrm>
+            <a:off x="3246120" y="1280160"/>
+            <a:ext cx="777240" cy="487680"/>
+          </a:xfrm>
+          <a:prstGeom prst="rect">
+            <a:avLst/>
+          </a:prstGeom>
+          <a:solidFill>
+            <a:srgbClr val="15803D"/>
+          </a:solidFill>
+          <a:ln/>
+        </p:spPr>
+      </p:sp>
+      <p:sp>
+        <p:nvSpPr>
+          <p:cNvPr id="11" name="Text 9"/>
+          <p:cNvSpPr/>
+          <p:nvPr/>
+        </p:nvSpPr>
+        <p:spPr>
+          <a:xfrm>
+            <a:off x="3063240" y="1005840"/>
+            <a:ext cx="1143000" cy="237744"/>
+          </a:xfrm>
+          <a:prstGeom prst="rect">
+            <a:avLst/>
+          </a:prstGeom>
+          <a:noFill/>
+          <a:ln/>
+        </p:spPr>
+        <p:txBody>
+          <a:bodyPr wrap="square" rtlCol="0" anchor="ctr"/>
+          <a:lstStyle/>
+          <a:p>
+            <a:pPr algn="ctr" indent="0" marL="0">
+              <a:buNone/>
+            </a:pPr>
+            <a:r>
+              <a:rPr lang="en-US" sz="950" b="1" dirty="0">
                 <a:solidFill>
                   <a:srgbClr val="1C1917"/>
                 </a:solidFill>
@@ -7510,20 +4520,97 @@
                 <a:ea typeface="Arial" pitchFamily="34" charset="-122"/>
                 <a:cs typeface="Arial" pitchFamily="34" charset="-120"/>
               </a:rPr>
-              <a:t>Scenario analysis stress-tests assumptions across bear, base, and bull cases.</a:t>
-            </a:r>
-            <a:endParaRPr lang="en-US" sz="1500" dirty="0"/>
-          </a:p>
-          <a:p>
-            <a:pPr marL="152400" indent="-152400">
-              <a:spcAft>
-                <a:spcPts val="800"/>
-              </a:spcAft>
-              <a:buSzPct val="100000"/>
-              <a:buChar char="•"/>
-            </a:pPr>
-            <a:r>
-              <a:rPr lang="en-US" sz="1500" dirty="0">
+              <a:t>80</a:t>
+            </a:r>
+            <a:endParaRPr lang="en-US" sz="950" dirty="0"/>
+          </a:p>
+        </p:txBody>
+      </p:sp>
+      <p:sp>
+        <p:nvSpPr>
+          <p:cNvPr id="12" name="Text 10"/>
+          <p:cNvSpPr/>
+          <p:nvPr/>
+        </p:nvSpPr>
+        <p:spPr>
+          <a:xfrm>
+            <a:off x="3017520" y="4315968"/>
+            <a:ext cx="1234440" cy="502920"/>
+          </a:xfrm>
+          <a:prstGeom prst="rect">
+            <a:avLst/>
+          </a:prstGeom>
+          <a:noFill/>
+          <a:ln/>
+        </p:spPr>
+        <p:txBody>
+          <a:bodyPr wrap="square" rtlCol="0" anchor="ctr"/>
+          <a:lstStyle/>
+          <a:p>
+            <a:pPr algn="ctr" indent="0" marL="0">
+              <a:buNone/>
+            </a:pPr>
+            <a:r>
+              <a:rPr lang="en-US" sz="850" dirty="0">
+                <a:solidFill>
+                  <a:srgbClr val="78716C"/>
+                </a:solidFill>
+                <a:latin typeface="Arial" pitchFamily="34" charset="0"/>
+                <a:ea typeface="Arial" pitchFamily="34" charset="-122"/>
+                <a:cs typeface="Arial" pitchFamily="34" charset="-120"/>
+              </a:rPr>
+              <a:t>Target Net Income</a:t>
+            </a:r>
+            <a:endParaRPr lang="en-US" sz="850" dirty="0"/>
+          </a:p>
+        </p:txBody>
+      </p:sp>
+      <p:sp>
+        <p:nvSpPr>
+          <p:cNvPr id="13" name="Shape 11"/>
+          <p:cNvSpPr/>
+          <p:nvPr/>
+        </p:nvSpPr>
+        <p:spPr>
+          <a:xfrm>
+            <a:off x="5120640" y="1280160"/>
+            <a:ext cx="777240" cy="114300"/>
+          </a:xfrm>
+          <a:prstGeom prst="rect">
+            <a:avLst/>
+          </a:prstGeom>
+          <a:solidFill>
+            <a:srgbClr val="B91C1C"/>
+          </a:solidFill>
+          <a:ln/>
+        </p:spPr>
+      </p:sp>
+      <p:sp>
+        <p:nvSpPr>
+          <p:cNvPr id="14" name="Text 12"/>
+          <p:cNvSpPr/>
+          <p:nvPr/>
+        </p:nvSpPr>
+        <p:spPr>
+          <a:xfrm>
+            <a:off x="4937760" y="1005840"/>
+            <a:ext cx="1143000" cy="237744"/>
+          </a:xfrm>
+          <a:prstGeom prst="rect">
+            <a:avLst/>
+          </a:prstGeom>
+          <a:noFill/>
+          <a:ln/>
+        </p:spPr>
+        <p:txBody>
+          <a:bodyPr wrap="square" rtlCol="0" anchor="ctr"/>
+          <a:lstStyle/>
+          <a:p>
+            <a:pPr algn="ctr" indent="0" marL="0">
+              <a:buNone/>
+            </a:pPr>
+            <a:r>
+              <a:rPr lang="en-US" sz="950" b="1" dirty="0">
                 <a:solidFill>
                   <a:srgbClr val="1C1917"/>
                 </a:solidFill>
@@ -7531,20 +4618,97 @@
                 <a:ea typeface="Arial" pitchFamily="34" charset="-122"/>
                 <a:cs typeface="Arial" pitchFamily="34" charset="-120"/>
               </a:rPr>
-              <a:t>Models satisfy due diligence requirements for boards, lenders, and regulators.</a:t>
-            </a:r>
-            <a:endParaRPr lang="en-US" sz="1500" dirty="0"/>
-          </a:p>
-          <a:p>
-            <a:pPr marL="152400" indent="-152400">
-              <a:spcAft>
-                <a:spcPts val="800"/>
-              </a:spcAft>
-              <a:buSzPct val="100000"/>
-              <a:buChar char="•"/>
-            </a:pPr>
-            <a:r>
-              <a:rPr lang="en-US" sz="1500" dirty="0">
+              <a:t>-18.75</a:t>
+            </a:r>
+            <a:endParaRPr lang="en-US" sz="950" dirty="0"/>
+          </a:p>
+        </p:txBody>
+      </p:sp>
+      <p:sp>
+        <p:nvSpPr>
+          <p:cNvPr id="15" name="Text 13"/>
+          <p:cNvSpPr/>
+          <p:nvPr/>
+        </p:nvSpPr>
+        <p:spPr>
+          <a:xfrm>
+            <a:off x="4892040" y="4315968"/>
+            <a:ext cx="1234440" cy="502920"/>
+          </a:xfrm>
+          <a:prstGeom prst="rect">
+            <a:avLst/>
+          </a:prstGeom>
+          <a:noFill/>
+          <a:ln/>
+        </p:spPr>
+        <p:txBody>
+          <a:bodyPr wrap="square" rtlCol="0" anchor="ctr"/>
+          <a:lstStyle/>
+          <a:p>
+            <a:pPr algn="ctr" indent="0" marL="0">
+              <a:buNone/>
+            </a:pPr>
+            <a:r>
+              <a:rPr lang="en-US" sz="850" dirty="0">
+                <a:solidFill>
+                  <a:srgbClr val="78716C"/>
+                </a:solidFill>
+                <a:latin typeface="Arial" pitchFamily="34" charset="0"/>
+                <a:ea typeface="Arial" pitchFamily="34" charset="-122"/>
+                <a:cs typeface="Arial" pitchFamily="34" charset="-120"/>
+              </a:rPr>
+              <a:t>After-Tax Interest</a:t>
+            </a:r>
+            <a:endParaRPr lang="en-US" sz="850" dirty="0"/>
+          </a:p>
+        </p:txBody>
+      </p:sp>
+      <p:sp>
+        <p:nvSpPr>
+          <p:cNvPr id="16" name="Shape 14"/>
+          <p:cNvSpPr/>
+          <p:nvPr/>
+        </p:nvSpPr>
+        <p:spPr>
+          <a:xfrm>
+            <a:off x="6995160" y="1394460"/>
+            <a:ext cx="777240" cy="2811780"/>
+          </a:xfrm>
+          <a:prstGeom prst="rect">
+            <a:avLst/>
+          </a:prstGeom>
+          <a:solidFill>
+            <a:srgbClr val="B45309"/>
+          </a:solidFill>
+          <a:ln/>
+        </p:spPr>
+      </p:sp>
+      <p:sp>
+        <p:nvSpPr>
+          <p:cNvPr id="17" name="Text 15"/>
+          <p:cNvSpPr/>
+          <p:nvPr/>
+        </p:nvSpPr>
+        <p:spPr>
+          <a:xfrm>
+            <a:off x="6812280" y="1120140"/>
+            <a:ext cx="1143000" cy="237744"/>
+          </a:xfrm>
+          <a:prstGeom prst="rect">
+            <a:avLst/>
+          </a:prstGeom>
+          <a:noFill/>
+          <a:ln/>
+        </p:spPr>
+        <p:txBody>
+          <a:bodyPr wrap="square" rtlCol="0" anchor="ctr"/>
+          <a:lstStyle/>
+          <a:p>
+            <a:pPr algn="ctr" indent="0" marL="0">
+              <a:buNone/>
+            </a:pPr>
+            <a:r>
+              <a:rPr lang="en-US" sz="950" b="1" dirty="0">
                 <a:solidFill>
                   <a:srgbClr val="1C1917"/>
                 </a:solidFill>
@@ -7552,72 +4716,22 @@
                 <a:ea typeface="Arial" pitchFamily="34" charset="-122"/>
                 <a:cs typeface="Arial" pitchFamily="34" charset="-120"/>
               </a:rPr>
-              <a:t>Analysts in banking, corporate development, and private equity build and consume models.</a:t>
-            </a:r>
-            <a:endParaRPr lang="en-US" sz="1500" dirty="0"/>
-          </a:p>
-          <a:p>
-            <a:pPr marL="152400" indent="-152400">
-              <a:spcAft>
-                <a:spcPts val="800"/>
-              </a:spcAft>
-              <a:buSzPct val="100000"/>
-              <a:buChar char="•"/>
-            </a:pPr>
-            <a:r>
-              <a:rPr lang="en-US" sz="1500" dirty="0">
-                <a:solidFill>
-                  <a:srgbClr val="1C1917"/>
-                </a:solidFill>
-                <a:latin typeface="Arial" pitchFamily="34" charset="0"/>
-                <a:ea typeface="Arial" pitchFamily="34" charset="-122"/>
-                <a:cs typeface="Arial" pitchFamily="34" charset="-120"/>
-              </a:rPr>
-              <a:t>Every model simultaneously forecasts, tells a story, and assesses risk.</a:t>
-            </a:r>
-            <a:endParaRPr lang="en-US" sz="1500" dirty="0"/>
-          </a:p>
-        </p:txBody>
-      </p:sp>
-      <p:sp>
-        <p:nvSpPr>
-          <p:cNvPr id="7" name="Shape 5"/>
-          <p:cNvSpPr/>
-          <p:nvPr/>
-        </p:nvSpPr>
-        <p:spPr>
-          <a:xfrm>
-            <a:off x="731520" y="4041648"/>
-            <a:ext cx="7680960" cy="566928"/>
-          </a:xfrm>
-          <a:prstGeom prst="roundRect">
-            <a:avLst>
-              <a:gd name="adj" fmla="val 12903"/>
-            </a:avLst>
-          </a:prstGeom>
-          <a:solidFill>
-            <a:srgbClr val="B45309">
-              <a:alpha val="12000"/>
-            </a:srgbClr>
-          </a:solidFill>
-          <a:ln w="12700">
-            <a:solidFill>
-              <a:srgbClr val="B45309"/>
-            </a:solidFill>
-            <a:prstDash val="solid"/>
-          </a:ln>
-        </p:spPr>
-      </p:sp>
-      <p:sp>
-        <p:nvSpPr>
-          <p:cNvPr id="8" name="Text 6"/>
-          <p:cNvSpPr/>
-          <p:nvPr/>
-        </p:nvSpPr>
-        <p:spPr>
-          <a:xfrm>
-            <a:off x="868680" y="4087368"/>
-            <a:ext cx="7406640" cy="475488"/>
+              <a:t>461.25</a:t>
+            </a:r>
+            <a:endParaRPr lang="en-US" sz="950" dirty="0"/>
+          </a:p>
+        </p:txBody>
+      </p:sp>
+      <p:sp>
+        <p:nvSpPr>
+          <p:cNvPr id="18" name="Text 16"/>
+          <p:cNvSpPr/>
+          <p:nvPr/>
+        </p:nvSpPr>
+        <p:spPr>
+          <a:xfrm>
+            <a:off x="6766560" y="4315968"/>
+            <a:ext cx="1234440" cy="502920"/>
           </a:xfrm>
           <a:prstGeom prst="rect">
             <a:avLst/>
@@ -7629,35 +4743,21 @@
           <a:bodyPr wrap="square" rtlCol="0" anchor="ctr"/>
           <a:lstStyle/>
           <a:p>
-            <a:pPr indent="0" marL="0">
-              <a:buNone/>
-            </a:pPr>
-            <a:r>
-              <a:rPr lang="en-US" sz="1100" b="1" dirty="0">
-                <a:solidFill>
-                  <a:srgbClr val="B45309"/>
-                </a:solidFill>
-                <a:latin typeface="Arial" pitchFamily="34" charset="0"/>
-                <a:ea typeface="Arial" pitchFamily="34" charset="-122"/>
-                <a:cs typeface="Arial" pitchFamily="34" charset="-120"/>
-              </a:rPr>
-              <a:t>Takeaway  </a:t>
-            </a:r>
-            <a:pPr indent="0" marL="0">
-              <a:buNone/>
-            </a:pPr>
-            <a:r>
-              <a:rPr lang="en-US" sz="1150" dirty="0">
-                <a:solidFill>
-                  <a:srgbClr val="1C1917"/>
-                </a:solidFill>
-                <a:latin typeface="Arial" pitchFamily="34" charset="0"/>
-                <a:ea typeface="Arial" pitchFamily="34" charset="-122"/>
-                <a:cs typeface="Arial" pitchFamily="34" charset="-120"/>
-              </a:rPr>
-              <a:t>Financial modeling is the analytical backbone connecting valuation, decision-making, and stakeholder communication.</a:t>
-            </a:r>
-            <a:endParaRPr lang="en-US" sz="1100" dirty="0"/>
+            <a:pPr algn="ctr" indent="0" marL="0">
+              <a:buNone/>
+            </a:pPr>
+            <a:r>
+              <a:rPr lang="en-US" sz="850" dirty="0">
+                <a:solidFill>
+                  <a:srgbClr val="78716C"/>
+                </a:solidFill>
+                <a:latin typeface="Arial" pitchFamily="34" charset="0"/>
+                <a:ea typeface="Arial" pitchFamily="34" charset="-122"/>
+                <a:cs typeface="Arial" pitchFamily="34" charset="-120"/>
+              </a:rPr>
+              <a:t>Pro-Forma Net Income</a:t>
+            </a:r>
+            <a:endParaRPr lang="en-US" sz="850" dirty="0"/>
           </a:p>
         </p:txBody>
       </p:sp>
@@ -7701,8 +4801,8 @@
         </p:nvSpPr>
         <p:spPr>
           <a:xfrm>
-            <a:off x="411480" y="384048"/>
-            <a:ext cx="82296" cy="310896"/>
+            <a:off x="411480" y="402336"/>
+            <a:ext cx="82296" cy="329184"/>
           </a:xfrm>
           <a:prstGeom prst="rect">
             <a:avLst/>
@@ -7722,7 +4822,7 @@
         <p:spPr>
           <a:xfrm>
             <a:off x="566928" y="292608"/>
-            <a:ext cx="8138160" cy="502920"/>
+            <a:ext cx="8138160" cy="548640"/>
           </a:xfrm>
           <a:prstGeom prst="rect">
             <a:avLst/>
@@ -7738,7 +4838,7 @@
               <a:buNone/>
             </a:pPr>
             <a:r>
-              <a:rPr lang="en-US" sz="2000" b="1" dirty="0">
+              <a:rPr lang="en-US" sz="2100" b="1" dirty="0">
                 <a:solidFill>
                   <a:srgbClr val="1C1917"/>
                 </a:solidFill>
@@ -7746,100 +4846,22 @@
                 <a:ea typeface="Arial" pitchFamily="34" charset="-122"/>
                 <a:cs typeface="Arial" pitchFamily="34" charset="-120"/>
               </a:rPr>
-              <a:t>Enterprise Value Build-Up</a:t>
-            </a:r>
-            <a:endParaRPr lang="en-US" sz="2000" dirty="0"/>
-          </a:p>
-        </p:txBody>
-      </p:sp>
-      <p:sp>
-        <p:nvSpPr>
-          <p:cNvPr id="4" name="Text 2"/>
-          <p:cNvSpPr/>
-          <p:nvPr/>
-        </p:nvSpPr>
-        <p:spPr>
-          <a:xfrm>
-            <a:off x="566928" y="4681728"/>
-            <a:ext cx="8138160" cy="320040"/>
-          </a:xfrm>
-          <a:prstGeom prst="rect">
-            <a:avLst/>
-          </a:prstGeom>
-          <a:noFill/>
-          <a:ln/>
-        </p:spPr>
-        <p:txBody>
-          <a:bodyPr wrap="square" rtlCol="0" anchor="ctr"/>
-          <a:lstStyle/>
-          <a:p>
-            <a:pPr indent="0" marL="0">
-              <a:buNone/>
-            </a:pPr>
-            <a:r>
-              <a:rPr lang="en-US" sz="1000" i="1" dirty="0">
-                <a:solidFill>
-                  <a:srgbClr val="78716C"/>
-                </a:solidFill>
-                <a:latin typeface="Arial" pitchFamily="34" charset="0"/>
-                <a:ea typeface="Arial" pitchFamily="34" charset="-122"/>
-                <a:cs typeface="Arial" pitchFamily="34" charset="-120"/>
-              </a:rPr>
-              <a:t>Target Inc. mini-scenario: $18 share price, $120M debt, $20M cash, $40M EBITDA</a:t>
-            </a:r>
-            <a:endParaRPr lang="en-US" sz="1000" dirty="0"/>
-          </a:p>
-        </p:txBody>
-      </p:sp>
-      <p:sp>
-        <p:nvSpPr>
-          <p:cNvPr id="5" name="Text 3"/>
-          <p:cNvSpPr/>
-          <p:nvPr/>
-        </p:nvSpPr>
-        <p:spPr>
-          <a:xfrm>
-            <a:off x="411480" y="4919472"/>
-            <a:ext cx="8321040" cy="219456"/>
-          </a:xfrm>
-          <a:prstGeom prst="rect">
-            <a:avLst/>
-          </a:prstGeom>
-          <a:noFill/>
-          <a:ln/>
-        </p:spPr>
-        <p:txBody>
-          <a:bodyPr wrap="square" rtlCol="0" anchor="ctr"/>
-          <a:lstStyle/>
-          <a:p>
-            <a:pPr indent="0" marL="0">
-              <a:buNone/>
-            </a:pPr>
-            <a:r>
-              <a:rPr lang="en-US" sz="750" dirty="0">
-                <a:solidFill>
-                  <a:srgbClr val="AAAAAA"/>
-                </a:solidFill>
-                <a:latin typeface="Arial" pitchFamily="34" charset="0"/>
-                <a:ea typeface="Arial" pitchFamily="34" charset="-122"/>
-                <a:cs typeface="Arial" pitchFamily="34" charset="-120"/>
-              </a:rPr>
-              <a:t>Lesson Forge Pro (owner) — This content is educational material only and does not constitute financial, investment, or trading advice.</a:t>
-            </a:r>
-            <a:endParaRPr lang="en-US" sz="750" dirty="0"/>
-          </a:p>
-        </p:txBody>
-      </p:sp>
-      <p:sp>
-        <p:nvSpPr>
-          <p:cNvPr id="6" name="Shape 4"/>
-          <p:cNvSpPr/>
-          <p:nvPr/>
-        </p:nvSpPr>
-        <p:spPr>
-          <a:xfrm>
-            <a:off x="685800" y="4206240"/>
-            <a:ext cx="7772400" cy="0"/>
+              <a:t>Leveraged Buyout (LBO) Modeling and Return Analysis</a:t>
+            </a:r>
+            <a:endParaRPr lang="en-US" sz="2100" dirty="0"/>
+          </a:p>
+        </p:txBody>
+      </p:sp>
+      <p:sp>
+        <p:nvSpPr>
+          <p:cNvPr id="4" name="Shape 2"/>
+          <p:cNvSpPr/>
+          <p:nvPr/>
+        </p:nvSpPr>
+        <p:spPr>
+          <a:xfrm>
+            <a:off x="411480" y="960120"/>
+            <a:ext cx="8321040" cy="0"/>
           </a:xfrm>
           <a:prstGeom prst="line">
             <a:avLst/>
@@ -7847,7 +4869,7 @@
           <a:noFill/>
           <a:ln w="12700">
             <a:solidFill>
-              <a:srgbClr val="1C1917"/>
+              <a:srgbClr val="E7E5E4"/>
             </a:solidFill>
             <a:prstDash val="solid"/>
           </a:ln>
@@ -7855,22 +4877,197 @@
       </p:sp>
       <p:sp>
         <p:nvSpPr>
+          <p:cNvPr id="5" name="Text 3"/>
+          <p:cNvSpPr/>
+          <p:nvPr/>
+        </p:nvSpPr>
+        <p:spPr>
+          <a:xfrm>
+            <a:off x="411480" y="4864608"/>
+            <a:ext cx="8321040" cy="237744"/>
+          </a:xfrm>
+          <a:prstGeom prst="rect">
+            <a:avLst/>
+          </a:prstGeom>
+          <a:noFill/>
+          <a:ln/>
+        </p:spPr>
+        <p:txBody>
+          <a:bodyPr wrap="square" rtlCol="0" anchor="ctr"/>
+          <a:lstStyle/>
+          <a:p>
+            <a:pPr indent="0" marL="0">
+              <a:buNone/>
+            </a:pPr>
+            <a:r>
+              <a:rPr lang="en-US" sz="750" dirty="0">
+                <a:solidFill>
+                  <a:srgbClr val="AAAAAA"/>
+                </a:solidFill>
+                <a:latin typeface="Arial" pitchFamily="34" charset="0"/>
+                <a:ea typeface="Arial" pitchFamily="34" charset="-122"/>
+                <a:cs typeface="Arial" pitchFamily="34" charset="-120"/>
+              </a:rPr>
+              <a:t>Lesson Forge Pro (owner) — This content is educational material only and does not constitute financial, investment, or trading advice.</a:t>
+            </a:r>
+            <a:endParaRPr lang="en-US" sz="750" dirty="0"/>
+          </a:p>
+        </p:txBody>
+      </p:sp>
+      <p:sp>
+        <p:nvSpPr>
+          <p:cNvPr id="6" name="Text 4"/>
+          <p:cNvSpPr/>
+          <p:nvPr/>
+        </p:nvSpPr>
+        <p:spPr>
+          <a:xfrm>
+            <a:off x="731520" y="1188720"/>
+            <a:ext cx="7680960" cy="2743200"/>
+          </a:xfrm>
+          <a:prstGeom prst="rect">
+            <a:avLst/>
+          </a:prstGeom>
+          <a:noFill/>
+          <a:ln/>
+        </p:spPr>
+        <p:txBody>
+          <a:bodyPr wrap="square" rtlCol="0" anchor="t"/>
+          <a:lstStyle/>
+          <a:p>
+            <a:pPr marL="152400" indent="-152400">
+              <a:spcAft>
+                <a:spcPts val="800"/>
+              </a:spcAft>
+              <a:buSzPct val="100000"/>
+              <a:buChar char="•"/>
+            </a:pPr>
+            <a:r>
+              <a:rPr lang="en-US" sz="1500" dirty="0">
+                <a:solidFill>
+                  <a:srgbClr val="1C1917"/>
+                </a:solidFill>
+                <a:latin typeface="Arial" pitchFamily="34" charset="0"/>
+                <a:ea typeface="Arial" pitchFamily="34" charset="-122"/>
+                <a:cs typeface="Arial" pitchFamily="34" charset="-120"/>
+              </a:rPr>
+              <a:t>Sponsors use heavy debt to amplify equity returns on a smaller cash outlay.</a:t>
+            </a:r>
+            <a:endParaRPr lang="en-US" sz="1500" dirty="0"/>
+          </a:p>
+          <a:p>
+            <a:pPr marL="152400" indent="-152400">
+              <a:spcAft>
+                <a:spcPts val="800"/>
+              </a:spcAft>
+              <a:buSzPct val="100000"/>
+              <a:buChar char="•"/>
+            </a:pPr>
+            <a:r>
+              <a:rPr lang="en-US" sz="1500" dirty="0">
+                <a:solidFill>
+                  <a:srgbClr val="1C1917"/>
+                </a:solidFill>
+                <a:latin typeface="Arial" pitchFamily="34" charset="0"/>
+                <a:ea typeface="Arial" pitchFamily="34" charset="-122"/>
+                <a:cs typeface="Arial" pitchFamily="34" charset="-120"/>
+              </a:rPr>
+              <a:t>Senior secured debt: lowest rate, amortizes first, highest repayment priority.</a:t>
+            </a:r>
+            <a:endParaRPr lang="en-US" sz="1500" dirty="0"/>
+          </a:p>
+          <a:p>
+            <a:pPr marL="152400" indent="-152400">
+              <a:spcAft>
+                <a:spcPts val="800"/>
+              </a:spcAft>
+              <a:buSzPct val="100000"/>
+              <a:buChar char="•"/>
+            </a:pPr>
+            <a:r>
+              <a:rPr lang="en-US" sz="1500" dirty="0">
+                <a:solidFill>
+                  <a:srgbClr val="1C1917"/>
+                </a:solidFill>
+                <a:latin typeface="Arial" pitchFamily="34" charset="0"/>
+                <a:ea typeface="Arial" pitchFamily="34" charset="-122"/>
+                <a:cs typeface="Arial" pitchFamily="34" charset="-120"/>
+              </a:rPr>
+              <a:t>Mezzanine/high-yield debt fills the gap between senior loans and equity.</a:t>
+            </a:r>
+            <a:endParaRPr lang="en-US" sz="1500" dirty="0"/>
+          </a:p>
+          <a:p>
+            <a:pPr marL="152400" indent="-152400">
+              <a:spcAft>
+                <a:spcPts val="800"/>
+              </a:spcAft>
+              <a:buSzPct val="100000"/>
+              <a:buChar char="•"/>
+            </a:pPr>
+            <a:r>
+              <a:rPr lang="en-US" sz="1500" dirty="0">
+                <a:solidFill>
+                  <a:srgbClr val="1C1917"/>
+                </a:solidFill>
+                <a:latin typeface="Arial" pitchFamily="34" charset="0"/>
+                <a:ea typeface="Arial" pitchFamily="34" charset="-122"/>
+                <a:cs typeface="Arial" pitchFamily="34" charset="-120"/>
+              </a:rPr>
+              <a:t>Target's own free cash flow services and repays acquisition debt over time.</a:t>
+            </a:r>
+            <a:endParaRPr lang="en-US" sz="1500" dirty="0"/>
+          </a:p>
+          <a:p>
+            <a:pPr marL="152400" indent="-152400">
+              <a:spcAft>
+                <a:spcPts val="800"/>
+              </a:spcAft>
+              <a:buSzPct val="100000"/>
+              <a:buChar char="•"/>
+            </a:pPr>
+            <a:r>
+              <a:rPr lang="en-US" sz="1500" dirty="0">
+                <a:solidFill>
+                  <a:srgbClr val="1C1917"/>
+                </a:solidFill>
+                <a:latin typeface="Arial" pitchFamily="34" charset="0"/>
+                <a:ea typeface="Arial" pitchFamily="34" charset="-122"/>
+                <a:cs typeface="Arial" pitchFamily="34" charset="-120"/>
+              </a:rPr>
+              <a:t>Equity IRR and MOIC measure sponsor returns at exit.</a:t>
+            </a:r>
+            <a:endParaRPr lang="en-US" sz="1500" dirty="0"/>
+          </a:p>
+        </p:txBody>
+      </p:sp>
+      <p:sp>
+        <p:nvSpPr>
           <p:cNvPr id="7" name="Shape 5"/>
           <p:cNvSpPr/>
           <p:nvPr/>
         </p:nvSpPr>
         <p:spPr>
           <a:xfrm>
-            <a:off x="1184148" y="2915322"/>
-            <a:ext cx="777240" cy="1290918"/>
-          </a:xfrm>
-          <a:prstGeom prst="rect">
-            <a:avLst/>
+            <a:off x="731520" y="4041648"/>
+            <a:ext cx="7680960" cy="566928"/>
+          </a:xfrm>
+          <a:prstGeom prst="roundRect">
+            <a:avLst>
+              <a:gd name="adj" fmla="val 12903"/>
+            </a:avLst>
           </a:prstGeom>
           <a:solidFill>
-            <a:srgbClr val="15803D"/>
+            <a:srgbClr val="B45309">
+              <a:alpha val="12000"/>
+            </a:srgbClr>
           </a:solidFill>
-          <a:ln/>
+          <a:ln w="12700">
+            <a:solidFill>
+              <a:srgbClr val="B45309"/>
+            </a:solidFill>
+            <a:prstDash val="solid"/>
+          </a:ln>
         </p:spPr>
       </p:sp>
       <p:sp>
@@ -7881,8 +5078,8 @@
         </p:nvSpPr>
         <p:spPr>
           <a:xfrm>
-            <a:off x="1001268" y="2641002"/>
-            <a:ext cx="1143000" cy="237744"/>
+            <a:off x="868680" y="4087368"/>
+            <a:ext cx="7406640" cy="475488"/>
           </a:xfrm>
           <a:prstGeom prst="rect">
             <a:avLst/>
@@ -7894,11 +5091,25 @@
           <a:bodyPr wrap="square" rtlCol="0" anchor="ctr"/>
           <a:lstStyle/>
           <a:p>
-            <a:pPr algn="ctr" indent="0" marL="0">
-              <a:buNone/>
-            </a:pPr>
-            <a:r>
-              <a:rPr lang="en-US" sz="950" b="1" dirty="0">
+            <a:pPr indent="0" marL="0">
+              <a:buNone/>
+            </a:pPr>
+            <a:r>
+              <a:rPr lang="en-US" sz="1100" b="1" dirty="0">
+                <a:solidFill>
+                  <a:srgbClr val="B45309"/>
+                </a:solidFill>
+                <a:latin typeface="Arial" pitchFamily="34" charset="0"/>
+                <a:ea typeface="Arial" pitchFamily="34" charset="-122"/>
+                <a:cs typeface="Arial" pitchFamily="34" charset="-120"/>
+              </a:rPr>
+              <a:t>Takeaway  </a:t>
+            </a:r>
+            <a:pPr indent="0" marL="0">
+              <a:buNone/>
+            </a:pPr>
+            <a:r>
+              <a:rPr lang="en-US" sz="1150" dirty="0">
                 <a:solidFill>
                   <a:srgbClr val="1C1917"/>
                 </a:solidFill>
@@ -7906,440 +5117,9 @@
                 <a:ea typeface="Arial" pitchFamily="34" charset="-122"/>
                 <a:cs typeface="Arial" pitchFamily="34" charset="-120"/>
               </a:rPr>
-              <a:t>900</a:t>
-            </a:r>
-            <a:endParaRPr lang="en-US" sz="950" dirty="0"/>
-          </a:p>
-        </p:txBody>
-      </p:sp>
-      <p:sp>
-        <p:nvSpPr>
-          <p:cNvPr id="9" name="Text 7"/>
-          <p:cNvSpPr/>
-          <p:nvPr/>
-        </p:nvSpPr>
-        <p:spPr>
-          <a:xfrm>
-            <a:off x="955548" y="4315968"/>
-            <a:ext cx="1234440" cy="502920"/>
-          </a:xfrm>
-          <a:prstGeom prst="rect">
-            <a:avLst/>
-          </a:prstGeom>
-          <a:noFill/>
-          <a:ln/>
-        </p:spPr>
-        <p:txBody>
-          <a:bodyPr wrap="square" rtlCol="0" anchor="ctr"/>
-          <a:lstStyle/>
-          <a:p>
-            <a:pPr algn="ctr" indent="0" marL="0">
-              <a:buNone/>
-            </a:pPr>
-            <a:r>
-              <a:rPr lang="en-US" sz="850" dirty="0">
-                <a:solidFill>
-                  <a:srgbClr val="78716C"/>
-                </a:solidFill>
-                <a:latin typeface="Arial" pitchFamily="34" charset="0"/>
-                <a:ea typeface="Arial" pitchFamily="34" charset="-122"/>
-                <a:cs typeface="Arial" pitchFamily="34" charset="-120"/>
-              </a:rPr>
-              <a:t>Equity Value</a:t>
-            </a:r>
-            <a:endParaRPr lang="en-US" sz="850" dirty="0"/>
-          </a:p>
-        </p:txBody>
-      </p:sp>
-      <p:sp>
-        <p:nvSpPr>
-          <p:cNvPr id="10" name="Shape 8"/>
-          <p:cNvSpPr/>
-          <p:nvPr/>
-        </p:nvSpPr>
-        <p:spPr>
-          <a:xfrm>
-            <a:off x="2683764" y="2771887"/>
-            <a:ext cx="777240" cy="143435"/>
-          </a:xfrm>
-          <a:prstGeom prst="rect">
-            <a:avLst/>
-          </a:prstGeom>
-          <a:solidFill>
-            <a:srgbClr val="15803D"/>
-          </a:solidFill>
-          <a:ln/>
-        </p:spPr>
-      </p:sp>
-      <p:sp>
-        <p:nvSpPr>
-          <p:cNvPr id="11" name="Text 9"/>
-          <p:cNvSpPr/>
-          <p:nvPr/>
-        </p:nvSpPr>
-        <p:spPr>
-          <a:xfrm>
-            <a:off x="2500884" y="2497567"/>
-            <a:ext cx="1143000" cy="237744"/>
-          </a:xfrm>
-          <a:prstGeom prst="rect">
-            <a:avLst/>
-          </a:prstGeom>
-          <a:noFill/>
-          <a:ln/>
-        </p:spPr>
-        <p:txBody>
-          <a:bodyPr wrap="square" rtlCol="0" anchor="ctr"/>
-          <a:lstStyle/>
-          <a:p>
-            <a:pPr algn="ctr" indent="0" marL="0">
-              <a:buNone/>
-            </a:pPr>
-            <a:r>
-              <a:rPr lang="en-US" sz="950" b="1" dirty="0">
-                <a:solidFill>
-                  <a:srgbClr val="1C1917"/>
-                </a:solidFill>
-                <a:latin typeface="Arial" pitchFamily="34" charset="0"/>
-                <a:ea typeface="Arial" pitchFamily="34" charset="-122"/>
-                <a:cs typeface="Arial" pitchFamily="34" charset="-120"/>
-              </a:rPr>
-              <a:t>100</a:t>
-            </a:r>
-            <a:endParaRPr lang="en-US" sz="950" dirty="0"/>
-          </a:p>
-        </p:txBody>
-      </p:sp>
-      <p:sp>
-        <p:nvSpPr>
-          <p:cNvPr id="12" name="Text 10"/>
-          <p:cNvSpPr/>
-          <p:nvPr/>
-        </p:nvSpPr>
-        <p:spPr>
-          <a:xfrm>
-            <a:off x="2455164" y="4315968"/>
-            <a:ext cx="1234440" cy="502920"/>
-          </a:xfrm>
-          <a:prstGeom prst="rect">
-            <a:avLst/>
-          </a:prstGeom>
-          <a:noFill/>
-          <a:ln/>
-        </p:spPr>
-        <p:txBody>
-          <a:bodyPr wrap="square" rtlCol="0" anchor="ctr"/>
-          <a:lstStyle/>
-          <a:p>
-            <a:pPr algn="ctr" indent="0" marL="0">
-              <a:buNone/>
-            </a:pPr>
-            <a:r>
-              <a:rPr lang="en-US" sz="850" dirty="0">
-                <a:solidFill>
-                  <a:srgbClr val="78716C"/>
-                </a:solidFill>
-                <a:latin typeface="Arial" pitchFamily="34" charset="0"/>
-                <a:ea typeface="Arial" pitchFamily="34" charset="-122"/>
-                <a:cs typeface="Arial" pitchFamily="34" charset="-120"/>
-              </a:rPr>
-              <a:t>Add: Net Debt</a:t>
-            </a:r>
-            <a:endParaRPr lang="en-US" sz="850" dirty="0"/>
-          </a:p>
-        </p:txBody>
-      </p:sp>
-      <p:sp>
-        <p:nvSpPr>
-          <p:cNvPr id="13" name="Shape 11"/>
-          <p:cNvSpPr/>
-          <p:nvPr/>
-        </p:nvSpPr>
-        <p:spPr>
-          <a:xfrm>
-            <a:off x="4183380" y="1337534"/>
-            <a:ext cx="777240" cy="1434353"/>
-          </a:xfrm>
-          <a:prstGeom prst="rect">
-            <a:avLst/>
-          </a:prstGeom>
-          <a:solidFill>
-            <a:srgbClr val="15803D"/>
-          </a:solidFill>
-          <a:ln/>
-        </p:spPr>
-      </p:sp>
-      <p:sp>
-        <p:nvSpPr>
-          <p:cNvPr id="14" name="Text 12"/>
-          <p:cNvSpPr/>
-          <p:nvPr/>
-        </p:nvSpPr>
-        <p:spPr>
-          <a:xfrm>
-            <a:off x="4000500" y="1063214"/>
-            <a:ext cx="1143000" cy="237744"/>
-          </a:xfrm>
-          <a:prstGeom prst="rect">
-            <a:avLst/>
-          </a:prstGeom>
-          <a:noFill/>
-          <a:ln/>
-        </p:spPr>
-        <p:txBody>
-          <a:bodyPr wrap="square" rtlCol="0" anchor="ctr"/>
-          <a:lstStyle/>
-          <a:p>
-            <a:pPr algn="ctr" indent="0" marL="0">
-              <a:buNone/>
-            </a:pPr>
-            <a:r>
-              <a:rPr lang="en-US" sz="950" b="1" dirty="0">
-                <a:solidFill>
-                  <a:srgbClr val="1C1917"/>
-                </a:solidFill>
-                <a:latin typeface="Arial" pitchFamily="34" charset="0"/>
-                <a:ea typeface="Arial" pitchFamily="34" charset="-122"/>
-                <a:cs typeface="Arial" pitchFamily="34" charset="-120"/>
-              </a:rPr>
-              <a:t>1000</a:t>
-            </a:r>
-            <a:endParaRPr lang="en-US" sz="950" dirty="0"/>
-          </a:p>
-        </p:txBody>
-      </p:sp>
-      <p:sp>
-        <p:nvSpPr>
-          <p:cNvPr id="15" name="Text 13"/>
-          <p:cNvSpPr/>
-          <p:nvPr/>
-        </p:nvSpPr>
-        <p:spPr>
-          <a:xfrm>
-            <a:off x="3954780" y="4315968"/>
-            <a:ext cx="1234440" cy="502920"/>
-          </a:xfrm>
-          <a:prstGeom prst="rect">
-            <a:avLst/>
-          </a:prstGeom>
-          <a:noFill/>
-          <a:ln/>
-        </p:spPr>
-        <p:txBody>
-          <a:bodyPr wrap="square" rtlCol="0" anchor="ctr"/>
-          <a:lstStyle/>
-          <a:p>
-            <a:pPr algn="ctr" indent="0" marL="0">
-              <a:buNone/>
-            </a:pPr>
-            <a:r>
-              <a:rPr lang="en-US" sz="850" dirty="0">
-                <a:solidFill>
-                  <a:srgbClr val="78716C"/>
-                </a:solidFill>
-                <a:latin typeface="Arial" pitchFamily="34" charset="0"/>
-                <a:ea typeface="Arial" pitchFamily="34" charset="-122"/>
-                <a:cs typeface="Arial" pitchFamily="34" charset="-120"/>
-              </a:rPr>
-              <a:t>Enterprise Value</a:t>
-            </a:r>
-            <a:endParaRPr lang="en-US" sz="850" dirty="0"/>
-          </a:p>
-        </p:txBody>
-      </p:sp>
-      <p:sp>
-        <p:nvSpPr>
-          <p:cNvPr id="16" name="Shape 14"/>
-          <p:cNvSpPr/>
-          <p:nvPr/>
-        </p:nvSpPr>
-        <p:spPr>
-          <a:xfrm>
-            <a:off x="5682996" y="1280160"/>
-            <a:ext cx="777240" cy="57374"/>
-          </a:xfrm>
-          <a:prstGeom prst="rect">
-            <a:avLst/>
-          </a:prstGeom>
-          <a:solidFill>
-            <a:srgbClr val="15803D"/>
-          </a:solidFill>
-          <a:ln/>
-        </p:spPr>
-      </p:sp>
-      <p:sp>
-        <p:nvSpPr>
-          <p:cNvPr id="17" name="Text 15"/>
-          <p:cNvSpPr/>
-          <p:nvPr/>
-        </p:nvSpPr>
-        <p:spPr>
-          <a:xfrm>
-            <a:off x="5500116" y="1005840"/>
-            <a:ext cx="1143000" cy="237744"/>
-          </a:xfrm>
-          <a:prstGeom prst="rect">
-            <a:avLst/>
-          </a:prstGeom>
-          <a:noFill/>
-          <a:ln/>
-        </p:spPr>
-        <p:txBody>
-          <a:bodyPr wrap="square" rtlCol="0" anchor="ctr"/>
-          <a:lstStyle/>
-          <a:p>
-            <a:pPr algn="ctr" indent="0" marL="0">
-              <a:buNone/>
-            </a:pPr>
-            <a:r>
-              <a:rPr lang="en-US" sz="950" b="1" dirty="0">
-                <a:solidFill>
-                  <a:srgbClr val="1C1917"/>
-                </a:solidFill>
-                <a:latin typeface="Arial" pitchFamily="34" charset="0"/>
-                <a:ea typeface="Arial" pitchFamily="34" charset="-122"/>
-                <a:cs typeface="Arial" pitchFamily="34" charset="-120"/>
-              </a:rPr>
-              <a:t>40</a:t>
-            </a:r>
-            <a:endParaRPr lang="en-US" sz="950" dirty="0"/>
-          </a:p>
-        </p:txBody>
-      </p:sp>
-      <p:sp>
-        <p:nvSpPr>
-          <p:cNvPr id="18" name="Text 16"/>
-          <p:cNvSpPr/>
-          <p:nvPr/>
-        </p:nvSpPr>
-        <p:spPr>
-          <a:xfrm>
-            <a:off x="5454396" y="4315968"/>
-            <a:ext cx="1234440" cy="502920"/>
-          </a:xfrm>
-          <a:prstGeom prst="rect">
-            <a:avLst/>
-          </a:prstGeom>
-          <a:noFill/>
-          <a:ln/>
-        </p:spPr>
-        <p:txBody>
-          <a:bodyPr wrap="square" rtlCol="0" anchor="ctr"/>
-          <a:lstStyle/>
-          <a:p>
-            <a:pPr algn="ctr" indent="0" marL="0">
-              <a:buNone/>
-            </a:pPr>
-            <a:r>
-              <a:rPr lang="en-US" sz="850" dirty="0">
-                <a:solidFill>
-                  <a:srgbClr val="78716C"/>
-                </a:solidFill>
-                <a:latin typeface="Arial" pitchFamily="34" charset="0"/>
-                <a:ea typeface="Arial" pitchFamily="34" charset="-122"/>
-                <a:cs typeface="Arial" pitchFamily="34" charset="-120"/>
-              </a:rPr>
-              <a:t>EBITDA</a:t>
-            </a:r>
-            <a:endParaRPr lang="en-US" sz="850" dirty="0"/>
-          </a:p>
-        </p:txBody>
-      </p:sp>
-      <p:sp>
-        <p:nvSpPr>
-          <p:cNvPr id="19" name="Shape 17"/>
-          <p:cNvSpPr/>
-          <p:nvPr/>
-        </p:nvSpPr>
-        <p:spPr>
-          <a:xfrm>
-            <a:off x="7182612" y="4170381"/>
-            <a:ext cx="777240" cy="35859"/>
-          </a:xfrm>
-          <a:prstGeom prst="rect">
-            <a:avLst/>
-          </a:prstGeom>
-          <a:solidFill>
-            <a:srgbClr val="B45309"/>
-          </a:solidFill>
-          <a:ln/>
-        </p:spPr>
-      </p:sp>
-      <p:sp>
-        <p:nvSpPr>
-          <p:cNvPr id="20" name="Text 18"/>
-          <p:cNvSpPr/>
-          <p:nvPr/>
-        </p:nvSpPr>
-        <p:spPr>
-          <a:xfrm>
-            <a:off x="6999732" y="3896061"/>
-            <a:ext cx="1143000" cy="237744"/>
-          </a:xfrm>
-          <a:prstGeom prst="rect">
-            <a:avLst/>
-          </a:prstGeom>
-          <a:noFill/>
-          <a:ln/>
-        </p:spPr>
-        <p:txBody>
-          <a:bodyPr wrap="square" rtlCol="0" anchor="ctr"/>
-          <a:lstStyle/>
-          <a:p>
-            <a:pPr algn="ctr" indent="0" marL="0">
-              <a:buNone/>
-            </a:pPr>
-            <a:r>
-              <a:rPr lang="en-US" sz="950" b="1" dirty="0">
-                <a:solidFill>
-                  <a:srgbClr val="1C1917"/>
-                </a:solidFill>
-                <a:latin typeface="Arial" pitchFamily="34" charset="0"/>
-                <a:ea typeface="Arial" pitchFamily="34" charset="-122"/>
-                <a:cs typeface="Arial" pitchFamily="34" charset="-120"/>
-              </a:rPr>
-              <a:t>25</a:t>
-            </a:r>
-            <a:endParaRPr lang="en-US" sz="950" dirty="0"/>
-          </a:p>
-        </p:txBody>
-      </p:sp>
-      <p:sp>
-        <p:nvSpPr>
-          <p:cNvPr id="21" name="Text 19"/>
-          <p:cNvSpPr/>
-          <p:nvPr/>
-        </p:nvSpPr>
-        <p:spPr>
-          <a:xfrm>
-            <a:off x="6954012" y="4315968"/>
-            <a:ext cx="1234440" cy="502920"/>
-          </a:xfrm>
-          <a:prstGeom prst="rect">
-            <a:avLst/>
-          </a:prstGeom>
-          <a:noFill/>
-          <a:ln/>
-        </p:spPr>
-        <p:txBody>
-          <a:bodyPr wrap="square" rtlCol="0" anchor="ctr"/>
-          <a:lstStyle/>
-          <a:p>
-            <a:pPr algn="ctr" indent="0" marL="0">
-              <a:buNone/>
-            </a:pPr>
-            <a:r>
-              <a:rPr lang="en-US" sz="850" dirty="0">
-                <a:solidFill>
-                  <a:srgbClr val="78716C"/>
-                </a:solidFill>
-                <a:latin typeface="Arial" pitchFamily="34" charset="0"/>
-                <a:ea typeface="Arial" pitchFamily="34" charset="-122"/>
-                <a:cs typeface="Arial" pitchFamily="34" charset="-120"/>
-              </a:rPr>
-              <a:t>EV/EBITDA Multiple</a:t>
-            </a:r>
-            <a:endParaRPr lang="en-US" sz="850" dirty="0"/>
+              <a:t>LBO returns hinge on leverage, cash flow quality, and the exit multiple achieved.</a:t>
+            </a:r>
+            <a:endParaRPr lang="en-US" sz="1100" dirty="0"/>
           </a:p>
         </p:txBody>
       </p:sp>
@@ -8428,7 +5208,7 @@
                 <a:ea typeface="Arial" pitchFamily="34" charset="-122"/>
                 <a:cs typeface="Arial" pitchFamily="34" charset="-120"/>
               </a:rPr>
-              <a:t>Standard Notation</a:t>
+              <a:t>Capital Budgeting: NPV, IRR, and Payback</a:t>
             </a:r>
             <a:endParaRPr lang="en-US" sz="2100" dirty="0"/>
           </a:p>
@@ -8533,7 +5313,7 @@
                 <a:ea typeface="Arial" pitchFamily="34" charset="-122"/>
                 <a:cs typeface="Arial" pitchFamily="34" charset="-120"/>
               </a:rPr>
-              <a:t>EV = Enterprise Value; Mkt Cap = Equity Value (Market Capitalization).</a:t>
+              <a:t>NPV discounts after-tax free cash flows at WACC; positive NPV creates value.</a:t>
             </a:r>
             <a:endParaRPr lang="en-US" sz="1500" dirty="0"/>
           </a:p>
@@ -8554,7 +5334,7 @@
                 <a:ea typeface="Arial" pitchFamily="34" charset="-122"/>
                 <a:cs typeface="Arial" pitchFamily="34" charset="-120"/>
               </a:rPr>
-              <a:t>EBITDA measures operating earnings before non-cash and financing charges.</a:t>
+              <a:t>IRR is the discount rate that sets NPV to zero; accept if IRR exceeds WACC.</a:t>
             </a:r>
             <a:endParaRPr lang="en-US" sz="1500" dirty="0"/>
           </a:p>
@@ -8575,7 +5355,7 @@
                 <a:ea typeface="Arial" pitchFamily="34" charset="-122"/>
                 <a:cs typeface="Arial" pitchFamily="34" charset="-120"/>
               </a:rPr>
-              <a:t>WACC is the blended required return across debt and equity capital.</a:t>
+              <a:t>Payback measures years to recover initial outlay, ignoring time value of money.</a:t>
             </a:r>
             <a:endParaRPr lang="en-US" sz="1500" dirty="0"/>
           </a:p>
@@ -8596,7 +5376,7 @@
                 <a:ea typeface="Arial" pitchFamily="34" charset="-122"/>
                 <a:cs typeface="Arial" pitchFamily="34" charset="-120"/>
               </a:rPr>
-              <a:t>FCF is free cash flow; PV is present value; t is the corporate tax rate.</a:t>
+              <a:t>NPV is theoretically superior because it measures absolute dollar value added.</a:t>
             </a:r>
             <a:endParaRPr lang="en-US" sz="1500" dirty="0"/>
           </a:p>
@@ -8617,7 +5397,7 @@
                 <a:ea typeface="Arial" pitchFamily="34" charset="-122"/>
                 <a:cs typeface="Arial" pitchFamily="34" charset="-120"/>
               </a:rPr>
-              <a:t>ND (Net Debt) bridges enterprise value and equity value calculations.</a:t>
+              <a:t>IRR and NPV can conflict on mutually exclusive projects; NPV wins.</a:t>
             </a:r>
             <a:endParaRPr lang="en-US" sz="1500" dirty="0"/>
           </a:p>
@@ -8699,7 +5479,7 @@
                 <a:ea typeface="Arial" pitchFamily="34" charset="-122"/>
                 <a:cs typeface="Arial" pitchFamily="34" charset="-120"/>
               </a:rPr>
-              <a:t>Consistent notation across a model eliminates ambiguity and makes formulas instantly auditable.</a:t>
+              <a:t>NPV is the gold-standard capital budgeting metric, but IRR and payback add practical context.</a:t>
             </a:r>
             <a:endParaRPr lang="en-US" sz="1100" dirty="0"/>
           </a:p>
@@ -8745,8 +5525,8 @@
         </p:nvSpPr>
         <p:spPr>
           <a:xfrm>
-            <a:off x="411480" y="402336"/>
-            <a:ext cx="82296" cy="329184"/>
+            <a:off x="411480" y="384048"/>
+            <a:ext cx="82296" cy="310896"/>
           </a:xfrm>
           <a:prstGeom prst="rect">
             <a:avLst/>
@@ -8766,7 +5546,7 @@
         <p:spPr>
           <a:xfrm>
             <a:off x="566928" y="292608"/>
-            <a:ext cx="8138160" cy="548640"/>
+            <a:ext cx="8138160" cy="502920"/>
           </a:xfrm>
           <a:prstGeom prst="rect">
             <a:avLst/>
@@ -8782,7 +5562,7 @@
               <a:buNone/>
             </a:pPr>
             <a:r>
-              <a:rPr lang="en-US" sz="2100" b="1" dirty="0">
+              <a:rPr lang="en-US" sz="2000" b="1" dirty="0">
                 <a:solidFill>
                   <a:srgbClr val="1C1917"/>
                 </a:solidFill>
@@ -8790,30 +5570,110 @@
                 <a:ea typeface="Arial" pitchFamily="34" charset="-122"/>
                 <a:cs typeface="Arial" pitchFamily="34" charset="-120"/>
               </a:rPr>
-              <a:t>Worked Example: Terminology Applied</a:t>
-            </a:r>
-            <a:endParaRPr lang="en-US" sz="2100" dirty="0"/>
-          </a:p>
-        </p:txBody>
-      </p:sp>
-      <p:sp>
-        <p:nvSpPr>
-          <p:cNvPr id="4" name="Shape 2"/>
-          <p:cNvSpPr/>
-          <p:nvPr/>
-        </p:nvSpPr>
-        <p:spPr>
-          <a:xfrm>
-            <a:off x="411480" y="960120"/>
-            <a:ext cx="8321040" cy="0"/>
-          </a:xfrm>
-          <a:prstGeom prst="line">
-            <a:avLst/>
-          </a:prstGeom>
-          <a:noFill/>
-          <a:ln w="12700">
+              <a:t>Financing Mix Trade-Offs</a:t>
+            </a:r>
+            <a:endParaRPr lang="en-US" sz="2000" dirty="0"/>
+          </a:p>
+        </p:txBody>
+      </p:sp>
+      <p:sp>
+        <p:nvSpPr>
+          <p:cNvPr id="4" name="Text 2"/>
+          <p:cNvSpPr/>
+          <p:nvPr/>
+        </p:nvSpPr>
+        <p:spPr>
+          <a:xfrm>
+            <a:off x="566928" y="4681728"/>
+            <a:ext cx="8138160" cy="320040"/>
+          </a:xfrm>
+          <a:prstGeom prst="rect">
+            <a:avLst/>
+          </a:prstGeom>
+          <a:noFill/>
+          <a:ln/>
+        </p:spPr>
+        <p:txBody>
+          <a:bodyPr wrap="square" rtlCol="0" anchor="ctr"/>
+          <a:lstStyle/>
+          <a:p>
+            <a:pPr indent="0" marL="0">
+              <a:buNone/>
+            </a:pPr>
+            <a:r>
+              <a:rPr lang="en-US" sz="1000" i="1" dirty="0">
+                <a:solidFill>
+                  <a:srgbClr val="78716C"/>
+                </a:solidFill>
+                <a:latin typeface="Arial" pitchFamily="34" charset="0"/>
+                <a:ea typeface="Arial" pitchFamily="34" charset="-122"/>
+                <a:cs typeface="Arial" pitchFamily="34" charset="-120"/>
+              </a:rPr>
+              <a:t>Financing mix is the most controllable lever in accretion/dilution analysis</a:t>
+            </a:r>
+            <a:endParaRPr lang="en-US" sz="1000" dirty="0"/>
+          </a:p>
+        </p:txBody>
+      </p:sp>
+      <p:sp>
+        <p:nvSpPr>
+          <p:cNvPr id="5" name="Text 3"/>
+          <p:cNvSpPr/>
+          <p:nvPr/>
+        </p:nvSpPr>
+        <p:spPr>
+          <a:xfrm>
+            <a:off x="411480" y="4919472"/>
+            <a:ext cx="8321040" cy="219456"/>
+          </a:xfrm>
+          <a:prstGeom prst="rect">
+            <a:avLst/>
+          </a:prstGeom>
+          <a:noFill/>
+          <a:ln/>
+        </p:spPr>
+        <p:txBody>
+          <a:bodyPr wrap="square" rtlCol="0" anchor="ctr"/>
+          <a:lstStyle/>
+          <a:p>
+            <a:pPr indent="0" marL="0">
+              <a:buNone/>
+            </a:pPr>
+            <a:r>
+              <a:rPr lang="en-US" sz="750" dirty="0">
+                <a:solidFill>
+                  <a:srgbClr val="AAAAAA"/>
+                </a:solidFill>
+                <a:latin typeface="Arial" pitchFamily="34" charset="0"/>
+                <a:ea typeface="Arial" pitchFamily="34" charset="-122"/>
+                <a:cs typeface="Arial" pitchFamily="34" charset="-120"/>
+              </a:rPr>
+              <a:t>Lesson Forge Pro (owner) — This content is educational material only and does not constitute financial, investment, or trading advice.</a:t>
+            </a:r>
+            <a:endParaRPr lang="en-US" sz="750" dirty="0"/>
+          </a:p>
+        </p:txBody>
+      </p:sp>
+      <p:sp>
+        <p:nvSpPr>
+          <p:cNvPr id="6" name="Shape 4"/>
+          <p:cNvSpPr/>
+          <p:nvPr/>
+        </p:nvSpPr>
+        <p:spPr>
+          <a:xfrm>
+            <a:off x="2011680" y="1234440"/>
+            <a:ext cx="5120640" cy="3108960"/>
+          </a:xfrm>
+          <a:prstGeom prst="rect">
+            <a:avLst/>
+          </a:prstGeom>
+          <a:solidFill>
+            <a:srgbClr val="FFFFFF"/>
+          </a:solidFill>
+          <a:ln w="15240">
             <a:solidFill>
-              <a:srgbClr val="E7E5E4"/>
+              <a:srgbClr val="1C1917"/>
             </a:solidFill>
             <a:prstDash val="solid"/>
           </a:ln>
@@ -8821,194 +5681,22 @@
       </p:sp>
       <p:sp>
         <p:nvSpPr>
-          <p:cNvPr id="5" name="Text 3"/>
-          <p:cNvSpPr/>
-          <p:nvPr/>
-        </p:nvSpPr>
-        <p:spPr>
-          <a:xfrm>
-            <a:off x="411480" y="4864608"/>
-            <a:ext cx="8321040" cy="237744"/>
-          </a:xfrm>
-          <a:prstGeom prst="rect">
-            <a:avLst/>
-          </a:prstGeom>
-          <a:noFill/>
-          <a:ln/>
-        </p:spPr>
-        <p:txBody>
-          <a:bodyPr wrap="square" rtlCol="0" anchor="ctr"/>
-          <a:lstStyle/>
-          <a:p>
-            <a:pPr indent="0" marL="0">
-              <a:buNone/>
-            </a:pPr>
-            <a:r>
-              <a:rPr lang="en-US" sz="750" dirty="0">
-                <a:solidFill>
-                  <a:srgbClr val="AAAAAA"/>
-                </a:solidFill>
-                <a:latin typeface="Arial" pitchFamily="34" charset="0"/>
-                <a:ea typeface="Arial" pitchFamily="34" charset="-122"/>
-                <a:cs typeface="Arial" pitchFamily="34" charset="-120"/>
-              </a:rPr>
-              <a:t>Lesson Forge Pro (owner) — This content is educational material only and does not constitute financial, investment, or trading advice.</a:t>
-            </a:r>
-            <a:endParaRPr lang="en-US" sz="750" dirty="0"/>
-          </a:p>
-        </p:txBody>
-      </p:sp>
-      <p:sp>
-        <p:nvSpPr>
-          <p:cNvPr id="6" name="Text 4"/>
-          <p:cNvSpPr/>
-          <p:nvPr/>
-        </p:nvSpPr>
-        <p:spPr>
-          <a:xfrm>
-            <a:off x="731520" y="1188720"/>
-            <a:ext cx="7680960" cy="2743200"/>
-          </a:xfrm>
-          <a:prstGeom prst="rect">
-            <a:avLst/>
-          </a:prstGeom>
-          <a:noFill/>
-          <a:ln/>
-        </p:spPr>
-        <p:txBody>
-          <a:bodyPr wrap="square" rtlCol="0" anchor="t"/>
-          <a:lstStyle/>
-          <a:p>
-            <a:pPr marL="152400" indent="-152400">
-              <a:spcAft>
-                <a:spcPts val="800"/>
-              </a:spcAft>
-              <a:buSzPct val="100000"/>
-              <a:buChar char="•"/>
-            </a:pPr>
-            <a:r>
-              <a:rPr lang="en-US" sz="1500" dirty="0">
-                <a:solidFill>
-                  <a:srgbClr val="1C1917"/>
-                </a:solidFill>
-                <a:latin typeface="Arial" pitchFamily="34" charset="0"/>
-                <a:ea typeface="Arial" pitchFamily="34" charset="-122"/>
-                <a:cs typeface="Arial" pitchFamily="34" charset="-120"/>
-              </a:rPr>
-              <a:t>Equity Value: $18.00 × 50M shares = $900M.</a:t>
-            </a:r>
-            <a:endParaRPr lang="en-US" sz="1500" dirty="0"/>
-          </a:p>
-          <a:p>
-            <a:pPr marL="152400" indent="-152400">
-              <a:spcAft>
-                <a:spcPts val="800"/>
-              </a:spcAft>
-              <a:buSzPct val="100000"/>
-              <a:buChar char="•"/>
-            </a:pPr>
-            <a:r>
-              <a:rPr lang="en-US" sz="1500" dirty="0">
-                <a:solidFill>
-                  <a:srgbClr val="1C1917"/>
-                </a:solidFill>
-                <a:latin typeface="Arial" pitchFamily="34" charset="0"/>
-                <a:ea typeface="Arial" pitchFamily="34" charset="-122"/>
-                <a:cs typeface="Arial" pitchFamily="34" charset="-120"/>
-              </a:rPr>
-              <a:t>Net Debt: $120M debt − $20M cash = $100M.</a:t>
-            </a:r>
-            <a:endParaRPr lang="en-US" sz="1500" dirty="0"/>
-          </a:p>
-          <a:p>
-            <a:pPr marL="152400" indent="-152400">
-              <a:spcAft>
-                <a:spcPts val="800"/>
-              </a:spcAft>
-              <a:buSzPct val="100000"/>
-              <a:buChar char="•"/>
-            </a:pPr>
-            <a:r>
-              <a:rPr lang="en-US" sz="1500" dirty="0">
-                <a:solidFill>
-                  <a:srgbClr val="1C1917"/>
-                </a:solidFill>
-                <a:latin typeface="Arial" pitchFamily="34" charset="0"/>
-                <a:ea typeface="Arial" pitchFamily="34" charset="-122"/>
-                <a:cs typeface="Arial" pitchFamily="34" charset="-120"/>
-              </a:rPr>
-              <a:t>Enterprise Value: $900M + $100M = $1,000M.</a:t>
-            </a:r>
-            <a:endParaRPr lang="en-US" sz="1500" dirty="0"/>
-          </a:p>
-          <a:p>
-            <a:pPr marL="152400" indent="-152400">
-              <a:spcAft>
-                <a:spcPts val="800"/>
-              </a:spcAft>
-              <a:buSzPct val="100000"/>
-              <a:buChar char="•"/>
-            </a:pPr>
-            <a:r>
-              <a:rPr lang="en-US" sz="1500" dirty="0">
-                <a:solidFill>
-                  <a:srgbClr val="1C1917"/>
-                </a:solidFill>
-                <a:latin typeface="Arial" pitchFamily="34" charset="0"/>
-                <a:ea typeface="Arial" pitchFamily="34" charset="-122"/>
-                <a:cs typeface="Arial" pitchFamily="34" charset="-120"/>
-              </a:rPr>
-              <a:t>EV/EBITDA: $1,000M ÷ $40M = 25.0×—above peer range of 18–22×.</a:t>
-            </a:r>
-            <a:endParaRPr lang="en-US" sz="1500" dirty="0"/>
-          </a:p>
-          <a:p>
-            <a:pPr marL="152400" indent="-152400">
-              <a:spcAft>
-                <a:spcPts val="800"/>
-              </a:spcAft>
-              <a:buSzPct val="100000"/>
-              <a:buChar char="•"/>
-            </a:pPr>
-            <a:r>
-              <a:rPr lang="en-US" sz="1500" dirty="0">
-                <a:solidFill>
-                  <a:srgbClr val="1C1917"/>
-                </a:solidFill>
-                <a:latin typeface="Arial" pitchFamily="34" charset="0"/>
-                <a:ea typeface="Arial" pitchFamily="34" charset="-122"/>
-                <a:cs typeface="Arial" pitchFamily="34" charset="-120"/>
-              </a:rPr>
-              <a:t>A rich multiple signals overpayment risk; a DCF must confirm or challenge it.</a:t>
-            </a:r>
-            <a:endParaRPr lang="en-US" sz="1500" dirty="0"/>
-          </a:p>
-        </p:txBody>
-      </p:sp>
-      <p:sp>
-        <p:nvSpPr>
           <p:cNvPr id="7" name="Shape 5"/>
           <p:cNvSpPr/>
           <p:nvPr/>
         </p:nvSpPr>
         <p:spPr>
           <a:xfrm>
-            <a:off x="731520" y="4041648"/>
-            <a:ext cx="7680960" cy="566928"/>
-          </a:xfrm>
-          <a:prstGeom prst="roundRect">
-            <a:avLst>
-              <a:gd name="adj" fmla="val 12903"/>
-            </a:avLst>
-          </a:prstGeom>
-          <a:solidFill>
-            <a:srgbClr val="B45309">
-              <a:alpha val="12000"/>
-            </a:srgbClr>
-          </a:solidFill>
-          <a:ln w="12700">
+            <a:off x="4572000" y="1234440"/>
+            <a:ext cx="0" cy="3108960"/>
+          </a:xfrm>
+          <a:prstGeom prst="line">
+            <a:avLst/>
+          </a:prstGeom>
+          <a:noFill/>
+          <a:ln w="11430">
             <a:solidFill>
-              <a:srgbClr val="B45309"/>
+              <a:srgbClr val="1C1917"/>
             </a:solidFill>
             <a:prstDash val="solid"/>
           </a:ln>
@@ -9016,14 +5704,61 @@
       </p:sp>
       <p:sp>
         <p:nvSpPr>
-          <p:cNvPr id="8" name="Text 6"/>
-          <p:cNvSpPr/>
-          <p:nvPr/>
-        </p:nvSpPr>
-        <p:spPr>
-          <a:xfrm>
-            <a:off x="868680" y="4087368"/>
-            <a:ext cx="7406640" cy="475488"/>
+          <p:cNvPr id="8" name="Shape 6"/>
+          <p:cNvSpPr/>
+          <p:nvPr/>
+        </p:nvSpPr>
+        <p:spPr>
+          <a:xfrm>
+            <a:off x="2011680" y="2788920"/>
+            <a:ext cx="5120640" cy="0"/>
+          </a:xfrm>
+          <a:prstGeom prst="line">
+            <a:avLst/>
+          </a:prstGeom>
+          <a:noFill/>
+          <a:ln w="11430">
+            <a:solidFill>
+              <a:srgbClr val="1C1917"/>
+            </a:solidFill>
+            <a:prstDash val="solid"/>
+          </a:ln>
+        </p:spPr>
+      </p:sp>
+      <p:sp>
+        <p:nvSpPr>
+          <p:cNvPr id="9" name="Shape 7"/>
+          <p:cNvSpPr/>
+          <p:nvPr/>
+        </p:nvSpPr>
+        <p:spPr>
+          <a:xfrm>
+            <a:off x="2240280" y="1600200"/>
+            <a:ext cx="2103120" cy="822960"/>
+          </a:xfrm>
+          <a:prstGeom prst="roundRect">
+            <a:avLst>
+              <a:gd name="adj" fmla="val 11111"/>
+            </a:avLst>
+          </a:prstGeom>
+          <a:solidFill>
+            <a:srgbClr val="B45309">
+              <a:alpha val="15000"/>
+            </a:srgbClr>
+          </a:solidFill>
+          <a:ln/>
+        </p:spPr>
+      </p:sp>
+      <p:sp>
+        <p:nvSpPr>
+          <p:cNvPr id="10" name="Text 8"/>
+          <p:cNvSpPr/>
+          <p:nvPr/>
+        </p:nvSpPr>
+        <p:spPr>
+          <a:xfrm>
+            <a:off x="2240280" y="1600200"/>
+            <a:ext cx="2103120" cy="822960"/>
           </a:xfrm>
           <a:prstGeom prst="rect">
             <a:avLst/>
@@ -9035,35 +5770,434 @@
           <a:bodyPr wrap="square" rtlCol="0" anchor="ctr"/>
           <a:lstStyle/>
           <a:p>
+            <a:pPr algn="ctr" indent="0" marL="0">
+              <a:buNone/>
+            </a:pPr>
+            <a:r>
+              <a:rPr lang="en-US" sz="1200" b="1" dirty="0">
+                <a:solidFill>
+                  <a:srgbClr val="1C1917"/>
+                </a:solidFill>
+                <a:latin typeface="Arial" pitchFamily="34" charset="0"/>
+                <a:ea typeface="Arial" pitchFamily="34" charset="-122"/>
+                <a:cs typeface="Arial" pitchFamily="34" charset="-120"/>
+              </a:rPr>
+              <a:t>All-Cash Deal</a:t>
+            </a:r>
+            <a:endParaRPr lang="en-US" sz="1200" dirty="0"/>
+          </a:p>
+          <a:p>
+            <a:pPr algn="ctr" indent="0" marL="0">
+              <a:buNone/>
+            </a:pPr>
+            <a:r>
+              <a:rPr lang="en-US" sz="900" dirty="0">
+                <a:solidFill>
+                  <a:srgbClr val="78716C"/>
+                </a:solidFill>
+                <a:latin typeface="Arial" pitchFamily="34" charset="0"/>
+                <a:ea typeface="Arial" pitchFamily="34" charset="-122"/>
+                <a:cs typeface="Arial" pitchFamily="34" charset="-120"/>
+              </a:rPr>
+              <a:t>No dilution but high interest drag</a:t>
+            </a:r>
+            <a:endParaRPr lang="en-US" sz="1200" dirty="0"/>
+          </a:p>
+        </p:txBody>
+      </p:sp>
+      <p:sp>
+        <p:nvSpPr>
+          <p:cNvPr id="11" name="Shape 9"/>
+          <p:cNvSpPr/>
+          <p:nvPr/>
+        </p:nvSpPr>
+        <p:spPr>
+          <a:xfrm>
+            <a:off x="4800600" y="1600200"/>
+            <a:ext cx="2103120" cy="822960"/>
+          </a:xfrm>
+          <a:prstGeom prst="roundRect">
+            <a:avLst>
+              <a:gd name="adj" fmla="val 11111"/>
+            </a:avLst>
+          </a:prstGeom>
+          <a:solidFill>
+            <a:srgbClr val="B45309">
+              <a:alpha val="15000"/>
+            </a:srgbClr>
+          </a:solidFill>
+          <a:ln/>
+        </p:spPr>
+      </p:sp>
+      <p:sp>
+        <p:nvSpPr>
+          <p:cNvPr id="12" name="Text 10"/>
+          <p:cNvSpPr/>
+          <p:nvPr/>
+        </p:nvSpPr>
+        <p:spPr>
+          <a:xfrm>
+            <a:off x="4800600" y="1600200"/>
+            <a:ext cx="2103120" cy="822960"/>
+          </a:xfrm>
+          <a:prstGeom prst="rect">
+            <a:avLst/>
+          </a:prstGeom>
+          <a:noFill/>
+          <a:ln/>
+        </p:spPr>
+        <p:txBody>
+          <a:bodyPr wrap="square" rtlCol="0" anchor="ctr"/>
+          <a:lstStyle/>
+          <a:p>
+            <a:pPr algn="ctr" indent="0" marL="0">
+              <a:buNone/>
+            </a:pPr>
+            <a:r>
+              <a:rPr lang="en-US" sz="1200" b="1" dirty="0">
+                <a:solidFill>
+                  <a:srgbClr val="1C1917"/>
+                </a:solidFill>
+                <a:latin typeface="Arial" pitchFamily="34" charset="0"/>
+                <a:ea typeface="Arial" pitchFamily="34" charset="-122"/>
+                <a:cs typeface="Arial" pitchFamily="34" charset="-120"/>
+              </a:rPr>
+              <a:t>All-Stock Deal</a:t>
+            </a:r>
+            <a:endParaRPr lang="en-US" sz="1200" dirty="0"/>
+          </a:p>
+          <a:p>
+            <a:pPr algn="ctr" indent="0" marL="0">
+              <a:buNone/>
+            </a:pPr>
+            <a:r>
+              <a:rPr lang="en-US" sz="900" dirty="0">
+                <a:solidFill>
+                  <a:srgbClr val="78716C"/>
+                </a:solidFill>
+                <a:latin typeface="Arial" pitchFamily="34" charset="0"/>
+                <a:ea typeface="Arial" pitchFamily="34" charset="-122"/>
+                <a:cs typeface="Arial" pitchFamily="34" charset="-120"/>
+              </a:rPr>
+              <a:t>No interest but large share count</a:t>
+            </a:r>
+            <a:endParaRPr lang="en-US" sz="1200" dirty="0"/>
+          </a:p>
+        </p:txBody>
+      </p:sp>
+      <p:sp>
+        <p:nvSpPr>
+          <p:cNvPr id="13" name="Shape 11"/>
+          <p:cNvSpPr/>
+          <p:nvPr/>
+        </p:nvSpPr>
+        <p:spPr>
+          <a:xfrm>
+            <a:off x="2240280" y="3154680"/>
+            <a:ext cx="2103120" cy="822960"/>
+          </a:xfrm>
+          <a:prstGeom prst="roundRect">
+            <a:avLst>
+              <a:gd name="adj" fmla="val 11111"/>
+            </a:avLst>
+          </a:prstGeom>
+          <a:solidFill>
+            <a:srgbClr val="B45309">
+              <a:alpha val="15000"/>
+            </a:srgbClr>
+          </a:solidFill>
+          <a:ln/>
+        </p:spPr>
+      </p:sp>
+      <p:sp>
+        <p:nvSpPr>
+          <p:cNvPr id="14" name="Text 12"/>
+          <p:cNvSpPr/>
+          <p:nvPr/>
+        </p:nvSpPr>
+        <p:spPr>
+          <a:xfrm>
+            <a:off x="2240280" y="3154680"/>
+            <a:ext cx="2103120" cy="822960"/>
+          </a:xfrm>
+          <a:prstGeom prst="rect">
+            <a:avLst/>
+          </a:prstGeom>
+          <a:noFill/>
+          <a:ln/>
+        </p:spPr>
+        <p:txBody>
+          <a:bodyPr wrap="square" rtlCol="0" anchor="ctr"/>
+          <a:lstStyle/>
+          <a:p>
+            <a:pPr algn="ctr" indent="0" marL="0">
+              <a:buNone/>
+            </a:pPr>
+            <a:r>
+              <a:rPr lang="en-US" sz="1200" b="1" dirty="0">
+                <a:solidFill>
+                  <a:srgbClr val="1C1917"/>
+                </a:solidFill>
+                <a:latin typeface="Arial" pitchFamily="34" charset="0"/>
+                <a:ea typeface="Arial" pitchFamily="34" charset="-122"/>
+                <a:cs typeface="Arial" pitchFamily="34" charset="-120"/>
+              </a:rPr>
+              <a:t>Blended 50/50</a:t>
+            </a:r>
+            <a:endParaRPr lang="en-US" sz="1200" dirty="0"/>
+          </a:p>
+          <a:p>
+            <a:pPr algn="ctr" indent="0" marL="0">
+              <a:buNone/>
+            </a:pPr>
+            <a:r>
+              <a:rPr lang="en-US" sz="900" dirty="0">
+                <a:solidFill>
+                  <a:srgbClr val="78716C"/>
+                </a:solidFill>
+                <a:latin typeface="Arial" pitchFamily="34" charset="0"/>
+                <a:ea typeface="Arial" pitchFamily="34" charset="-122"/>
+                <a:cs typeface="Arial" pitchFamily="34" charset="-120"/>
+              </a:rPr>
+              <a:t>Balances EPS and leverage risk</a:t>
+            </a:r>
+            <a:endParaRPr lang="en-US" sz="1200" dirty="0"/>
+          </a:p>
+        </p:txBody>
+      </p:sp>
+      <p:sp>
+        <p:nvSpPr>
+          <p:cNvPr id="15" name="Shape 13"/>
+          <p:cNvSpPr/>
+          <p:nvPr/>
+        </p:nvSpPr>
+        <p:spPr>
+          <a:xfrm>
+            <a:off x="4800600" y="3154680"/>
+            <a:ext cx="2103120" cy="822960"/>
+          </a:xfrm>
+          <a:prstGeom prst="roundRect">
+            <a:avLst>
+              <a:gd name="adj" fmla="val 11111"/>
+            </a:avLst>
+          </a:prstGeom>
+          <a:solidFill>
+            <a:srgbClr val="B45309">
+              <a:alpha val="15000"/>
+            </a:srgbClr>
+          </a:solidFill>
+          <a:ln/>
+        </p:spPr>
+      </p:sp>
+      <p:sp>
+        <p:nvSpPr>
+          <p:cNvPr id="16" name="Text 14"/>
+          <p:cNvSpPr/>
+          <p:nvPr/>
+        </p:nvSpPr>
+        <p:spPr>
+          <a:xfrm>
+            <a:off x="4800600" y="3154680"/>
+            <a:ext cx="2103120" cy="822960"/>
+          </a:xfrm>
+          <a:prstGeom prst="rect">
+            <a:avLst/>
+          </a:prstGeom>
+          <a:noFill/>
+          <a:ln/>
+        </p:spPr>
+        <p:txBody>
+          <a:bodyPr wrap="square" rtlCol="0" anchor="ctr"/>
+          <a:lstStyle/>
+          <a:p>
+            <a:pPr algn="ctr" indent="0" marL="0">
+              <a:buNone/>
+            </a:pPr>
+            <a:r>
+              <a:rPr lang="en-US" sz="1200" b="1" dirty="0">
+                <a:solidFill>
+                  <a:srgbClr val="1C1917"/>
+                </a:solidFill>
+                <a:latin typeface="Arial" pitchFamily="34" charset="0"/>
+                <a:ea typeface="Arial" pitchFamily="34" charset="-122"/>
+                <a:cs typeface="Arial" pitchFamily="34" charset="-120"/>
+              </a:rPr>
+              <a:t>Debt-Heavy LBO</a:t>
+            </a:r>
+            <a:endParaRPr lang="en-US" sz="1200" dirty="0"/>
+          </a:p>
+          <a:p>
+            <a:pPr algn="ctr" indent="0" marL="0">
+              <a:buNone/>
+            </a:pPr>
+            <a:r>
+              <a:rPr lang="en-US" sz="900" dirty="0">
+                <a:solidFill>
+                  <a:srgbClr val="78716C"/>
+                </a:solidFill>
+                <a:latin typeface="Arial" pitchFamily="34" charset="0"/>
+                <a:ea typeface="Arial" pitchFamily="34" charset="-122"/>
+                <a:cs typeface="Arial" pitchFamily="34" charset="-120"/>
+              </a:rPr>
+              <a:t>Max leverage, highest IRR risk</a:t>
+            </a:r>
+            <a:endParaRPr lang="en-US" sz="1200" dirty="0"/>
+          </a:p>
+        </p:txBody>
+      </p:sp>
+      <p:sp>
+        <p:nvSpPr>
+          <p:cNvPr id="17" name="Text 15"/>
+          <p:cNvSpPr/>
+          <p:nvPr/>
+        </p:nvSpPr>
+        <p:spPr>
+          <a:xfrm>
+            <a:off x="1920240" y="4398264"/>
+            <a:ext cx="2194560" cy="274320"/>
+          </a:xfrm>
+          <a:prstGeom prst="rect">
+            <a:avLst/>
+          </a:prstGeom>
+          <a:noFill/>
+          <a:ln/>
+        </p:spPr>
+        <p:txBody>
+          <a:bodyPr wrap="square" rtlCol="0" anchor="ctr"/>
+          <a:lstStyle/>
+          <a:p>
             <a:pPr indent="0" marL="0">
               <a:buNone/>
             </a:pPr>
             <a:r>
-              <a:rPr lang="en-US" sz="1100" b="1" dirty="0">
-                <a:solidFill>
-                  <a:srgbClr val="B45309"/>
-                </a:solidFill>
-                <a:latin typeface="Arial" pitchFamily="34" charset="0"/>
-                <a:ea typeface="Arial" pitchFamily="34" charset="-122"/>
-                <a:cs typeface="Arial" pitchFamily="34" charset="-120"/>
-              </a:rPr>
-              <a:t>Takeaway  </a:t>
-            </a:r>
-            <a:pPr indent="0" marL="0">
-              <a:buNone/>
-            </a:pPr>
-            <a:r>
-              <a:rPr lang="en-US" sz="1150" dirty="0">
-                <a:solidFill>
-                  <a:srgbClr val="1C1917"/>
-                </a:solidFill>
-                <a:latin typeface="Arial" pitchFamily="34" charset="0"/>
-                <a:ea typeface="Arial" pitchFamily="34" charset="-122"/>
-                <a:cs typeface="Arial" pitchFamily="34" charset="-120"/>
-              </a:rPr>
-              <a:t>Walking through EV and EV/EBITDA step-by-step reveals whether a target is fairly priced relative to peers.</a:t>
-            </a:r>
-            <a:endParaRPr lang="en-US" sz="1100" dirty="0"/>
+              <a:rPr lang="en-US" sz="950" dirty="0">
+                <a:solidFill>
+                  <a:srgbClr val="78716C"/>
+                </a:solidFill>
+                <a:latin typeface="Arial" pitchFamily="34" charset="0"/>
+                <a:ea typeface="Arial" pitchFamily="34" charset="-122"/>
+                <a:cs typeface="Arial" pitchFamily="34" charset="-120"/>
+              </a:rPr>
+              <a:t>Low Share Dilution</a:t>
+            </a:r>
+            <a:endParaRPr lang="en-US" sz="950" dirty="0"/>
+          </a:p>
+        </p:txBody>
+      </p:sp>
+      <p:sp>
+        <p:nvSpPr>
+          <p:cNvPr id="18" name="Text 16"/>
+          <p:cNvSpPr/>
+          <p:nvPr/>
+        </p:nvSpPr>
+        <p:spPr>
+          <a:xfrm>
+            <a:off x="5029200" y="4398264"/>
+            <a:ext cx="2194560" cy="274320"/>
+          </a:xfrm>
+          <a:prstGeom prst="rect">
+            <a:avLst/>
+          </a:prstGeom>
+          <a:noFill/>
+          <a:ln/>
+        </p:spPr>
+        <p:txBody>
+          <a:bodyPr wrap="square" rtlCol="0" anchor="ctr"/>
+          <a:lstStyle/>
+          <a:p>
+            <a:pPr algn="r" indent="0" marL="0">
+              <a:buNone/>
+            </a:pPr>
+            <a:r>
+              <a:rPr lang="en-US" sz="950" dirty="0">
+                <a:solidFill>
+                  <a:srgbClr val="78716C"/>
+                </a:solidFill>
+                <a:latin typeface="Arial" pitchFamily="34" charset="0"/>
+                <a:ea typeface="Arial" pitchFamily="34" charset="-122"/>
+                <a:cs typeface="Arial" pitchFamily="34" charset="-120"/>
+              </a:rPr>
+              <a:t>High Share Dilution</a:t>
+            </a:r>
+            <a:endParaRPr lang="en-US" sz="950" dirty="0"/>
+          </a:p>
+        </p:txBody>
+      </p:sp>
+      <p:sp>
+        <p:nvSpPr>
+          <p:cNvPr id="19" name="Text 17"/>
+          <p:cNvSpPr/>
+          <p:nvPr/>
+        </p:nvSpPr>
+        <p:spPr>
+          <a:xfrm>
+            <a:off x="45720" y="1280160"/>
+            <a:ext cx="1828800" cy="274320"/>
+          </a:xfrm>
+          <a:prstGeom prst="rect">
+            <a:avLst/>
+          </a:prstGeom>
+          <a:noFill/>
+          <a:ln/>
+        </p:spPr>
+        <p:txBody>
+          <a:bodyPr wrap="square" rtlCol="0" anchor="ctr"/>
+          <a:lstStyle/>
+          <a:p>
+            <a:pPr algn="r" indent="0" marL="0">
+              <a:buNone/>
+            </a:pPr>
+            <a:r>
+              <a:rPr lang="en-US" sz="950" dirty="0">
+                <a:solidFill>
+                  <a:srgbClr val="78716C"/>
+                </a:solidFill>
+                <a:latin typeface="Arial" pitchFamily="34" charset="0"/>
+                <a:ea typeface="Arial" pitchFamily="34" charset="-122"/>
+                <a:cs typeface="Arial" pitchFamily="34" charset="-120"/>
+              </a:rPr>
+              <a:t>High Interest Cost</a:t>
+            </a:r>
+            <a:endParaRPr lang="en-US" sz="950" dirty="0"/>
+          </a:p>
+        </p:txBody>
+      </p:sp>
+      <p:sp>
+        <p:nvSpPr>
+          <p:cNvPr id="20" name="Text 18"/>
+          <p:cNvSpPr/>
+          <p:nvPr/>
+        </p:nvSpPr>
+        <p:spPr>
+          <a:xfrm>
+            <a:off x="45720" y="4023360"/>
+            <a:ext cx="1828800" cy="274320"/>
+          </a:xfrm>
+          <a:prstGeom prst="rect">
+            <a:avLst/>
+          </a:prstGeom>
+          <a:noFill/>
+          <a:ln/>
+        </p:spPr>
+        <p:txBody>
+          <a:bodyPr wrap="square" rtlCol="0" anchor="ctr"/>
+          <a:lstStyle/>
+          <a:p>
+            <a:pPr algn="r" indent="0" marL="0">
+              <a:buNone/>
+            </a:pPr>
+            <a:r>
+              <a:rPr lang="en-US" sz="950" dirty="0">
+                <a:solidFill>
+                  <a:srgbClr val="78716C"/>
+                </a:solidFill>
+                <a:latin typeface="Arial" pitchFamily="34" charset="0"/>
+                <a:ea typeface="Arial" pitchFamily="34" charset="-122"/>
+                <a:cs typeface="Arial" pitchFamily="34" charset="-120"/>
+              </a:rPr>
+              <a:t>Low Interest Cost</a:t>
+            </a:r>
+            <a:endParaRPr lang="en-US" sz="950" dirty="0"/>
           </a:p>
         </p:txBody>
       </p:sp>
@@ -9152,7 +6286,7 @@
                 <a:ea typeface="Arial" pitchFamily="34" charset="-122"/>
                 <a:cs typeface="Arial" pitchFamily="34" charset="-120"/>
               </a:rPr>
-              <a:t>The Standard M&amp;A Modeling Procedure</a:t>
+              <a:t>Financing Mix Optimization and Its Impact on Returns</a:t>
             </a:r>
             <a:endParaRPr lang="en-US" sz="2100" dirty="0"/>
           </a:p>
@@ -9257,7 +6391,7 @@
                 <a:ea typeface="Arial" pitchFamily="34" charset="-122"/>
                 <a:cs typeface="Arial" pitchFamily="34" charset="-120"/>
               </a:rPr>
-              <a:t>Every model follows a disciplined, repeatable sequence of stages.</a:t>
+              <a:t>Debt generates an interest tax shield: Debt × Rate × Tax Rate annually.</a:t>
             </a:r>
             <a:endParaRPr lang="en-US" sz="1500" dirty="0"/>
           </a:p>
@@ -9278,7 +6412,7 @@
                 <a:ea typeface="Arial" pitchFamily="34" charset="-122"/>
                 <a:cs typeface="Arial" pitchFamily="34" charset="-120"/>
               </a:rPr>
-              <a:t>Inputs, steps, outputs, and checks must all be completed without skipping.</a:t>
+              <a:t>Too little debt sacrifices tax shield value; too much raises financial distress costs.</a:t>
             </a:r>
             <a:endParaRPr lang="en-US" sz="1500" dirty="0"/>
           </a:p>
@@ -9299,7 +6433,7 @@
                 <a:ea typeface="Arial" pitchFamily="34" charset="-122"/>
                 <a:cs typeface="Arial" pitchFamily="34" charset="-120"/>
               </a:rPr>
-              <a:t>A defensible model is auditable by any qualified third party.</a:t>
+              <a:t>Optimal structure: marginal benefit of debt equals its marginal cost.</a:t>
             </a:r>
             <a:endParaRPr lang="en-US" sz="1500" dirty="0"/>
           </a:p>
@@ -9320,7 +6454,28 @@
                 <a:ea typeface="Arial" pitchFamily="34" charset="-122"/>
                 <a:cs typeface="Arial" pitchFamily="34" charset="-120"/>
               </a:rPr>
-              <a:t>Discipline at each stage prevents errors from compounding downstream.</a:t>
+              <a:t>Higher leverage amplifies equity returns but compresses financial flexibility.</a:t>
+            </a:r>
+            <a:endParaRPr lang="en-US" sz="1500" dirty="0"/>
+          </a:p>
+          <a:p>
+            <a:pPr marL="152400" indent="-152400">
+              <a:spcAft>
+                <a:spcPts val="800"/>
+              </a:spcAft>
+              <a:buSzPct val="100000"/>
+              <a:buChar char="•"/>
+            </a:pPr>
+            <a:r>
+              <a:rPr lang="en-US" sz="1500" dirty="0">
+                <a:solidFill>
+                  <a:srgbClr val="1C1917"/>
+                </a:solidFill>
+                <a:latin typeface="Arial" pitchFamily="34" charset="0"/>
+                <a:ea typeface="Arial" pitchFamily="34" charset="-122"/>
+                <a:cs typeface="Arial" pitchFamily="34" charset="-120"/>
+              </a:rPr>
+              <a:t>Distress costs include legal fees, supplier tightening, and management distraction.</a:t>
             </a:r>
             <a:endParaRPr lang="en-US" sz="1500" dirty="0"/>
           </a:p>
@@ -9402,7 +6557,7 @@
                 <a:ea typeface="Arial" pitchFamily="34" charset="-122"/>
                 <a:cs typeface="Arial" pitchFamily="34" charset="-120"/>
               </a:rPr>
-              <a:t>A structured, stage-by-stage process is what separates a boardroom-ready model from a risky guess.</a:t>
+              <a:t>The optimal financing mix balances tax shield benefits against rising financial distress costs.</a:t>
             </a:r>
             <a:endParaRPr lang="en-US" sz="1100" dirty="0"/>
           </a:p>
